--- a/CRM для Центров Дополнительного образования.pptx
+++ b/CRM для Центров Дополнительного образования.pptx
@@ -1,36 +1,34 @@
 
 <file path=ppt/presentation.xml><?xml version="1.0" encoding="utf-8"?>
-<p:presentation xmlns:a="http://schemas.openxmlformats.org/drawingml/2006/main" xmlns:r="http://schemas.openxmlformats.org/officeDocument/2006/relationships" xmlns:mc="http://schemas.openxmlformats.org/markup-compatibility/2006" xmlns:mv="urn:schemas-microsoft-com:mac:vml" xmlns:p="http://schemas.openxmlformats.org/presentationml/2006/main" xmlns:c="http://schemas.openxmlformats.org/drawingml/2006/chart" xmlns:dgm="http://schemas.openxmlformats.org/drawingml/2006/diagram" xmlns:o="urn:schemas-microsoft-com:office:office" xmlns:v="urn:schemas-microsoft-com:vml" xmlns:pvml="urn:schemas-microsoft-com:office:powerpoint" xmlns:com="http://schemas.openxmlformats.org/drawingml/2006/compatibility" xmlns:p14="http://schemas.microsoft.com/office/powerpoint/2010/main" xmlns:p15="http://schemas.microsoft.com/office/powerpoint/2012/main" xmlns:ahyp="http://schemas.microsoft.com/office/drawing/2018/hyperlinkcolor" autoCompressPictures="0" embedTrueTypeFonts="1" strictFirstAndLastChars="0" saveSubsetFonts="1">
+<p:presentation xmlns:a="http://schemas.openxmlformats.org/drawingml/2006/main" xmlns:r="http://schemas.openxmlformats.org/officeDocument/2006/relationships" xmlns:p="http://schemas.openxmlformats.org/presentationml/2006/main" strictFirstAndLastChars="0" embedTrueTypeFonts="1" saveSubsetFonts="1" autoCompressPictures="0">
   <p:sldMasterIdLst>
-    <p:sldMasterId id="2147483659" r:id="rId4"/>
+    <p:sldMasterId id="2147483648" r:id="rId1"/>
   </p:sldMasterIdLst>
   <p:notesMasterIdLst>
-    <p:notesMasterId r:id="rId5"/>
+    <p:notesMasterId r:id="rId4"/>
   </p:notesMasterIdLst>
   <p:sldIdLst>
-    <p:sldId id="256" r:id="rId6"/>
-    <p:sldId id="257" r:id="rId7"/>
-    <p:sldId id="258" r:id="rId8"/>
-    <p:sldId id="259" r:id="rId9"/>
-    <p:sldId id="260" r:id="rId10"/>
-    <p:sldId id="261" r:id="rId11"/>
-    <p:sldId id="262" r:id="rId12"/>
-    <p:sldId id="263" r:id="rId13"/>
-    <p:sldId id="264" r:id="rId14"/>
-    <p:sldId id="265" r:id="rId15"/>
+    <p:sldId id="256" r:id="rId3"/>
+    <p:sldId id="257" r:id="rId5"/>
+    <p:sldId id="258" r:id="rId6"/>
+    <p:sldId id="259" r:id="rId7"/>
+    <p:sldId id="260" r:id="rId8"/>
+    <p:sldId id="261" r:id="rId9"/>
+    <p:sldId id="262" r:id="rId10"/>
+    <p:sldId id="263" r:id="rId11"/>
+    <p:sldId id="264" r:id="rId12"/>
+    <p:sldId id="265" r:id="rId13"/>
   </p:sldIdLst>
-  <p:sldSz cy="5143500" cx="9144000"/>
+  <p:sldSz cx="9144000" cy="5143500"/>
   <p:notesSz cx="6858000" cy="9144000"/>
   <p:embeddedFontLst>
     <p:embeddedFont>
-      <p:font typeface="Old Standard TT"/>
-      <p:regular r:id="rId16"/>
-      <p:bold r:id="rId17"/>
-      <p:italic r:id="rId18"/>
+      <p:font typeface="Old Standard TT" panose="00000500000000000000"/>
+      <p:regular r:id="rId17"/>
     </p:embeddedFont>
   </p:embeddedFontLst>
   <p:defaultTextStyle>
-    <a:defPPr lvl="0" marR="0" rtl="0" algn="l">
+    <a:defPPr marR="0" lvl="0" algn="l" rtl="0">
       <a:lnSpc>
         <a:spcPct val="100000"/>
       </a:lnSpc>
@@ -41,7 +39,7 @@
         <a:spcPts val="0"/>
       </a:spcAft>
     </a:defPPr>
-    <a:lvl1pPr lvl="0" marR="0" rtl="0" algn="l">
+    <a:lvl1pPr marR="0" lvl="0" algn="l" rtl="0">
       <a:lnSpc>
         <a:spcPct val="100000"/>
       </a:lnSpc>
@@ -54,18 +52,18 @@
       <a:buClr>
         <a:srgbClr val="000000"/>
       </a:buClr>
-      <a:buFont typeface="Arial"/>
-      <a:defRPr b="0" i="0" sz="1400" u="none" cap="none" strike="noStrike">
+      <a:buFont typeface="Arial" panose="020B0604020202020204"/>
+      <a:defRPr sz="1400" b="0" i="0" u="none" strike="noStrike" cap="none">
         <a:solidFill>
           <a:srgbClr val="000000"/>
         </a:solidFill>
-        <a:latin typeface="Arial"/>
-        <a:ea typeface="Arial"/>
-        <a:cs typeface="Arial"/>
-        <a:sym typeface="Arial"/>
+        <a:latin typeface="Arial" panose="020B0604020202020204"/>
+        <a:ea typeface="Arial" panose="020B0604020202020204"/>
+        <a:cs typeface="Arial" panose="020B0604020202020204"/>
+        <a:sym typeface="Arial" panose="020B0604020202020204"/>
       </a:defRPr>
     </a:lvl1pPr>
-    <a:lvl2pPr lvl="1" marR="0" rtl="0" algn="l">
+    <a:lvl2pPr marR="0" lvl="1" algn="l" rtl="0">
       <a:lnSpc>
         <a:spcPct val="100000"/>
       </a:lnSpc>
@@ -78,18 +76,18 @@
       <a:buClr>
         <a:srgbClr val="000000"/>
       </a:buClr>
-      <a:buFont typeface="Arial"/>
-      <a:defRPr b="0" i="0" sz="1400" u="none" cap="none" strike="noStrike">
+      <a:buFont typeface="Arial" panose="020B0604020202020204"/>
+      <a:defRPr sz="1400" b="0" i="0" u="none" strike="noStrike" cap="none">
         <a:solidFill>
           <a:srgbClr val="000000"/>
         </a:solidFill>
-        <a:latin typeface="Arial"/>
-        <a:ea typeface="Arial"/>
-        <a:cs typeface="Arial"/>
-        <a:sym typeface="Arial"/>
+        <a:latin typeface="Arial" panose="020B0604020202020204"/>
+        <a:ea typeface="Arial" panose="020B0604020202020204"/>
+        <a:cs typeface="Arial" panose="020B0604020202020204"/>
+        <a:sym typeface="Arial" panose="020B0604020202020204"/>
       </a:defRPr>
     </a:lvl2pPr>
-    <a:lvl3pPr lvl="2" marR="0" rtl="0" algn="l">
+    <a:lvl3pPr marR="0" lvl="2" algn="l" rtl="0">
       <a:lnSpc>
         <a:spcPct val="100000"/>
       </a:lnSpc>
@@ -102,18 +100,18 @@
       <a:buClr>
         <a:srgbClr val="000000"/>
       </a:buClr>
-      <a:buFont typeface="Arial"/>
-      <a:defRPr b="0" i="0" sz="1400" u="none" cap="none" strike="noStrike">
+      <a:buFont typeface="Arial" panose="020B0604020202020204"/>
+      <a:defRPr sz="1400" b="0" i="0" u="none" strike="noStrike" cap="none">
         <a:solidFill>
           <a:srgbClr val="000000"/>
         </a:solidFill>
-        <a:latin typeface="Arial"/>
-        <a:ea typeface="Arial"/>
-        <a:cs typeface="Arial"/>
-        <a:sym typeface="Arial"/>
+        <a:latin typeface="Arial" panose="020B0604020202020204"/>
+        <a:ea typeface="Arial" panose="020B0604020202020204"/>
+        <a:cs typeface="Arial" panose="020B0604020202020204"/>
+        <a:sym typeface="Arial" panose="020B0604020202020204"/>
       </a:defRPr>
     </a:lvl3pPr>
-    <a:lvl4pPr lvl="3" marR="0" rtl="0" algn="l">
+    <a:lvl4pPr marR="0" lvl="3" algn="l" rtl="0">
       <a:lnSpc>
         <a:spcPct val="100000"/>
       </a:lnSpc>
@@ -126,18 +124,18 @@
       <a:buClr>
         <a:srgbClr val="000000"/>
       </a:buClr>
-      <a:buFont typeface="Arial"/>
-      <a:defRPr b="0" i="0" sz="1400" u="none" cap="none" strike="noStrike">
+      <a:buFont typeface="Arial" panose="020B0604020202020204"/>
+      <a:defRPr sz="1400" b="0" i="0" u="none" strike="noStrike" cap="none">
         <a:solidFill>
           <a:srgbClr val="000000"/>
         </a:solidFill>
-        <a:latin typeface="Arial"/>
-        <a:ea typeface="Arial"/>
-        <a:cs typeface="Arial"/>
-        <a:sym typeface="Arial"/>
+        <a:latin typeface="Arial" panose="020B0604020202020204"/>
+        <a:ea typeface="Arial" panose="020B0604020202020204"/>
+        <a:cs typeface="Arial" panose="020B0604020202020204"/>
+        <a:sym typeface="Arial" panose="020B0604020202020204"/>
       </a:defRPr>
     </a:lvl4pPr>
-    <a:lvl5pPr lvl="4" marR="0" rtl="0" algn="l">
+    <a:lvl5pPr marR="0" lvl="4" algn="l" rtl="0">
       <a:lnSpc>
         <a:spcPct val="100000"/>
       </a:lnSpc>
@@ -150,18 +148,18 @@
       <a:buClr>
         <a:srgbClr val="000000"/>
       </a:buClr>
-      <a:buFont typeface="Arial"/>
-      <a:defRPr b="0" i="0" sz="1400" u="none" cap="none" strike="noStrike">
+      <a:buFont typeface="Arial" panose="020B0604020202020204"/>
+      <a:defRPr sz="1400" b="0" i="0" u="none" strike="noStrike" cap="none">
         <a:solidFill>
           <a:srgbClr val="000000"/>
         </a:solidFill>
-        <a:latin typeface="Arial"/>
-        <a:ea typeface="Arial"/>
-        <a:cs typeface="Arial"/>
-        <a:sym typeface="Arial"/>
+        <a:latin typeface="Arial" panose="020B0604020202020204"/>
+        <a:ea typeface="Arial" panose="020B0604020202020204"/>
+        <a:cs typeface="Arial" panose="020B0604020202020204"/>
+        <a:sym typeface="Arial" panose="020B0604020202020204"/>
       </a:defRPr>
     </a:lvl5pPr>
-    <a:lvl6pPr lvl="5" marR="0" rtl="0" algn="l">
+    <a:lvl6pPr marR="0" lvl="5" algn="l" rtl="0">
       <a:lnSpc>
         <a:spcPct val="100000"/>
       </a:lnSpc>
@@ -174,18 +172,18 @@
       <a:buClr>
         <a:srgbClr val="000000"/>
       </a:buClr>
-      <a:buFont typeface="Arial"/>
-      <a:defRPr b="0" i="0" sz="1400" u="none" cap="none" strike="noStrike">
+      <a:buFont typeface="Arial" panose="020B0604020202020204"/>
+      <a:defRPr sz="1400" b="0" i="0" u="none" strike="noStrike" cap="none">
         <a:solidFill>
           <a:srgbClr val="000000"/>
         </a:solidFill>
-        <a:latin typeface="Arial"/>
-        <a:ea typeface="Arial"/>
-        <a:cs typeface="Arial"/>
-        <a:sym typeface="Arial"/>
+        <a:latin typeface="Arial" panose="020B0604020202020204"/>
+        <a:ea typeface="Arial" panose="020B0604020202020204"/>
+        <a:cs typeface="Arial" panose="020B0604020202020204"/>
+        <a:sym typeface="Arial" panose="020B0604020202020204"/>
       </a:defRPr>
     </a:lvl6pPr>
-    <a:lvl7pPr lvl="6" marR="0" rtl="0" algn="l">
+    <a:lvl7pPr marR="0" lvl="6" algn="l" rtl="0">
       <a:lnSpc>
         <a:spcPct val="100000"/>
       </a:lnSpc>
@@ -198,18 +196,18 @@
       <a:buClr>
         <a:srgbClr val="000000"/>
       </a:buClr>
-      <a:buFont typeface="Arial"/>
-      <a:defRPr b="0" i="0" sz="1400" u="none" cap="none" strike="noStrike">
+      <a:buFont typeface="Arial" panose="020B0604020202020204"/>
+      <a:defRPr sz="1400" b="0" i="0" u="none" strike="noStrike" cap="none">
         <a:solidFill>
           <a:srgbClr val="000000"/>
         </a:solidFill>
-        <a:latin typeface="Arial"/>
-        <a:ea typeface="Arial"/>
-        <a:cs typeface="Arial"/>
-        <a:sym typeface="Arial"/>
+        <a:latin typeface="Arial" panose="020B0604020202020204"/>
+        <a:ea typeface="Arial" panose="020B0604020202020204"/>
+        <a:cs typeface="Arial" panose="020B0604020202020204"/>
+        <a:sym typeface="Arial" panose="020B0604020202020204"/>
       </a:defRPr>
     </a:lvl7pPr>
-    <a:lvl8pPr lvl="7" marR="0" rtl="0" algn="l">
+    <a:lvl8pPr marR="0" lvl="7" algn="l" rtl="0">
       <a:lnSpc>
         <a:spcPct val="100000"/>
       </a:lnSpc>
@@ -222,18 +220,18 @@
       <a:buClr>
         <a:srgbClr val="000000"/>
       </a:buClr>
-      <a:buFont typeface="Arial"/>
-      <a:defRPr b="0" i="0" sz="1400" u="none" cap="none" strike="noStrike">
+      <a:buFont typeface="Arial" panose="020B0604020202020204"/>
+      <a:defRPr sz="1400" b="0" i="0" u="none" strike="noStrike" cap="none">
         <a:solidFill>
           <a:srgbClr val="000000"/>
         </a:solidFill>
-        <a:latin typeface="Arial"/>
-        <a:ea typeface="Arial"/>
-        <a:cs typeface="Arial"/>
-        <a:sym typeface="Arial"/>
+        <a:latin typeface="Arial" panose="020B0604020202020204"/>
+        <a:ea typeface="Arial" panose="020B0604020202020204"/>
+        <a:cs typeface="Arial" panose="020B0604020202020204"/>
+        <a:sym typeface="Arial" panose="020B0604020202020204"/>
       </a:defRPr>
     </a:lvl8pPr>
-    <a:lvl9pPr lvl="8" marR="0" rtl="0" algn="l">
+    <a:lvl9pPr marR="0" lvl="8" algn="l" rtl="0">
       <a:lnSpc>
         <a:spcPct val="100000"/>
       </a:lnSpc>
@@ -246,27 +244,27 @@
       <a:buClr>
         <a:srgbClr val="000000"/>
       </a:buClr>
-      <a:buFont typeface="Arial"/>
-      <a:defRPr b="0" i="0" sz="1400" u="none" cap="none" strike="noStrike">
+      <a:buFont typeface="Arial" panose="020B0604020202020204"/>
+      <a:defRPr sz="1400" b="0" i="0" u="none" strike="noStrike" cap="none">
         <a:solidFill>
           <a:srgbClr val="000000"/>
         </a:solidFill>
-        <a:latin typeface="Arial"/>
-        <a:ea typeface="Arial"/>
-        <a:cs typeface="Arial"/>
-        <a:sym typeface="Arial"/>
+        <a:latin typeface="Arial" panose="020B0604020202020204"/>
+        <a:ea typeface="Arial" panose="020B0604020202020204"/>
+        <a:cs typeface="Arial" panose="020B0604020202020204"/>
+        <a:sym typeface="Arial" panose="020B0604020202020204"/>
       </a:defRPr>
     </a:lvl9pPr>
   </p:defaultTextStyle>
   <p:extLst>
     <p:ext uri="{EFAFB233-063F-42B5-8137-9DF3F51BA10A}">
-      <p15:sldGuideLst>
-        <p15:guide id="1" orient="horz" pos="1620">
+      <p15:sldGuideLst xmlns:p15="http://schemas.microsoft.com/office/powerpoint/2012/main">
+        <p15:guide id="1" orient="horz" pos="1620" userDrawn="1">
           <p15:clr>
             <a:srgbClr val="747775"/>
           </p15:clr>
         </p15:guide>
-        <p15:guide id="2" pos="2880">
+        <p15:guide id="2" pos="2880" userDrawn="1">
           <p15:clr>
             <a:srgbClr val="747775"/>
           </p15:clr>
@@ -278,8 +276,13 @@
 </file>
 
 <file path=ppt/notesMasters/notesMaster1.xml><?xml version="1.0" encoding="utf-8"?>
-<p:notesMaster xmlns:a="http://schemas.openxmlformats.org/drawingml/2006/main" xmlns:r="http://schemas.openxmlformats.org/officeDocument/2006/relationships" xmlns:mc="http://schemas.openxmlformats.org/markup-compatibility/2006" xmlns:mv="urn:schemas-microsoft-com:mac:vml" xmlns:p="http://schemas.openxmlformats.org/presentationml/2006/main" xmlns:c="http://schemas.openxmlformats.org/drawingml/2006/chart" xmlns:dgm="http://schemas.openxmlformats.org/drawingml/2006/diagram" xmlns:o="urn:schemas-microsoft-com:office:office" xmlns:v="urn:schemas-microsoft-com:vml" xmlns:pvml="urn:schemas-microsoft-com:office:powerpoint" xmlns:com="http://schemas.openxmlformats.org/drawingml/2006/compatibility" xmlns:p14="http://schemas.microsoft.com/office/powerpoint/2010/main" xmlns:p15="http://schemas.microsoft.com/office/powerpoint/2012/main" xmlns:ahyp="http://schemas.microsoft.com/office/drawing/2018/hyperlinkcolor">
+<p:notesMaster xmlns:a="http://schemas.openxmlformats.org/drawingml/2006/main" xmlns:r="http://schemas.openxmlformats.org/officeDocument/2006/relationships" xmlns:p="http://schemas.openxmlformats.org/presentationml/2006/main">
   <p:cSld>
+    <p:bg>
+      <p:bgRef idx="1001">
+        <a:schemeClr val="bg1"/>
+      </p:bgRef>
+    </p:bg>
     <p:spTree>
       <p:nvGrpSpPr>
         <p:cNvPr id="2" name="Shape 2"/>
@@ -299,7 +302,7 @@
           <p:cNvPr id="3" name="Google Shape;3;n"/>
           <p:cNvSpPr/>
           <p:nvPr>
-            <p:ph idx="2" type="sldImg"/>
+            <p:ph type="sldImg" idx="2"/>
           </p:nvPr>
         </p:nvSpPr>
         <p:spPr>
@@ -308,9 +311,13 @@
             <a:ext cx="6096075" cy="3429000"/>
           </a:xfrm>
           <a:custGeom>
-            <a:rect b="b" l="l" r="r" t="t"/>
+            <a:avLst/>
+            <a:gdLst/>
+            <a:ahLst/>
+            <a:cxnLst/>
+            <a:rect l="l" t="t" r="r" b="b"/>
             <a:pathLst>
-              <a:path extrusionOk="0" h="120000" w="120000">
+              <a:path w="120000" h="120000" extrusionOk="0">
                 <a:moveTo>
                   <a:pt x="0" y="0"/>
                 </a:moveTo>
@@ -328,14 +335,14 @@
             </a:pathLst>
           </a:custGeom>
           <a:noFill/>
-          <a:ln cap="flat" cmpd="sng" w="9525">
+          <a:ln w="9525" cap="flat" cmpd="sng">
             <a:solidFill>
               <a:srgbClr val="000000"/>
             </a:solidFill>
             <a:prstDash val="solid"/>
             <a:round/>
-            <a:headEnd len="sm" w="sm" type="none"/>
-            <a:tailEnd len="sm" w="sm" type="none"/>
+            <a:headEnd type="none" w="sm" len="sm"/>
+            <a:tailEnd type="none" w="sm" len="sm"/>
           </a:ln>
         </p:spPr>
       </p:sp>
@@ -344,7 +351,7 @@
           <p:cNvPr id="4" name="Google Shape;4;n"/>
           <p:cNvSpPr txBox="1"/>
           <p:nvPr>
-            <p:ph idx="1" type="body"/>
+            <p:ph type="body" idx="1"/>
           </p:nvPr>
         </p:nvSpPr>
         <p:spPr>
@@ -361,11 +368,11 @@
           </a:ln>
         </p:spPr>
         <p:txBody>
-          <a:bodyPr anchorCtr="0" anchor="t" bIns="91425" lIns="91425" spcFirstLastPara="1" rIns="91425" wrap="square" tIns="91425">
+          <a:bodyPr spcFirstLastPara="1" wrap="square" lIns="91425" tIns="91425" rIns="91425" bIns="91425" anchor="t" anchorCtr="0">
             <a:noAutofit/>
           </a:bodyPr>
           <a:lstStyle>
-            <a:lvl1pPr indent="-298450" lvl="0" marL="457200">
+            <a:lvl1pPr marL="457200" lvl="0" indent="-298450">
               <a:spcBef>
                 <a:spcPts val="0"/>
               </a:spcBef>
@@ -376,7 +383,7 @@
               <a:buChar char="●"/>
               <a:defRPr sz="1100"/>
             </a:lvl1pPr>
-            <a:lvl2pPr indent="-298450" lvl="1" marL="914400">
+            <a:lvl2pPr marL="914400" lvl="1" indent="-298450">
               <a:spcBef>
                 <a:spcPts val="0"/>
               </a:spcBef>
@@ -387,7 +394,7 @@
               <a:buChar char="○"/>
               <a:defRPr sz="1100"/>
             </a:lvl2pPr>
-            <a:lvl3pPr indent="-298450" lvl="2" marL="1371600">
+            <a:lvl3pPr marL="1371600" lvl="2" indent="-298450">
               <a:spcBef>
                 <a:spcPts val="0"/>
               </a:spcBef>
@@ -398,7 +405,7 @@
               <a:buChar char="■"/>
               <a:defRPr sz="1100"/>
             </a:lvl3pPr>
-            <a:lvl4pPr indent="-298450" lvl="3" marL="1828800">
+            <a:lvl4pPr marL="1828800" lvl="3" indent="-298450">
               <a:spcBef>
                 <a:spcPts val="0"/>
               </a:spcBef>
@@ -409,7 +416,7 @@
               <a:buChar char="●"/>
               <a:defRPr sz="1100"/>
             </a:lvl4pPr>
-            <a:lvl5pPr indent="-298450" lvl="4" marL="2286000">
+            <a:lvl5pPr marL="2286000" lvl="4" indent="-298450">
               <a:spcBef>
                 <a:spcPts val="0"/>
               </a:spcBef>
@@ -420,7 +427,7 @@
               <a:buChar char="○"/>
               <a:defRPr sz="1100"/>
             </a:lvl5pPr>
-            <a:lvl6pPr indent="-298450" lvl="5" marL="2743200">
+            <a:lvl6pPr marL="2743200" lvl="5" indent="-298450">
               <a:spcBef>
                 <a:spcPts val="0"/>
               </a:spcBef>
@@ -431,7 +438,7 @@
               <a:buChar char="■"/>
               <a:defRPr sz="1100"/>
             </a:lvl6pPr>
-            <a:lvl7pPr indent="-298450" lvl="6" marL="3200400">
+            <a:lvl7pPr marL="3200400" lvl="6" indent="-298450">
               <a:spcBef>
                 <a:spcPts val="0"/>
               </a:spcBef>
@@ -442,7 +449,7 @@
               <a:buChar char="●"/>
               <a:defRPr sz="1100"/>
             </a:lvl7pPr>
-            <a:lvl8pPr indent="-298450" lvl="7" marL="3657600">
+            <a:lvl8pPr marL="3657600" lvl="7" indent="-298450">
               <a:spcBef>
                 <a:spcPts val="0"/>
               </a:spcBef>
@@ -453,7 +460,7 @@
               <a:buChar char="○"/>
               <a:defRPr sz="1100"/>
             </a:lvl8pPr>
-            <a:lvl9pPr indent="-298450" lvl="8" marL="4114800">
+            <a:lvl9pPr marL="4114800" lvl="8" indent="-298450">
               <a:spcBef>
                 <a:spcPts val="0"/>
               </a:spcBef>
@@ -470,9 +477,9 @@
       </p:sp>
     </p:spTree>
   </p:cSld>
-  <p:clrMap accent1="accent1" accent2="accent2" accent3="accent3" accent4="accent4" accent5="accent5" accent6="accent6" bg1="lt1" bg2="dk2" tx1="dk1" tx2="lt2" folHlink="folHlink" hlink="hlink"/>
+  <p:clrMap bg1="lt1" tx1="dk1" bg2="dk2" tx2="lt2" accent1="accent1" accent2="accent2" accent3="accent3" accent4="accent4" accent5="accent5" accent6="accent6" hlink="hlink" folHlink="folHlink"/>
   <p:notesStyle>
-    <a:defPPr lvl="0" marR="0" rtl="0" algn="l">
+    <a:defPPr marR="0" lvl="0" algn="l" rtl="0">
       <a:lnSpc>
         <a:spcPct val="100000"/>
       </a:lnSpc>
@@ -483,7 +490,7 @@
         <a:spcPts val="0"/>
       </a:spcAft>
     </a:defPPr>
-    <a:lvl1pPr lvl="0" marR="0" rtl="0" algn="l">
+    <a:lvl1pPr marR="0" lvl="0" algn="l" rtl="0">
       <a:lnSpc>
         <a:spcPct val="100000"/>
       </a:lnSpc>
@@ -496,18 +503,18 @@
       <a:buClr>
         <a:srgbClr val="000000"/>
       </a:buClr>
-      <a:buFont typeface="Arial"/>
-      <a:defRPr b="0" i="0" sz="1400" u="none" cap="none" strike="noStrike">
+      <a:buFont typeface="Arial" panose="020B0604020202020204"/>
+      <a:defRPr sz="1400" b="0" i="0" u="none" strike="noStrike" cap="none">
         <a:solidFill>
           <a:srgbClr val="000000"/>
         </a:solidFill>
-        <a:latin typeface="Arial"/>
-        <a:ea typeface="Arial"/>
-        <a:cs typeface="Arial"/>
-        <a:sym typeface="Arial"/>
+        <a:latin typeface="Arial" panose="020B0604020202020204"/>
+        <a:ea typeface="Arial" panose="020B0604020202020204"/>
+        <a:cs typeface="Arial" panose="020B0604020202020204"/>
+        <a:sym typeface="Arial" panose="020B0604020202020204"/>
       </a:defRPr>
     </a:lvl1pPr>
-    <a:lvl2pPr lvl="1" marR="0" rtl="0" algn="l">
+    <a:lvl2pPr marR="0" lvl="1" algn="l" rtl="0">
       <a:lnSpc>
         <a:spcPct val="100000"/>
       </a:lnSpc>
@@ -520,18 +527,18 @@
       <a:buClr>
         <a:srgbClr val="000000"/>
       </a:buClr>
-      <a:buFont typeface="Arial"/>
-      <a:defRPr b="0" i="0" sz="1400" u="none" cap="none" strike="noStrike">
+      <a:buFont typeface="Arial" panose="020B0604020202020204"/>
+      <a:defRPr sz="1400" b="0" i="0" u="none" strike="noStrike" cap="none">
         <a:solidFill>
           <a:srgbClr val="000000"/>
         </a:solidFill>
-        <a:latin typeface="Arial"/>
-        <a:ea typeface="Arial"/>
-        <a:cs typeface="Arial"/>
-        <a:sym typeface="Arial"/>
+        <a:latin typeface="Arial" panose="020B0604020202020204"/>
+        <a:ea typeface="Arial" panose="020B0604020202020204"/>
+        <a:cs typeface="Arial" panose="020B0604020202020204"/>
+        <a:sym typeface="Arial" panose="020B0604020202020204"/>
       </a:defRPr>
     </a:lvl2pPr>
-    <a:lvl3pPr lvl="2" marR="0" rtl="0" algn="l">
+    <a:lvl3pPr marR="0" lvl="2" algn="l" rtl="0">
       <a:lnSpc>
         <a:spcPct val="100000"/>
       </a:lnSpc>
@@ -544,18 +551,18 @@
       <a:buClr>
         <a:srgbClr val="000000"/>
       </a:buClr>
-      <a:buFont typeface="Arial"/>
-      <a:defRPr b="0" i="0" sz="1400" u="none" cap="none" strike="noStrike">
+      <a:buFont typeface="Arial" panose="020B0604020202020204"/>
+      <a:defRPr sz="1400" b="0" i="0" u="none" strike="noStrike" cap="none">
         <a:solidFill>
           <a:srgbClr val="000000"/>
         </a:solidFill>
-        <a:latin typeface="Arial"/>
-        <a:ea typeface="Arial"/>
-        <a:cs typeface="Arial"/>
-        <a:sym typeface="Arial"/>
+        <a:latin typeface="Arial" panose="020B0604020202020204"/>
+        <a:ea typeface="Arial" panose="020B0604020202020204"/>
+        <a:cs typeface="Arial" panose="020B0604020202020204"/>
+        <a:sym typeface="Arial" panose="020B0604020202020204"/>
       </a:defRPr>
     </a:lvl3pPr>
-    <a:lvl4pPr lvl="3" marR="0" rtl="0" algn="l">
+    <a:lvl4pPr marR="0" lvl="3" algn="l" rtl="0">
       <a:lnSpc>
         <a:spcPct val="100000"/>
       </a:lnSpc>
@@ -568,18 +575,18 @@
       <a:buClr>
         <a:srgbClr val="000000"/>
       </a:buClr>
-      <a:buFont typeface="Arial"/>
-      <a:defRPr b="0" i="0" sz="1400" u="none" cap="none" strike="noStrike">
+      <a:buFont typeface="Arial" panose="020B0604020202020204"/>
+      <a:defRPr sz="1400" b="0" i="0" u="none" strike="noStrike" cap="none">
         <a:solidFill>
           <a:srgbClr val="000000"/>
         </a:solidFill>
-        <a:latin typeface="Arial"/>
-        <a:ea typeface="Arial"/>
-        <a:cs typeface="Arial"/>
-        <a:sym typeface="Arial"/>
+        <a:latin typeface="Arial" panose="020B0604020202020204"/>
+        <a:ea typeface="Arial" panose="020B0604020202020204"/>
+        <a:cs typeface="Arial" panose="020B0604020202020204"/>
+        <a:sym typeface="Arial" panose="020B0604020202020204"/>
       </a:defRPr>
     </a:lvl4pPr>
-    <a:lvl5pPr lvl="4" marR="0" rtl="0" algn="l">
+    <a:lvl5pPr marR="0" lvl="4" algn="l" rtl="0">
       <a:lnSpc>
         <a:spcPct val="100000"/>
       </a:lnSpc>
@@ -592,18 +599,18 @@
       <a:buClr>
         <a:srgbClr val="000000"/>
       </a:buClr>
-      <a:buFont typeface="Arial"/>
-      <a:defRPr b="0" i="0" sz="1400" u="none" cap="none" strike="noStrike">
+      <a:buFont typeface="Arial" panose="020B0604020202020204"/>
+      <a:defRPr sz="1400" b="0" i="0" u="none" strike="noStrike" cap="none">
         <a:solidFill>
           <a:srgbClr val="000000"/>
         </a:solidFill>
-        <a:latin typeface="Arial"/>
-        <a:ea typeface="Arial"/>
-        <a:cs typeface="Arial"/>
-        <a:sym typeface="Arial"/>
+        <a:latin typeface="Arial" panose="020B0604020202020204"/>
+        <a:ea typeface="Arial" panose="020B0604020202020204"/>
+        <a:cs typeface="Arial" panose="020B0604020202020204"/>
+        <a:sym typeface="Arial" panose="020B0604020202020204"/>
       </a:defRPr>
     </a:lvl5pPr>
-    <a:lvl6pPr lvl="5" marR="0" rtl="0" algn="l">
+    <a:lvl6pPr marR="0" lvl="5" algn="l" rtl="0">
       <a:lnSpc>
         <a:spcPct val="100000"/>
       </a:lnSpc>
@@ -616,18 +623,18 @@
       <a:buClr>
         <a:srgbClr val="000000"/>
       </a:buClr>
-      <a:buFont typeface="Arial"/>
-      <a:defRPr b="0" i="0" sz="1400" u="none" cap="none" strike="noStrike">
+      <a:buFont typeface="Arial" panose="020B0604020202020204"/>
+      <a:defRPr sz="1400" b="0" i="0" u="none" strike="noStrike" cap="none">
         <a:solidFill>
           <a:srgbClr val="000000"/>
         </a:solidFill>
-        <a:latin typeface="Arial"/>
-        <a:ea typeface="Arial"/>
-        <a:cs typeface="Arial"/>
-        <a:sym typeface="Arial"/>
+        <a:latin typeface="Arial" panose="020B0604020202020204"/>
+        <a:ea typeface="Arial" panose="020B0604020202020204"/>
+        <a:cs typeface="Arial" panose="020B0604020202020204"/>
+        <a:sym typeface="Arial" panose="020B0604020202020204"/>
       </a:defRPr>
     </a:lvl6pPr>
-    <a:lvl7pPr lvl="6" marR="0" rtl="0" algn="l">
+    <a:lvl7pPr marR="0" lvl="6" algn="l" rtl="0">
       <a:lnSpc>
         <a:spcPct val="100000"/>
       </a:lnSpc>
@@ -640,18 +647,18 @@
       <a:buClr>
         <a:srgbClr val="000000"/>
       </a:buClr>
-      <a:buFont typeface="Arial"/>
-      <a:defRPr b="0" i="0" sz="1400" u="none" cap="none" strike="noStrike">
+      <a:buFont typeface="Arial" panose="020B0604020202020204"/>
+      <a:defRPr sz="1400" b="0" i="0" u="none" strike="noStrike" cap="none">
         <a:solidFill>
           <a:srgbClr val="000000"/>
         </a:solidFill>
-        <a:latin typeface="Arial"/>
-        <a:ea typeface="Arial"/>
-        <a:cs typeface="Arial"/>
-        <a:sym typeface="Arial"/>
+        <a:latin typeface="Arial" panose="020B0604020202020204"/>
+        <a:ea typeface="Arial" panose="020B0604020202020204"/>
+        <a:cs typeface="Arial" panose="020B0604020202020204"/>
+        <a:sym typeface="Arial" panose="020B0604020202020204"/>
       </a:defRPr>
     </a:lvl7pPr>
-    <a:lvl8pPr lvl="7" marR="0" rtl="0" algn="l">
+    <a:lvl8pPr marR="0" lvl="7" algn="l" rtl="0">
       <a:lnSpc>
         <a:spcPct val="100000"/>
       </a:lnSpc>
@@ -664,18 +671,18 @@
       <a:buClr>
         <a:srgbClr val="000000"/>
       </a:buClr>
-      <a:buFont typeface="Arial"/>
-      <a:defRPr b="0" i="0" sz="1400" u="none" cap="none" strike="noStrike">
+      <a:buFont typeface="Arial" panose="020B0604020202020204"/>
+      <a:defRPr sz="1400" b="0" i="0" u="none" strike="noStrike" cap="none">
         <a:solidFill>
           <a:srgbClr val="000000"/>
         </a:solidFill>
-        <a:latin typeface="Arial"/>
-        <a:ea typeface="Arial"/>
-        <a:cs typeface="Arial"/>
-        <a:sym typeface="Arial"/>
+        <a:latin typeface="Arial" panose="020B0604020202020204"/>
+        <a:ea typeface="Arial" panose="020B0604020202020204"/>
+        <a:cs typeface="Arial" panose="020B0604020202020204"/>
+        <a:sym typeface="Arial" panose="020B0604020202020204"/>
       </a:defRPr>
     </a:lvl8pPr>
-    <a:lvl9pPr lvl="8" marR="0" rtl="0" algn="l">
+    <a:lvl9pPr marR="0" lvl="8" algn="l" rtl="0">
       <a:lnSpc>
         <a:spcPct val="100000"/>
       </a:lnSpc>
@@ -688,15 +695,15 @@
       <a:buClr>
         <a:srgbClr val="000000"/>
       </a:buClr>
-      <a:buFont typeface="Arial"/>
-      <a:defRPr b="0" i="0" sz="1400" u="none" cap="none" strike="noStrike">
+      <a:buFont typeface="Arial" panose="020B0604020202020204"/>
+      <a:defRPr sz="1400" b="0" i="0" u="none" strike="noStrike" cap="none">
         <a:solidFill>
           <a:srgbClr val="000000"/>
         </a:solidFill>
-        <a:latin typeface="Arial"/>
-        <a:ea typeface="Arial"/>
-        <a:cs typeface="Arial"/>
-        <a:sym typeface="Arial"/>
+        <a:latin typeface="Arial" panose="020B0604020202020204"/>
+        <a:ea typeface="Arial" panose="020B0604020202020204"/>
+        <a:cs typeface="Arial" panose="020B0604020202020204"/>
+        <a:sym typeface="Arial" panose="020B0604020202020204"/>
       </a:defRPr>
     </a:lvl9pPr>
   </p:notesStyle>
@@ -704,7 +711,7 @@
 </file>
 
 <file path=ppt/notesSlides/notesSlide1.xml><?xml version="1.0" encoding="utf-8"?>
-<p:notes xmlns:a="http://schemas.openxmlformats.org/drawingml/2006/main" xmlns:r="http://schemas.openxmlformats.org/officeDocument/2006/relationships" xmlns:mc="http://schemas.openxmlformats.org/markup-compatibility/2006" xmlns:mv="urn:schemas-microsoft-com:mac:vml" xmlns:p="http://schemas.openxmlformats.org/presentationml/2006/main" xmlns:c="http://schemas.openxmlformats.org/drawingml/2006/chart" xmlns:dgm="http://schemas.openxmlformats.org/drawingml/2006/diagram" xmlns:o="urn:schemas-microsoft-com:office:office" xmlns:v="urn:schemas-microsoft-com:vml" xmlns:pvml="urn:schemas-microsoft-com:office:powerpoint" xmlns:com="http://schemas.openxmlformats.org/drawingml/2006/compatibility" xmlns:p14="http://schemas.microsoft.com/office/powerpoint/2010/main" xmlns:p15="http://schemas.microsoft.com/office/powerpoint/2012/main" xmlns:ahyp="http://schemas.microsoft.com/office/drawing/2018/hyperlinkcolor" showMasterPhAnim="0" showMasterSp="0">
+<p:notes xmlns:a="http://schemas.openxmlformats.org/drawingml/2006/main" xmlns:r="http://schemas.openxmlformats.org/officeDocument/2006/relationships" xmlns:p="http://schemas.openxmlformats.org/presentationml/2006/main" showMasterPhAnim="0" showMasterSp="0">
   <p:cSld>
     <p:spTree>
       <p:nvGrpSpPr>
@@ -725,7 +732,7 @@
           <p:cNvPr id="56" name="Google Shape;56;p:notes"/>
           <p:cNvSpPr/>
           <p:nvPr>
-            <p:ph idx="2" type="sldImg"/>
+            <p:ph type="sldImg" idx="2"/>
           </p:nvPr>
         </p:nvSpPr>
         <p:spPr>
@@ -734,9 +741,13 @@
             <a:ext cx="6096075" cy="3429000"/>
           </a:xfrm>
           <a:custGeom>
-            <a:rect b="b" l="l" r="r" t="t"/>
+            <a:avLst/>
+            <a:gdLst/>
+            <a:ahLst/>
+            <a:cxnLst/>
+            <a:rect l="l" t="t" r="r" b="b"/>
             <a:pathLst>
-              <a:path extrusionOk="0" h="120000" w="120000">
+              <a:path w="120000" h="120000" extrusionOk="0">
                 <a:moveTo>
                   <a:pt x="0" y="0"/>
                 </a:moveTo>
@@ -760,7 +771,7 @@
           <p:cNvPr id="57" name="Google Shape;57;p:notes"/>
           <p:cNvSpPr txBox="1"/>
           <p:nvPr>
-            <p:ph idx="1" type="body"/>
+            <p:ph type="body" idx="1"/>
           </p:nvPr>
         </p:nvSpPr>
         <p:spPr>
@@ -773,12 +784,12 @@
           </a:prstGeom>
         </p:spPr>
         <p:txBody>
-          <a:bodyPr anchorCtr="0" anchor="t" bIns="91425" lIns="91425" spcFirstLastPara="1" rIns="91425" wrap="square" tIns="91425">
+          <a:bodyPr spcFirstLastPara="1" wrap="square" lIns="91425" tIns="91425" rIns="91425" bIns="91425" anchor="t" anchorCtr="0">
             <a:noAutofit/>
           </a:bodyPr>
           <a:lstStyle/>
           <a:p>
-            <a:pPr indent="0" lvl="0" marL="0" rtl="0" algn="l">
+            <a:pPr marL="0" lvl="0" indent="0" algn="l" rtl="0">
               <a:spcBef>
                 <a:spcPts val="0"/>
               </a:spcBef>
@@ -787,10 +798,6 @@
               </a:spcAft>
               <a:buNone/>
             </a:pPr>
-            <a:r>
-              <a:t/>
-            </a:r>
-            <a:endParaRPr/>
           </a:p>
         </p:txBody>
       </p:sp>
@@ -803,7 +810,7 @@
 </file>
 
 <file path=ppt/notesSlides/notesSlide10.xml><?xml version="1.0" encoding="utf-8"?>
-<p:notes xmlns:a="http://schemas.openxmlformats.org/drawingml/2006/main" xmlns:r="http://schemas.openxmlformats.org/officeDocument/2006/relationships" xmlns:mc="http://schemas.openxmlformats.org/markup-compatibility/2006" xmlns:mv="urn:schemas-microsoft-com:mac:vml" xmlns:p="http://schemas.openxmlformats.org/presentationml/2006/main" xmlns:c="http://schemas.openxmlformats.org/drawingml/2006/chart" xmlns:dgm="http://schemas.openxmlformats.org/drawingml/2006/diagram" xmlns:o="urn:schemas-microsoft-com:office:office" xmlns:v="urn:schemas-microsoft-com:vml" xmlns:pvml="urn:schemas-microsoft-com:office:powerpoint" xmlns:com="http://schemas.openxmlformats.org/drawingml/2006/compatibility" xmlns:p14="http://schemas.microsoft.com/office/powerpoint/2010/main" xmlns:p15="http://schemas.microsoft.com/office/powerpoint/2012/main" xmlns:ahyp="http://schemas.microsoft.com/office/drawing/2018/hyperlinkcolor" showMasterPhAnim="0" showMasterSp="0">
+<p:notes xmlns:a="http://schemas.openxmlformats.org/drawingml/2006/main" xmlns:r="http://schemas.openxmlformats.org/officeDocument/2006/relationships" xmlns:p="http://schemas.openxmlformats.org/presentationml/2006/main" showMasterPhAnim="0" showMasterSp="0">
   <p:cSld>
     <p:spTree>
       <p:nvGrpSpPr>
@@ -824,7 +831,7 @@
           <p:cNvPr id="124" name="Google Shape;124;g3e1981d9e2e_0_17:notes"/>
           <p:cNvSpPr/>
           <p:nvPr>
-            <p:ph idx="2" type="sldImg"/>
+            <p:ph type="sldImg" idx="2"/>
           </p:nvPr>
         </p:nvSpPr>
         <p:spPr>
@@ -833,9 +840,13 @@
             <a:ext cx="6096000" cy="3429000"/>
           </a:xfrm>
           <a:custGeom>
-            <a:rect b="b" l="l" r="r" t="t"/>
+            <a:avLst/>
+            <a:gdLst/>
+            <a:ahLst/>
+            <a:cxnLst/>
+            <a:rect l="l" t="t" r="r" b="b"/>
             <a:pathLst>
-              <a:path extrusionOk="0" h="120000" w="120000">
+              <a:path w="120000" h="120000" extrusionOk="0">
                 <a:moveTo>
                   <a:pt x="0" y="0"/>
                 </a:moveTo>
@@ -859,7 +870,7 @@
           <p:cNvPr id="125" name="Google Shape;125;g3e1981d9e2e_0_17:notes"/>
           <p:cNvSpPr txBox="1"/>
           <p:nvPr>
-            <p:ph idx="1" type="body"/>
+            <p:ph type="body" idx="1"/>
           </p:nvPr>
         </p:nvSpPr>
         <p:spPr>
@@ -872,12 +883,12 @@
           </a:prstGeom>
         </p:spPr>
         <p:txBody>
-          <a:bodyPr anchorCtr="0" anchor="t" bIns="91425" lIns="91425" spcFirstLastPara="1" rIns="91425" wrap="square" tIns="91425">
+          <a:bodyPr spcFirstLastPara="1" wrap="square" lIns="91425" tIns="91425" rIns="91425" bIns="91425" anchor="t" anchorCtr="0">
             <a:noAutofit/>
           </a:bodyPr>
           <a:lstStyle/>
           <a:p>
-            <a:pPr indent="0" lvl="0" marL="0" rtl="0" algn="l">
+            <a:pPr marL="0" lvl="0" indent="0" algn="l" rtl="0">
               <a:spcBef>
                 <a:spcPts val="0"/>
               </a:spcBef>
@@ -886,10 +897,6 @@
               </a:spcAft>
               <a:buNone/>
             </a:pPr>
-            <a:r>
-              <a:t/>
-            </a:r>
-            <a:endParaRPr/>
           </a:p>
         </p:txBody>
       </p:sp>
@@ -902,7 +909,7 @@
 </file>
 
 <file path=ppt/notesSlides/notesSlide2.xml><?xml version="1.0" encoding="utf-8"?>
-<p:notes xmlns:a="http://schemas.openxmlformats.org/drawingml/2006/main" xmlns:r="http://schemas.openxmlformats.org/officeDocument/2006/relationships" xmlns:mc="http://schemas.openxmlformats.org/markup-compatibility/2006" xmlns:mv="urn:schemas-microsoft-com:mac:vml" xmlns:p="http://schemas.openxmlformats.org/presentationml/2006/main" xmlns:c="http://schemas.openxmlformats.org/drawingml/2006/chart" xmlns:dgm="http://schemas.openxmlformats.org/drawingml/2006/diagram" xmlns:o="urn:schemas-microsoft-com:office:office" xmlns:v="urn:schemas-microsoft-com:vml" xmlns:pvml="urn:schemas-microsoft-com:office:powerpoint" xmlns:com="http://schemas.openxmlformats.org/drawingml/2006/compatibility" xmlns:p14="http://schemas.microsoft.com/office/powerpoint/2010/main" xmlns:p15="http://schemas.microsoft.com/office/powerpoint/2012/main" xmlns:ahyp="http://schemas.microsoft.com/office/drawing/2018/hyperlinkcolor" showMasterPhAnim="0" showMasterSp="0">
+<p:notes xmlns:a="http://schemas.openxmlformats.org/drawingml/2006/main" xmlns:r="http://schemas.openxmlformats.org/officeDocument/2006/relationships" xmlns:p="http://schemas.openxmlformats.org/presentationml/2006/main" showMasterPhAnim="0" showMasterSp="0">
   <p:cSld>
     <p:spTree>
       <p:nvGrpSpPr>
@@ -923,7 +930,7 @@
           <p:cNvPr id="62" name="Google Shape;62;g3e0b95f86ae_0_305:notes"/>
           <p:cNvSpPr/>
           <p:nvPr>
-            <p:ph idx="2" type="sldImg"/>
+            <p:ph type="sldImg" idx="2"/>
           </p:nvPr>
         </p:nvSpPr>
         <p:spPr>
@@ -932,9 +939,13 @@
             <a:ext cx="6096000" cy="3429000"/>
           </a:xfrm>
           <a:custGeom>
-            <a:rect b="b" l="l" r="r" t="t"/>
+            <a:avLst/>
+            <a:gdLst/>
+            <a:ahLst/>
+            <a:cxnLst/>
+            <a:rect l="l" t="t" r="r" b="b"/>
             <a:pathLst>
-              <a:path extrusionOk="0" h="120000" w="120000">
+              <a:path w="120000" h="120000" extrusionOk="0">
                 <a:moveTo>
                   <a:pt x="0" y="0"/>
                 </a:moveTo>
@@ -958,7 +969,7 @@
           <p:cNvPr id="63" name="Google Shape;63;g3e0b95f86ae_0_305:notes"/>
           <p:cNvSpPr txBox="1"/>
           <p:nvPr>
-            <p:ph idx="1" type="body"/>
+            <p:ph type="body" idx="1"/>
           </p:nvPr>
         </p:nvSpPr>
         <p:spPr>
@@ -971,12 +982,12 @@
           </a:prstGeom>
         </p:spPr>
         <p:txBody>
-          <a:bodyPr anchorCtr="0" anchor="t" bIns="91425" lIns="91425" spcFirstLastPara="1" rIns="91425" wrap="square" tIns="91425">
+          <a:bodyPr spcFirstLastPara="1" wrap="square" lIns="91425" tIns="91425" rIns="91425" bIns="91425" anchor="t" anchorCtr="0">
             <a:noAutofit/>
           </a:bodyPr>
           <a:lstStyle/>
           <a:p>
-            <a:pPr indent="0" lvl="0" marL="0" rtl="0" algn="l">
+            <a:pPr marL="0" lvl="0" indent="0" algn="l" rtl="0">
               <a:spcBef>
                 <a:spcPts val="0"/>
               </a:spcBef>
@@ -985,10 +996,6 @@
               </a:spcAft>
               <a:buNone/>
             </a:pPr>
-            <a:r>
-              <a:t/>
-            </a:r>
-            <a:endParaRPr/>
           </a:p>
         </p:txBody>
       </p:sp>
@@ -1001,7 +1008,7 @@
 </file>
 
 <file path=ppt/notesSlides/notesSlide3.xml><?xml version="1.0" encoding="utf-8"?>
-<p:notes xmlns:a="http://schemas.openxmlformats.org/drawingml/2006/main" xmlns:r="http://schemas.openxmlformats.org/officeDocument/2006/relationships" xmlns:mc="http://schemas.openxmlformats.org/markup-compatibility/2006" xmlns:mv="urn:schemas-microsoft-com:mac:vml" xmlns:p="http://schemas.openxmlformats.org/presentationml/2006/main" xmlns:c="http://schemas.openxmlformats.org/drawingml/2006/chart" xmlns:dgm="http://schemas.openxmlformats.org/drawingml/2006/diagram" xmlns:o="urn:schemas-microsoft-com:office:office" xmlns:v="urn:schemas-microsoft-com:vml" xmlns:pvml="urn:schemas-microsoft-com:office:powerpoint" xmlns:com="http://schemas.openxmlformats.org/drawingml/2006/compatibility" xmlns:p14="http://schemas.microsoft.com/office/powerpoint/2010/main" xmlns:p15="http://schemas.microsoft.com/office/powerpoint/2012/main" xmlns:ahyp="http://schemas.microsoft.com/office/drawing/2018/hyperlinkcolor" showMasterPhAnim="0" showMasterSp="0">
+<p:notes xmlns:a="http://schemas.openxmlformats.org/drawingml/2006/main" xmlns:r="http://schemas.openxmlformats.org/officeDocument/2006/relationships" xmlns:p="http://schemas.openxmlformats.org/presentationml/2006/main" showMasterPhAnim="0" showMasterSp="0">
   <p:cSld>
     <p:spTree>
       <p:nvGrpSpPr>
@@ -1022,7 +1029,7 @@
           <p:cNvPr id="70" name="Google Shape;70;g3e0b95f86ae_0_310:notes"/>
           <p:cNvSpPr/>
           <p:nvPr>
-            <p:ph idx="2" type="sldImg"/>
+            <p:ph type="sldImg" idx="2"/>
           </p:nvPr>
         </p:nvSpPr>
         <p:spPr>
@@ -1031,9 +1038,13 @@
             <a:ext cx="6096000" cy="3429000"/>
           </a:xfrm>
           <a:custGeom>
-            <a:rect b="b" l="l" r="r" t="t"/>
+            <a:avLst/>
+            <a:gdLst/>
+            <a:ahLst/>
+            <a:cxnLst/>
+            <a:rect l="l" t="t" r="r" b="b"/>
             <a:pathLst>
-              <a:path extrusionOk="0" h="120000" w="120000">
+              <a:path w="120000" h="120000" extrusionOk="0">
                 <a:moveTo>
                   <a:pt x="0" y="0"/>
                 </a:moveTo>
@@ -1057,7 +1068,7 @@
           <p:cNvPr id="71" name="Google Shape;71;g3e0b95f86ae_0_310:notes"/>
           <p:cNvSpPr txBox="1"/>
           <p:nvPr>
-            <p:ph idx="1" type="body"/>
+            <p:ph type="body" idx="1"/>
           </p:nvPr>
         </p:nvSpPr>
         <p:spPr>
@@ -1070,12 +1081,12 @@
           </a:prstGeom>
         </p:spPr>
         <p:txBody>
-          <a:bodyPr anchorCtr="0" anchor="t" bIns="91425" lIns="91425" spcFirstLastPara="1" rIns="91425" wrap="square" tIns="91425">
+          <a:bodyPr spcFirstLastPara="1" wrap="square" lIns="91425" tIns="91425" rIns="91425" bIns="91425" anchor="t" anchorCtr="0">
             <a:noAutofit/>
           </a:bodyPr>
           <a:lstStyle/>
           <a:p>
-            <a:pPr indent="0" lvl="0" marL="0" rtl="0" algn="l">
+            <a:pPr marL="0" lvl="0" indent="0" algn="l" rtl="0">
               <a:spcBef>
                 <a:spcPts val="0"/>
               </a:spcBef>
@@ -1084,10 +1095,6 @@
               </a:spcAft>
               <a:buNone/>
             </a:pPr>
-            <a:r>
-              <a:t/>
-            </a:r>
-            <a:endParaRPr/>
           </a:p>
         </p:txBody>
       </p:sp>
@@ -1100,7 +1107,7 @@
 </file>
 
 <file path=ppt/notesSlides/notesSlide4.xml><?xml version="1.0" encoding="utf-8"?>
-<p:notes xmlns:a="http://schemas.openxmlformats.org/drawingml/2006/main" xmlns:r="http://schemas.openxmlformats.org/officeDocument/2006/relationships" xmlns:mc="http://schemas.openxmlformats.org/markup-compatibility/2006" xmlns:mv="urn:schemas-microsoft-com:mac:vml" xmlns:p="http://schemas.openxmlformats.org/presentationml/2006/main" xmlns:c="http://schemas.openxmlformats.org/drawingml/2006/chart" xmlns:dgm="http://schemas.openxmlformats.org/drawingml/2006/diagram" xmlns:o="urn:schemas-microsoft-com:office:office" xmlns:v="urn:schemas-microsoft-com:vml" xmlns:pvml="urn:schemas-microsoft-com:office:powerpoint" xmlns:com="http://schemas.openxmlformats.org/drawingml/2006/compatibility" xmlns:p14="http://schemas.microsoft.com/office/powerpoint/2010/main" xmlns:p15="http://schemas.microsoft.com/office/powerpoint/2012/main" xmlns:ahyp="http://schemas.microsoft.com/office/drawing/2018/hyperlinkcolor" showMasterPhAnim="0" showMasterSp="0">
+<p:notes xmlns:a="http://schemas.openxmlformats.org/drawingml/2006/main" xmlns:r="http://schemas.openxmlformats.org/officeDocument/2006/relationships" xmlns:p="http://schemas.openxmlformats.org/presentationml/2006/main" showMasterPhAnim="0" showMasterSp="0">
   <p:cSld>
     <p:spTree>
       <p:nvGrpSpPr>
@@ -1121,7 +1128,7 @@
           <p:cNvPr id="80" name="Google Shape;80;g3e0c1a5fde7_0_0:notes"/>
           <p:cNvSpPr/>
           <p:nvPr>
-            <p:ph idx="2" type="sldImg"/>
+            <p:ph type="sldImg" idx="2"/>
           </p:nvPr>
         </p:nvSpPr>
         <p:spPr>
@@ -1130,9 +1137,13 @@
             <a:ext cx="6096000" cy="3429000"/>
           </a:xfrm>
           <a:custGeom>
-            <a:rect b="b" l="l" r="r" t="t"/>
+            <a:avLst/>
+            <a:gdLst/>
+            <a:ahLst/>
+            <a:cxnLst/>
+            <a:rect l="l" t="t" r="r" b="b"/>
             <a:pathLst>
-              <a:path extrusionOk="0" h="120000" w="120000">
+              <a:path w="120000" h="120000" extrusionOk="0">
                 <a:moveTo>
                   <a:pt x="0" y="0"/>
                 </a:moveTo>
@@ -1156,7 +1167,7 @@
           <p:cNvPr id="81" name="Google Shape;81;g3e0c1a5fde7_0_0:notes"/>
           <p:cNvSpPr txBox="1"/>
           <p:nvPr>
-            <p:ph idx="1" type="body"/>
+            <p:ph type="body" idx="1"/>
           </p:nvPr>
         </p:nvSpPr>
         <p:spPr>
@@ -1169,12 +1180,12 @@
           </a:prstGeom>
         </p:spPr>
         <p:txBody>
-          <a:bodyPr anchorCtr="0" anchor="t" bIns="91425" lIns="91425" spcFirstLastPara="1" rIns="91425" wrap="square" tIns="91425">
+          <a:bodyPr spcFirstLastPara="1" wrap="square" lIns="91425" tIns="91425" rIns="91425" bIns="91425" anchor="t" anchorCtr="0">
             <a:noAutofit/>
           </a:bodyPr>
           <a:lstStyle/>
           <a:p>
-            <a:pPr indent="0" lvl="0" marL="0" rtl="0" algn="l">
+            <a:pPr marL="0" lvl="0" indent="0" algn="l" rtl="0">
               <a:spcBef>
                 <a:spcPts val="0"/>
               </a:spcBef>
@@ -1183,10 +1194,6 @@
               </a:spcAft>
               <a:buNone/>
             </a:pPr>
-            <a:r>
-              <a:t/>
-            </a:r>
-            <a:endParaRPr/>
           </a:p>
         </p:txBody>
       </p:sp>
@@ -1199,7 +1206,7 @@
 </file>
 
 <file path=ppt/notesSlides/notesSlide5.xml><?xml version="1.0" encoding="utf-8"?>
-<p:notes xmlns:a="http://schemas.openxmlformats.org/drawingml/2006/main" xmlns:r="http://schemas.openxmlformats.org/officeDocument/2006/relationships" xmlns:mc="http://schemas.openxmlformats.org/markup-compatibility/2006" xmlns:mv="urn:schemas-microsoft-com:mac:vml" xmlns:p="http://schemas.openxmlformats.org/presentationml/2006/main" xmlns:c="http://schemas.openxmlformats.org/drawingml/2006/chart" xmlns:dgm="http://schemas.openxmlformats.org/drawingml/2006/diagram" xmlns:o="urn:schemas-microsoft-com:office:office" xmlns:v="urn:schemas-microsoft-com:vml" xmlns:pvml="urn:schemas-microsoft-com:office:powerpoint" xmlns:com="http://schemas.openxmlformats.org/drawingml/2006/compatibility" xmlns:p14="http://schemas.microsoft.com/office/powerpoint/2010/main" xmlns:p15="http://schemas.microsoft.com/office/powerpoint/2012/main" xmlns:ahyp="http://schemas.microsoft.com/office/drawing/2018/hyperlinkcolor" showMasterPhAnim="0" showMasterSp="0">
+<p:notes xmlns:a="http://schemas.openxmlformats.org/drawingml/2006/main" xmlns:r="http://schemas.openxmlformats.org/officeDocument/2006/relationships" xmlns:p="http://schemas.openxmlformats.org/presentationml/2006/main" showMasterPhAnim="0" showMasterSp="0">
   <p:cSld>
     <p:spTree>
       <p:nvGrpSpPr>
@@ -1220,7 +1227,7 @@
           <p:cNvPr id="90" name="Google Shape;90;g3e0c1a5fde7_0_5:notes"/>
           <p:cNvSpPr/>
           <p:nvPr>
-            <p:ph idx="2" type="sldImg"/>
+            <p:ph type="sldImg" idx="2"/>
           </p:nvPr>
         </p:nvSpPr>
         <p:spPr>
@@ -1229,9 +1236,13 @@
             <a:ext cx="6096000" cy="3429000"/>
           </a:xfrm>
           <a:custGeom>
-            <a:rect b="b" l="l" r="r" t="t"/>
+            <a:avLst/>
+            <a:gdLst/>
+            <a:ahLst/>
+            <a:cxnLst/>
+            <a:rect l="l" t="t" r="r" b="b"/>
             <a:pathLst>
-              <a:path extrusionOk="0" h="120000" w="120000">
+              <a:path w="120000" h="120000" extrusionOk="0">
                 <a:moveTo>
                   <a:pt x="0" y="0"/>
                 </a:moveTo>
@@ -1255,7 +1266,7 @@
           <p:cNvPr id="91" name="Google Shape;91;g3e0c1a5fde7_0_5:notes"/>
           <p:cNvSpPr txBox="1"/>
           <p:nvPr>
-            <p:ph idx="1" type="body"/>
+            <p:ph type="body" idx="1"/>
           </p:nvPr>
         </p:nvSpPr>
         <p:spPr>
@@ -1268,12 +1279,12 @@
           </a:prstGeom>
         </p:spPr>
         <p:txBody>
-          <a:bodyPr anchorCtr="0" anchor="t" bIns="91425" lIns="91425" spcFirstLastPara="1" rIns="91425" wrap="square" tIns="91425">
+          <a:bodyPr spcFirstLastPara="1" wrap="square" lIns="91425" tIns="91425" rIns="91425" bIns="91425" anchor="t" anchorCtr="0">
             <a:noAutofit/>
           </a:bodyPr>
           <a:lstStyle/>
           <a:p>
-            <a:pPr indent="0" lvl="0" marL="0" rtl="0" algn="l">
+            <a:pPr marL="0" lvl="0" indent="0" algn="l" rtl="0">
               <a:spcBef>
                 <a:spcPts val="0"/>
               </a:spcBef>
@@ -1282,10 +1293,6 @@
               </a:spcAft>
               <a:buNone/>
             </a:pPr>
-            <a:r>
-              <a:t/>
-            </a:r>
-            <a:endParaRPr/>
           </a:p>
         </p:txBody>
       </p:sp>
@@ -1298,7 +1305,7 @@
 </file>
 
 <file path=ppt/notesSlides/notesSlide6.xml><?xml version="1.0" encoding="utf-8"?>
-<p:notes xmlns:a="http://schemas.openxmlformats.org/drawingml/2006/main" xmlns:r="http://schemas.openxmlformats.org/officeDocument/2006/relationships" xmlns:mc="http://schemas.openxmlformats.org/markup-compatibility/2006" xmlns:mv="urn:schemas-microsoft-com:mac:vml" xmlns:p="http://schemas.openxmlformats.org/presentationml/2006/main" xmlns:c="http://schemas.openxmlformats.org/drawingml/2006/chart" xmlns:dgm="http://schemas.openxmlformats.org/drawingml/2006/diagram" xmlns:o="urn:schemas-microsoft-com:office:office" xmlns:v="urn:schemas-microsoft-com:vml" xmlns:pvml="urn:schemas-microsoft-com:office:powerpoint" xmlns:com="http://schemas.openxmlformats.org/drawingml/2006/compatibility" xmlns:p14="http://schemas.microsoft.com/office/powerpoint/2010/main" xmlns:p15="http://schemas.microsoft.com/office/powerpoint/2012/main" xmlns:ahyp="http://schemas.microsoft.com/office/drawing/2018/hyperlinkcolor" showMasterPhAnim="0" showMasterSp="0">
+<p:notes xmlns:a="http://schemas.openxmlformats.org/drawingml/2006/main" xmlns:r="http://schemas.openxmlformats.org/officeDocument/2006/relationships" xmlns:p="http://schemas.openxmlformats.org/presentationml/2006/main" showMasterPhAnim="0" showMasterSp="0">
   <p:cSld>
     <p:spTree>
       <p:nvGrpSpPr>
@@ -1319,7 +1326,7 @@
           <p:cNvPr id="99" name="Google Shape;99;g3e1981d9e2e_0_0:notes"/>
           <p:cNvSpPr/>
           <p:nvPr>
-            <p:ph idx="2" type="sldImg"/>
+            <p:ph type="sldImg" idx="2"/>
           </p:nvPr>
         </p:nvSpPr>
         <p:spPr>
@@ -1328,9 +1335,13 @@
             <a:ext cx="6096000" cy="3429000"/>
           </a:xfrm>
           <a:custGeom>
-            <a:rect b="b" l="l" r="r" t="t"/>
+            <a:avLst/>
+            <a:gdLst/>
+            <a:ahLst/>
+            <a:cxnLst/>
+            <a:rect l="l" t="t" r="r" b="b"/>
             <a:pathLst>
-              <a:path extrusionOk="0" h="120000" w="120000">
+              <a:path w="120000" h="120000" extrusionOk="0">
                 <a:moveTo>
                   <a:pt x="0" y="0"/>
                 </a:moveTo>
@@ -1354,7 +1365,7 @@
           <p:cNvPr id="100" name="Google Shape;100;g3e1981d9e2e_0_0:notes"/>
           <p:cNvSpPr txBox="1"/>
           <p:nvPr>
-            <p:ph idx="1" type="body"/>
+            <p:ph type="body" idx="1"/>
           </p:nvPr>
         </p:nvSpPr>
         <p:spPr>
@@ -1367,12 +1378,12 @@
           </a:prstGeom>
         </p:spPr>
         <p:txBody>
-          <a:bodyPr anchorCtr="0" anchor="t" bIns="91425" lIns="91425" spcFirstLastPara="1" rIns="91425" wrap="square" tIns="91425">
+          <a:bodyPr spcFirstLastPara="1" wrap="square" lIns="91425" tIns="91425" rIns="91425" bIns="91425" anchor="t" anchorCtr="0">
             <a:noAutofit/>
           </a:bodyPr>
           <a:lstStyle/>
           <a:p>
-            <a:pPr indent="0" lvl="0" marL="0" rtl="0" algn="l">
+            <a:pPr marL="0" lvl="0" indent="0" algn="l" rtl="0">
               <a:spcBef>
                 <a:spcPts val="0"/>
               </a:spcBef>
@@ -1381,10 +1392,6 @@
               </a:spcAft>
               <a:buNone/>
             </a:pPr>
-            <a:r>
-              <a:t/>
-            </a:r>
-            <a:endParaRPr/>
           </a:p>
         </p:txBody>
       </p:sp>
@@ -1397,7 +1404,7 @@
 </file>
 
 <file path=ppt/notesSlides/notesSlide7.xml><?xml version="1.0" encoding="utf-8"?>
-<p:notes xmlns:a="http://schemas.openxmlformats.org/drawingml/2006/main" xmlns:r="http://schemas.openxmlformats.org/officeDocument/2006/relationships" xmlns:mc="http://schemas.openxmlformats.org/markup-compatibility/2006" xmlns:mv="urn:schemas-microsoft-com:mac:vml" xmlns:p="http://schemas.openxmlformats.org/presentationml/2006/main" xmlns:c="http://schemas.openxmlformats.org/drawingml/2006/chart" xmlns:dgm="http://schemas.openxmlformats.org/drawingml/2006/diagram" xmlns:o="urn:schemas-microsoft-com:office:office" xmlns:v="urn:schemas-microsoft-com:vml" xmlns:pvml="urn:schemas-microsoft-com:office:powerpoint" xmlns:com="http://schemas.openxmlformats.org/drawingml/2006/compatibility" xmlns:p14="http://schemas.microsoft.com/office/powerpoint/2010/main" xmlns:p15="http://schemas.microsoft.com/office/powerpoint/2012/main" xmlns:ahyp="http://schemas.microsoft.com/office/drawing/2018/hyperlinkcolor" showMasterPhAnim="0" showMasterSp="0">
+<p:notes xmlns:a="http://schemas.openxmlformats.org/drawingml/2006/main" xmlns:r="http://schemas.openxmlformats.org/officeDocument/2006/relationships" xmlns:p="http://schemas.openxmlformats.org/presentationml/2006/main" showMasterPhAnim="0" showMasterSp="0">
   <p:cSld>
     <p:spTree>
       <p:nvGrpSpPr>
@@ -1418,7 +1425,7 @@
           <p:cNvPr id="105" name="Google Shape;105;g3e1981d9e2e_0_5:notes"/>
           <p:cNvSpPr/>
           <p:nvPr>
-            <p:ph idx="2" type="sldImg"/>
+            <p:ph type="sldImg" idx="2"/>
           </p:nvPr>
         </p:nvSpPr>
         <p:spPr>
@@ -1427,9 +1434,13 @@
             <a:ext cx="6096000" cy="3429000"/>
           </a:xfrm>
           <a:custGeom>
-            <a:rect b="b" l="l" r="r" t="t"/>
+            <a:avLst/>
+            <a:gdLst/>
+            <a:ahLst/>
+            <a:cxnLst/>
+            <a:rect l="l" t="t" r="r" b="b"/>
             <a:pathLst>
-              <a:path extrusionOk="0" h="120000" w="120000">
+              <a:path w="120000" h="120000" extrusionOk="0">
                 <a:moveTo>
                   <a:pt x="0" y="0"/>
                 </a:moveTo>
@@ -1453,7 +1464,7 @@
           <p:cNvPr id="106" name="Google Shape;106;g3e1981d9e2e_0_5:notes"/>
           <p:cNvSpPr txBox="1"/>
           <p:nvPr>
-            <p:ph idx="1" type="body"/>
+            <p:ph type="body" idx="1"/>
           </p:nvPr>
         </p:nvSpPr>
         <p:spPr>
@@ -1466,12 +1477,12 @@
           </a:prstGeom>
         </p:spPr>
         <p:txBody>
-          <a:bodyPr anchorCtr="0" anchor="t" bIns="91425" lIns="91425" spcFirstLastPara="1" rIns="91425" wrap="square" tIns="91425">
+          <a:bodyPr spcFirstLastPara="1" wrap="square" lIns="91425" tIns="91425" rIns="91425" bIns="91425" anchor="t" anchorCtr="0">
             <a:noAutofit/>
           </a:bodyPr>
           <a:lstStyle/>
           <a:p>
-            <a:pPr indent="0" lvl="0" marL="0" rtl="0" algn="l">
+            <a:pPr marL="0" lvl="0" indent="0" algn="l" rtl="0">
               <a:spcBef>
                 <a:spcPts val="0"/>
               </a:spcBef>
@@ -1480,10 +1491,6 @@
               </a:spcAft>
               <a:buNone/>
             </a:pPr>
-            <a:r>
-              <a:t/>
-            </a:r>
-            <a:endParaRPr/>
           </a:p>
         </p:txBody>
       </p:sp>
@@ -1496,7 +1503,7 @@
 </file>
 
 <file path=ppt/notesSlides/notesSlide8.xml><?xml version="1.0" encoding="utf-8"?>
-<p:notes xmlns:a="http://schemas.openxmlformats.org/drawingml/2006/main" xmlns:r="http://schemas.openxmlformats.org/officeDocument/2006/relationships" xmlns:mc="http://schemas.openxmlformats.org/markup-compatibility/2006" xmlns:mv="urn:schemas-microsoft-com:mac:vml" xmlns:p="http://schemas.openxmlformats.org/presentationml/2006/main" xmlns:c="http://schemas.openxmlformats.org/drawingml/2006/chart" xmlns:dgm="http://schemas.openxmlformats.org/drawingml/2006/diagram" xmlns:o="urn:schemas-microsoft-com:office:office" xmlns:v="urn:schemas-microsoft-com:vml" xmlns:pvml="urn:schemas-microsoft-com:office:powerpoint" xmlns:com="http://schemas.openxmlformats.org/drawingml/2006/compatibility" xmlns:p14="http://schemas.microsoft.com/office/powerpoint/2010/main" xmlns:p15="http://schemas.microsoft.com/office/powerpoint/2012/main" xmlns:ahyp="http://schemas.microsoft.com/office/drawing/2018/hyperlinkcolor" showMasterPhAnim="0" showMasterSp="0">
+<p:notes xmlns:a="http://schemas.openxmlformats.org/drawingml/2006/main" xmlns:r="http://schemas.openxmlformats.org/officeDocument/2006/relationships" xmlns:p="http://schemas.openxmlformats.org/presentationml/2006/main" showMasterPhAnim="0" showMasterSp="0">
   <p:cSld>
     <p:spTree>
       <p:nvGrpSpPr>
@@ -1517,7 +1524,7 @@
           <p:cNvPr id="111" name="Google Shape;111;g3e1981d9e2e_0_12:notes"/>
           <p:cNvSpPr/>
           <p:nvPr>
-            <p:ph idx="2" type="sldImg"/>
+            <p:ph type="sldImg" idx="2"/>
           </p:nvPr>
         </p:nvSpPr>
         <p:spPr>
@@ -1526,9 +1533,13 @@
             <a:ext cx="6096000" cy="3429000"/>
           </a:xfrm>
           <a:custGeom>
-            <a:rect b="b" l="l" r="r" t="t"/>
+            <a:avLst/>
+            <a:gdLst/>
+            <a:ahLst/>
+            <a:cxnLst/>
+            <a:rect l="l" t="t" r="r" b="b"/>
             <a:pathLst>
-              <a:path extrusionOk="0" h="120000" w="120000">
+              <a:path w="120000" h="120000" extrusionOk="0">
                 <a:moveTo>
                   <a:pt x="0" y="0"/>
                 </a:moveTo>
@@ -1552,7 +1563,7 @@
           <p:cNvPr id="112" name="Google Shape;112;g3e1981d9e2e_0_12:notes"/>
           <p:cNvSpPr txBox="1"/>
           <p:nvPr>
-            <p:ph idx="1" type="body"/>
+            <p:ph type="body" idx="1"/>
           </p:nvPr>
         </p:nvSpPr>
         <p:spPr>
@@ -1565,12 +1576,12 @@
           </a:prstGeom>
         </p:spPr>
         <p:txBody>
-          <a:bodyPr anchorCtr="0" anchor="t" bIns="91425" lIns="91425" spcFirstLastPara="1" rIns="91425" wrap="square" tIns="91425">
+          <a:bodyPr spcFirstLastPara="1" wrap="square" lIns="91425" tIns="91425" rIns="91425" bIns="91425" anchor="t" anchorCtr="0">
             <a:noAutofit/>
           </a:bodyPr>
           <a:lstStyle/>
           <a:p>
-            <a:pPr indent="0" lvl="0" marL="0" rtl="0" algn="l">
+            <a:pPr marL="0" lvl="0" indent="0" algn="l" rtl="0">
               <a:spcBef>
                 <a:spcPts val="0"/>
               </a:spcBef>
@@ -1579,10 +1590,6 @@
               </a:spcAft>
               <a:buNone/>
             </a:pPr>
-            <a:r>
-              <a:t/>
-            </a:r>
-            <a:endParaRPr/>
           </a:p>
         </p:txBody>
       </p:sp>
@@ -1595,7 +1602,7 @@
 </file>
 
 <file path=ppt/notesSlides/notesSlide9.xml><?xml version="1.0" encoding="utf-8"?>
-<p:notes xmlns:a="http://schemas.openxmlformats.org/drawingml/2006/main" xmlns:r="http://schemas.openxmlformats.org/officeDocument/2006/relationships" xmlns:mc="http://schemas.openxmlformats.org/markup-compatibility/2006" xmlns:mv="urn:schemas-microsoft-com:mac:vml" xmlns:p="http://schemas.openxmlformats.org/presentationml/2006/main" xmlns:c="http://schemas.openxmlformats.org/drawingml/2006/chart" xmlns:dgm="http://schemas.openxmlformats.org/drawingml/2006/diagram" xmlns:o="urn:schemas-microsoft-com:office:office" xmlns:v="urn:schemas-microsoft-com:vml" xmlns:pvml="urn:schemas-microsoft-com:office:powerpoint" xmlns:com="http://schemas.openxmlformats.org/drawingml/2006/compatibility" xmlns:p14="http://schemas.microsoft.com/office/powerpoint/2010/main" xmlns:p15="http://schemas.microsoft.com/office/powerpoint/2012/main" xmlns:ahyp="http://schemas.microsoft.com/office/drawing/2018/hyperlinkcolor" showMasterPhAnim="0" showMasterSp="0">
+<p:notes xmlns:a="http://schemas.openxmlformats.org/drawingml/2006/main" xmlns:r="http://schemas.openxmlformats.org/officeDocument/2006/relationships" xmlns:p="http://schemas.openxmlformats.org/presentationml/2006/main" showMasterPhAnim="0" showMasterSp="0">
   <p:cSld>
     <p:spTree>
       <p:nvGrpSpPr>
@@ -1616,7 +1623,7 @@
           <p:cNvPr id="117" name="Google Shape;117;g3e1981d9e2e_0_26:notes"/>
           <p:cNvSpPr/>
           <p:nvPr>
-            <p:ph idx="2" type="sldImg"/>
+            <p:ph type="sldImg" idx="2"/>
           </p:nvPr>
         </p:nvSpPr>
         <p:spPr>
@@ -1625,9 +1632,13 @@
             <a:ext cx="6096000" cy="3429000"/>
           </a:xfrm>
           <a:custGeom>
-            <a:rect b="b" l="l" r="r" t="t"/>
+            <a:avLst/>
+            <a:gdLst/>
+            <a:ahLst/>
+            <a:cxnLst/>
+            <a:rect l="l" t="t" r="r" b="b"/>
             <a:pathLst>
-              <a:path extrusionOk="0" h="120000" w="120000">
+              <a:path w="120000" h="120000" extrusionOk="0">
                 <a:moveTo>
                   <a:pt x="0" y="0"/>
                 </a:moveTo>
@@ -1651,7 +1662,7 @@
           <p:cNvPr id="118" name="Google Shape;118;g3e1981d9e2e_0_26:notes"/>
           <p:cNvSpPr txBox="1"/>
           <p:nvPr>
-            <p:ph idx="1" type="body"/>
+            <p:ph type="body" idx="1"/>
           </p:nvPr>
         </p:nvSpPr>
         <p:spPr>
@@ -1664,12 +1675,12 @@
           </a:prstGeom>
         </p:spPr>
         <p:txBody>
-          <a:bodyPr anchorCtr="0" anchor="t" bIns="91425" lIns="91425" spcFirstLastPara="1" rIns="91425" wrap="square" tIns="91425">
+          <a:bodyPr spcFirstLastPara="1" wrap="square" lIns="91425" tIns="91425" rIns="91425" bIns="91425" anchor="t" anchorCtr="0">
             <a:noAutofit/>
           </a:bodyPr>
           <a:lstStyle/>
           <a:p>
-            <a:pPr indent="0" lvl="0" marL="0" rtl="0" algn="l">
+            <a:pPr marL="0" lvl="0" indent="0" algn="l" rtl="0">
               <a:spcBef>
                 <a:spcPts val="0"/>
               </a:spcBef>
@@ -1678,10 +1689,6 @@
               </a:spcAft>
               <a:buNone/>
             </a:pPr>
-            <a:r>
-              <a:t/>
-            </a:r>
-            <a:endParaRPr/>
           </a:p>
         </p:txBody>
       </p:sp>
@@ -1694,13 +1701,14 @@
 </file>
 
 <file path=ppt/slideLayouts/slideLayout1.xml><?xml version="1.0" encoding="utf-8"?>
-<p:sldLayout xmlns:a="http://schemas.openxmlformats.org/drawingml/2006/main" xmlns:r="http://schemas.openxmlformats.org/officeDocument/2006/relationships" xmlns:mc="http://schemas.openxmlformats.org/markup-compatibility/2006" xmlns:mv="urn:schemas-microsoft-com:mac:vml" xmlns:p="http://schemas.openxmlformats.org/presentationml/2006/main" xmlns:c="http://schemas.openxmlformats.org/drawingml/2006/chart" xmlns:dgm="http://schemas.openxmlformats.org/drawingml/2006/diagram" xmlns:o="urn:schemas-microsoft-com:office:office" xmlns:v="urn:schemas-microsoft-com:vml" xmlns:pvml="urn:schemas-microsoft-com:office:powerpoint" xmlns:com="http://schemas.openxmlformats.org/drawingml/2006/compatibility" xmlns:p14="http://schemas.microsoft.com/office/powerpoint/2010/main" xmlns:p15="http://schemas.microsoft.com/office/powerpoint/2012/main" xmlns:ahyp="http://schemas.microsoft.com/office/drawing/2018/hyperlinkcolor" matchingName="Title slide" type="title">
+<p:sldLayout xmlns:a="http://schemas.openxmlformats.org/drawingml/2006/main" xmlns:r="http://schemas.openxmlformats.org/officeDocument/2006/relationships" xmlns:p="http://schemas.openxmlformats.org/presentationml/2006/main" type="title" matchingName="Title slide">
   <p:cSld name="TITLE">
     <p:bg>
       <p:bgPr>
         <a:solidFill>
           <a:schemeClr val="dk1"/>
         </a:solidFill>
+        <a:effectLst/>
       </p:bgPr>
     </p:bg>
     <p:spTree>
@@ -1739,12 +1747,12 @@
           </a:ln>
         </p:spPr>
         <p:txBody>
-          <a:bodyPr anchorCtr="0" anchor="ctr" bIns="91425" lIns="91425" spcFirstLastPara="1" rIns="91425" wrap="square" tIns="91425">
+          <a:bodyPr spcFirstLastPara="1" wrap="square" lIns="91425" tIns="91425" rIns="91425" bIns="91425" anchor="ctr" anchorCtr="0">
             <a:noAutofit/>
           </a:bodyPr>
           <a:lstStyle/>
           <a:p>
-            <a:pPr indent="0" lvl="0" marL="0" rtl="0" algn="l">
+            <a:pPr marL="0" lvl="0" indent="0" algn="l" rtl="0">
               <a:spcBef>
                 <a:spcPts val="0"/>
               </a:spcBef>
@@ -1753,10 +1761,6 @@
               </a:spcAft>
               <a:buNone/>
             </a:pPr>
-            <a:r>
-              <a:t/>
-            </a:r>
-            <a:endParaRPr/>
           </a:p>
         </p:txBody>
       </p:sp>
@@ -1775,14 +1779,14 @@
             <a:avLst/>
           </a:prstGeom>
           <a:noFill/>
-          <a:ln cap="flat" cmpd="sng" w="28575">
+          <a:ln w="28575" cap="flat" cmpd="sng">
             <a:solidFill>
               <a:schemeClr val="accent1"/>
             </a:solidFill>
             <a:prstDash val="solid"/>
             <a:round/>
-            <a:headEnd len="sm" w="sm" type="none"/>
-            <a:tailEnd len="sm" w="sm" type="none"/>
+            <a:headEnd type="none" w="sm" len="sm"/>
+            <a:tailEnd type="none" w="sm" len="sm"/>
           </a:ln>
         </p:spPr>
       </p:cxnSp>
@@ -1804,7 +1808,7 @@
           </a:prstGeom>
         </p:spPr>
         <p:txBody>
-          <a:bodyPr anchorCtr="0" anchor="b" bIns="91425" lIns="91425" spcFirstLastPara="1" rIns="91425" wrap="square" tIns="91425">
+          <a:bodyPr spcFirstLastPara="1" wrap="square" lIns="91425" tIns="91425" rIns="91425" bIns="91425" anchor="b" anchorCtr="0">
             <a:normAutofit/>
           </a:bodyPr>
           <a:lstStyle>
@@ -1979,7 +1983,7 @@
           <p:cNvPr id="13" name="Google Shape;13;p2"/>
           <p:cNvSpPr txBox="1"/>
           <p:nvPr>
-            <p:ph idx="1" type="subTitle"/>
+            <p:ph type="subTitle" idx="1"/>
           </p:nvPr>
         </p:nvSpPr>
         <p:spPr>
@@ -1992,7 +1996,7 @@
           </a:prstGeom>
         </p:spPr>
         <p:txBody>
-          <a:bodyPr anchorCtr="0" anchor="t" bIns="91425" lIns="91425" spcFirstLastPara="1" rIns="91425" wrap="square" tIns="91425">
+          <a:bodyPr spcFirstLastPara="1" wrap="square" lIns="91425" tIns="91425" rIns="91425" bIns="91425" anchor="t" anchorCtr="0">
             <a:normAutofit/>
           </a:bodyPr>
           <a:lstStyle>
@@ -2194,7 +2198,7 @@
           <p:cNvPr id="14" name="Google Shape;14;p2"/>
           <p:cNvSpPr txBox="1"/>
           <p:nvPr>
-            <p:ph idx="12" type="sldNum"/>
+            <p:ph type="sldNum" idx="12"/>
           </p:nvPr>
         </p:nvSpPr>
         <p:spPr>
@@ -2207,7 +2211,7 @@
           </a:prstGeom>
         </p:spPr>
         <p:txBody>
-          <a:bodyPr anchorCtr="0" anchor="ctr" bIns="91425" lIns="91425" spcFirstLastPara="1" rIns="91425" wrap="square" tIns="91425">
+          <a:bodyPr spcFirstLastPara="1" wrap="square" lIns="91425" tIns="91425" rIns="91425" bIns="91425" anchor="ctr" anchorCtr="0">
             <a:normAutofit/>
           </a:bodyPr>
           <a:lstStyle>
@@ -2285,7 +2289,7 @@
             </a:lvl9pPr>
           </a:lstStyle>
           <a:p>
-            <a:pPr indent="0" lvl="0" marL="0" rtl="0" algn="r">
+            <a:pPr marL="0" lvl="0" indent="0" algn="r" rtl="0">
               <a:spcBef>
                 <a:spcPts val="0"/>
               </a:spcBef>
@@ -2295,10 +2299,9 @@
               <a:buNone/>
             </a:pPr>
             <a:fld id="{00000000-1234-1234-1234-123412341234}" type="slidenum">
-              <a:rPr lang="ru"/>
-              <a:t>‹#›</a:t>
+              <a:rPr lang="en-US"/>
             </a:fld>
-            <a:endParaRPr/>
+            <a:endParaRPr lang="en-US"/>
           </a:p>
         </p:txBody>
       </p:sp>
@@ -2311,7 +2314,7 @@
 </file>
 
 <file path=ppt/slideLayouts/slideLayout10.xml><?xml version="1.0" encoding="utf-8"?>
-<p:sldLayout xmlns:a="http://schemas.openxmlformats.org/drawingml/2006/main" xmlns:r="http://schemas.openxmlformats.org/officeDocument/2006/relationships" xmlns:mc="http://schemas.openxmlformats.org/markup-compatibility/2006" xmlns:mv="urn:schemas-microsoft-com:mac:vml" xmlns:p="http://schemas.openxmlformats.org/presentationml/2006/main" xmlns:c="http://schemas.openxmlformats.org/drawingml/2006/chart" xmlns:dgm="http://schemas.openxmlformats.org/drawingml/2006/diagram" xmlns:o="urn:schemas-microsoft-com:office:office" xmlns:v="urn:schemas-microsoft-com:vml" xmlns:pvml="urn:schemas-microsoft-com:office:powerpoint" xmlns:com="http://schemas.openxmlformats.org/drawingml/2006/compatibility" xmlns:p14="http://schemas.microsoft.com/office/powerpoint/2010/main" xmlns:p15="http://schemas.microsoft.com/office/powerpoint/2012/main" xmlns:ahyp="http://schemas.microsoft.com/office/drawing/2018/hyperlinkcolor" matchingName="Big number">
+<p:sldLayout xmlns:a="http://schemas.openxmlformats.org/drawingml/2006/main" xmlns:r="http://schemas.openxmlformats.org/officeDocument/2006/relationships" xmlns:p="http://schemas.openxmlformats.org/presentationml/2006/main" matchingName="Big number">
   <p:cSld name="BIG_NUMBER">
     <p:spTree>
       <p:nvGrpSpPr>
@@ -2332,7 +2335,7 @@
           <p:cNvPr id="50" name="Google Shape;50;p11"/>
           <p:cNvSpPr txBox="1"/>
           <p:nvPr>
-            <p:ph hasCustomPrompt="1" type="title"/>
+            <p:ph type="title" hasCustomPrompt="1"/>
           </p:nvPr>
         </p:nvSpPr>
         <p:spPr>
@@ -2345,7 +2348,7 @@
           </a:prstGeom>
         </p:spPr>
         <p:txBody>
-          <a:bodyPr anchorCtr="0" anchor="b" bIns="91425" lIns="91425" spcFirstLastPara="1" rIns="91425" wrap="square" tIns="91425">
+          <a:bodyPr spcFirstLastPara="1" wrap="square" lIns="91425" tIns="91425" rIns="91425" bIns="91425" anchor="b" anchorCtr="0">
             <a:normAutofit/>
           </a:bodyPr>
           <a:lstStyle>
@@ -2358,7 +2361,7 @@
               </a:spcAft>
               <a:buSzPts val="14000"/>
               <a:buNone/>
-              <a:defRPr b="1" sz="14000"/>
+              <a:defRPr sz="14000" b="1"/>
             </a:lvl1pPr>
             <a:lvl2pPr lvl="1" algn="ctr">
               <a:spcBef>
@@ -2369,7 +2372,7 @@
               </a:spcAft>
               <a:buSzPts val="14000"/>
               <a:buNone/>
-              <a:defRPr b="1" sz="14000"/>
+              <a:defRPr sz="14000" b="1"/>
             </a:lvl2pPr>
             <a:lvl3pPr lvl="2" algn="ctr">
               <a:spcBef>
@@ -2380,7 +2383,7 @@
               </a:spcAft>
               <a:buSzPts val="14000"/>
               <a:buNone/>
-              <a:defRPr b="1" sz="14000"/>
+              <a:defRPr sz="14000" b="1"/>
             </a:lvl3pPr>
             <a:lvl4pPr lvl="3" algn="ctr">
               <a:spcBef>
@@ -2391,7 +2394,7 @@
               </a:spcAft>
               <a:buSzPts val="14000"/>
               <a:buNone/>
-              <a:defRPr b="1" sz="14000"/>
+              <a:defRPr sz="14000" b="1"/>
             </a:lvl4pPr>
             <a:lvl5pPr lvl="4" algn="ctr">
               <a:spcBef>
@@ -2402,7 +2405,7 @@
               </a:spcAft>
               <a:buSzPts val="14000"/>
               <a:buNone/>
-              <a:defRPr b="1" sz="14000"/>
+              <a:defRPr sz="14000" b="1"/>
             </a:lvl5pPr>
             <a:lvl6pPr lvl="5" algn="ctr">
               <a:spcBef>
@@ -2413,7 +2416,7 @@
               </a:spcAft>
               <a:buSzPts val="14000"/>
               <a:buNone/>
-              <a:defRPr b="1" sz="14000"/>
+              <a:defRPr sz="14000" b="1"/>
             </a:lvl6pPr>
             <a:lvl7pPr lvl="6" algn="ctr">
               <a:spcBef>
@@ -2424,7 +2427,7 @@
               </a:spcAft>
               <a:buSzPts val="14000"/>
               <a:buNone/>
-              <a:defRPr b="1" sz="14000"/>
+              <a:defRPr sz="14000" b="1"/>
             </a:lvl7pPr>
             <a:lvl8pPr lvl="7" algn="ctr">
               <a:spcBef>
@@ -2435,7 +2438,7 @@
               </a:spcAft>
               <a:buSzPts val="14000"/>
               <a:buNone/>
-              <a:defRPr b="1" sz="14000"/>
+              <a:defRPr sz="14000" b="1"/>
             </a:lvl8pPr>
             <a:lvl9pPr lvl="8" algn="ctr">
               <a:spcBef>
@@ -2446,7 +2449,7 @@
               </a:spcAft>
               <a:buSzPts val="14000"/>
               <a:buNone/>
-              <a:defRPr b="1" sz="14000"/>
+              <a:defRPr sz="14000" b="1"/>
             </a:lvl9pPr>
           </a:lstStyle>
           <a:p>
@@ -2461,7 +2464,7 @@
           <p:cNvPr id="51" name="Google Shape;51;p11"/>
           <p:cNvSpPr txBox="1"/>
           <p:nvPr>
-            <p:ph idx="1" type="body"/>
+            <p:ph type="body" idx="1"/>
           </p:nvPr>
         </p:nvSpPr>
         <p:spPr>
@@ -2474,11 +2477,11 @@
           </a:prstGeom>
         </p:spPr>
         <p:txBody>
-          <a:bodyPr anchorCtr="0" anchor="t" bIns="91425" lIns="91425" spcFirstLastPara="1" rIns="91425" wrap="square" tIns="91425">
+          <a:bodyPr spcFirstLastPara="1" wrap="square" lIns="91425" tIns="91425" rIns="91425" bIns="91425" anchor="t" anchorCtr="0">
             <a:normAutofit/>
           </a:bodyPr>
           <a:lstStyle>
-            <a:lvl1pPr indent="-342900" lvl="0" marL="457200" algn="ctr">
+            <a:lvl1pPr marL="457200" lvl="0" indent="-342900" algn="ctr">
               <a:spcBef>
                 <a:spcPts val="0"/>
               </a:spcBef>
@@ -2489,7 +2492,7 @@
               <a:buChar char="●"/>
               <a:defRPr/>
             </a:lvl1pPr>
-            <a:lvl2pPr indent="-317500" lvl="1" marL="914400" algn="ctr">
+            <a:lvl2pPr marL="914400" lvl="1" indent="-317500" algn="ctr">
               <a:spcBef>
                 <a:spcPts val="0"/>
               </a:spcBef>
@@ -2500,7 +2503,7 @@
               <a:buChar char="○"/>
               <a:defRPr/>
             </a:lvl2pPr>
-            <a:lvl3pPr indent="-317500" lvl="2" marL="1371600" algn="ctr">
+            <a:lvl3pPr marL="1371600" lvl="2" indent="-317500" algn="ctr">
               <a:spcBef>
                 <a:spcPts val="0"/>
               </a:spcBef>
@@ -2511,7 +2514,7 @@
               <a:buChar char="■"/>
               <a:defRPr/>
             </a:lvl3pPr>
-            <a:lvl4pPr indent="-317500" lvl="3" marL="1828800" algn="ctr">
+            <a:lvl4pPr marL="1828800" lvl="3" indent="-317500" algn="ctr">
               <a:spcBef>
                 <a:spcPts val="0"/>
               </a:spcBef>
@@ -2522,7 +2525,7 @@
               <a:buChar char="●"/>
               <a:defRPr/>
             </a:lvl4pPr>
-            <a:lvl5pPr indent="-317500" lvl="4" marL="2286000" algn="ctr">
+            <a:lvl5pPr marL="2286000" lvl="4" indent="-317500" algn="ctr">
               <a:spcBef>
                 <a:spcPts val="0"/>
               </a:spcBef>
@@ -2533,7 +2536,7 @@
               <a:buChar char="○"/>
               <a:defRPr/>
             </a:lvl5pPr>
-            <a:lvl6pPr indent="-317500" lvl="5" marL="2743200" algn="ctr">
+            <a:lvl6pPr marL="2743200" lvl="5" indent="-317500" algn="ctr">
               <a:spcBef>
                 <a:spcPts val="0"/>
               </a:spcBef>
@@ -2544,7 +2547,7 @@
               <a:buChar char="■"/>
               <a:defRPr/>
             </a:lvl6pPr>
-            <a:lvl7pPr indent="-317500" lvl="6" marL="3200400" algn="ctr">
+            <a:lvl7pPr marL="3200400" lvl="6" indent="-317500" algn="ctr">
               <a:spcBef>
                 <a:spcPts val="0"/>
               </a:spcBef>
@@ -2555,7 +2558,7 @@
               <a:buChar char="●"/>
               <a:defRPr/>
             </a:lvl7pPr>
-            <a:lvl8pPr indent="-317500" lvl="7" marL="3657600" algn="ctr">
+            <a:lvl8pPr marL="3657600" lvl="7" indent="-317500" algn="ctr">
               <a:spcBef>
                 <a:spcPts val="0"/>
               </a:spcBef>
@@ -2566,7 +2569,7 @@
               <a:buChar char="○"/>
               <a:defRPr/>
             </a:lvl8pPr>
-            <a:lvl9pPr indent="-317500" lvl="8" marL="4114800" algn="ctr">
+            <a:lvl9pPr marL="4114800" lvl="8" indent="-317500" algn="ctr">
               <a:spcBef>
                 <a:spcPts val="0"/>
               </a:spcBef>
@@ -2586,7 +2589,7 @@
           <p:cNvPr id="52" name="Google Shape;52;p11"/>
           <p:cNvSpPr txBox="1"/>
           <p:nvPr>
-            <p:ph idx="12" type="sldNum"/>
+            <p:ph type="sldNum" idx="12"/>
           </p:nvPr>
         </p:nvSpPr>
         <p:spPr>
@@ -2599,7 +2602,7 @@
           </a:prstGeom>
         </p:spPr>
         <p:txBody>
-          <a:bodyPr anchorCtr="0" anchor="ctr" bIns="91425" lIns="91425" spcFirstLastPara="1" rIns="91425" wrap="square" tIns="91425">
+          <a:bodyPr spcFirstLastPara="1" wrap="square" lIns="91425" tIns="91425" rIns="91425" bIns="91425" anchor="ctr" anchorCtr="0">
             <a:normAutofit/>
           </a:bodyPr>
           <a:lstStyle>
@@ -2641,7 +2644,7 @@
             </a:lvl9pPr>
           </a:lstStyle>
           <a:p>
-            <a:pPr indent="0" lvl="0" marL="0" rtl="0" algn="r">
+            <a:pPr marL="0" lvl="0" indent="0" algn="r" rtl="0">
               <a:spcBef>
                 <a:spcPts val="0"/>
               </a:spcBef>
@@ -2651,10 +2654,9 @@
               <a:buNone/>
             </a:pPr>
             <a:fld id="{00000000-1234-1234-1234-123412341234}" type="slidenum">
-              <a:rPr lang="ru"/>
-              <a:t>‹#›</a:t>
+              <a:rPr lang="en-US"/>
             </a:fld>
-            <a:endParaRPr/>
+            <a:endParaRPr lang="en-US"/>
           </a:p>
         </p:txBody>
       </p:sp>
@@ -2667,7 +2669,7 @@
 </file>
 
 <file path=ppt/slideLayouts/slideLayout11.xml><?xml version="1.0" encoding="utf-8"?>
-<p:sldLayout xmlns:a="http://schemas.openxmlformats.org/drawingml/2006/main" xmlns:r="http://schemas.openxmlformats.org/officeDocument/2006/relationships" xmlns:mc="http://schemas.openxmlformats.org/markup-compatibility/2006" xmlns:mv="urn:schemas-microsoft-com:mac:vml" xmlns:p="http://schemas.openxmlformats.org/presentationml/2006/main" xmlns:c="http://schemas.openxmlformats.org/drawingml/2006/chart" xmlns:dgm="http://schemas.openxmlformats.org/drawingml/2006/diagram" xmlns:o="urn:schemas-microsoft-com:office:office" xmlns:v="urn:schemas-microsoft-com:vml" xmlns:pvml="urn:schemas-microsoft-com:office:powerpoint" xmlns:com="http://schemas.openxmlformats.org/drawingml/2006/compatibility" xmlns:p14="http://schemas.microsoft.com/office/powerpoint/2010/main" xmlns:p15="http://schemas.microsoft.com/office/powerpoint/2012/main" xmlns:ahyp="http://schemas.microsoft.com/office/drawing/2018/hyperlinkcolor" matchingName="Blank" type="blank">
+<p:sldLayout xmlns:a="http://schemas.openxmlformats.org/drawingml/2006/main" xmlns:r="http://schemas.openxmlformats.org/officeDocument/2006/relationships" xmlns:p="http://schemas.openxmlformats.org/presentationml/2006/main" type="blank" matchingName="Blank">
   <p:cSld name="BLANK">
     <p:spTree>
       <p:nvGrpSpPr>
@@ -2688,7 +2690,7 @@
           <p:cNvPr id="54" name="Google Shape;54;p12"/>
           <p:cNvSpPr txBox="1"/>
           <p:nvPr>
-            <p:ph idx="12" type="sldNum"/>
+            <p:ph type="sldNum" idx="12"/>
           </p:nvPr>
         </p:nvSpPr>
         <p:spPr>
@@ -2701,7 +2703,7 @@
           </a:prstGeom>
         </p:spPr>
         <p:txBody>
-          <a:bodyPr anchorCtr="0" anchor="ctr" bIns="91425" lIns="91425" spcFirstLastPara="1" rIns="91425" wrap="square" tIns="91425">
+          <a:bodyPr spcFirstLastPara="1" wrap="square" lIns="91425" tIns="91425" rIns="91425" bIns="91425" anchor="ctr" anchorCtr="0">
             <a:normAutofit/>
           </a:bodyPr>
           <a:lstStyle>
@@ -2743,7 +2745,7 @@
             </a:lvl9pPr>
           </a:lstStyle>
           <a:p>
-            <a:pPr indent="0" lvl="0" marL="0" rtl="0" algn="r">
+            <a:pPr marL="0" lvl="0" indent="0" algn="r" rtl="0">
               <a:spcBef>
                 <a:spcPts val="0"/>
               </a:spcBef>
@@ -2753,10 +2755,9 @@
               <a:buNone/>
             </a:pPr>
             <a:fld id="{00000000-1234-1234-1234-123412341234}" type="slidenum">
-              <a:rPr lang="ru"/>
-              <a:t>‹#›</a:t>
+              <a:rPr lang="en-US"/>
             </a:fld>
-            <a:endParaRPr/>
+            <a:endParaRPr lang="en-US"/>
           </a:p>
         </p:txBody>
       </p:sp>
@@ -2769,13 +2770,14 @@
 </file>
 
 <file path=ppt/slideLayouts/slideLayout2.xml><?xml version="1.0" encoding="utf-8"?>
-<p:sldLayout xmlns:a="http://schemas.openxmlformats.org/drawingml/2006/main" xmlns:r="http://schemas.openxmlformats.org/officeDocument/2006/relationships" xmlns:mc="http://schemas.openxmlformats.org/markup-compatibility/2006" xmlns:mv="urn:schemas-microsoft-com:mac:vml" xmlns:p="http://schemas.openxmlformats.org/presentationml/2006/main" xmlns:c="http://schemas.openxmlformats.org/drawingml/2006/chart" xmlns:dgm="http://schemas.openxmlformats.org/drawingml/2006/diagram" xmlns:o="urn:schemas-microsoft-com:office:office" xmlns:v="urn:schemas-microsoft-com:vml" xmlns:pvml="urn:schemas-microsoft-com:office:powerpoint" xmlns:com="http://schemas.openxmlformats.org/drawingml/2006/compatibility" xmlns:p14="http://schemas.microsoft.com/office/powerpoint/2010/main" xmlns:p15="http://schemas.microsoft.com/office/powerpoint/2012/main" xmlns:ahyp="http://schemas.microsoft.com/office/drawing/2018/hyperlinkcolor" matchingName="Section header" type="secHead">
+<p:sldLayout xmlns:a="http://schemas.openxmlformats.org/drawingml/2006/main" xmlns:r="http://schemas.openxmlformats.org/officeDocument/2006/relationships" xmlns:p="http://schemas.openxmlformats.org/presentationml/2006/main" type="secHead" matchingName="Section header">
   <p:cSld name="SECTION_HEADER">
     <p:bg>
       <p:bgPr>
         <a:solidFill>
           <a:schemeClr val="dk1"/>
         </a:solidFill>
+        <a:effectLst/>
       </p:bgPr>
     </p:bg>
     <p:spTree>
@@ -2807,14 +2809,14 @@
             <a:avLst/>
           </a:prstGeom>
           <a:noFill/>
-          <a:ln cap="flat" cmpd="sng" w="28575">
+          <a:ln w="28575" cap="flat" cmpd="sng">
             <a:solidFill>
               <a:schemeClr val="lt2"/>
             </a:solidFill>
             <a:prstDash val="solid"/>
             <a:round/>
-            <a:headEnd len="sm" w="sm" type="none"/>
-            <a:tailEnd len="sm" w="sm" type="none"/>
+            <a:headEnd type="none" w="sm" len="sm"/>
+            <a:tailEnd type="none" w="sm" len="sm"/>
           </a:ln>
         </p:spPr>
       </p:cxnSp>
@@ -2836,7 +2838,7 @@
           </a:prstGeom>
         </p:spPr>
         <p:txBody>
-          <a:bodyPr anchorCtr="0" anchor="b" bIns="91425" lIns="91425" spcFirstLastPara="1" rIns="91425" wrap="square" tIns="91425">
+          <a:bodyPr spcFirstLastPara="1" wrap="square" lIns="91425" tIns="91425" rIns="91425" bIns="91425" anchor="b" anchorCtr="0">
             <a:normAutofit/>
           </a:bodyPr>
           <a:lstStyle>
@@ -3011,7 +3013,7 @@
           <p:cNvPr id="18" name="Google Shape;18;p3"/>
           <p:cNvSpPr txBox="1"/>
           <p:nvPr>
-            <p:ph idx="12" type="sldNum"/>
+            <p:ph type="sldNum" idx="12"/>
           </p:nvPr>
         </p:nvSpPr>
         <p:spPr>
@@ -3024,7 +3026,7 @@
           </a:prstGeom>
         </p:spPr>
         <p:txBody>
-          <a:bodyPr anchorCtr="0" anchor="ctr" bIns="91425" lIns="91425" spcFirstLastPara="1" rIns="91425" wrap="square" tIns="91425">
+          <a:bodyPr spcFirstLastPara="1" wrap="square" lIns="91425" tIns="91425" rIns="91425" bIns="91425" anchor="ctr" anchorCtr="0">
             <a:normAutofit/>
           </a:bodyPr>
           <a:lstStyle>
@@ -3102,7 +3104,7 @@
             </a:lvl9pPr>
           </a:lstStyle>
           <a:p>
-            <a:pPr indent="0" lvl="0" marL="0" rtl="0" algn="r">
+            <a:pPr marL="0" lvl="0" indent="0" algn="r" rtl="0">
               <a:spcBef>
                 <a:spcPts val="0"/>
               </a:spcBef>
@@ -3112,10 +3114,9 @@
               <a:buNone/>
             </a:pPr>
             <a:fld id="{00000000-1234-1234-1234-123412341234}" type="slidenum">
-              <a:rPr lang="ru"/>
-              <a:t>‹#›</a:t>
+              <a:rPr lang="en-US"/>
             </a:fld>
-            <a:endParaRPr/>
+            <a:endParaRPr lang="en-US"/>
           </a:p>
         </p:txBody>
       </p:sp>
@@ -3128,7 +3129,7 @@
 </file>
 
 <file path=ppt/slideLayouts/slideLayout3.xml><?xml version="1.0" encoding="utf-8"?>
-<p:sldLayout xmlns:a="http://schemas.openxmlformats.org/drawingml/2006/main" xmlns:r="http://schemas.openxmlformats.org/officeDocument/2006/relationships" xmlns:mc="http://schemas.openxmlformats.org/markup-compatibility/2006" xmlns:mv="urn:schemas-microsoft-com:mac:vml" xmlns:p="http://schemas.openxmlformats.org/presentationml/2006/main" xmlns:c="http://schemas.openxmlformats.org/drawingml/2006/chart" xmlns:dgm="http://schemas.openxmlformats.org/drawingml/2006/diagram" xmlns:o="urn:schemas-microsoft-com:office:office" xmlns:v="urn:schemas-microsoft-com:vml" xmlns:pvml="urn:schemas-microsoft-com:office:powerpoint" xmlns:com="http://schemas.openxmlformats.org/drawingml/2006/compatibility" xmlns:p14="http://schemas.microsoft.com/office/powerpoint/2010/main" xmlns:p15="http://schemas.microsoft.com/office/powerpoint/2012/main" xmlns:ahyp="http://schemas.microsoft.com/office/drawing/2018/hyperlinkcolor" matchingName="Title and body" type="tx">
+<p:sldLayout xmlns:a="http://schemas.openxmlformats.org/drawingml/2006/main" xmlns:r="http://schemas.openxmlformats.org/officeDocument/2006/relationships" xmlns:p="http://schemas.openxmlformats.org/presentationml/2006/main" type="tx" matchingName="Title and body">
   <p:cSld name="TITLE_AND_BODY">
     <p:spTree>
       <p:nvGrpSpPr>
@@ -3166,12 +3167,12 @@
           </a:ln>
         </p:spPr>
         <p:txBody>
-          <a:bodyPr anchorCtr="0" anchor="ctr" bIns="91425" lIns="91425" spcFirstLastPara="1" rIns="91425" wrap="square" tIns="91425">
+          <a:bodyPr spcFirstLastPara="1" wrap="square" lIns="91425" tIns="91425" rIns="91425" bIns="91425" anchor="ctr" anchorCtr="0">
             <a:noAutofit/>
           </a:bodyPr>
           <a:lstStyle/>
           <a:p>
-            <a:pPr indent="0" lvl="0" marL="0" rtl="0" algn="l">
+            <a:pPr marL="0" lvl="0" indent="0" algn="l" rtl="0">
               <a:spcBef>
                 <a:spcPts val="0"/>
               </a:spcBef>
@@ -3180,10 +3181,6 @@
               </a:spcAft>
               <a:buNone/>
             </a:pPr>
-            <a:r>
-              <a:t/>
-            </a:r>
-            <a:endParaRPr/>
           </a:p>
         </p:txBody>
       </p:sp>
@@ -3205,7 +3202,7 @@
           </a:prstGeom>
         </p:spPr>
         <p:txBody>
-          <a:bodyPr anchorCtr="0" anchor="t" bIns="91425" lIns="91425" spcFirstLastPara="1" rIns="91425" wrap="square" tIns="91425">
+          <a:bodyPr spcFirstLastPara="1" wrap="square" lIns="91425" tIns="91425" rIns="91425" bIns="91425" anchor="t" anchorCtr="0">
             <a:normAutofit/>
           </a:bodyPr>
           <a:lstStyle>
@@ -3317,7 +3314,7 @@
           <p:cNvPr id="22" name="Google Shape;22;p4"/>
           <p:cNvSpPr txBox="1"/>
           <p:nvPr>
-            <p:ph idx="1" type="body"/>
+            <p:ph type="body" idx="1"/>
           </p:nvPr>
         </p:nvSpPr>
         <p:spPr>
@@ -3330,11 +3327,11 @@
           </a:prstGeom>
         </p:spPr>
         <p:txBody>
-          <a:bodyPr anchorCtr="0" anchor="t" bIns="91425" lIns="91425" spcFirstLastPara="1" rIns="91425" wrap="square" tIns="91425">
+          <a:bodyPr spcFirstLastPara="1" wrap="square" lIns="91425" tIns="91425" rIns="91425" bIns="91425" anchor="t" anchorCtr="0">
             <a:normAutofit/>
           </a:bodyPr>
           <a:lstStyle>
-            <a:lvl1pPr indent="-342900" lvl="0" marL="457200">
+            <a:lvl1pPr marL="457200" lvl="0" indent="-342900">
               <a:spcBef>
                 <a:spcPts val="0"/>
               </a:spcBef>
@@ -3345,7 +3342,7 @@
               <a:buChar char="●"/>
               <a:defRPr/>
             </a:lvl1pPr>
-            <a:lvl2pPr indent="-317500" lvl="1" marL="914400">
+            <a:lvl2pPr marL="914400" lvl="1" indent="-317500">
               <a:spcBef>
                 <a:spcPts val="0"/>
               </a:spcBef>
@@ -3356,7 +3353,7 @@
               <a:buChar char="○"/>
               <a:defRPr/>
             </a:lvl2pPr>
-            <a:lvl3pPr indent="-317500" lvl="2" marL="1371600">
+            <a:lvl3pPr marL="1371600" lvl="2" indent="-317500">
               <a:spcBef>
                 <a:spcPts val="0"/>
               </a:spcBef>
@@ -3367,7 +3364,7 @@
               <a:buChar char="■"/>
               <a:defRPr/>
             </a:lvl3pPr>
-            <a:lvl4pPr indent="-317500" lvl="3" marL="1828800">
+            <a:lvl4pPr marL="1828800" lvl="3" indent="-317500">
               <a:spcBef>
                 <a:spcPts val="0"/>
               </a:spcBef>
@@ -3378,7 +3375,7 @@
               <a:buChar char="●"/>
               <a:defRPr/>
             </a:lvl4pPr>
-            <a:lvl5pPr indent="-317500" lvl="4" marL="2286000">
+            <a:lvl5pPr marL="2286000" lvl="4" indent="-317500">
               <a:spcBef>
                 <a:spcPts val="0"/>
               </a:spcBef>
@@ -3389,7 +3386,7 @@
               <a:buChar char="○"/>
               <a:defRPr/>
             </a:lvl5pPr>
-            <a:lvl6pPr indent="-317500" lvl="5" marL="2743200">
+            <a:lvl6pPr marL="2743200" lvl="5" indent="-317500">
               <a:spcBef>
                 <a:spcPts val="0"/>
               </a:spcBef>
@@ -3400,7 +3397,7 @@
               <a:buChar char="■"/>
               <a:defRPr/>
             </a:lvl6pPr>
-            <a:lvl7pPr indent="-317500" lvl="6" marL="3200400">
+            <a:lvl7pPr marL="3200400" lvl="6" indent="-317500">
               <a:spcBef>
                 <a:spcPts val="0"/>
               </a:spcBef>
@@ -3411,7 +3408,7 @@
               <a:buChar char="●"/>
               <a:defRPr/>
             </a:lvl7pPr>
-            <a:lvl8pPr indent="-317500" lvl="7" marL="3657600">
+            <a:lvl8pPr marL="3657600" lvl="7" indent="-317500">
               <a:spcBef>
                 <a:spcPts val="0"/>
               </a:spcBef>
@@ -3422,7 +3419,7 @@
               <a:buChar char="○"/>
               <a:defRPr/>
             </a:lvl8pPr>
-            <a:lvl9pPr indent="-317500" lvl="8" marL="4114800">
+            <a:lvl9pPr marL="4114800" lvl="8" indent="-317500">
               <a:spcBef>
                 <a:spcPts val="0"/>
               </a:spcBef>
@@ -3442,7 +3439,7 @@
           <p:cNvPr id="23" name="Google Shape;23;p4"/>
           <p:cNvSpPr txBox="1"/>
           <p:nvPr>
-            <p:ph idx="12" type="sldNum"/>
+            <p:ph type="sldNum" idx="12"/>
           </p:nvPr>
         </p:nvSpPr>
         <p:spPr>
@@ -3455,7 +3452,7 @@
           </a:prstGeom>
         </p:spPr>
         <p:txBody>
-          <a:bodyPr anchorCtr="0" anchor="ctr" bIns="91425" lIns="91425" spcFirstLastPara="1" rIns="91425" wrap="square" tIns="91425">
+          <a:bodyPr spcFirstLastPara="1" wrap="square" lIns="91425" tIns="91425" rIns="91425" bIns="91425" anchor="ctr" anchorCtr="0">
             <a:normAutofit/>
           </a:bodyPr>
           <a:lstStyle>
@@ -3497,7 +3494,7 @@
             </a:lvl9pPr>
           </a:lstStyle>
           <a:p>
-            <a:pPr indent="0" lvl="0" marL="0" rtl="0" algn="r">
+            <a:pPr marL="0" lvl="0" indent="0" algn="r" rtl="0">
               <a:spcBef>
                 <a:spcPts val="0"/>
               </a:spcBef>
@@ -3507,10 +3504,9 @@
               <a:buNone/>
             </a:pPr>
             <a:fld id="{00000000-1234-1234-1234-123412341234}" type="slidenum">
-              <a:rPr lang="ru"/>
-              <a:t>‹#›</a:t>
+              <a:rPr lang="en-US"/>
             </a:fld>
-            <a:endParaRPr/>
+            <a:endParaRPr lang="en-US"/>
           </a:p>
         </p:txBody>
       </p:sp>
@@ -3523,7 +3519,7 @@
 </file>
 
 <file path=ppt/slideLayouts/slideLayout4.xml><?xml version="1.0" encoding="utf-8"?>
-<p:sldLayout xmlns:a="http://schemas.openxmlformats.org/drawingml/2006/main" xmlns:r="http://schemas.openxmlformats.org/officeDocument/2006/relationships" xmlns:mc="http://schemas.openxmlformats.org/markup-compatibility/2006" xmlns:mv="urn:schemas-microsoft-com:mac:vml" xmlns:p="http://schemas.openxmlformats.org/presentationml/2006/main" xmlns:c="http://schemas.openxmlformats.org/drawingml/2006/chart" xmlns:dgm="http://schemas.openxmlformats.org/drawingml/2006/diagram" xmlns:o="urn:schemas-microsoft-com:office:office" xmlns:v="urn:schemas-microsoft-com:vml" xmlns:pvml="urn:schemas-microsoft-com:office:powerpoint" xmlns:com="http://schemas.openxmlformats.org/drawingml/2006/compatibility" xmlns:p14="http://schemas.microsoft.com/office/powerpoint/2010/main" xmlns:p15="http://schemas.microsoft.com/office/powerpoint/2012/main" xmlns:ahyp="http://schemas.microsoft.com/office/drawing/2018/hyperlinkcolor" matchingName="Title and two columns" type="twoColTx">
+<p:sldLayout xmlns:a="http://schemas.openxmlformats.org/drawingml/2006/main" xmlns:r="http://schemas.openxmlformats.org/officeDocument/2006/relationships" xmlns:p="http://schemas.openxmlformats.org/presentationml/2006/main" type="twoColTx" matchingName="Title and two columns">
   <p:cSld name="TITLE_AND_TWO_COLUMNS">
     <p:spTree>
       <p:nvGrpSpPr>
@@ -3557,7 +3553,7 @@
           </a:prstGeom>
         </p:spPr>
         <p:txBody>
-          <a:bodyPr anchorCtr="0" anchor="t" bIns="91425" lIns="91425" spcFirstLastPara="1" rIns="91425" wrap="square" tIns="91425">
+          <a:bodyPr spcFirstLastPara="1" wrap="square" lIns="91425" tIns="91425" rIns="91425" bIns="91425" anchor="t" anchorCtr="0">
             <a:normAutofit/>
           </a:bodyPr>
           <a:lstStyle>
@@ -3669,7 +3665,7 @@
           <p:cNvPr id="26" name="Google Shape;26;p5"/>
           <p:cNvSpPr txBox="1"/>
           <p:nvPr>
-            <p:ph idx="1" type="body"/>
+            <p:ph type="body" idx="1"/>
           </p:nvPr>
         </p:nvSpPr>
         <p:spPr>
@@ -3682,11 +3678,11 @@
           </a:prstGeom>
         </p:spPr>
         <p:txBody>
-          <a:bodyPr anchorCtr="0" anchor="t" bIns="91425" lIns="91425" spcFirstLastPara="1" rIns="91425" wrap="square" tIns="91425">
+          <a:bodyPr spcFirstLastPara="1" wrap="square" lIns="91425" tIns="91425" rIns="91425" bIns="91425" anchor="t" anchorCtr="0">
             <a:normAutofit/>
           </a:bodyPr>
           <a:lstStyle>
-            <a:lvl1pPr indent="-317500" lvl="0" marL="457200">
+            <a:lvl1pPr marL="457200" lvl="0" indent="-317500">
               <a:spcBef>
                 <a:spcPts val="0"/>
               </a:spcBef>
@@ -3697,7 +3693,7 @@
               <a:buChar char="●"/>
               <a:defRPr sz="1400"/>
             </a:lvl1pPr>
-            <a:lvl2pPr indent="-304800" lvl="1" marL="914400">
+            <a:lvl2pPr marL="914400" lvl="1" indent="-304800">
               <a:spcBef>
                 <a:spcPts val="0"/>
               </a:spcBef>
@@ -3708,7 +3704,7 @@
               <a:buChar char="○"/>
               <a:defRPr sz="1200"/>
             </a:lvl2pPr>
-            <a:lvl3pPr indent="-304800" lvl="2" marL="1371600">
+            <a:lvl3pPr marL="1371600" lvl="2" indent="-304800">
               <a:spcBef>
                 <a:spcPts val="0"/>
               </a:spcBef>
@@ -3719,7 +3715,7 @@
               <a:buChar char="■"/>
               <a:defRPr sz="1200"/>
             </a:lvl3pPr>
-            <a:lvl4pPr indent="-304800" lvl="3" marL="1828800">
+            <a:lvl4pPr marL="1828800" lvl="3" indent="-304800">
               <a:spcBef>
                 <a:spcPts val="0"/>
               </a:spcBef>
@@ -3730,7 +3726,7 @@
               <a:buChar char="●"/>
               <a:defRPr sz="1200"/>
             </a:lvl4pPr>
-            <a:lvl5pPr indent="-304800" lvl="4" marL="2286000">
+            <a:lvl5pPr marL="2286000" lvl="4" indent="-304800">
               <a:spcBef>
                 <a:spcPts val="0"/>
               </a:spcBef>
@@ -3741,7 +3737,7 @@
               <a:buChar char="○"/>
               <a:defRPr sz="1200"/>
             </a:lvl5pPr>
-            <a:lvl6pPr indent="-304800" lvl="5" marL="2743200">
+            <a:lvl6pPr marL="2743200" lvl="5" indent="-304800">
               <a:spcBef>
                 <a:spcPts val="0"/>
               </a:spcBef>
@@ -3752,7 +3748,7 @@
               <a:buChar char="■"/>
               <a:defRPr sz="1200"/>
             </a:lvl6pPr>
-            <a:lvl7pPr indent="-304800" lvl="6" marL="3200400">
+            <a:lvl7pPr marL="3200400" lvl="6" indent="-304800">
               <a:spcBef>
                 <a:spcPts val="0"/>
               </a:spcBef>
@@ -3763,7 +3759,7 @@
               <a:buChar char="●"/>
               <a:defRPr sz="1200"/>
             </a:lvl7pPr>
-            <a:lvl8pPr indent="-304800" lvl="7" marL="3657600">
+            <a:lvl8pPr marL="3657600" lvl="7" indent="-304800">
               <a:spcBef>
                 <a:spcPts val="0"/>
               </a:spcBef>
@@ -3774,7 +3770,7 @@
               <a:buChar char="○"/>
               <a:defRPr sz="1200"/>
             </a:lvl8pPr>
-            <a:lvl9pPr indent="-304800" lvl="8" marL="4114800">
+            <a:lvl9pPr marL="4114800" lvl="8" indent="-304800">
               <a:spcBef>
                 <a:spcPts val="0"/>
               </a:spcBef>
@@ -3794,7 +3790,7 @@
           <p:cNvPr id="27" name="Google Shape;27;p5"/>
           <p:cNvSpPr txBox="1"/>
           <p:nvPr>
-            <p:ph idx="2" type="body"/>
+            <p:ph type="body" idx="2"/>
           </p:nvPr>
         </p:nvSpPr>
         <p:spPr>
@@ -3807,11 +3803,11 @@
           </a:prstGeom>
         </p:spPr>
         <p:txBody>
-          <a:bodyPr anchorCtr="0" anchor="t" bIns="91425" lIns="91425" spcFirstLastPara="1" rIns="91425" wrap="square" tIns="91425">
+          <a:bodyPr spcFirstLastPara="1" wrap="square" lIns="91425" tIns="91425" rIns="91425" bIns="91425" anchor="t" anchorCtr="0">
             <a:normAutofit/>
           </a:bodyPr>
           <a:lstStyle>
-            <a:lvl1pPr indent="-317500" lvl="0" marL="457200">
+            <a:lvl1pPr marL="457200" lvl="0" indent="-317500">
               <a:spcBef>
                 <a:spcPts val="0"/>
               </a:spcBef>
@@ -3822,7 +3818,7 @@
               <a:buChar char="●"/>
               <a:defRPr sz="1400"/>
             </a:lvl1pPr>
-            <a:lvl2pPr indent="-304800" lvl="1" marL="914400">
+            <a:lvl2pPr marL="914400" lvl="1" indent="-304800">
               <a:spcBef>
                 <a:spcPts val="0"/>
               </a:spcBef>
@@ -3833,7 +3829,7 @@
               <a:buChar char="○"/>
               <a:defRPr sz="1200"/>
             </a:lvl2pPr>
-            <a:lvl3pPr indent="-304800" lvl="2" marL="1371600">
+            <a:lvl3pPr marL="1371600" lvl="2" indent="-304800">
               <a:spcBef>
                 <a:spcPts val="0"/>
               </a:spcBef>
@@ -3844,7 +3840,7 @@
               <a:buChar char="■"/>
               <a:defRPr sz="1200"/>
             </a:lvl3pPr>
-            <a:lvl4pPr indent="-304800" lvl="3" marL="1828800">
+            <a:lvl4pPr marL="1828800" lvl="3" indent="-304800">
               <a:spcBef>
                 <a:spcPts val="0"/>
               </a:spcBef>
@@ -3855,7 +3851,7 @@
               <a:buChar char="●"/>
               <a:defRPr sz="1200"/>
             </a:lvl4pPr>
-            <a:lvl5pPr indent="-304800" lvl="4" marL="2286000">
+            <a:lvl5pPr marL="2286000" lvl="4" indent="-304800">
               <a:spcBef>
                 <a:spcPts val="0"/>
               </a:spcBef>
@@ -3866,7 +3862,7 @@
               <a:buChar char="○"/>
               <a:defRPr sz="1200"/>
             </a:lvl5pPr>
-            <a:lvl6pPr indent="-304800" lvl="5" marL="2743200">
+            <a:lvl6pPr marL="2743200" lvl="5" indent="-304800">
               <a:spcBef>
                 <a:spcPts val="0"/>
               </a:spcBef>
@@ -3877,7 +3873,7 @@
               <a:buChar char="■"/>
               <a:defRPr sz="1200"/>
             </a:lvl6pPr>
-            <a:lvl7pPr indent="-304800" lvl="6" marL="3200400">
+            <a:lvl7pPr marL="3200400" lvl="6" indent="-304800">
               <a:spcBef>
                 <a:spcPts val="0"/>
               </a:spcBef>
@@ -3888,7 +3884,7 @@
               <a:buChar char="●"/>
               <a:defRPr sz="1200"/>
             </a:lvl7pPr>
-            <a:lvl8pPr indent="-304800" lvl="7" marL="3657600">
+            <a:lvl8pPr marL="3657600" lvl="7" indent="-304800">
               <a:spcBef>
                 <a:spcPts val="0"/>
               </a:spcBef>
@@ -3899,7 +3895,7 @@
               <a:buChar char="○"/>
               <a:defRPr sz="1200"/>
             </a:lvl8pPr>
-            <a:lvl9pPr indent="-304800" lvl="8" marL="4114800">
+            <a:lvl9pPr marL="4114800" lvl="8" indent="-304800">
               <a:spcBef>
                 <a:spcPts val="0"/>
               </a:spcBef>
@@ -3919,7 +3915,7 @@
           <p:cNvPr id="28" name="Google Shape;28;p5"/>
           <p:cNvSpPr txBox="1"/>
           <p:nvPr>
-            <p:ph idx="12" type="sldNum"/>
+            <p:ph type="sldNum" idx="12"/>
           </p:nvPr>
         </p:nvSpPr>
         <p:spPr>
@@ -3932,7 +3928,7 @@
           </a:prstGeom>
         </p:spPr>
         <p:txBody>
-          <a:bodyPr anchorCtr="0" anchor="ctr" bIns="91425" lIns="91425" spcFirstLastPara="1" rIns="91425" wrap="square" tIns="91425">
+          <a:bodyPr spcFirstLastPara="1" wrap="square" lIns="91425" tIns="91425" rIns="91425" bIns="91425" anchor="ctr" anchorCtr="0">
             <a:normAutofit/>
           </a:bodyPr>
           <a:lstStyle>
@@ -3974,7 +3970,7 @@
             </a:lvl9pPr>
           </a:lstStyle>
           <a:p>
-            <a:pPr indent="0" lvl="0" marL="0" rtl="0" algn="r">
+            <a:pPr marL="0" lvl="0" indent="0" algn="r" rtl="0">
               <a:spcBef>
                 <a:spcPts val="0"/>
               </a:spcBef>
@@ -3984,10 +3980,9 @@
               <a:buNone/>
             </a:pPr>
             <a:fld id="{00000000-1234-1234-1234-123412341234}" type="slidenum">
-              <a:rPr lang="ru"/>
-              <a:t>‹#›</a:t>
+              <a:rPr lang="en-US"/>
             </a:fld>
-            <a:endParaRPr/>
+            <a:endParaRPr lang="en-US"/>
           </a:p>
         </p:txBody>
       </p:sp>
@@ -4000,7 +3995,7 @@
 </file>
 
 <file path=ppt/slideLayouts/slideLayout5.xml><?xml version="1.0" encoding="utf-8"?>
-<p:sldLayout xmlns:a="http://schemas.openxmlformats.org/drawingml/2006/main" xmlns:r="http://schemas.openxmlformats.org/officeDocument/2006/relationships" xmlns:mc="http://schemas.openxmlformats.org/markup-compatibility/2006" xmlns:mv="urn:schemas-microsoft-com:mac:vml" xmlns:p="http://schemas.openxmlformats.org/presentationml/2006/main" xmlns:c="http://schemas.openxmlformats.org/drawingml/2006/chart" xmlns:dgm="http://schemas.openxmlformats.org/drawingml/2006/diagram" xmlns:o="urn:schemas-microsoft-com:office:office" xmlns:v="urn:schemas-microsoft-com:vml" xmlns:pvml="urn:schemas-microsoft-com:office:powerpoint" xmlns:com="http://schemas.openxmlformats.org/drawingml/2006/compatibility" xmlns:p14="http://schemas.microsoft.com/office/powerpoint/2010/main" xmlns:p15="http://schemas.microsoft.com/office/powerpoint/2012/main" xmlns:ahyp="http://schemas.microsoft.com/office/drawing/2018/hyperlinkcolor" matchingName="Title only" type="titleOnly">
+<p:sldLayout xmlns:a="http://schemas.openxmlformats.org/drawingml/2006/main" xmlns:r="http://schemas.openxmlformats.org/officeDocument/2006/relationships" xmlns:p="http://schemas.openxmlformats.org/presentationml/2006/main" type="titleOnly" matchingName="Title only">
   <p:cSld name="TITLE_ONLY">
     <p:spTree>
       <p:nvGrpSpPr>
@@ -4034,7 +4029,7 @@
           </a:prstGeom>
         </p:spPr>
         <p:txBody>
-          <a:bodyPr anchorCtr="0" anchor="t" bIns="91425" lIns="91425" spcFirstLastPara="1" rIns="91425" wrap="square" tIns="91425">
+          <a:bodyPr spcFirstLastPara="1" wrap="square" lIns="91425" tIns="91425" rIns="91425" bIns="91425" anchor="t" anchorCtr="0">
             <a:normAutofit/>
           </a:bodyPr>
           <a:lstStyle>
@@ -4146,7 +4141,7 @@
           <p:cNvPr id="31" name="Google Shape;31;p6"/>
           <p:cNvSpPr txBox="1"/>
           <p:nvPr>
-            <p:ph idx="12" type="sldNum"/>
+            <p:ph type="sldNum" idx="12"/>
           </p:nvPr>
         </p:nvSpPr>
         <p:spPr>
@@ -4159,7 +4154,7 @@
           </a:prstGeom>
         </p:spPr>
         <p:txBody>
-          <a:bodyPr anchorCtr="0" anchor="ctr" bIns="91425" lIns="91425" spcFirstLastPara="1" rIns="91425" wrap="square" tIns="91425">
+          <a:bodyPr spcFirstLastPara="1" wrap="square" lIns="91425" tIns="91425" rIns="91425" bIns="91425" anchor="ctr" anchorCtr="0">
             <a:normAutofit/>
           </a:bodyPr>
           <a:lstStyle>
@@ -4201,7 +4196,7 @@
             </a:lvl9pPr>
           </a:lstStyle>
           <a:p>
-            <a:pPr indent="0" lvl="0" marL="0" rtl="0" algn="r">
+            <a:pPr marL="0" lvl="0" indent="0" algn="r" rtl="0">
               <a:spcBef>
                 <a:spcPts val="0"/>
               </a:spcBef>
@@ -4211,10 +4206,9 @@
               <a:buNone/>
             </a:pPr>
             <a:fld id="{00000000-1234-1234-1234-123412341234}" type="slidenum">
-              <a:rPr lang="ru"/>
-              <a:t>‹#›</a:t>
+              <a:rPr lang="en-US"/>
             </a:fld>
-            <a:endParaRPr/>
+            <a:endParaRPr lang="en-US"/>
           </a:p>
         </p:txBody>
       </p:sp>
@@ -4227,7 +4221,7 @@
 </file>
 
 <file path=ppt/slideLayouts/slideLayout6.xml><?xml version="1.0" encoding="utf-8"?>
-<p:sldLayout xmlns:a="http://schemas.openxmlformats.org/drawingml/2006/main" xmlns:r="http://schemas.openxmlformats.org/officeDocument/2006/relationships" xmlns:mc="http://schemas.openxmlformats.org/markup-compatibility/2006" xmlns:mv="urn:schemas-microsoft-com:mac:vml" xmlns:p="http://schemas.openxmlformats.org/presentationml/2006/main" xmlns:c="http://schemas.openxmlformats.org/drawingml/2006/chart" xmlns:dgm="http://schemas.openxmlformats.org/drawingml/2006/diagram" xmlns:o="urn:schemas-microsoft-com:office:office" xmlns:v="urn:schemas-microsoft-com:vml" xmlns:pvml="urn:schemas-microsoft-com:office:powerpoint" xmlns:com="http://schemas.openxmlformats.org/drawingml/2006/compatibility" xmlns:p14="http://schemas.microsoft.com/office/powerpoint/2010/main" xmlns:p15="http://schemas.microsoft.com/office/powerpoint/2012/main" xmlns:ahyp="http://schemas.microsoft.com/office/drawing/2018/hyperlinkcolor" matchingName="One column text">
+<p:sldLayout xmlns:a="http://schemas.openxmlformats.org/drawingml/2006/main" xmlns:r="http://schemas.openxmlformats.org/officeDocument/2006/relationships" xmlns:p="http://schemas.openxmlformats.org/presentationml/2006/main" matchingName="One column text">
   <p:cSld name="ONE_COLUMN_TEXT">
     <p:spTree>
       <p:nvGrpSpPr>
@@ -4261,7 +4255,7 @@
           </a:prstGeom>
         </p:spPr>
         <p:txBody>
-          <a:bodyPr anchorCtr="0" anchor="b" bIns="91425" lIns="91425" spcFirstLastPara="1" rIns="91425" wrap="square" tIns="91425">
+          <a:bodyPr spcFirstLastPara="1" wrap="square" lIns="91425" tIns="91425" rIns="91425" bIns="91425" anchor="b" anchorCtr="0">
             <a:normAutofit/>
           </a:bodyPr>
           <a:lstStyle>
@@ -4373,7 +4367,7 @@
           <p:cNvPr id="34" name="Google Shape;34;p7"/>
           <p:cNvSpPr txBox="1"/>
           <p:nvPr>
-            <p:ph idx="1" type="body"/>
+            <p:ph type="body" idx="1"/>
           </p:nvPr>
         </p:nvSpPr>
         <p:spPr>
@@ -4386,11 +4380,11 @@
           </a:prstGeom>
         </p:spPr>
         <p:txBody>
-          <a:bodyPr anchorCtr="0" anchor="t" bIns="91425" lIns="91425" spcFirstLastPara="1" rIns="91425" wrap="square" tIns="91425">
+          <a:bodyPr spcFirstLastPara="1" wrap="square" lIns="91425" tIns="91425" rIns="91425" bIns="91425" anchor="t" anchorCtr="0">
             <a:normAutofit/>
           </a:bodyPr>
           <a:lstStyle>
-            <a:lvl1pPr indent="-304800" lvl="0" marL="457200">
+            <a:lvl1pPr marL="457200" lvl="0" indent="-304800">
               <a:spcBef>
                 <a:spcPts val="0"/>
               </a:spcBef>
@@ -4401,7 +4395,7 @@
               <a:buChar char="●"/>
               <a:defRPr sz="1200"/>
             </a:lvl1pPr>
-            <a:lvl2pPr indent="-304800" lvl="1" marL="914400">
+            <a:lvl2pPr marL="914400" lvl="1" indent="-304800">
               <a:spcBef>
                 <a:spcPts val="0"/>
               </a:spcBef>
@@ -4412,7 +4406,7 @@
               <a:buChar char="○"/>
               <a:defRPr sz="1200"/>
             </a:lvl2pPr>
-            <a:lvl3pPr indent="-304800" lvl="2" marL="1371600">
+            <a:lvl3pPr marL="1371600" lvl="2" indent="-304800">
               <a:spcBef>
                 <a:spcPts val="0"/>
               </a:spcBef>
@@ -4423,7 +4417,7 @@
               <a:buChar char="■"/>
               <a:defRPr sz="1200"/>
             </a:lvl3pPr>
-            <a:lvl4pPr indent="-304800" lvl="3" marL="1828800">
+            <a:lvl4pPr marL="1828800" lvl="3" indent="-304800">
               <a:spcBef>
                 <a:spcPts val="0"/>
               </a:spcBef>
@@ -4434,7 +4428,7 @@
               <a:buChar char="●"/>
               <a:defRPr sz="1200"/>
             </a:lvl4pPr>
-            <a:lvl5pPr indent="-304800" lvl="4" marL="2286000">
+            <a:lvl5pPr marL="2286000" lvl="4" indent="-304800">
               <a:spcBef>
                 <a:spcPts val="0"/>
               </a:spcBef>
@@ -4445,7 +4439,7 @@
               <a:buChar char="○"/>
               <a:defRPr sz="1200"/>
             </a:lvl5pPr>
-            <a:lvl6pPr indent="-304800" lvl="5" marL="2743200">
+            <a:lvl6pPr marL="2743200" lvl="5" indent="-304800">
               <a:spcBef>
                 <a:spcPts val="0"/>
               </a:spcBef>
@@ -4456,7 +4450,7 @@
               <a:buChar char="■"/>
               <a:defRPr sz="1200"/>
             </a:lvl6pPr>
-            <a:lvl7pPr indent="-304800" lvl="6" marL="3200400">
+            <a:lvl7pPr marL="3200400" lvl="6" indent="-304800">
               <a:spcBef>
                 <a:spcPts val="0"/>
               </a:spcBef>
@@ -4467,7 +4461,7 @@
               <a:buChar char="●"/>
               <a:defRPr sz="1200"/>
             </a:lvl7pPr>
-            <a:lvl8pPr indent="-304800" lvl="7" marL="3657600">
+            <a:lvl8pPr marL="3657600" lvl="7" indent="-304800">
               <a:spcBef>
                 <a:spcPts val="0"/>
               </a:spcBef>
@@ -4478,7 +4472,7 @@
               <a:buChar char="○"/>
               <a:defRPr sz="1200"/>
             </a:lvl8pPr>
-            <a:lvl9pPr indent="-304800" lvl="8" marL="4114800">
+            <a:lvl9pPr marL="4114800" lvl="8" indent="-304800">
               <a:spcBef>
                 <a:spcPts val="0"/>
               </a:spcBef>
@@ -4498,7 +4492,7 @@
           <p:cNvPr id="35" name="Google Shape;35;p7"/>
           <p:cNvSpPr txBox="1"/>
           <p:nvPr>
-            <p:ph idx="12" type="sldNum"/>
+            <p:ph type="sldNum" idx="12"/>
           </p:nvPr>
         </p:nvSpPr>
         <p:spPr>
@@ -4511,7 +4505,7 @@
           </a:prstGeom>
         </p:spPr>
         <p:txBody>
-          <a:bodyPr anchorCtr="0" anchor="ctr" bIns="91425" lIns="91425" spcFirstLastPara="1" rIns="91425" wrap="square" tIns="91425">
+          <a:bodyPr spcFirstLastPara="1" wrap="square" lIns="91425" tIns="91425" rIns="91425" bIns="91425" anchor="ctr" anchorCtr="0">
             <a:normAutofit/>
           </a:bodyPr>
           <a:lstStyle>
@@ -4553,7 +4547,7 @@
             </a:lvl9pPr>
           </a:lstStyle>
           <a:p>
-            <a:pPr indent="0" lvl="0" marL="0" rtl="0" algn="r">
+            <a:pPr marL="0" lvl="0" indent="0" algn="r" rtl="0">
               <a:spcBef>
                 <a:spcPts val="0"/>
               </a:spcBef>
@@ -4563,10 +4557,9 @@
               <a:buNone/>
             </a:pPr>
             <a:fld id="{00000000-1234-1234-1234-123412341234}" type="slidenum">
-              <a:rPr lang="ru"/>
-              <a:t>‹#›</a:t>
+              <a:rPr lang="en-US"/>
             </a:fld>
-            <a:endParaRPr/>
+            <a:endParaRPr lang="en-US"/>
           </a:p>
         </p:txBody>
       </p:sp>
@@ -4579,13 +4572,14 @@
 </file>
 
 <file path=ppt/slideLayouts/slideLayout7.xml><?xml version="1.0" encoding="utf-8"?>
-<p:sldLayout xmlns:a="http://schemas.openxmlformats.org/drawingml/2006/main" xmlns:r="http://schemas.openxmlformats.org/officeDocument/2006/relationships" xmlns:mc="http://schemas.openxmlformats.org/markup-compatibility/2006" xmlns:mv="urn:schemas-microsoft-com:mac:vml" xmlns:p="http://schemas.openxmlformats.org/presentationml/2006/main" xmlns:c="http://schemas.openxmlformats.org/drawingml/2006/chart" xmlns:dgm="http://schemas.openxmlformats.org/drawingml/2006/diagram" xmlns:o="urn:schemas-microsoft-com:office:office" xmlns:v="urn:schemas-microsoft-com:vml" xmlns:pvml="urn:schemas-microsoft-com:office:powerpoint" xmlns:com="http://schemas.openxmlformats.org/drawingml/2006/compatibility" xmlns:p14="http://schemas.microsoft.com/office/powerpoint/2010/main" xmlns:p15="http://schemas.microsoft.com/office/powerpoint/2012/main" xmlns:ahyp="http://schemas.microsoft.com/office/drawing/2018/hyperlinkcolor" matchingName="Main point">
+<p:sldLayout xmlns:a="http://schemas.openxmlformats.org/drawingml/2006/main" xmlns:r="http://schemas.openxmlformats.org/officeDocument/2006/relationships" xmlns:p="http://schemas.openxmlformats.org/presentationml/2006/main" matchingName="Main point">
   <p:cSld name="MAIN_POINT">
     <p:bg>
       <p:bgPr>
         <a:solidFill>
           <a:schemeClr val="lt2"/>
         </a:solidFill>
+        <a:effectLst/>
       </p:bgPr>
     </p:bg>
     <p:spTree>
@@ -4620,7 +4614,7 @@
           </a:prstGeom>
         </p:spPr>
         <p:txBody>
-          <a:bodyPr anchorCtr="0" anchor="ctr" bIns="91425" lIns="91425" spcFirstLastPara="1" rIns="91425" wrap="square" tIns="91425">
+          <a:bodyPr spcFirstLastPara="1" wrap="square" lIns="91425" tIns="91425" rIns="91425" bIns="91425" anchor="ctr" anchorCtr="0">
             <a:normAutofit/>
           </a:bodyPr>
           <a:lstStyle>
@@ -4795,7 +4789,7 @@
           <p:cNvPr id="38" name="Google Shape;38;p8"/>
           <p:cNvSpPr txBox="1"/>
           <p:nvPr>
-            <p:ph idx="12" type="sldNum"/>
+            <p:ph type="sldNum" idx="12"/>
           </p:nvPr>
         </p:nvSpPr>
         <p:spPr>
@@ -4808,7 +4802,7 @@
           </a:prstGeom>
         </p:spPr>
         <p:txBody>
-          <a:bodyPr anchorCtr="0" anchor="ctr" bIns="91425" lIns="91425" spcFirstLastPara="1" rIns="91425" wrap="square" tIns="91425">
+          <a:bodyPr spcFirstLastPara="1" wrap="square" lIns="91425" tIns="91425" rIns="91425" bIns="91425" anchor="ctr" anchorCtr="0">
             <a:normAutofit/>
           </a:bodyPr>
           <a:lstStyle>
@@ -4886,7 +4880,7 @@
             </a:lvl9pPr>
           </a:lstStyle>
           <a:p>
-            <a:pPr indent="0" lvl="0" marL="0" rtl="0" algn="r">
+            <a:pPr marL="0" lvl="0" indent="0" algn="r" rtl="0">
               <a:spcBef>
                 <a:spcPts val="0"/>
               </a:spcBef>
@@ -4896,10 +4890,9 @@
               <a:buNone/>
             </a:pPr>
             <a:fld id="{00000000-1234-1234-1234-123412341234}" type="slidenum">
-              <a:rPr lang="ru"/>
-              <a:t>‹#›</a:t>
+              <a:rPr lang="en-US"/>
             </a:fld>
-            <a:endParaRPr/>
+            <a:endParaRPr lang="en-US"/>
           </a:p>
         </p:txBody>
       </p:sp>
@@ -4912,7 +4905,7 @@
 </file>
 
 <file path=ppt/slideLayouts/slideLayout8.xml><?xml version="1.0" encoding="utf-8"?>
-<p:sldLayout xmlns:a="http://schemas.openxmlformats.org/drawingml/2006/main" xmlns:r="http://schemas.openxmlformats.org/officeDocument/2006/relationships" xmlns:mc="http://schemas.openxmlformats.org/markup-compatibility/2006" xmlns:mv="urn:schemas-microsoft-com:mac:vml" xmlns:p="http://schemas.openxmlformats.org/presentationml/2006/main" xmlns:c="http://schemas.openxmlformats.org/drawingml/2006/chart" xmlns:dgm="http://schemas.openxmlformats.org/drawingml/2006/diagram" xmlns:o="urn:schemas-microsoft-com:office:office" xmlns:v="urn:schemas-microsoft-com:vml" xmlns:pvml="urn:schemas-microsoft-com:office:powerpoint" xmlns:com="http://schemas.openxmlformats.org/drawingml/2006/compatibility" xmlns:p14="http://schemas.microsoft.com/office/powerpoint/2010/main" xmlns:p15="http://schemas.microsoft.com/office/powerpoint/2012/main" xmlns:ahyp="http://schemas.microsoft.com/office/drawing/2018/hyperlinkcolor" matchingName="Section title and description">
+<p:sldLayout xmlns:a="http://schemas.openxmlformats.org/drawingml/2006/main" xmlns:r="http://schemas.openxmlformats.org/officeDocument/2006/relationships" xmlns:p="http://schemas.openxmlformats.org/presentationml/2006/main" matchingName="Section title and description">
   <p:cSld name="SECTION_TITLE_AND_DESCRIPTION">
     <p:spTree>
       <p:nvGrpSpPr>
@@ -4950,12 +4943,12 @@
           </a:ln>
         </p:spPr>
         <p:txBody>
-          <a:bodyPr anchorCtr="0" anchor="ctr" bIns="91425" lIns="91425" spcFirstLastPara="1" rIns="91425" wrap="square" tIns="91425">
+          <a:bodyPr spcFirstLastPara="1" wrap="square" lIns="91425" tIns="91425" rIns="91425" bIns="91425" anchor="ctr" anchorCtr="0">
             <a:noAutofit/>
           </a:bodyPr>
           <a:lstStyle/>
           <a:p>
-            <a:pPr indent="0" lvl="0" marL="0" rtl="0" algn="l">
+            <a:pPr marL="0" lvl="0" indent="0" algn="l" rtl="0">
               <a:spcBef>
                 <a:spcPts val="0"/>
               </a:spcBef>
@@ -4964,10 +4957,6 @@
               </a:spcAft>
               <a:buNone/>
             </a:pPr>
-            <a:r>
-              <a:t/>
-            </a:r>
-            <a:endParaRPr/>
           </a:p>
         </p:txBody>
       </p:sp>
@@ -4986,14 +4975,14 @@
             <a:avLst/>
           </a:prstGeom>
           <a:noFill/>
-          <a:ln cap="flat" cmpd="sng" w="19050">
+          <a:ln w="19050" cap="flat" cmpd="sng">
             <a:solidFill>
               <a:schemeClr val="lt2"/>
             </a:solidFill>
             <a:prstDash val="solid"/>
             <a:round/>
-            <a:headEnd len="sm" w="sm" type="none"/>
-            <a:tailEnd len="sm" w="sm" type="none"/>
+            <a:headEnd type="none" w="sm" len="sm"/>
+            <a:tailEnd type="none" w="sm" len="sm"/>
           </a:ln>
         </p:spPr>
       </p:cxnSp>
@@ -5015,7 +5004,7 @@
           </a:prstGeom>
         </p:spPr>
         <p:txBody>
-          <a:bodyPr anchorCtr="0" anchor="b" bIns="91425" lIns="91425" spcFirstLastPara="1" rIns="91425" wrap="square" tIns="91425">
+          <a:bodyPr spcFirstLastPara="1" wrap="square" lIns="91425" tIns="91425" rIns="91425" bIns="91425" anchor="b" anchorCtr="0">
             <a:normAutofit/>
           </a:bodyPr>
           <a:lstStyle>
@@ -5190,7 +5179,7 @@
           <p:cNvPr id="43" name="Google Shape;43;p9"/>
           <p:cNvSpPr txBox="1"/>
           <p:nvPr>
-            <p:ph idx="1" type="subTitle"/>
+            <p:ph type="subTitle" idx="1"/>
           </p:nvPr>
         </p:nvSpPr>
         <p:spPr>
@@ -5203,7 +5192,7 @@
           </a:prstGeom>
         </p:spPr>
         <p:txBody>
-          <a:bodyPr anchorCtr="0" anchor="t" bIns="91425" lIns="91425" spcFirstLastPara="1" rIns="91425" wrap="square" tIns="91425">
+          <a:bodyPr spcFirstLastPara="1" wrap="square" lIns="91425" tIns="91425" rIns="91425" bIns="91425" anchor="t" anchorCtr="0">
             <a:normAutofit/>
           </a:bodyPr>
           <a:lstStyle>
@@ -5342,7 +5331,7 @@
           <p:cNvPr id="44" name="Google Shape;44;p9"/>
           <p:cNvSpPr txBox="1"/>
           <p:nvPr>
-            <p:ph idx="2" type="body"/>
+            <p:ph type="body" idx="2"/>
           </p:nvPr>
         </p:nvSpPr>
         <p:spPr>
@@ -5355,11 +5344,11 @@
           </a:prstGeom>
         </p:spPr>
         <p:txBody>
-          <a:bodyPr anchorCtr="0" anchor="ctr" bIns="91425" lIns="91425" spcFirstLastPara="1" rIns="91425" wrap="square" tIns="91425">
+          <a:bodyPr spcFirstLastPara="1" wrap="square" lIns="91425" tIns="91425" rIns="91425" bIns="91425" anchor="ctr" anchorCtr="0">
             <a:normAutofit/>
           </a:bodyPr>
           <a:lstStyle>
-            <a:lvl1pPr indent="-342900" lvl="0" marL="457200">
+            <a:lvl1pPr marL="457200" lvl="0" indent="-342900">
               <a:spcBef>
                 <a:spcPts val="0"/>
               </a:spcBef>
@@ -5377,7 +5366,7 @@
                 </a:solidFill>
               </a:defRPr>
             </a:lvl1pPr>
-            <a:lvl2pPr indent="-317500" lvl="1" marL="914400">
+            <a:lvl2pPr marL="914400" lvl="1" indent="-317500">
               <a:spcBef>
                 <a:spcPts val="0"/>
               </a:spcBef>
@@ -5395,7 +5384,7 @@
                 </a:solidFill>
               </a:defRPr>
             </a:lvl2pPr>
-            <a:lvl3pPr indent="-317500" lvl="2" marL="1371600">
+            <a:lvl3pPr marL="1371600" lvl="2" indent="-317500">
               <a:spcBef>
                 <a:spcPts val="0"/>
               </a:spcBef>
@@ -5413,7 +5402,7 @@
                 </a:solidFill>
               </a:defRPr>
             </a:lvl3pPr>
-            <a:lvl4pPr indent="-317500" lvl="3" marL="1828800">
+            <a:lvl4pPr marL="1828800" lvl="3" indent="-317500">
               <a:spcBef>
                 <a:spcPts val="0"/>
               </a:spcBef>
@@ -5431,7 +5420,7 @@
                 </a:solidFill>
               </a:defRPr>
             </a:lvl4pPr>
-            <a:lvl5pPr indent="-317500" lvl="4" marL="2286000">
+            <a:lvl5pPr marL="2286000" lvl="4" indent="-317500">
               <a:spcBef>
                 <a:spcPts val="0"/>
               </a:spcBef>
@@ -5449,7 +5438,7 @@
                 </a:solidFill>
               </a:defRPr>
             </a:lvl5pPr>
-            <a:lvl6pPr indent="-317500" lvl="5" marL="2743200">
+            <a:lvl6pPr marL="2743200" lvl="5" indent="-317500">
               <a:spcBef>
                 <a:spcPts val="0"/>
               </a:spcBef>
@@ -5467,7 +5456,7 @@
                 </a:solidFill>
               </a:defRPr>
             </a:lvl6pPr>
-            <a:lvl7pPr indent="-317500" lvl="6" marL="3200400">
+            <a:lvl7pPr marL="3200400" lvl="6" indent="-317500">
               <a:spcBef>
                 <a:spcPts val="0"/>
               </a:spcBef>
@@ -5485,7 +5474,7 @@
                 </a:solidFill>
               </a:defRPr>
             </a:lvl7pPr>
-            <a:lvl8pPr indent="-317500" lvl="7" marL="3657600">
+            <a:lvl8pPr marL="3657600" lvl="7" indent="-317500">
               <a:spcBef>
                 <a:spcPts val="0"/>
               </a:spcBef>
@@ -5503,7 +5492,7 @@
                 </a:solidFill>
               </a:defRPr>
             </a:lvl8pPr>
-            <a:lvl9pPr indent="-317500" lvl="8" marL="4114800">
+            <a:lvl9pPr marL="4114800" lvl="8" indent="-317500">
               <a:spcBef>
                 <a:spcPts val="0"/>
               </a:spcBef>
@@ -5530,7 +5519,7 @@
           <p:cNvPr id="45" name="Google Shape;45;p9"/>
           <p:cNvSpPr txBox="1"/>
           <p:nvPr>
-            <p:ph idx="12" type="sldNum"/>
+            <p:ph type="sldNum" idx="12"/>
           </p:nvPr>
         </p:nvSpPr>
         <p:spPr>
@@ -5543,7 +5532,7 @@
           </a:prstGeom>
         </p:spPr>
         <p:txBody>
-          <a:bodyPr anchorCtr="0" anchor="ctr" bIns="91425" lIns="91425" spcFirstLastPara="1" rIns="91425" wrap="square" tIns="91425">
+          <a:bodyPr spcFirstLastPara="1" wrap="square" lIns="91425" tIns="91425" rIns="91425" bIns="91425" anchor="ctr" anchorCtr="0">
             <a:normAutofit/>
           </a:bodyPr>
           <a:lstStyle>
@@ -5621,7 +5610,7 @@
             </a:lvl9pPr>
           </a:lstStyle>
           <a:p>
-            <a:pPr indent="0" lvl="0" marL="0" rtl="0" algn="r">
+            <a:pPr marL="0" lvl="0" indent="0" algn="r" rtl="0">
               <a:spcBef>
                 <a:spcPts val="0"/>
               </a:spcBef>
@@ -5631,10 +5620,9 @@
               <a:buNone/>
             </a:pPr>
             <a:fld id="{00000000-1234-1234-1234-123412341234}" type="slidenum">
-              <a:rPr lang="ru"/>
-              <a:t>‹#›</a:t>
+              <a:rPr lang="en-US"/>
             </a:fld>
-            <a:endParaRPr/>
+            <a:endParaRPr lang="en-US"/>
           </a:p>
         </p:txBody>
       </p:sp>
@@ -5647,7 +5635,7 @@
 </file>
 
 <file path=ppt/slideLayouts/slideLayout9.xml><?xml version="1.0" encoding="utf-8"?>
-<p:sldLayout xmlns:a="http://schemas.openxmlformats.org/drawingml/2006/main" xmlns:r="http://schemas.openxmlformats.org/officeDocument/2006/relationships" xmlns:mc="http://schemas.openxmlformats.org/markup-compatibility/2006" xmlns:mv="urn:schemas-microsoft-com:mac:vml" xmlns:p="http://schemas.openxmlformats.org/presentationml/2006/main" xmlns:c="http://schemas.openxmlformats.org/drawingml/2006/chart" xmlns:dgm="http://schemas.openxmlformats.org/drawingml/2006/diagram" xmlns:o="urn:schemas-microsoft-com:office:office" xmlns:v="urn:schemas-microsoft-com:vml" xmlns:pvml="urn:schemas-microsoft-com:office:powerpoint" xmlns:com="http://schemas.openxmlformats.org/drawingml/2006/compatibility" xmlns:p14="http://schemas.microsoft.com/office/powerpoint/2010/main" xmlns:p15="http://schemas.microsoft.com/office/powerpoint/2012/main" xmlns:ahyp="http://schemas.microsoft.com/office/drawing/2018/hyperlinkcolor" matchingName="Caption">
+<p:sldLayout xmlns:a="http://schemas.openxmlformats.org/drawingml/2006/main" xmlns:r="http://schemas.openxmlformats.org/officeDocument/2006/relationships" xmlns:p="http://schemas.openxmlformats.org/presentationml/2006/main" matchingName="Caption">
   <p:cSld name="CAPTION_ONLY">
     <p:spTree>
       <p:nvGrpSpPr>
@@ -5668,7 +5656,7 @@
           <p:cNvPr id="47" name="Google Shape;47;p10"/>
           <p:cNvSpPr txBox="1"/>
           <p:nvPr>
-            <p:ph idx="1" type="body"/>
+            <p:ph type="body" idx="1"/>
           </p:nvPr>
         </p:nvSpPr>
         <p:spPr>
@@ -5681,11 +5669,11 @@
           </a:prstGeom>
         </p:spPr>
         <p:txBody>
-          <a:bodyPr anchorCtr="0" anchor="ctr" bIns="91425" lIns="91425" spcFirstLastPara="1" rIns="91425" wrap="square" tIns="91425">
+          <a:bodyPr spcFirstLastPara="1" wrap="square" lIns="91425" tIns="91425" rIns="91425" bIns="91425" anchor="ctr" anchorCtr="0">
             <a:normAutofit/>
           </a:bodyPr>
           <a:lstStyle>
-            <a:lvl1pPr indent="-228600" lvl="0" marL="457200">
+            <a:lvl1pPr marL="457200" lvl="0" indent="-228600">
               <a:lnSpc>
                 <a:spcPct val="100000"/>
               </a:lnSpc>
@@ -5708,7 +5696,7 @@
           <p:cNvPr id="48" name="Google Shape;48;p10"/>
           <p:cNvSpPr txBox="1"/>
           <p:nvPr>
-            <p:ph idx="12" type="sldNum"/>
+            <p:ph type="sldNum" idx="12"/>
           </p:nvPr>
         </p:nvSpPr>
         <p:spPr>
@@ -5721,7 +5709,7 @@
           </a:prstGeom>
         </p:spPr>
         <p:txBody>
-          <a:bodyPr anchorCtr="0" anchor="ctr" bIns="91425" lIns="91425" spcFirstLastPara="1" rIns="91425" wrap="square" tIns="91425">
+          <a:bodyPr spcFirstLastPara="1" wrap="square" lIns="91425" tIns="91425" rIns="91425" bIns="91425" anchor="ctr" anchorCtr="0">
             <a:normAutofit/>
           </a:bodyPr>
           <a:lstStyle>
@@ -5763,7 +5751,7 @@
             </a:lvl9pPr>
           </a:lstStyle>
           <a:p>
-            <a:pPr indent="0" lvl="0" marL="0" rtl="0" algn="r">
+            <a:pPr marL="0" lvl="0" indent="0" algn="r" rtl="0">
               <a:spcBef>
                 <a:spcPts val="0"/>
               </a:spcBef>
@@ -5773,10 +5761,9 @@
               <a:buNone/>
             </a:pPr>
             <a:fld id="{00000000-1234-1234-1234-123412341234}" type="slidenum">
-              <a:rPr lang="ru"/>
-              <a:t>‹#›</a:t>
+              <a:rPr lang="en-US"/>
             </a:fld>
-            <a:endParaRPr/>
+            <a:endParaRPr lang="en-US"/>
           </a:p>
         </p:txBody>
       </p:sp>
@@ -5789,13 +5776,14 @@
 </file>
 
 <file path=ppt/slideMasters/slideMaster1.xml><?xml version="1.0" encoding="utf-8"?>
-<p:sldMaster xmlns:a="http://schemas.openxmlformats.org/drawingml/2006/main" xmlns:r="http://schemas.openxmlformats.org/officeDocument/2006/relationships" xmlns:mc="http://schemas.openxmlformats.org/markup-compatibility/2006" xmlns:mv="urn:schemas-microsoft-com:mac:vml" xmlns:p="http://schemas.openxmlformats.org/presentationml/2006/main" xmlns:c="http://schemas.openxmlformats.org/drawingml/2006/chart" xmlns:dgm="http://schemas.openxmlformats.org/drawingml/2006/diagram" xmlns:o="urn:schemas-microsoft-com:office:office" xmlns:v="urn:schemas-microsoft-com:vml" xmlns:pvml="urn:schemas-microsoft-com:office:powerpoint" xmlns:com="http://schemas.openxmlformats.org/drawingml/2006/compatibility" xmlns:p14="http://schemas.microsoft.com/office/powerpoint/2010/main" xmlns:p15="http://schemas.microsoft.com/office/powerpoint/2012/main" xmlns:ahyp="http://schemas.microsoft.com/office/drawing/2018/hyperlinkcolor">
-  <p:cSld name="paperback">
+<p:sldMaster xmlns:a="http://schemas.openxmlformats.org/drawingml/2006/main" xmlns:r="http://schemas.openxmlformats.org/officeDocument/2006/relationships" xmlns:p="http://schemas.openxmlformats.org/presentationml/2006/main">
+  <p:cSld>
     <p:bg>
       <p:bgPr>
         <a:solidFill>
           <a:schemeClr val="accent1"/>
         </a:solidFill>
+        <a:effectLst/>
       </p:bgPr>
     </p:bg>
     <p:spTree>
@@ -5834,7 +5822,7 @@
           </a:ln>
         </p:spPr>
         <p:txBody>
-          <a:bodyPr anchorCtr="0" anchor="t" bIns="91425" lIns="91425" spcFirstLastPara="1" rIns="91425" wrap="square" tIns="91425">
+          <a:bodyPr spcFirstLastPara="1" wrap="square" lIns="91425" tIns="91425" rIns="91425" bIns="91425" anchor="t" anchorCtr="0">
             <a:normAutofit/>
           </a:bodyPr>
           <a:lstStyle>
@@ -5849,16 +5837,16 @@
                 <a:schemeClr val="dk1"/>
               </a:buClr>
               <a:buSzPts val="3000"/>
-              <a:buFont typeface="Old Standard TT"/>
+              <a:buFont typeface="Old Standard TT" panose="00000500000000000000"/>
               <a:buNone/>
               <a:defRPr sz="3000">
                 <a:solidFill>
                   <a:schemeClr val="dk1"/>
                 </a:solidFill>
-                <a:latin typeface="Old Standard TT"/>
-                <a:ea typeface="Old Standard TT"/>
-                <a:cs typeface="Old Standard TT"/>
-                <a:sym typeface="Old Standard TT"/>
+                <a:latin typeface="Old Standard TT" panose="00000500000000000000"/>
+                <a:ea typeface="Old Standard TT" panose="00000500000000000000"/>
+                <a:cs typeface="Old Standard TT" panose="00000500000000000000"/>
+                <a:sym typeface="Old Standard TT" panose="00000500000000000000"/>
               </a:defRPr>
             </a:lvl1pPr>
             <a:lvl2pPr lvl="1">
@@ -5872,16 +5860,16 @@
                 <a:schemeClr val="dk1"/>
               </a:buClr>
               <a:buSzPts val="3000"/>
-              <a:buFont typeface="Old Standard TT"/>
+              <a:buFont typeface="Old Standard TT" panose="00000500000000000000"/>
               <a:buNone/>
               <a:defRPr sz="3000">
                 <a:solidFill>
                   <a:schemeClr val="dk1"/>
                 </a:solidFill>
-                <a:latin typeface="Old Standard TT"/>
-                <a:ea typeface="Old Standard TT"/>
-                <a:cs typeface="Old Standard TT"/>
-                <a:sym typeface="Old Standard TT"/>
+                <a:latin typeface="Old Standard TT" panose="00000500000000000000"/>
+                <a:ea typeface="Old Standard TT" panose="00000500000000000000"/>
+                <a:cs typeface="Old Standard TT" panose="00000500000000000000"/>
+                <a:sym typeface="Old Standard TT" panose="00000500000000000000"/>
               </a:defRPr>
             </a:lvl2pPr>
             <a:lvl3pPr lvl="2">
@@ -5895,16 +5883,16 @@
                 <a:schemeClr val="dk1"/>
               </a:buClr>
               <a:buSzPts val="3000"/>
-              <a:buFont typeface="Old Standard TT"/>
+              <a:buFont typeface="Old Standard TT" panose="00000500000000000000"/>
               <a:buNone/>
               <a:defRPr sz="3000">
                 <a:solidFill>
                   <a:schemeClr val="dk1"/>
                 </a:solidFill>
-                <a:latin typeface="Old Standard TT"/>
-                <a:ea typeface="Old Standard TT"/>
-                <a:cs typeface="Old Standard TT"/>
-                <a:sym typeface="Old Standard TT"/>
+                <a:latin typeface="Old Standard TT" panose="00000500000000000000"/>
+                <a:ea typeface="Old Standard TT" panose="00000500000000000000"/>
+                <a:cs typeface="Old Standard TT" panose="00000500000000000000"/>
+                <a:sym typeface="Old Standard TT" panose="00000500000000000000"/>
               </a:defRPr>
             </a:lvl3pPr>
             <a:lvl4pPr lvl="3">
@@ -5918,16 +5906,16 @@
                 <a:schemeClr val="dk1"/>
               </a:buClr>
               <a:buSzPts val="3000"/>
-              <a:buFont typeface="Old Standard TT"/>
+              <a:buFont typeface="Old Standard TT" panose="00000500000000000000"/>
               <a:buNone/>
               <a:defRPr sz="3000">
                 <a:solidFill>
                   <a:schemeClr val="dk1"/>
                 </a:solidFill>
-                <a:latin typeface="Old Standard TT"/>
-                <a:ea typeface="Old Standard TT"/>
-                <a:cs typeface="Old Standard TT"/>
-                <a:sym typeface="Old Standard TT"/>
+                <a:latin typeface="Old Standard TT" panose="00000500000000000000"/>
+                <a:ea typeface="Old Standard TT" panose="00000500000000000000"/>
+                <a:cs typeface="Old Standard TT" panose="00000500000000000000"/>
+                <a:sym typeface="Old Standard TT" panose="00000500000000000000"/>
               </a:defRPr>
             </a:lvl4pPr>
             <a:lvl5pPr lvl="4">
@@ -5941,16 +5929,16 @@
                 <a:schemeClr val="dk1"/>
               </a:buClr>
               <a:buSzPts val="3000"/>
-              <a:buFont typeface="Old Standard TT"/>
+              <a:buFont typeface="Old Standard TT" panose="00000500000000000000"/>
               <a:buNone/>
               <a:defRPr sz="3000">
                 <a:solidFill>
                   <a:schemeClr val="dk1"/>
                 </a:solidFill>
-                <a:latin typeface="Old Standard TT"/>
-                <a:ea typeface="Old Standard TT"/>
-                <a:cs typeface="Old Standard TT"/>
-                <a:sym typeface="Old Standard TT"/>
+                <a:latin typeface="Old Standard TT" panose="00000500000000000000"/>
+                <a:ea typeface="Old Standard TT" panose="00000500000000000000"/>
+                <a:cs typeface="Old Standard TT" panose="00000500000000000000"/>
+                <a:sym typeface="Old Standard TT" panose="00000500000000000000"/>
               </a:defRPr>
             </a:lvl5pPr>
             <a:lvl6pPr lvl="5">
@@ -5964,16 +5952,16 @@
                 <a:schemeClr val="dk1"/>
               </a:buClr>
               <a:buSzPts val="3000"/>
-              <a:buFont typeface="Old Standard TT"/>
+              <a:buFont typeface="Old Standard TT" panose="00000500000000000000"/>
               <a:buNone/>
               <a:defRPr sz="3000">
                 <a:solidFill>
                   <a:schemeClr val="dk1"/>
                 </a:solidFill>
-                <a:latin typeface="Old Standard TT"/>
-                <a:ea typeface="Old Standard TT"/>
-                <a:cs typeface="Old Standard TT"/>
-                <a:sym typeface="Old Standard TT"/>
+                <a:latin typeface="Old Standard TT" panose="00000500000000000000"/>
+                <a:ea typeface="Old Standard TT" panose="00000500000000000000"/>
+                <a:cs typeface="Old Standard TT" panose="00000500000000000000"/>
+                <a:sym typeface="Old Standard TT" panose="00000500000000000000"/>
               </a:defRPr>
             </a:lvl6pPr>
             <a:lvl7pPr lvl="6">
@@ -5987,16 +5975,16 @@
                 <a:schemeClr val="dk1"/>
               </a:buClr>
               <a:buSzPts val="3000"/>
-              <a:buFont typeface="Old Standard TT"/>
+              <a:buFont typeface="Old Standard TT" panose="00000500000000000000"/>
               <a:buNone/>
               <a:defRPr sz="3000">
                 <a:solidFill>
                   <a:schemeClr val="dk1"/>
                 </a:solidFill>
-                <a:latin typeface="Old Standard TT"/>
-                <a:ea typeface="Old Standard TT"/>
-                <a:cs typeface="Old Standard TT"/>
-                <a:sym typeface="Old Standard TT"/>
+                <a:latin typeface="Old Standard TT" panose="00000500000000000000"/>
+                <a:ea typeface="Old Standard TT" panose="00000500000000000000"/>
+                <a:cs typeface="Old Standard TT" panose="00000500000000000000"/>
+                <a:sym typeface="Old Standard TT" panose="00000500000000000000"/>
               </a:defRPr>
             </a:lvl7pPr>
             <a:lvl8pPr lvl="7">
@@ -6010,16 +5998,16 @@
                 <a:schemeClr val="dk1"/>
               </a:buClr>
               <a:buSzPts val="3000"/>
-              <a:buFont typeface="Old Standard TT"/>
+              <a:buFont typeface="Old Standard TT" panose="00000500000000000000"/>
               <a:buNone/>
               <a:defRPr sz="3000">
                 <a:solidFill>
                   <a:schemeClr val="dk1"/>
                 </a:solidFill>
-                <a:latin typeface="Old Standard TT"/>
-                <a:ea typeface="Old Standard TT"/>
-                <a:cs typeface="Old Standard TT"/>
-                <a:sym typeface="Old Standard TT"/>
+                <a:latin typeface="Old Standard TT" panose="00000500000000000000"/>
+                <a:ea typeface="Old Standard TT" panose="00000500000000000000"/>
+                <a:cs typeface="Old Standard TT" panose="00000500000000000000"/>
+                <a:sym typeface="Old Standard TT" panose="00000500000000000000"/>
               </a:defRPr>
             </a:lvl8pPr>
             <a:lvl9pPr lvl="8">
@@ -6033,16 +6021,16 @@
                 <a:schemeClr val="dk1"/>
               </a:buClr>
               <a:buSzPts val="3000"/>
-              <a:buFont typeface="Old Standard TT"/>
+              <a:buFont typeface="Old Standard TT" panose="00000500000000000000"/>
               <a:buNone/>
               <a:defRPr sz="3000">
                 <a:solidFill>
                   <a:schemeClr val="dk1"/>
                 </a:solidFill>
-                <a:latin typeface="Old Standard TT"/>
-                <a:ea typeface="Old Standard TT"/>
-                <a:cs typeface="Old Standard TT"/>
-                <a:sym typeface="Old Standard TT"/>
+                <a:latin typeface="Old Standard TT" panose="00000500000000000000"/>
+                <a:ea typeface="Old Standard TT" panose="00000500000000000000"/>
+                <a:cs typeface="Old Standard TT" panose="00000500000000000000"/>
+                <a:sym typeface="Old Standard TT" panose="00000500000000000000"/>
               </a:defRPr>
             </a:lvl9pPr>
           </a:lstStyle>
@@ -6054,7 +6042,7 @@
           <p:cNvPr id="7" name="Google Shape;7;p1"/>
           <p:cNvSpPr txBox="1"/>
           <p:nvPr>
-            <p:ph idx="1" type="body"/>
+            <p:ph type="body" idx="1"/>
           </p:nvPr>
         </p:nvSpPr>
         <p:spPr>
@@ -6071,11 +6059,11 @@
           </a:ln>
         </p:spPr>
         <p:txBody>
-          <a:bodyPr anchorCtr="0" anchor="t" bIns="91425" lIns="91425" spcFirstLastPara="1" rIns="91425" wrap="square" tIns="91425">
+          <a:bodyPr spcFirstLastPara="1" wrap="square" lIns="91425" tIns="91425" rIns="91425" bIns="91425" anchor="t" anchorCtr="0">
             <a:normAutofit/>
           </a:bodyPr>
           <a:lstStyle>
-            <a:lvl1pPr indent="-342900" lvl="0" marL="457200">
+            <a:lvl1pPr marL="457200" lvl="0" indent="-342900">
               <a:lnSpc>
                 <a:spcPct val="115000"/>
               </a:lnSpc>
@@ -6089,19 +6077,19 @@
                 <a:schemeClr val="dk1"/>
               </a:buClr>
               <a:buSzPts val="1800"/>
-              <a:buFont typeface="Old Standard TT"/>
+              <a:buFont typeface="Old Standard TT" panose="00000500000000000000"/>
               <a:buChar char="●"/>
               <a:defRPr sz="1800">
                 <a:solidFill>
                   <a:schemeClr val="dk1"/>
                 </a:solidFill>
-                <a:latin typeface="Old Standard TT"/>
-                <a:ea typeface="Old Standard TT"/>
-                <a:cs typeface="Old Standard TT"/>
-                <a:sym typeface="Old Standard TT"/>
+                <a:latin typeface="Old Standard TT" panose="00000500000000000000"/>
+                <a:ea typeface="Old Standard TT" panose="00000500000000000000"/>
+                <a:cs typeface="Old Standard TT" panose="00000500000000000000"/>
+                <a:sym typeface="Old Standard TT" panose="00000500000000000000"/>
               </a:defRPr>
             </a:lvl1pPr>
-            <a:lvl2pPr indent="-317500" lvl="1" marL="914400">
+            <a:lvl2pPr marL="914400" lvl="1" indent="-317500">
               <a:lnSpc>
                 <a:spcPct val="115000"/>
               </a:lnSpc>
@@ -6115,19 +6103,19 @@
                 <a:schemeClr val="dk1"/>
               </a:buClr>
               <a:buSzPts val="1400"/>
-              <a:buFont typeface="Old Standard TT"/>
+              <a:buFont typeface="Old Standard TT" panose="00000500000000000000"/>
               <a:buChar char="○"/>
               <a:defRPr>
                 <a:solidFill>
                   <a:schemeClr val="dk1"/>
                 </a:solidFill>
-                <a:latin typeface="Old Standard TT"/>
-                <a:ea typeface="Old Standard TT"/>
-                <a:cs typeface="Old Standard TT"/>
-                <a:sym typeface="Old Standard TT"/>
+                <a:latin typeface="Old Standard TT" panose="00000500000000000000"/>
+                <a:ea typeface="Old Standard TT" panose="00000500000000000000"/>
+                <a:cs typeface="Old Standard TT" panose="00000500000000000000"/>
+                <a:sym typeface="Old Standard TT" panose="00000500000000000000"/>
               </a:defRPr>
             </a:lvl2pPr>
-            <a:lvl3pPr indent="-317500" lvl="2" marL="1371600">
+            <a:lvl3pPr marL="1371600" lvl="2" indent="-317500">
               <a:lnSpc>
                 <a:spcPct val="115000"/>
               </a:lnSpc>
@@ -6141,19 +6129,19 @@
                 <a:schemeClr val="dk1"/>
               </a:buClr>
               <a:buSzPts val="1400"/>
-              <a:buFont typeface="Old Standard TT"/>
+              <a:buFont typeface="Old Standard TT" panose="00000500000000000000"/>
               <a:buChar char="■"/>
               <a:defRPr>
                 <a:solidFill>
                   <a:schemeClr val="dk1"/>
                 </a:solidFill>
-                <a:latin typeface="Old Standard TT"/>
-                <a:ea typeface="Old Standard TT"/>
-                <a:cs typeface="Old Standard TT"/>
-                <a:sym typeface="Old Standard TT"/>
+                <a:latin typeface="Old Standard TT" panose="00000500000000000000"/>
+                <a:ea typeface="Old Standard TT" panose="00000500000000000000"/>
+                <a:cs typeface="Old Standard TT" panose="00000500000000000000"/>
+                <a:sym typeface="Old Standard TT" panose="00000500000000000000"/>
               </a:defRPr>
             </a:lvl3pPr>
-            <a:lvl4pPr indent="-317500" lvl="3" marL="1828800">
+            <a:lvl4pPr marL="1828800" lvl="3" indent="-317500">
               <a:lnSpc>
                 <a:spcPct val="115000"/>
               </a:lnSpc>
@@ -6167,19 +6155,19 @@
                 <a:schemeClr val="dk1"/>
               </a:buClr>
               <a:buSzPts val="1400"/>
-              <a:buFont typeface="Old Standard TT"/>
+              <a:buFont typeface="Old Standard TT" panose="00000500000000000000"/>
               <a:buChar char="●"/>
               <a:defRPr>
                 <a:solidFill>
                   <a:schemeClr val="dk1"/>
                 </a:solidFill>
-                <a:latin typeface="Old Standard TT"/>
-                <a:ea typeface="Old Standard TT"/>
-                <a:cs typeface="Old Standard TT"/>
-                <a:sym typeface="Old Standard TT"/>
+                <a:latin typeface="Old Standard TT" panose="00000500000000000000"/>
+                <a:ea typeface="Old Standard TT" panose="00000500000000000000"/>
+                <a:cs typeface="Old Standard TT" panose="00000500000000000000"/>
+                <a:sym typeface="Old Standard TT" panose="00000500000000000000"/>
               </a:defRPr>
             </a:lvl4pPr>
-            <a:lvl5pPr indent="-317500" lvl="4" marL="2286000">
+            <a:lvl5pPr marL="2286000" lvl="4" indent="-317500">
               <a:lnSpc>
                 <a:spcPct val="115000"/>
               </a:lnSpc>
@@ -6193,19 +6181,19 @@
                 <a:schemeClr val="dk1"/>
               </a:buClr>
               <a:buSzPts val="1400"/>
-              <a:buFont typeface="Old Standard TT"/>
+              <a:buFont typeface="Old Standard TT" panose="00000500000000000000"/>
               <a:buChar char="○"/>
               <a:defRPr>
                 <a:solidFill>
                   <a:schemeClr val="dk1"/>
                 </a:solidFill>
-                <a:latin typeface="Old Standard TT"/>
-                <a:ea typeface="Old Standard TT"/>
-                <a:cs typeface="Old Standard TT"/>
-                <a:sym typeface="Old Standard TT"/>
+                <a:latin typeface="Old Standard TT" panose="00000500000000000000"/>
+                <a:ea typeface="Old Standard TT" panose="00000500000000000000"/>
+                <a:cs typeface="Old Standard TT" panose="00000500000000000000"/>
+                <a:sym typeface="Old Standard TT" panose="00000500000000000000"/>
               </a:defRPr>
             </a:lvl5pPr>
-            <a:lvl6pPr indent="-317500" lvl="5" marL="2743200">
+            <a:lvl6pPr marL="2743200" lvl="5" indent="-317500">
               <a:lnSpc>
                 <a:spcPct val="115000"/>
               </a:lnSpc>
@@ -6219,19 +6207,19 @@
                 <a:schemeClr val="dk1"/>
               </a:buClr>
               <a:buSzPts val="1400"/>
-              <a:buFont typeface="Old Standard TT"/>
+              <a:buFont typeface="Old Standard TT" panose="00000500000000000000"/>
               <a:buChar char="■"/>
               <a:defRPr>
                 <a:solidFill>
                   <a:schemeClr val="dk1"/>
                 </a:solidFill>
-                <a:latin typeface="Old Standard TT"/>
-                <a:ea typeface="Old Standard TT"/>
-                <a:cs typeface="Old Standard TT"/>
-                <a:sym typeface="Old Standard TT"/>
+                <a:latin typeface="Old Standard TT" panose="00000500000000000000"/>
+                <a:ea typeface="Old Standard TT" panose="00000500000000000000"/>
+                <a:cs typeface="Old Standard TT" panose="00000500000000000000"/>
+                <a:sym typeface="Old Standard TT" panose="00000500000000000000"/>
               </a:defRPr>
             </a:lvl6pPr>
-            <a:lvl7pPr indent="-317500" lvl="6" marL="3200400">
+            <a:lvl7pPr marL="3200400" lvl="6" indent="-317500">
               <a:lnSpc>
                 <a:spcPct val="115000"/>
               </a:lnSpc>
@@ -6245,19 +6233,19 @@
                 <a:schemeClr val="dk1"/>
               </a:buClr>
               <a:buSzPts val="1400"/>
-              <a:buFont typeface="Old Standard TT"/>
+              <a:buFont typeface="Old Standard TT" panose="00000500000000000000"/>
               <a:buChar char="●"/>
               <a:defRPr>
                 <a:solidFill>
                   <a:schemeClr val="dk1"/>
                 </a:solidFill>
-                <a:latin typeface="Old Standard TT"/>
-                <a:ea typeface="Old Standard TT"/>
-                <a:cs typeface="Old Standard TT"/>
-                <a:sym typeface="Old Standard TT"/>
+                <a:latin typeface="Old Standard TT" panose="00000500000000000000"/>
+                <a:ea typeface="Old Standard TT" panose="00000500000000000000"/>
+                <a:cs typeface="Old Standard TT" panose="00000500000000000000"/>
+                <a:sym typeface="Old Standard TT" panose="00000500000000000000"/>
               </a:defRPr>
             </a:lvl7pPr>
-            <a:lvl8pPr indent="-317500" lvl="7" marL="3657600">
+            <a:lvl8pPr marL="3657600" lvl="7" indent="-317500">
               <a:lnSpc>
                 <a:spcPct val="115000"/>
               </a:lnSpc>
@@ -6271,19 +6259,19 @@
                 <a:schemeClr val="dk1"/>
               </a:buClr>
               <a:buSzPts val="1400"/>
-              <a:buFont typeface="Old Standard TT"/>
+              <a:buFont typeface="Old Standard TT" panose="00000500000000000000"/>
               <a:buChar char="○"/>
               <a:defRPr>
                 <a:solidFill>
                   <a:schemeClr val="dk1"/>
                 </a:solidFill>
-                <a:latin typeface="Old Standard TT"/>
-                <a:ea typeface="Old Standard TT"/>
-                <a:cs typeface="Old Standard TT"/>
-                <a:sym typeface="Old Standard TT"/>
+                <a:latin typeface="Old Standard TT" panose="00000500000000000000"/>
+                <a:ea typeface="Old Standard TT" panose="00000500000000000000"/>
+                <a:cs typeface="Old Standard TT" panose="00000500000000000000"/>
+                <a:sym typeface="Old Standard TT" panose="00000500000000000000"/>
               </a:defRPr>
             </a:lvl8pPr>
-            <a:lvl9pPr indent="-317500" lvl="8" marL="4114800">
+            <a:lvl9pPr marL="4114800" lvl="8" indent="-317500">
               <a:lnSpc>
                 <a:spcPct val="115000"/>
               </a:lnSpc>
@@ -6297,16 +6285,16 @@
                 <a:schemeClr val="dk1"/>
               </a:buClr>
               <a:buSzPts val="1400"/>
-              <a:buFont typeface="Old Standard TT"/>
+              <a:buFont typeface="Old Standard TT" panose="00000500000000000000"/>
               <a:buChar char="■"/>
               <a:defRPr>
                 <a:solidFill>
                   <a:schemeClr val="dk1"/>
                 </a:solidFill>
-                <a:latin typeface="Old Standard TT"/>
-                <a:ea typeface="Old Standard TT"/>
-                <a:cs typeface="Old Standard TT"/>
-                <a:sym typeface="Old Standard TT"/>
+                <a:latin typeface="Old Standard TT" panose="00000500000000000000"/>
+                <a:ea typeface="Old Standard TT" panose="00000500000000000000"/>
+                <a:cs typeface="Old Standard TT" panose="00000500000000000000"/>
+                <a:sym typeface="Old Standard TT" panose="00000500000000000000"/>
               </a:defRPr>
             </a:lvl9pPr>
           </a:lstStyle>
@@ -6318,7 +6306,7 @@
           <p:cNvPr id="8" name="Google Shape;8;p1"/>
           <p:cNvSpPr txBox="1"/>
           <p:nvPr>
-            <p:ph idx="12" type="sldNum"/>
+            <p:ph type="sldNum" idx="12"/>
           </p:nvPr>
         </p:nvSpPr>
         <p:spPr>
@@ -6335,7 +6323,7 @@
           </a:ln>
         </p:spPr>
         <p:txBody>
-          <a:bodyPr anchorCtr="0" anchor="ctr" bIns="91425" lIns="91425" spcFirstLastPara="1" rIns="91425" wrap="square" tIns="91425">
+          <a:bodyPr spcFirstLastPara="1" wrap="square" lIns="91425" tIns="91425" rIns="91425" bIns="91425" anchor="ctr" anchorCtr="0">
             <a:normAutofit/>
           </a:bodyPr>
           <a:lstStyle>
@@ -6345,10 +6333,10 @@
                 <a:solidFill>
                   <a:schemeClr val="dk1"/>
                 </a:solidFill>
-                <a:latin typeface="Old Standard TT"/>
-                <a:ea typeface="Old Standard TT"/>
-                <a:cs typeface="Old Standard TT"/>
-                <a:sym typeface="Old Standard TT"/>
+                <a:latin typeface="Old Standard TT" panose="00000500000000000000"/>
+                <a:ea typeface="Old Standard TT" panose="00000500000000000000"/>
+                <a:cs typeface="Old Standard TT" panose="00000500000000000000"/>
+                <a:sym typeface="Old Standard TT" panose="00000500000000000000"/>
               </a:defRPr>
             </a:lvl1pPr>
             <a:lvl2pPr lvl="1" algn="r">
@@ -6357,10 +6345,10 @@
                 <a:solidFill>
                   <a:schemeClr val="dk1"/>
                 </a:solidFill>
-                <a:latin typeface="Old Standard TT"/>
-                <a:ea typeface="Old Standard TT"/>
-                <a:cs typeface="Old Standard TT"/>
-                <a:sym typeface="Old Standard TT"/>
+                <a:latin typeface="Old Standard TT" panose="00000500000000000000"/>
+                <a:ea typeface="Old Standard TT" panose="00000500000000000000"/>
+                <a:cs typeface="Old Standard TT" panose="00000500000000000000"/>
+                <a:sym typeface="Old Standard TT" panose="00000500000000000000"/>
               </a:defRPr>
             </a:lvl2pPr>
             <a:lvl3pPr lvl="2" algn="r">
@@ -6369,10 +6357,10 @@
                 <a:solidFill>
                   <a:schemeClr val="dk1"/>
                 </a:solidFill>
-                <a:latin typeface="Old Standard TT"/>
-                <a:ea typeface="Old Standard TT"/>
-                <a:cs typeface="Old Standard TT"/>
-                <a:sym typeface="Old Standard TT"/>
+                <a:latin typeface="Old Standard TT" panose="00000500000000000000"/>
+                <a:ea typeface="Old Standard TT" panose="00000500000000000000"/>
+                <a:cs typeface="Old Standard TT" panose="00000500000000000000"/>
+                <a:sym typeface="Old Standard TT" panose="00000500000000000000"/>
               </a:defRPr>
             </a:lvl3pPr>
             <a:lvl4pPr lvl="3" algn="r">
@@ -6381,10 +6369,10 @@
                 <a:solidFill>
                   <a:schemeClr val="dk1"/>
                 </a:solidFill>
-                <a:latin typeface="Old Standard TT"/>
-                <a:ea typeface="Old Standard TT"/>
-                <a:cs typeface="Old Standard TT"/>
-                <a:sym typeface="Old Standard TT"/>
+                <a:latin typeface="Old Standard TT" panose="00000500000000000000"/>
+                <a:ea typeface="Old Standard TT" panose="00000500000000000000"/>
+                <a:cs typeface="Old Standard TT" panose="00000500000000000000"/>
+                <a:sym typeface="Old Standard TT" panose="00000500000000000000"/>
               </a:defRPr>
             </a:lvl4pPr>
             <a:lvl5pPr lvl="4" algn="r">
@@ -6393,10 +6381,10 @@
                 <a:solidFill>
                   <a:schemeClr val="dk1"/>
                 </a:solidFill>
-                <a:latin typeface="Old Standard TT"/>
-                <a:ea typeface="Old Standard TT"/>
-                <a:cs typeface="Old Standard TT"/>
-                <a:sym typeface="Old Standard TT"/>
+                <a:latin typeface="Old Standard TT" panose="00000500000000000000"/>
+                <a:ea typeface="Old Standard TT" panose="00000500000000000000"/>
+                <a:cs typeface="Old Standard TT" panose="00000500000000000000"/>
+                <a:sym typeface="Old Standard TT" panose="00000500000000000000"/>
               </a:defRPr>
             </a:lvl5pPr>
             <a:lvl6pPr lvl="5" algn="r">
@@ -6405,10 +6393,10 @@
                 <a:solidFill>
                   <a:schemeClr val="dk1"/>
                 </a:solidFill>
-                <a:latin typeface="Old Standard TT"/>
-                <a:ea typeface="Old Standard TT"/>
-                <a:cs typeface="Old Standard TT"/>
-                <a:sym typeface="Old Standard TT"/>
+                <a:latin typeface="Old Standard TT" panose="00000500000000000000"/>
+                <a:ea typeface="Old Standard TT" panose="00000500000000000000"/>
+                <a:cs typeface="Old Standard TT" panose="00000500000000000000"/>
+                <a:sym typeface="Old Standard TT" panose="00000500000000000000"/>
               </a:defRPr>
             </a:lvl6pPr>
             <a:lvl7pPr lvl="6" algn="r">
@@ -6417,10 +6405,10 @@
                 <a:solidFill>
                   <a:schemeClr val="dk1"/>
                 </a:solidFill>
-                <a:latin typeface="Old Standard TT"/>
-                <a:ea typeface="Old Standard TT"/>
-                <a:cs typeface="Old Standard TT"/>
-                <a:sym typeface="Old Standard TT"/>
+                <a:latin typeface="Old Standard TT" panose="00000500000000000000"/>
+                <a:ea typeface="Old Standard TT" panose="00000500000000000000"/>
+                <a:cs typeface="Old Standard TT" panose="00000500000000000000"/>
+                <a:sym typeface="Old Standard TT" panose="00000500000000000000"/>
               </a:defRPr>
             </a:lvl7pPr>
             <a:lvl8pPr lvl="7" algn="r">
@@ -6429,10 +6417,10 @@
                 <a:solidFill>
                   <a:schemeClr val="dk1"/>
                 </a:solidFill>
-                <a:latin typeface="Old Standard TT"/>
-                <a:ea typeface="Old Standard TT"/>
-                <a:cs typeface="Old Standard TT"/>
-                <a:sym typeface="Old Standard TT"/>
+                <a:latin typeface="Old Standard TT" panose="00000500000000000000"/>
+                <a:ea typeface="Old Standard TT" panose="00000500000000000000"/>
+                <a:cs typeface="Old Standard TT" panose="00000500000000000000"/>
+                <a:sym typeface="Old Standard TT" panose="00000500000000000000"/>
               </a:defRPr>
             </a:lvl8pPr>
             <a:lvl9pPr lvl="8" algn="r">
@@ -6441,15 +6429,15 @@
                 <a:solidFill>
                   <a:schemeClr val="dk1"/>
                 </a:solidFill>
-                <a:latin typeface="Old Standard TT"/>
-                <a:ea typeface="Old Standard TT"/>
-                <a:cs typeface="Old Standard TT"/>
-                <a:sym typeface="Old Standard TT"/>
+                <a:latin typeface="Old Standard TT" panose="00000500000000000000"/>
+                <a:ea typeface="Old Standard TT" panose="00000500000000000000"/>
+                <a:cs typeface="Old Standard TT" panose="00000500000000000000"/>
+                <a:sym typeface="Old Standard TT" panose="00000500000000000000"/>
               </a:defRPr>
             </a:lvl9pPr>
           </a:lstStyle>
           <a:p>
-            <a:pPr indent="0" lvl="0" marL="0" rtl="0" algn="r">
+            <a:pPr marL="0" lvl="0" indent="0" algn="r" rtl="0">
               <a:spcBef>
                 <a:spcPts val="0"/>
               </a:spcBef>
@@ -6459,33 +6447,32 @@
               <a:buNone/>
             </a:pPr>
             <a:fld id="{00000000-1234-1234-1234-123412341234}" type="slidenum">
-              <a:rPr lang="ru"/>
-              <a:t>‹#›</a:t>
+              <a:rPr lang="en-US"/>
             </a:fld>
-            <a:endParaRPr/>
+            <a:endParaRPr lang="en-US"/>
           </a:p>
         </p:txBody>
       </p:sp>
     </p:spTree>
   </p:cSld>
-  <p:clrMap accent1="accent1" accent2="accent2" accent3="accent3" accent4="accent4" accent5="accent5" accent6="accent6" bg1="lt1" bg2="dk2" tx1="dk1" tx2="lt2" folHlink="folHlink" hlink="hlink"/>
+  <p:clrMap bg1="lt1" tx1="dk1" bg2="dk2" tx2="lt2" accent1="accent1" accent2="accent2" accent3="accent3" accent4="accent4" accent5="accent5" accent6="accent6" hlink="hlink" folHlink="folHlink"/>
   <p:sldLayoutIdLst>
-    <p:sldLayoutId id="2147483648" r:id="rId1"/>
-    <p:sldLayoutId id="2147483649" r:id="rId2"/>
-    <p:sldLayoutId id="2147483650" r:id="rId3"/>
-    <p:sldLayoutId id="2147483651" r:id="rId4"/>
-    <p:sldLayoutId id="2147483652" r:id="rId5"/>
-    <p:sldLayoutId id="2147483653" r:id="rId6"/>
-    <p:sldLayoutId id="2147483654" r:id="rId7"/>
-    <p:sldLayoutId id="2147483655" r:id="rId8"/>
-    <p:sldLayoutId id="2147483656" r:id="rId9"/>
-    <p:sldLayoutId id="2147483657" r:id="rId10"/>
-    <p:sldLayoutId id="2147483658" r:id="rId11"/>
+    <p:sldLayoutId id="2147483649" r:id="rId1"/>
+    <p:sldLayoutId id="2147483650" r:id="rId2"/>
+    <p:sldLayoutId id="2147483651" r:id="rId3"/>
+    <p:sldLayoutId id="2147483652" r:id="rId4"/>
+    <p:sldLayoutId id="2147483653" r:id="rId5"/>
+    <p:sldLayoutId id="2147483654" r:id="rId6"/>
+    <p:sldLayoutId id="2147483655" r:id="rId7"/>
+    <p:sldLayoutId id="2147483656" r:id="rId8"/>
+    <p:sldLayoutId id="2147483657" r:id="rId9"/>
+    <p:sldLayoutId id="2147483658" r:id="rId10"/>
+    <p:sldLayoutId id="2147483659" r:id="rId11"/>
   </p:sldLayoutIdLst>
-  <p:hf dt="0" ftr="0" hdr="0" sldNum="0"/>
+  <p:hf sldNum="0" hdr="0" ftr="0" dt="0"/>
   <p:txStyles>
     <p:titleStyle>
-      <a:defPPr lvl="0" marR="0" rtl="0" algn="l">
+      <a:defPPr marR="0" lvl="0" algn="l" rtl="0">
         <a:lnSpc>
           <a:spcPct val="100000"/>
         </a:lnSpc>
@@ -6496,7 +6483,7 @@
           <a:spcPts val="0"/>
         </a:spcAft>
       </a:defPPr>
-      <a:lvl1pPr lvl="0" marR="0" rtl="0" algn="l">
+      <a:lvl1pPr marR="0" lvl="0" algn="l" rtl="0">
         <a:lnSpc>
           <a:spcPct val="100000"/>
         </a:lnSpc>
@@ -6509,18 +6496,18 @@
         <a:buClr>
           <a:srgbClr val="000000"/>
         </a:buClr>
-        <a:buFont typeface="Arial"/>
-        <a:defRPr b="0" i="0" sz="1400" u="none" cap="none" strike="noStrike">
+        <a:buFont typeface="Arial" panose="020B0604020202020204"/>
+        <a:defRPr sz="1400" b="0" i="0" u="none" strike="noStrike" cap="none">
           <a:solidFill>
             <a:srgbClr val="000000"/>
           </a:solidFill>
-          <a:latin typeface="Arial"/>
-          <a:ea typeface="Arial"/>
-          <a:cs typeface="Arial"/>
-          <a:sym typeface="Arial"/>
+          <a:latin typeface="Arial" panose="020B0604020202020204"/>
+          <a:ea typeface="Arial" panose="020B0604020202020204"/>
+          <a:cs typeface="Arial" panose="020B0604020202020204"/>
+          <a:sym typeface="Arial" panose="020B0604020202020204"/>
         </a:defRPr>
       </a:lvl1pPr>
-      <a:lvl2pPr lvl="1" marR="0" rtl="0" algn="l">
+      <a:lvl2pPr marR="0" lvl="1" algn="l" rtl="0">
         <a:lnSpc>
           <a:spcPct val="100000"/>
         </a:lnSpc>
@@ -6533,18 +6520,18 @@
         <a:buClr>
           <a:srgbClr val="000000"/>
         </a:buClr>
-        <a:buFont typeface="Arial"/>
-        <a:defRPr b="0" i="0" sz="1400" u="none" cap="none" strike="noStrike">
+        <a:buFont typeface="Arial" panose="020B0604020202020204"/>
+        <a:defRPr sz="1400" b="0" i="0" u="none" strike="noStrike" cap="none">
           <a:solidFill>
             <a:srgbClr val="000000"/>
           </a:solidFill>
-          <a:latin typeface="Arial"/>
-          <a:ea typeface="Arial"/>
-          <a:cs typeface="Arial"/>
-          <a:sym typeface="Arial"/>
+          <a:latin typeface="Arial" panose="020B0604020202020204"/>
+          <a:ea typeface="Arial" panose="020B0604020202020204"/>
+          <a:cs typeface="Arial" panose="020B0604020202020204"/>
+          <a:sym typeface="Arial" panose="020B0604020202020204"/>
         </a:defRPr>
       </a:lvl2pPr>
-      <a:lvl3pPr lvl="2" marR="0" rtl="0" algn="l">
+      <a:lvl3pPr marR="0" lvl="2" algn="l" rtl="0">
         <a:lnSpc>
           <a:spcPct val="100000"/>
         </a:lnSpc>
@@ -6557,18 +6544,18 @@
         <a:buClr>
           <a:srgbClr val="000000"/>
         </a:buClr>
-        <a:buFont typeface="Arial"/>
-        <a:defRPr b="0" i="0" sz="1400" u="none" cap="none" strike="noStrike">
+        <a:buFont typeface="Arial" panose="020B0604020202020204"/>
+        <a:defRPr sz="1400" b="0" i="0" u="none" strike="noStrike" cap="none">
           <a:solidFill>
             <a:srgbClr val="000000"/>
           </a:solidFill>
-          <a:latin typeface="Arial"/>
-          <a:ea typeface="Arial"/>
-          <a:cs typeface="Arial"/>
-          <a:sym typeface="Arial"/>
+          <a:latin typeface="Arial" panose="020B0604020202020204"/>
+          <a:ea typeface="Arial" panose="020B0604020202020204"/>
+          <a:cs typeface="Arial" panose="020B0604020202020204"/>
+          <a:sym typeface="Arial" panose="020B0604020202020204"/>
         </a:defRPr>
       </a:lvl3pPr>
-      <a:lvl4pPr lvl="3" marR="0" rtl="0" algn="l">
+      <a:lvl4pPr marR="0" lvl="3" algn="l" rtl="0">
         <a:lnSpc>
           <a:spcPct val="100000"/>
         </a:lnSpc>
@@ -6581,18 +6568,18 @@
         <a:buClr>
           <a:srgbClr val="000000"/>
         </a:buClr>
-        <a:buFont typeface="Arial"/>
-        <a:defRPr b="0" i="0" sz="1400" u="none" cap="none" strike="noStrike">
+        <a:buFont typeface="Arial" panose="020B0604020202020204"/>
+        <a:defRPr sz="1400" b="0" i="0" u="none" strike="noStrike" cap="none">
           <a:solidFill>
             <a:srgbClr val="000000"/>
           </a:solidFill>
-          <a:latin typeface="Arial"/>
-          <a:ea typeface="Arial"/>
-          <a:cs typeface="Arial"/>
-          <a:sym typeface="Arial"/>
+          <a:latin typeface="Arial" panose="020B0604020202020204"/>
+          <a:ea typeface="Arial" panose="020B0604020202020204"/>
+          <a:cs typeface="Arial" panose="020B0604020202020204"/>
+          <a:sym typeface="Arial" panose="020B0604020202020204"/>
         </a:defRPr>
       </a:lvl4pPr>
-      <a:lvl5pPr lvl="4" marR="0" rtl="0" algn="l">
+      <a:lvl5pPr marR="0" lvl="4" algn="l" rtl="0">
         <a:lnSpc>
           <a:spcPct val="100000"/>
         </a:lnSpc>
@@ -6605,18 +6592,18 @@
         <a:buClr>
           <a:srgbClr val="000000"/>
         </a:buClr>
-        <a:buFont typeface="Arial"/>
-        <a:defRPr b="0" i="0" sz="1400" u="none" cap="none" strike="noStrike">
+        <a:buFont typeface="Arial" panose="020B0604020202020204"/>
+        <a:defRPr sz="1400" b="0" i="0" u="none" strike="noStrike" cap="none">
           <a:solidFill>
             <a:srgbClr val="000000"/>
           </a:solidFill>
-          <a:latin typeface="Arial"/>
-          <a:ea typeface="Arial"/>
-          <a:cs typeface="Arial"/>
-          <a:sym typeface="Arial"/>
+          <a:latin typeface="Arial" panose="020B0604020202020204"/>
+          <a:ea typeface="Arial" panose="020B0604020202020204"/>
+          <a:cs typeface="Arial" panose="020B0604020202020204"/>
+          <a:sym typeface="Arial" panose="020B0604020202020204"/>
         </a:defRPr>
       </a:lvl5pPr>
-      <a:lvl6pPr lvl="5" marR="0" rtl="0" algn="l">
+      <a:lvl6pPr marR="0" lvl="5" algn="l" rtl="0">
         <a:lnSpc>
           <a:spcPct val="100000"/>
         </a:lnSpc>
@@ -6629,18 +6616,18 @@
         <a:buClr>
           <a:srgbClr val="000000"/>
         </a:buClr>
-        <a:buFont typeface="Arial"/>
-        <a:defRPr b="0" i="0" sz="1400" u="none" cap="none" strike="noStrike">
+        <a:buFont typeface="Arial" panose="020B0604020202020204"/>
+        <a:defRPr sz="1400" b="0" i="0" u="none" strike="noStrike" cap="none">
           <a:solidFill>
             <a:srgbClr val="000000"/>
           </a:solidFill>
-          <a:latin typeface="Arial"/>
-          <a:ea typeface="Arial"/>
-          <a:cs typeface="Arial"/>
-          <a:sym typeface="Arial"/>
+          <a:latin typeface="Arial" panose="020B0604020202020204"/>
+          <a:ea typeface="Arial" panose="020B0604020202020204"/>
+          <a:cs typeface="Arial" panose="020B0604020202020204"/>
+          <a:sym typeface="Arial" panose="020B0604020202020204"/>
         </a:defRPr>
       </a:lvl6pPr>
-      <a:lvl7pPr lvl="6" marR="0" rtl="0" algn="l">
+      <a:lvl7pPr marR="0" lvl="6" algn="l" rtl="0">
         <a:lnSpc>
           <a:spcPct val="100000"/>
         </a:lnSpc>
@@ -6653,18 +6640,18 @@
         <a:buClr>
           <a:srgbClr val="000000"/>
         </a:buClr>
-        <a:buFont typeface="Arial"/>
-        <a:defRPr b="0" i="0" sz="1400" u="none" cap="none" strike="noStrike">
+        <a:buFont typeface="Arial" panose="020B0604020202020204"/>
+        <a:defRPr sz="1400" b="0" i="0" u="none" strike="noStrike" cap="none">
           <a:solidFill>
             <a:srgbClr val="000000"/>
           </a:solidFill>
-          <a:latin typeface="Arial"/>
-          <a:ea typeface="Arial"/>
-          <a:cs typeface="Arial"/>
-          <a:sym typeface="Arial"/>
+          <a:latin typeface="Arial" panose="020B0604020202020204"/>
+          <a:ea typeface="Arial" panose="020B0604020202020204"/>
+          <a:cs typeface="Arial" panose="020B0604020202020204"/>
+          <a:sym typeface="Arial" panose="020B0604020202020204"/>
         </a:defRPr>
       </a:lvl7pPr>
-      <a:lvl8pPr lvl="7" marR="0" rtl="0" algn="l">
+      <a:lvl8pPr marR="0" lvl="7" algn="l" rtl="0">
         <a:lnSpc>
           <a:spcPct val="100000"/>
         </a:lnSpc>
@@ -6677,18 +6664,18 @@
         <a:buClr>
           <a:srgbClr val="000000"/>
         </a:buClr>
-        <a:buFont typeface="Arial"/>
-        <a:defRPr b="0" i="0" sz="1400" u="none" cap="none" strike="noStrike">
+        <a:buFont typeface="Arial" panose="020B0604020202020204"/>
+        <a:defRPr sz="1400" b="0" i="0" u="none" strike="noStrike" cap="none">
           <a:solidFill>
             <a:srgbClr val="000000"/>
           </a:solidFill>
-          <a:latin typeface="Arial"/>
-          <a:ea typeface="Arial"/>
-          <a:cs typeface="Arial"/>
-          <a:sym typeface="Arial"/>
+          <a:latin typeface="Arial" panose="020B0604020202020204"/>
+          <a:ea typeface="Arial" panose="020B0604020202020204"/>
+          <a:cs typeface="Arial" panose="020B0604020202020204"/>
+          <a:sym typeface="Arial" panose="020B0604020202020204"/>
         </a:defRPr>
       </a:lvl8pPr>
-      <a:lvl9pPr lvl="8" marR="0" rtl="0" algn="l">
+      <a:lvl9pPr marR="0" lvl="8" algn="l" rtl="0">
         <a:lnSpc>
           <a:spcPct val="100000"/>
         </a:lnSpc>
@@ -6701,20 +6688,20 @@
         <a:buClr>
           <a:srgbClr val="000000"/>
         </a:buClr>
-        <a:buFont typeface="Arial"/>
-        <a:defRPr b="0" i="0" sz="1400" u="none" cap="none" strike="noStrike">
+        <a:buFont typeface="Arial" panose="020B0604020202020204"/>
+        <a:defRPr sz="1400" b="0" i="0" u="none" strike="noStrike" cap="none">
           <a:solidFill>
             <a:srgbClr val="000000"/>
           </a:solidFill>
-          <a:latin typeface="Arial"/>
-          <a:ea typeface="Arial"/>
-          <a:cs typeface="Arial"/>
-          <a:sym typeface="Arial"/>
+          <a:latin typeface="Arial" panose="020B0604020202020204"/>
+          <a:ea typeface="Arial" panose="020B0604020202020204"/>
+          <a:cs typeface="Arial" panose="020B0604020202020204"/>
+          <a:sym typeface="Arial" panose="020B0604020202020204"/>
         </a:defRPr>
       </a:lvl9pPr>
     </p:titleStyle>
     <p:bodyStyle>
-      <a:defPPr lvl="0" marR="0" rtl="0" algn="l">
+      <a:defPPr marR="0" lvl="0" algn="l" rtl="0">
         <a:lnSpc>
           <a:spcPct val="100000"/>
         </a:lnSpc>
@@ -6725,7 +6712,7 @@
           <a:spcPts val="0"/>
         </a:spcAft>
       </a:defPPr>
-      <a:lvl1pPr lvl="0" marR="0" rtl="0" algn="l">
+      <a:lvl1pPr marR="0" lvl="0" algn="l" rtl="0">
         <a:lnSpc>
           <a:spcPct val="100000"/>
         </a:lnSpc>
@@ -6738,18 +6725,18 @@
         <a:buClr>
           <a:srgbClr val="000000"/>
         </a:buClr>
-        <a:buFont typeface="Arial"/>
-        <a:defRPr b="0" i="0" sz="1400" u="none" cap="none" strike="noStrike">
+        <a:buFont typeface="Arial" panose="020B0604020202020204"/>
+        <a:defRPr sz="1400" b="0" i="0" u="none" strike="noStrike" cap="none">
           <a:solidFill>
             <a:srgbClr val="000000"/>
           </a:solidFill>
-          <a:latin typeface="Arial"/>
-          <a:ea typeface="Arial"/>
-          <a:cs typeface="Arial"/>
-          <a:sym typeface="Arial"/>
+          <a:latin typeface="Arial" panose="020B0604020202020204"/>
+          <a:ea typeface="Arial" panose="020B0604020202020204"/>
+          <a:cs typeface="Arial" panose="020B0604020202020204"/>
+          <a:sym typeface="Arial" panose="020B0604020202020204"/>
         </a:defRPr>
       </a:lvl1pPr>
-      <a:lvl2pPr lvl="1" marR="0" rtl="0" algn="l">
+      <a:lvl2pPr marR="0" lvl="1" algn="l" rtl="0">
         <a:lnSpc>
           <a:spcPct val="100000"/>
         </a:lnSpc>
@@ -6762,18 +6749,18 @@
         <a:buClr>
           <a:srgbClr val="000000"/>
         </a:buClr>
-        <a:buFont typeface="Arial"/>
-        <a:defRPr b="0" i="0" sz="1400" u="none" cap="none" strike="noStrike">
+        <a:buFont typeface="Arial" panose="020B0604020202020204"/>
+        <a:defRPr sz="1400" b="0" i="0" u="none" strike="noStrike" cap="none">
           <a:solidFill>
             <a:srgbClr val="000000"/>
           </a:solidFill>
-          <a:latin typeface="Arial"/>
-          <a:ea typeface="Arial"/>
-          <a:cs typeface="Arial"/>
-          <a:sym typeface="Arial"/>
+          <a:latin typeface="Arial" panose="020B0604020202020204"/>
+          <a:ea typeface="Arial" panose="020B0604020202020204"/>
+          <a:cs typeface="Arial" panose="020B0604020202020204"/>
+          <a:sym typeface="Arial" panose="020B0604020202020204"/>
         </a:defRPr>
       </a:lvl2pPr>
-      <a:lvl3pPr lvl="2" marR="0" rtl="0" algn="l">
+      <a:lvl3pPr marR="0" lvl="2" algn="l" rtl="0">
         <a:lnSpc>
           <a:spcPct val="100000"/>
         </a:lnSpc>
@@ -6786,18 +6773,18 @@
         <a:buClr>
           <a:srgbClr val="000000"/>
         </a:buClr>
-        <a:buFont typeface="Arial"/>
-        <a:defRPr b="0" i="0" sz="1400" u="none" cap="none" strike="noStrike">
+        <a:buFont typeface="Arial" panose="020B0604020202020204"/>
+        <a:defRPr sz="1400" b="0" i="0" u="none" strike="noStrike" cap="none">
           <a:solidFill>
             <a:srgbClr val="000000"/>
           </a:solidFill>
-          <a:latin typeface="Arial"/>
-          <a:ea typeface="Arial"/>
-          <a:cs typeface="Arial"/>
-          <a:sym typeface="Arial"/>
+          <a:latin typeface="Arial" panose="020B0604020202020204"/>
+          <a:ea typeface="Arial" panose="020B0604020202020204"/>
+          <a:cs typeface="Arial" panose="020B0604020202020204"/>
+          <a:sym typeface="Arial" panose="020B0604020202020204"/>
         </a:defRPr>
       </a:lvl3pPr>
-      <a:lvl4pPr lvl="3" marR="0" rtl="0" algn="l">
+      <a:lvl4pPr marR="0" lvl="3" algn="l" rtl="0">
         <a:lnSpc>
           <a:spcPct val="100000"/>
         </a:lnSpc>
@@ -6810,18 +6797,18 @@
         <a:buClr>
           <a:srgbClr val="000000"/>
         </a:buClr>
-        <a:buFont typeface="Arial"/>
-        <a:defRPr b="0" i="0" sz="1400" u="none" cap="none" strike="noStrike">
+        <a:buFont typeface="Arial" panose="020B0604020202020204"/>
+        <a:defRPr sz="1400" b="0" i="0" u="none" strike="noStrike" cap="none">
           <a:solidFill>
             <a:srgbClr val="000000"/>
           </a:solidFill>
-          <a:latin typeface="Arial"/>
-          <a:ea typeface="Arial"/>
-          <a:cs typeface="Arial"/>
-          <a:sym typeface="Arial"/>
+          <a:latin typeface="Arial" panose="020B0604020202020204"/>
+          <a:ea typeface="Arial" panose="020B0604020202020204"/>
+          <a:cs typeface="Arial" panose="020B0604020202020204"/>
+          <a:sym typeface="Arial" panose="020B0604020202020204"/>
         </a:defRPr>
       </a:lvl4pPr>
-      <a:lvl5pPr lvl="4" marR="0" rtl="0" algn="l">
+      <a:lvl5pPr marR="0" lvl="4" algn="l" rtl="0">
         <a:lnSpc>
           <a:spcPct val="100000"/>
         </a:lnSpc>
@@ -6834,18 +6821,18 @@
         <a:buClr>
           <a:srgbClr val="000000"/>
         </a:buClr>
-        <a:buFont typeface="Arial"/>
-        <a:defRPr b="0" i="0" sz="1400" u="none" cap="none" strike="noStrike">
+        <a:buFont typeface="Arial" panose="020B0604020202020204"/>
+        <a:defRPr sz="1400" b="0" i="0" u="none" strike="noStrike" cap="none">
           <a:solidFill>
             <a:srgbClr val="000000"/>
           </a:solidFill>
-          <a:latin typeface="Arial"/>
-          <a:ea typeface="Arial"/>
-          <a:cs typeface="Arial"/>
-          <a:sym typeface="Arial"/>
+          <a:latin typeface="Arial" panose="020B0604020202020204"/>
+          <a:ea typeface="Arial" panose="020B0604020202020204"/>
+          <a:cs typeface="Arial" panose="020B0604020202020204"/>
+          <a:sym typeface="Arial" panose="020B0604020202020204"/>
         </a:defRPr>
       </a:lvl5pPr>
-      <a:lvl6pPr lvl="5" marR="0" rtl="0" algn="l">
+      <a:lvl6pPr marR="0" lvl="5" algn="l" rtl="0">
         <a:lnSpc>
           <a:spcPct val="100000"/>
         </a:lnSpc>
@@ -6858,18 +6845,18 @@
         <a:buClr>
           <a:srgbClr val="000000"/>
         </a:buClr>
-        <a:buFont typeface="Arial"/>
-        <a:defRPr b="0" i="0" sz="1400" u="none" cap="none" strike="noStrike">
+        <a:buFont typeface="Arial" panose="020B0604020202020204"/>
+        <a:defRPr sz="1400" b="0" i="0" u="none" strike="noStrike" cap="none">
           <a:solidFill>
             <a:srgbClr val="000000"/>
           </a:solidFill>
-          <a:latin typeface="Arial"/>
-          <a:ea typeface="Arial"/>
-          <a:cs typeface="Arial"/>
-          <a:sym typeface="Arial"/>
+          <a:latin typeface="Arial" panose="020B0604020202020204"/>
+          <a:ea typeface="Arial" panose="020B0604020202020204"/>
+          <a:cs typeface="Arial" panose="020B0604020202020204"/>
+          <a:sym typeface="Arial" panose="020B0604020202020204"/>
         </a:defRPr>
       </a:lvl6pPr>
-      <a:lvl7pPr lvl="6" marR="0" rtl="0" algn="l">
+      <a:lvl7pPr marR="0" lvl="6" algn="l" rtl="0">
         <a:lnSpc>
           <a:spcPct val="100000"/>
         </a:lnSpc>
@@ -6882,18 +6869,18 @@
         <a:buClr>
           <a:srgbClr val="000000"/>
         </a:buClr>
-        <a:buFont typeface="Arial"/>
-        <a:defRPr b="0" i="0" sz="1400" u="none" cap="none" strike="noStrike">
+        <a:buFont typeface="Arial" panose="020B0604020202020204"/>
+        <a:defRPr sz="1400" b="0" i="0" u="none" strike="noStrike" cap="none">
           <a:solidFill>
             <a:srgbClr val="000000"/>
           </a:solidFill>
-          <a:latin typeface="Arial"/>
-          <a:ea typeface="Arial"/>
-          <a:cs typeface="Arial"/>
-          <a:sym typeface="Arial"/>
+          <a:latin typeface="Arial" panose="020B0604020202020204"/>
+          <a:ea typeface="Arial" panose="020B0604020202020204"/>
+          <a:cs typeface="Arial" panose="020B0604020202020204"/>
+          <a:sym typeface="Arial" panose="020B0604020202020204"/>
         </a:defRPr>
       </a:lvl7pPr>
-      <a:lvl8pPr lvl="7" marR="0" rtl="0" algn="l">
+      <a:lvl8pPr marR="0" lvl="7" algn="l" rtl="0">
         <a:lnSpc>
           <a:spcPct val="100000"/>
         </a:lnSpc>
@@ -6906,18 +6893,18 @@
         <a:buClr>
           <a:srgbClr val="000000"/>
         </a:buClr>
-        <a:buFont typeface="Arial"/>
-        <a:defRPr b="0" i="0" sz="1400" u="none" cap="none" strike="noStrike">
+        <a:buFont typeface="Arial" panose="020B0604020202020204"/>
+        <a:defRPr sz="1400" b="0" i="0" u="none" strike="noStrike" cap="none">
           <a:solidFill>
             <a:srgbClr val="000000"/>
           </a:solidFill>
-          <a:latin typeface="Arial"/>
-          <a:ea typeface="Arial"/>
-          <a:cs typeface="Arial"/>
-          <a:sym typeface="Arial"/>
+          <a:latin typeface="Arial" panose="020B0604020202020204"/>
+          <a:ea typeface="Arial" panose="020B0604020202020204"/>
+          <a:cs typeface="Arial" panose="020B0604020202020204"/>
+          <a:sym typeface="Arial" panose="020B0604020202020204"/>
         </a:defRPr>
       </a:lvl8pPr>
-      <a:lvl9pPr lvl="8" marR="0" rtl="0" algn="l">
+      <a:lvl9pPr marR="0" lvl="8" algn="l" rtl="0">
         <a:lnSpc>
           <a:spcPct val="100000"/>
         </a:lnSpc>
@@ -6930,20 +6917,20 @@
         <a:buClr>
           <a:srgbClr val="000000"/>
         </a:buClr>
-        <a:buFont typeface="Arial"/>
-        <a:defRPr b="0" i="0" sz="1400" u="none" cap="none" strike="noStrike">
+        <a:buFont typeface="Arial" panose="020B0604020202020204"/>
+        <a:defRPr sz="1400" b="0" i="0" u="none" strike="noStrike" cap="none">
           <a:solidFill>
             <a:srgbClr val="000000"/>
           </a:solidFill>
-          <a:latin typeface="Arial"/>
-          <a:ea typeface="Arial"/>
-          <a:cs typeface="Arial"/>
-          <a:sym typeface="Arial"/>
+          <a:latin typeface="Arial" panose="020B0604020202020204"/>
+          <a:ea typeface="Arial" panose="020B0604020202020204"/>
+          <a:cs typeface="Arial" panose="020B0604020202020204"/>
+          <a:sym typeface="Arial" panose="020B0604020202020204"/>
         </a:defRPr>
       </a:lvl9pPr>
     </p:bodyStyle>
     <p:otherStyle>
-      <a:defPPr lvl="0" marR="0" rtl="0" algn="l">
+      <a:defPPr marR="0" lvl="0" algn="l" rtl="0">
         <a:lnSpc>
           <a:spcPct val="100000"/>
         </a:lnSpc>
@@ -6954,7 +6941,7 @@
           <a:spcPts val="0"/>
         </a:spcAft>
       </a:defPPr>
-      <a:lvl1pPr lvl="0" marR="0" rtl="0" algn="l">
+      <a:lvl1pPr marR="0" lvl="0" algn="l" rtl="0">
         <a:lnSpc>
           <a:spcPct val="100000"/>
         </a:lnSpc>
@@ -6967,18 +6954,18 @@
         <a:buClr>
           <a:srgbClr val="000000"/>
         </a:buClr>
-        <a:buFont typeface="Arial"/>
-        <a:defRPr b="0" i="0" sz="1400" u="none" cap="none" strike="noStrike">
+        <a:buFont typeface="Arial" panose="020B0604020202020204"/>
+        <a:defRPr sz="1400" b="0" i="0" u="none" strike="noStrike" cap="none">
           <a:solidFill>
             <a:srgbClr val="000000"/>
           </a:solidFill>
-          <a:latin typeface="Arial"/>
-          <a:ea typeface="Arial"/>
-          <a:cs typeface="Arial"/>
-          <a:sym typeface="Arial"/>
+          <a:latin typeface="Arial" panose="020B0604020202020204"/>
+          <a:ea typeface="Arial" panose="020B0604020202020204"/>
+          <a:cs typeface="Arial" panose="020B0604020202020204"/>
+          <a:sym typeface="Arial" panose="020B0604020202020204"/>
         </a:defRPr>
       </a:lvl1pPr>
-      <a:lvl2pPr lvl="1" marR="0" rtl="0" algn="l">
+      <a:lvl2pPr marR="0" lvl="1" algn="l" rtl="0">
         <a:lnSpc>
           <a:spcPct val="100000"/>
         </a:lnSpc>
@@ -6991,18 +6978,18 @@
         <a:buClr>
           <a:srgbClr val="000000"/>
         </a:buClr>
-        <a:buFont typeface="Arial"/>
-        <a:defRPr b="0" i="0" sz="1400" u="none" cap="none" strike="noStrike">
+        <a:buFont typeface="Arial" panose="020B0604020202020204"/>
+        <a:defRPr sz="1400" b="0" i="0" u="none" strike="noStrike" cap="none">
           <a:solidFill>
             <a:srgbClr val="000000"/>
           </a:solidFill>
-          <a:latin typeface="Arial"/>
-          <a:ea typeface="Arial"/>
-          <a:cs typeface="Arial"/>
-          <a:sym typeface="Arial"/>
+          <a:latin typeface="Arial" panose="020B0604020202020204"/>
+          <a:ea typeface="Arial" panose="020B0604020202020204"/>
+          <a:cs typeface="Arial" panose="020B0604020202020204"/>
+          <a:sym typeface="Arial" panose="020B0604020202020204"/>
         </a:defRPr>
       </a:lvl2pPr>
-      <a:lvl3pPr lvl="2" marR="0" rtl="0" algn="l">
+      <a:lvl3pPr marR="0" lvl="2" algn="l" rtl="0">
         <a:lnSpc>
           <a:spcPct val="100000"/>
         </a:lnSpc>
@@ -7015,18 +7002,18 @@
         <a:buClr>
           <a:srgbClr val="000000"/>
         </a:buClr>
-        <a:buFont typeface="Arial"/>
-        <a:defRPr b="0" i="0" sz="1400" u="none" cap="none" strike="noStrike">
+        <a:buFont typeface="Arial" panose="020B0604020202020204"/>
+        <a:defRPr sz="1400" b="0" i="0" u="none" strike="noStrike" cap="none">
           <a:solidFill>
             <a:srgbClr val="000000"/>
           </a:solidFill>
-          <a:latin typeface="Arial"/>
-          <a:ea typeface="Arial"/>
-          <a:cs typeface="Arial"/>
-          <a:sym typeface="Arial"/>
+          <a:latin typeface="Arial" panose="020B0604020202020204"/>
+          <a:ea typeface="Arial" panose="020B0604020202020204"/>
+          <a:cs typeface="Arial" panose="020B0604020202020204"/>
+          <a:sym typeface="Arial" panose="020B0604020202020204"/>
         </a:defRPr>
       </a:lvl3pPr>
-      <a:lvl4pPr lvl="3" marR="0" rtl="0" algn="l">
+      <a:lvl4pPr marR="0" lvl="3" algn="l" rtl="0">
         <a:lnSpc>
           <a:spcPct val="100000"/>
         </a:lnSpc>
@@ -7039,18 +7026,18 @@
         <a:buClr>
           <a:srgbClr val="000000"/>
         </a:buClr>
-        <a:buFont typeface="Arial"/>
-        <a:defRPr b="0" i="0" sz="1400" u="none" cap="none" strike="noStrike">
+        <a:buFont typeface="Arial" panose="020B0604020202020204"/>
+        <a:defRPr sz="1400" b="0" i="0" u="none" strike="noStrike" cap="none">
           <a:solidFill>
             <a:srgbClr val="000000"/>
           </a:solidFill>
-          <a:latin typeface="Arial"/>
-          <a:ea typeface="Arial"/>
-          <a:cs typeface="Arial"/>
-          <a:sym typeface="Arial"/>
+          <a:latin typeface="Arial" panose="020B0604020202020204"/>
+          <a:ea typeface="Arial" panose="020B0604020202020204"/>
+          <a:cs typeface="Arial" panose="020B0604020202020204"/>
+          <a:sym typeface="Arial" panose="020B0604020202020204"/>
         </a:defRPr>
       </a:lvl4pPr>
-      <a:lvl5pPr lvl="4" marR="0" rtl="0" algn="l">
+      <a:lvl5pPr marR="0" lvl="4" algn="l" rtl="0">
         <a:lnSpc>
           <a:spcPct val="100000"/>
         </a:lnSpc>
@@ -7063,18 +7050,18 @@
         <a:buClr>
           <a:srgbClr val="000000"/>
         </a:buClr>
-        <a:buFont typeface="Arial"/>
-        <a:defRPr b="0" i="0" sz="1400" u="none" cap="none" strike="noStrike">
+        <a:buFont typeface="Arial" panose="020B0604020202020204"/>
+        <a:defRPr sz="1400" b="0" i="0" u="none" strike="noStrike" cap="none">
           <a:solidFill>
             <a:srgbClr val="000000"/>
           </a:solidFill>
-          <a:latin typeface="Arial"/>
-          <a:ea typeface="Arial"/>
-          <a:cs typeface="Arial"/>
-          <a:sym typeface="Arial"/>
+          <a:latin typeface="Arial" panose="020B0604020202020204"/>
+          <a:ea typeface="Arial" panose="020B0604020202020204"/>
+          <a:cs typeface="Arial" panose="020B0604020202020204"/>
+          <a:sym typeface="Arial" panose="020B0604020202020204"/>
         </a:defRPr>
       </a:lvl5pPr>
-      <a:lvl6pPr lvl="5" marR="0" rtl="0" algn="l">
+      <a:lvl6pPr marR="0" lvl="5" algn="l" rtl="0">
         <a:lnSpc>
           <a:spcPct val="100000"/>
         </a:lnSpc>
@@ -7087,18 +7074,18 @@
         <a:buClr>
           <a:srgbClr val="000000"/>
         </a:buClr>
-        <a:buFont typeface="Arial"/>
-        <a:defRPr b="0" i="0" sz="1400" u="none" cap="none" strike="noStrike">
+        <a:buFont typeface="Arial" panose="020B0604020202020204"/>
+        <a:defRPr sz="1400" b="0" i="0" u="none" strike="noStrike" cap="none">
           <a:solidFill>
             <a:srgbClr val="000000"/>
           </a:solidFill>
-          <a:latin typeface="Arial"/>
-          <a:ea typeface="Arial"/>
-          <a:cs typeface="Arial"/>
-          <a:sym typeface="Arial"/>
+          <a:latin typeface="Arial" panose="020B0604020202020204"/>
+          <a:ea typeface="Arial" panose="020B0604020202020204"/>
+          <a:cs typeface="Arial" panose="020B0604020202020204"/>
+          <a:sym typeface="Arial" panose="020B0604020202020204"/>
         </a:defRPr>
       </a:lvl6pPr>
-      <a:lvl7pPr lvl="6" marR="0" rtl="0" algn="l">
+      <a:lvl7pPr marR="0" lvl="6" algn="l" rtl="0">
         <a:lnSpc>
           <a:spcPct val="100000"/>
         </a:lnSpc>
@@ -7111,18 +7098,18 @@
         <a:buClr>
           <a:srgbClr val="000000"/>
         </a:buClr>
-        <a:buFont typeface="Arial"/>
-        <a:defRPr b="0" i="0" sz="1400" u="none" cap="none" strike="noStrike">
+        <a:buFont typeface="Arial" panose="020B0604020202020204"/>
+        <a:defRPr sz="1400" b="0" i="0" u="none" strike="noStrike" cap="none">
           <a:solidFill>
             <a:srgbClr val="000000"/>
           </a:solidFill>
-          <a:latin typeface="Arial"/>
-          <a:ea typeface="Arial"/>
-          <a:cs typeface="Arial"/>
-          <a:sym typeface="Arial"/>
+          <a:latin typeface="Arial" panose="020B0604020202020204"/>
+          <a:ea typeface="Arial" panose="020B0604020202020204"/>
+          <a:cs typeface="Arial" panose="020B0604020202020204"/>
+          <a:sym typeface="Arial" panose="020B0604020202020204"/>
         </a:defRPr>
       </a:lvl7pPr>
-      <a:lvl8pPr lvl="7" marR="0" rtl="0" algn="l">
+      <a:lvl8pPr marR="0" lvl="7" algn="l" rtl="0">
         <a:lnSpc>
           <a:spcPct val="100000"/>
         </a:lnSpc>
@@ -7135,18 +7122,18 @@
         <a:buClr>
           <a:srgbClr val="000000"/>
         </a:buClr>
-        <a:buFont typeface="Arial"/>
-        <a:defRPr b="0" i="0" sz="1400" u="none" cap="none" strike="noStrike">
+        <a:buFont typeface="Arial" panose="020B0604020202020204"/>
+        <a:defRPr sz="1400" b="0" i="0" u="none" strike="noStrike" cap="none">
           <a:solidFill>
             <a:srgbClr val="000000"/>
           </a:solidFill>
-          <a:latin typeface="Arial"/>
-          <a:ea typeface="Arial"/>
-          <a:cs typeface="Arial"/>
-          <a:sym typeface="Arial"/>
+          <a:latin typeface="Arial" panose="020B0604020202020204"/>
+          <a:ea typeface="Arial" panose="020B0604020202020204"/>
+          <a:cs typeface="Arial" panose="020B0604020202020204"/>
+          <a:sym typeface="Arial" panose="020B0604020202020204"/>
         </a:defRPr>
       </a:lvl8pPr>
-      <a:lvl9pPr lvl="8" marR="0" rtl="0" algn="l">
+      <a:lvl9pPr marR="0" lvl="8" algn="l" rtl="0">
         <a:lnSpc>
           <a:spcPct val="100000"/>
         </a:lnSpc>
@@ -7159,15 +7146,15 @@
         <a:buClr>
           <a:srgbClr val="000000"/>
         </a:buClr>
-        <a:buFont typeface="Arial"/>
-        <a:defRPr b="0" i="0" sz="1400" u="none" cap="none" strike="noStrike">
+        <a:buFont typeface="Arial" panose="020B0604020202020204"/>
+        <a:defRPr sz="1400" b="0" i="0" u="none" strike="noStrike" cap="none">
           <a:solidFill>
             <a:srgbClr val="000000"/>
           </a:solidFill>
-          <a:latin typeface="Arial"/>
-          <a:ea typeface="Arial"/>
-          <a:cs typeface="Arial"/>
-          <a:sym typeface="Arial"/>
+          <a:latin typeface="Arial" panose="020B0604020202020204"/>
+          <a:ea typeface="Arial" panose="020B0604020202020204"/>
+          <a:cs typeface="Arial" panose="020B0604020202020204"/>
+          <a:sym typeface="Arial" panose="020B0604020202020204"/>
         </a:defRPr>
       </a:lvl9pPr>
     </p:otherStyle>
@@ -7176,7 +7163,7 @@
 </file>
 
 <file path=ppt/slides/slide1.xml><?xml version="1.0" encoding="utf-8"?>
-<p:sld xmlns:a="http://schemas.openxmlformats.org/drawingml/2006/main" xmlns:r="http://schemas.openxmlformats.org/officeDocument/2006/relationships" xmlns:mc="http://schemas.openxmlformats.org/markup-compatibility/2006" xmlns:mv="urn:schemas-microsoft-com:mac:vml" xmlns:p="http://schemas.openxmlformats.org/presentationml/2006/main" xmlns:c="http://schemas.openxmlformats.org/drawingml/2006/chart" xmlns:dgm="http://schemas.openxmlformats.org/drawingml/2006/diagram" xmlns:o="urn:schemas-microsoft-com:office:office" xmlns:v="urn:schemas-microsoft-com:vml" xmlns:pvml="urn:schemas-microsoft-com:office:powerpoint" xmlns:com="http://schemas.openxmlformats.org/drawingml/2006/compatibility" xmlns:p14="http://schemas.microsoft.com/office/powerpoint/2010/main" xmlns:p15="http://schemas.microsoft.com/office/powerpoint/2012/main" xmlns:ahyp="http://schemas.microsoft.com/office/drawing/2018/hyperlinkcolor">
+<p:sld xmlns:a="http://schemas.openxmlformats.org/drawingml/2006/main" xmlns:r="http://schemas.openxmlformats.org/officeDocument/2006/relationships" xmlns:p="http://schemas.openxmlformats.org/presentationml/2006/main">
   <p:cSld>
     <p:spTree>
       <p:nvGrpSpPr>
@@ -7210,12 +7197,12 @@
           </a:prstGeom>
         </p:spPr>
         <p:txBody>
-          <a:bodyPr anchorCtr="0" anchor="b" bIns="91425" lIns="91425" spcFirstLastPara="1" rIns="91425" wrap="square" tIns="91425">
+          <a:bodyPr spcFirstLastPara="1" wrap="square" lIns="91425" tIns="91425" rIns="91425" bIns="91425" anchor="b" anchorCtr="0">
             <a:normAutofit/>
           </a:bodyPr>
           <a:lstStyle/>
           <a:p>
-            <a:pPr indent="0" lvl="0" marL="0" rtl="0" algn="l">
+            <a:pPr marL="0" lvl="0" indent="0" algn="l" rtl="0">
               <a:spcBef>
                 <a:spcPts val="0"/>
               </a:spcBef>
@@ -7225,10 +7212,10 @@
               <a:buNone/>
             </a:pPr>
             <a:r>
-              <a:rPr lang="ru"/>
+              <a:rPr lang="en-US"/>
               <a:t>CRM для Центров Дополнительного образования</a:t>
             </a:r>
-            <a:endParaRPr/>
+            <a:endParaRPr lang="en-US"/>
           </a:p>
         </p:txBody>
       </p:sp>
@@ -7237,25 +7224,25 @@
           <p:cNvPr id="60" name="Google Shape;60;p13"/>
           <p:cNvSpPr txBox="1"/>
           <p:nvPr>
-            <p:ph idx="1" type="subTitle"/>
+            <p:ph type="subTitle" idx="1"/>
           </p:nvPr>
         </p:nvSpPr>
         <p:spPr>
           <a:xfrm>
-            <a:off x="6572175" y="4244300"/>
-            <a:ext cx="2571900" cy="1041300"/>
+            <a:off x="5545455" y="3912235"/>
+            <a:ext cx="3488055" cy="1041400"/>
           </a:xfrm>
           <a:prstGeom prst="rect">
             <a:avLst/>
           </a:prstGeom>
         </p:spPr>
         <p:txBody>
-          <a:bodyPr anchorCtr="0" anchor="t" bIns="91425" lIns="91425" spcFirstLastPara="1" rIns="91425" wrap="square" tIns="91425">
+          <a:bodyPr spcFirstLastPara="1" wrap="square" lIns="91425" tIns="91425" rIns="91425" bIns="91425" anchor="t" anchorCtr="0">
             <a:noAutofit/>
           </a:bodyPr>
           <a:lstStyle/>
           <a:p>
-            <a:pPr indent="0" lvl="0" marL="0" rtl="0" algn="l">
+            <a:pPr marL="0" lvl="0" indent="0" algn="l" rtl="0">
               <a:spcBef>
                 <a:spcPts val="0"/>
               </a:spcBef>
@@ -7265,10 +7252,26 @@
               <a:buNone/>
             </a:pPr>
             <a:r>
-              <a:rPr lang="ru" sz="2900"/>
+              <a:rPr lang="en-US" sz="2900"/>
               <a:t>Очилов Артур</a:t>
             </a:r>
-            <a:endParaRPr sz="2900"/>
+            <a:endParaRPr lang="en-US" sz="2900"/>
+          </a:p>
+          <a:p>
+            <a:pPr marL="0" lvl="0" indent="0" algn="l" rtl="0">
+              <a:spcBef>
+                <a:spcPts val="0"/>
+              </a:spcBef>
+              <a:spcAft>
+                <a:spcPts val="0"/>
+              </a:spcAft>
+              <a:buNone/>
+            </a:pPr>
+            <a:r>
+              <a:rPr lang="ru-RU" sz="2900"/>
+              <a:t>Сидакова Вероника</a:t>
+            </a:r>
+            <a:endParaRPr lang="ru-RU" sz="2900"/>
           </a:p>
         </p:txBody>
       </p:sp>
@@ -7281,7 +7284,7 @@
 </file>
 
 <file path=ppt/slides/slide10.xml><?xml version="1.0" encoding="utf-8"?>
-<p:sld xmlns:a="http://schemas.openxmlformats.org/drawingml/2006/main" xmlns:r="http://schemas.openxmlformats.org/officeDocument/2006/relationships" xmlns:mc="http://schemas.openxmlformats.org/markup-compatibility/2006" xmlns:mv="urn:schemas-microsoft-com:mac:vml" xmlns:p="http://schemas.openxmlformats.org/presentationml/2006/main" xmlns:c="http://schemas.openxmlformats.org/drawingml/2006/chart" xmlns:dgm="http://schemas.openxmlformats.org/drawingml/2006/diagram" xmlns:o="urn:schemas-microsoft-com:office:office" xmlns:v="urn:schemas-microsoft-com:vml" xmlns:pvml="urn:schemas-microsoft-com:office:powerpoint" xmlns:com="http://schemas.openxmlformats.org/drawingml/2006/compatibility" xmlns:p14="http://schemas.microsoft.com/office/powerpoint/2010/main" xmlns:p15="http://schemas.microsoft.com/office/powerpoint/2012/main" xmlns:ahyp="http://schemas.microsoft.com/office/drawing/2018/hyperlinkcolor">
+<p:sld xmlns:a="http://schemas.openxmlformats.org/drawingml/2006/main" xmlns:r="http://schemas.openxmlformats.org/officeDocument/2006/relationships" xmlns:p="http://schemas.openxmlformats.org/presentationml/2006/main">
   <p:cSld>
     <p:spTree>
       <p:nvGrpSpPr>
@@ -7315,12 +7318,12 @@
           </a:prstGeom>
         </p:spPr>
         <p:txBody>
-          <a:bodyPr anchorCtr="0" anchor="t" bIns="91425" lIns="91425" spcFirstLastPara="1" rIns="91425" wrap="square" tIns="91425">
+          <a:bodyPr spcFirstLastPara="1" wrap="square" lIns="91425" tIns="91425" rIns="91425" bIns="91425" anchor="t" anchorCtr="0">
             <a:normAutofit/>
           </a:bodyPr>
           <a:lstStyle/>
           <a:p>
-            <a:pPr indent="0" lvl="0" marL="0" rtl="0" algn="l">
+            <a:pPr marL="0" lvl="0" indent="0" algn="l" rtl="0">
               <a:spcBef>
                 <a:spcPts val="0"/>
               </a:spcBef>
@@ -7330,7 +7333,7 @@
               <a:buNone/>
             </a:pPr>
             <a:r>
-              <a:rPr lang="ru" sz="6500"/>
+              <a:rPr lang="en-US" sz="6500"/>
               <a:t>Спасибо за внимание!</a:t>
             </a:r>
             <a:endParaRPr sz="6500"/>
@@ -7346,7 +7349,7 @@
 </file>
 
 <file path=ppt/slides/slide2.xml><?xml version="1.0" encoding="utf-8"?>
-<p:sld xmlns:a="http://schemas.openxmlformats.org/drawingml/2006/main" xmlns:r="http://schemas.openxmlformats.org/officeDocument/2006/relationships" xmlns:mc="http://schemas.openxmlformats.org/markup-compatibility/2006" xmlns:mv="urn:schemas-microsoft-com:mac:vml" xmlns:p="http://schemas.openxmlformats.org/presentationml/2006/main" xmlns:c="http://schemas.openxmlformats.org/drawingml/2006/chart" xmlns:dgm="http://schemas.openxmlformats.org/drawingml/2006/diagram" xmlns:o="urn:schemas-microsoft-com:office:office" xmlns:v="urn:schemas-microsoft-com:vml" xmlns:pvml="urn:schemas-microsoft-com:office:powerpoint" xmlns:com="http://schemas.openxmlformats.org/drawingml/2006/compatibility" xmlns:p14="http://schemas.microsoft.com/office/powerpoint/2010/main" xmlns:p15="http://schemas.microsoft.com/office/powerpoint/2012/main" xmlns:ahyp="http://schemas.microsoft.com/office/drawing/2018/hyperlinkcolor">
+<p:sld xmlns:a="http://schemas.openxmlformats.org/drawingml/2006/main" xmlns:r="http://schemas.openxmlformats.org/officeDocument/2006/relationships" xmlns:p="http://schemas.openxmlformats.org/presentationml/2006/main">
   <p:cSld>
     <p:spTree>
       <p:nvGrpSpPr>
@@ -7380,12 +7383,12 @@
           </a:prstGeom>
         </p:spPr>
         <p:txBody>
-          <a:bodyPr anchorCtr="0" anchor="t" bIns="91425" lIns="91425" spcFirstLastPara="1" rIns="91425" wrap="square" tIns="91425">
+          <a:bodyPr spcFirstLastPara="1" wrap="square" lIns="91425" tIns="91425" rIns="91425" bIns="91425" anchor="t" anchorCtr="0">
             <a:normAutofit fontScale="90000"/>
           </a:bodyPr>
           <a:lstStyle/>
           <a:p>
-            <a:pPr indent="0" lvl="0" marL="0" rtl="0" algn="l">
+            <a:pPr marL="0" lvl="0" indent="0" algn="l" rtl="0">
               <a:spcBef>
                 <a:spcPts val="0"/>
               </a:spcBef>
@@ -7395,10 +7398,10 @@
               <a:buNone/>
             </a:pPr>
             <a:r>
-              <a:rPr lang="ru"/>
+              <a:rPr lang="en-US"/>
               <a:t>В чем цель проекта?</a:t>
             </a:r>
-            <a:endParaRPr/>
+            <a:endParaRPr lang="en-US"/>
           </a:p>
         </p:txBody>
       </p:sp>
@@ -7407,7 +7410,7 @@
           <p:cNvPr id="66" name="Google Shape;66;p14"/>
           <p:cNvSpPr txBox="1"/>
           <p:nvPr>
-            <p:ph idx="1" type="body"/>
+            <p:ph type="body" idx="1"/>
           </p:nvPr>
         </p:nvSpPr>
         <p:spPr>
@@ -7420,12 +7423,12 @@
           </a:prstGeom>
         </p:spPr>
         <p:txBody>
-          <a:bodyPr anchorCtr="0" anchor="t" bIns="91425" lIns="91425" spcFirstLastPara="1" rIns="91425" wrap="square" tIns="91425">
+          <a:bodyPr spcFirstLastPara="1" wrap="square" lIns="91425" tIns="91425" rIns="91425" bIns="91425" anchor="t" anchorCtr="0">
             <a:normAutofit/>
           </a:bodyPr>
           <a:lstStyle/>
           <a:p>
-            <a:pPr indent="0" lvl="0" marL="0" rtl="0" algn="l">
+            <a:pPr marL="0" lvl="0" indent="0" algn="l" rtl="0">
               <a:spcBef>
                 <a:spcPts val="0"/>
               </a:spcBef>
@@ -7435,13 +7438,13 @@
               <a:buNone/>
             </a:pPr>
             <a:r>
-              <a:rPr lang="ru"/>
+              <a:rPr lang="en-US"/>
               <a:t>Преподавателям в ЦДО приходится работать с бумажками, и вести учет учеников карандашем - Это очень неудобно, а главное поиск и хранение таких документов тратит много места и времени. Также не стоит забывать о человеческом факторе. </a:t>
             </a:r>
-            <a:endParaRPr/>
+            <a:endParaRPr lang="en-US"/>
           </a:p>
           <a:p>
-            <a:pPr indent="0" lvl="0" marL="0" rtl="0" algn="l">
+            <a:pPr marL="0" lvl="0" indent="0" algn="l" rtl="0">
               <a:spcBef>
                 <a:spcPts val="1200"/>
               </a:spcBef>
@@ -7450,13 +7453,9 @@
               </a:spcAft>
               <a:buNone/>
             </a:pPr>
-            <a:r>
-              <a:t/>
-            </a:r>
-            <a:endParaRPr/>
           </a:p>
           <a:p>
-            <a:pPr indent="0" lvl="0" marL="0" rtl="0" algn="l">
+            <a:pPr marL="0" lvl="0" indent="0" algn="l" rtl="0">
               <a:spcBef>
                 <a:spcPts val="1200"/>
               </a:spcBef>
@@ -7465,10 +7464,6 @@
               </a:spcAft>
               <a:buNone/>
             </a:pPr>
-            <a:r>
-              <a:t/>
-            </a:r>
-            <a:endParaRPr/>
           </a:p>
         </p:txBody>
       </p:sp>
@@ -7479,9 +7474,7 @@
           <p:nvPr/>
         </p:nvPicPr>
         <p:blipFill>
-          <a:blip r:embed="rId3">
-            <a:alphaModFix/>
-          </a:blip>
+          <a:blip r:embed="rId1"/>
           <a:stretch>
             <a:fillRect/>
           </a:stretch>
@@ -7507,9 +7500,7 @@
           <p:nvPr/>
         </p:nvPicPr>
         <p:blipFill>
-          <a:blip r:embed="rId4">
-            <a:alphaModFix/>
-          </a:blip>
+          <a:blip r:embed="rId2"/>
           <a:stretch>
             <a:fillRect/>
           </a:stretch>
@@ -7537,7 +7528,7 @@
 </file>
 
 <file path=ppt/slides/slide3.xml><?xml version="1.0" encoding="utf-8"?>
-<p:sld xmlns:a="http://schemas.openxmlformats.org/drawingml/2006/main" xmlns:r="http://schemas.openxmlformats.org/officeDocument/2006/relationships" xmlns:mc="http://schemas.openxmlformats.org/markup-compatibility/2006" xmlns:mv="urn:schemas-microsoft-com:mac:vml" xmlns:p="http://schemas.openxmlformats.org/presentationml/2006/main" xmlns:c="http://schemas.openxmlformats.org/drawingml/2006/chart" xmlns:dgm="http://schemas.openxmlformats.org/drawingml/2006/diagram" xmlns:o="urn:schemas-microsoft-com:office:office" xmlns:v="urn:schemas-microsoft-com:vml" xmlns:pvml="urn:schemas-microsoft-com:office:powerpoint" xmlns:com="http://schemas.openxmlformats.org/drawingml/2006/compatibility" xmlns:p14="http://schemas.microsoft.com/office/powerpoint/2010/main" xmlns:p15="http://schemas.microsoft.com/office/powerpoint/2012/main" xmlns:ahyp="http://schemas.microsoft.com/office/drawing/2018/hyperlinkcolor">
+<p:sld xmlns:a="http://schemas.openxmlformats.org/drawingml/2006/main" xmlns:r="http://schemas.openxmlformats.org/officeDocument/2006/relationships" xmlns:p="http://schemas.openxmlformats.org/presentationml/2006/main">
   <p:cSld>
     <p:spTree>
       <p:nvGrpSpPr>
@@ -7571,12 +7562,12 @@
           </a:prstGeom>
         </p:spPr>
         <p:txBody>
-          <a:bodyPr anchorCtr="0" anchor="t" bIns="91425" lIns="91425" spcFirstLastPara="1" rIns="91425" wrap="square" tIns="91425">
+          <a:bodyPr spcFirstLastPara="1" wrap="square" lIns="91425" tIns="91425" rIns="91425" bIns="91425" anchor="t" anchorCtr="0">
             <a:normAutofit fontScale="90000"/>
           </a:bodyPr>
           <a:lstStyle/>
           <a:p>
-            <a:pPr indent="0" lvl="0" marL="0" rtl="0" algn="l">
+            <a:pPr marL="0" lvl="0" indent="0" algn="l" rtl="0">
               <a:spcBef>
                 <a:spcPts val="0"/>
               </a:spcBef>
@@ -7586,10 +7577,10 @@
               <a:buNone/>
             </a:pPr>
             <a:r>
-              <a:rPr lang="ru"/>
+              <a:rPr lang="en-US"/>
               <a:t>Какие проблемы мой проект решает</a:t>
             </a:r>
-            <a:endParaRPr/>
+            <a:endParaRPr lang="en-US"/>
           </a:p>
         </p:txBody>
       </p:sp>
@@ -7598,12 +7589,12 @@
           <p:cNvPr id="74" name="Google Shape;74;p15"/>
           <p:cNvSpPr txBox="1"/>
           <p:nvPr>
-            <p:ph idx="1" type="body"/>
+            <p:ph type="body" idx="1"/>
           </p:nvPr>
         </p:nvSpPr>
         <p:spPr>
           <a:xfrm>
-            <a:off x="311700" y="1171600"/>
+            <a:off x="311700" y="1057935"/>
             <a:ext cx="8520600" cy="3397200"/>
           </a:xfrm>
           <a:prstGeom prst="rect">
@@ -7611,12 +7602,12 @@
           </a:prstGeom>
         </p:spPr>
         <p:txBody>
-          <a:bodyPr anchorCtr="0" anchor="t" bIns="91425" lIns="91425" spcFirstLastPara="1" rIns="91425" wrap="square" tIns="91425">
+          <a:bodyPr spcFirstLastPara="1" wrap="square" lIns="91425" tIns="91425" rIns="91425" bIns="91425" anchor="t" anchorCtr="0">
             <a:normAutofit/>
           </a:bodyPr>
           <a:lstStyle/>
           <a:p>
-            <a:pPr indent="-342900" lvl="0" marL="457200" rtl="0" algn="l">
+            <a:pPr marL="457200" lvl="0" indent="-342900" algn="l" rtl="0">
               <a:spcBef>
                 <a:spcPts val="0"/>
               </a:spcBef>
@@ -7627,13 +7618,21 @@
               <a:buAutoNum type="arabicPeriod"/>
             </a:pPr>
             <a:r>
-              <a:rPr lang="ru"/>
-              <a:t>Упрощение работы с учениками.</a:t>
+              <a:rPr lang="en-US"/>
+              <a:t>Упрощение работы с учениками</a:t>
             </a:r>
-            <a:endParaRPr/>
+            <a:r>
+              <a:rPr lang="ru-RU" altLang="en-US"/>
+              <a:t> и преподавателями</a:t>
+            </a:r>
+            <a:r>
+              <a:rPr lang="en-US"/>
+              <a:t>.</a:t>
+            </a:r>
+            <a:endParaRPr lang="en-US"/>
           </a:p>
           <a:p>
-            <a:pPr indent="-342900" lvl="0" marL="457200" rtl="0" algn="l">
+            <a:pPr marL="457200" lvl="0" indent="-342900" algn="l" rtl="0">
               <a:spcBef>
                 <a:spcPts val="0"/>
               </a:spcBef>
@@ -7644,13 +7643,21 @@
               <a:buAutoNum type="arabicPeriod"/>
             </a:pPr>
             <a:r>
-              <a:rPr lang="ru"/>
-              <a:t>Автоматизация составления, периодических отчетов</a:t>
+              <a:rPr lang="en-US"/>
+              <a:t>Автоматизация составления</a:t>
             </a:r>
-            <a:endParaRPr/>
+            <a:r>
+              <a:rPr lang="ru-RU" altLang="en-US"/>
+              <a:t> </a:t>
+            </a:r>
+            <a:r>
+              <a:rPr lang="en-US"/>
+              <a:t>периодических отчетов</a:t>
+            </a:r>
+            <a:endParaRPr lang="en-US"/>
           </a:p>
           <a:p>
-            <a:pPr indent="-342900" lvl="0" marL="457200" rtl="0" algn="l">
+            <a:pPr marL="457200" lvl="0" indent="-342900" algn="l" rtl="0">
               <a:spcBef>
                 <a:spcPts val="0"/>
               </a:spcBef>
@@ -7661,13 +7668,17 @@
               <a:buAutoNum type="arabicPeriod"/>
             </a:pPr>
             <a:r>
-              <a:rPr lang="ru"/>
+              <a:rPr lang="en-US"/>
               <a:t>Упрощение просмотра будущих конкурсов</a:t>
             </a:r>
-            <a:endParaRPr/>
+            <a:r>
+              <a:rPr lang="ru-RU" altLang="en-US"/>
+              <a:t> и курсов и управленя ими</a:t>
+            </a:r>
+            <a:endParaRPr lang="en-US"/>
           </a:p>
           <a:p>
-            <a:pPr indent="-342900" lvl="0" marL="457200" rtl="0" algn="l">
+            <a:pPr marL="457200" lvl="0" indent="-342900" algn="l" rtl="0">
               <a:spcBef>
                 <a:spcPts val="0"/>
               </a:spcBef>
@@ -7678,13 +7689,13 @@
               <a:buAutoNum type="arabicPeriod"/>
             </a:pPr>
             <a:r>
-              <a:rPr lang="ru"/>
+              <a:rPr lang="en-US"/>
               <a:t>Просмотр расписания онлайн</a:t>
             </a:r>
-            <a:endParaRPr/>
+            <a:endParaRPr lang="en-US"/>
           </a:p>
           <a:p>
-            <a:pPr indent="-342900" lvl="0" marL="457200" rtl="0" algn="l">
+            <a:pPr marL="457200" lvl="0" indent="-342900" algn="l" rtl="0">
               <a:spcBef>
                 <a:spcPts val="0"/>
               </a:spcBef>
@@ -7695,13 +7706,13 @@
               <a:buAutoNum type="arabicPeriod"/>
             </a:pPr>
             <a:r>
-              <a:rPr lang="ru"/>
+              <a:rPr lang="en-US"/>
               <a:t>Слежение за посещаемостью учеников</a:t>
             </a:r>
-            <a:endParaRPr/>
+            <a:endParaRPr lang="en-US"/>
           </a:p>
           <a:p>
-            <a:pPr indent="-342900" lvl="0" marL="457200" rtl="0" algn="l">
+            <a:pPr marL="457200" lvl="0" indent="-342900" algn="l" rtl="0">
               <a:spcBef>
                 <a:spcPts val="0"/>
               </a:spcBef>
@@ -7712,41 +7723,13 @@
               <a:buAutoNum type="arabicPeriod"/>
             </a:pPr>
             <a:r>
-              <a:rPr lang="ru"/>
+              <a:rPr lang="en-US"/>
               <a:t>Слежение за эффективностью преподавателя для директора ЦДО</a:t>
             </a:r>
-            <a:endParaRPr/>
+            <a:endParaRPr lang="en-US"/>
           </a:p>
         </p:txBody>
       </p:sp>
-      <p:pic>
-        <p:nvPicPr>
-          <p:cNvPr id="75" name="Google Shape;75;p15"/>
-          <p:cNvPicPr preferRelativeResize="0"/>
-          <p:nvPr/>
-        </p:nvPicPr>
-        <p:blipFill>
-          <a:blip r:embed="rId3">
-            <a:alphaModFix/>
-          </a:blip>
-          <a:stretch>
-            <a:fillRect/>
-          </a:stretch>
-        </p:blipFill>
-        <p:spPr>
-          <a:xfrm>
-            <a:off x="608400" y="3153625"/>
-            <a:ext cx="543666" cy="1830844"/>
-          </a:xfrm>
-          <a:prstGeom prst="rect">
-            <a:avLst/>
-          </a:prstGeom>
-          <a:noFill/>
-          <a:ln>
-            <a:noFill/>
-          </a:ln>
-        </p:spPr>
-      </p:pic>
       <p:pic>
         <p:nvPicPr>
           <p:cNvPr id="76" name="Google Shape;76;p15"/>
@@ -7754,9 +7737,7 @@
           <p:nvPr/>
         </p:nvPicPr>
         <p:blipFill>
-          <a:blip r:embed="rId4">
-            <a:alphaModFix/>
-          </a:blip>
+          <a:blip r:embed="rId1"/>
           <a:stretch>
             <a:fillRect/>
           </a:stretch>
@@ -7777,58 +7758,74 @@
       </p:pic>
       <p:pic>
         <p:nvPicPr>
-          <p:cNvPr id="77" name="Google Shape;77;p15"/>
-          <p:cNvPicPr preferRelativeResize="0"/>
+          <p:cNvPr id="1" name="Picture 0"/>
+          <p:cNvPicPr>
+            <a:picLocks noChangeAspect="1"/>
+          </p:cNvPicPr>
           <p:nvPr/>
         </p:nvPicPr>
         <p:blipFill>
-          <a:blip r:embed="rId5">
-            <a:alphaModFix/>
-          </a:blip>
+          <a:blip r:embed="rId2"/>
           <a:stretch>
             <a:fillRect/>
           </a:stretch>
         </p:blipFill>
         <p:spPr>
           <a:xfrm>
-            <a:off x="1297700" y="4055477"/>
-            <a:ext cx="3125101" cy="928995"/>
+            <a:off x="671830" y="3153410"/>
+            <a:ext cx="550545" cy="1830705"/>
           </a:xfrm>
           <a:prstGeom prst="rect">
             <a:avLst/>
           </a:prstGeom>
-          <a:noFill/>
-          <a:ln>
-            <a:noFill/>
-          </a:ln>
         </p:spPr>
       </p:pic>
       <p:pic>
         <p:nvPicPr>
-          <p:cNvPr id="78" name="Google Shape;78;p15"/>
-          <p:cNvPicPr preferRelativeResize="0"/>
+          <p:cNvPr id="2" name="Picture 1"/>
+          <p:cNvPicPr>
+            <a:picLocks noChangeAspect="1"/>
+          </p:cNvPicPr>
           <p:nvPr/>
         </p:nvPicPr>
         <p:blipFill>
-          <a:blip r:embed="rId6">
-            <a:alphaModFix/>
-          </a:blip>
+          <a:blip r:embed="rId3"/>
           <a:stretch>
             <a:fillRect/>
           </a:stretch>
         </p:blipFill>
         <p:spPr>
           <a:xfrm>
-            <a:off x="4812219" y="4055474"/>
-            <a:ext cx="3826131" cy="929000"/>
+            <a:off x="1297940" y="4054475"/>
+            <a:ext cx="3124835" cy="929640"/>
           </a:xfrm>
           <a:prstGeom prst="rect">
             <a:avLst/>
           </a:prstGeom>
-          <a:noFill/>
-          <a:ln>
-            <a:noFill/>
-          </a:ln>
+        </p:spPr>
+      </p:pic>
+      <p:pic>
+        <p:nvPicPr>
+          <p:cNvPr id="3" name="Picture 2"/>
+          <p:cNvPicPr>
+            <a:picLocks noChangeAspect="1"/>
+          </p:cNvPicPr>
+          <p:nvPr/>
+        </p:nvPicPr>
+        <p:blipFill>
+          <a:blip r:embed="rId4"/>
+          <a:stretch>
+            <a:fillRect/>
+          </a:stretch>
+        </p:blipFill>
+        <p:spPr>
+          <a:xfrm>
+            <a:off x="4422775" y="3348355"/>
+            <a:ext cx="4558030" cy="1106805"/>
+          </a:xfrm>
+          <a:prstGeom prst="rect">
+            <a:avLst/>
+          </a:prstGeom>
         </p:spPr>
       </p:pic>
     </p:spTree>
@@ -7840,7 +7837,7 @@
 </file>
 
 <file path=ppt/slides/slide4.xml><?xml version="1.0" encoding="utf-8"?>
-<p:sld xmlns:a="http://schemas.openxmlformats.org/drawingml/2006/main" xmlns:r="http://schemas.openxmlformats.org/officeDocument/2006/relationships" xmlns:mc="http://schemas.openxmlformats.org/markup-compatibility/2006" xmlns:mv="urn:schemas-microsoft-com:mac:vml" xmlns:p="http://schemas.openxmlformats.org/presentationml/2006/main" xmlns:c="http://schemas.openxmlformats.org/drawingml/2006/chart" xmlns:dgm="http://schemas.openxmlformats.org/drawingml/2006/diagram" xmlns:o="urn:schemas-microsoft-com:office:office" xmlns:v="urn:schemas-microsoft-com:vml" xmlns:pvml="urn:schemas-microsoft-com:office:powerpoint" xmlns:com="http://schemas.openxmlformats.org/drawingml/2006/compatibility" xmlns:p14="http://schemas.microsoft.com/office/powerpoint/2010/main" xmlns:p15="http://schemas.microsoft.com/office/powerpoint/2012/main" xmlns:ahyp="http://schemas.microsoft.com/office/drawing/2018/hyperlinkcolor">
+<p:sld xmlns:a="http://schemas.openxmlformats.org/drawingml/2006/main" xmlns:r="http://schemas.openxmlformats.org/officeDocument/2006/relationships" xmlns:p="http://schemas.openxmlformats.org/presentationml/2006/main">
   <p:cSld>
     <p:spTree>
       <p:nvGrpSpPr>
@@ -7874,12 +7871,12 @@
           </a:prstGeom>
         </p:spPr>
         <p:txBody>
-          <a:bodyPr anchorCtr="0" anchor="t" bIns="91425" lIns="91425" spcFirstLastPara="1" rIns="91425" wrap="square" tIns="91425">
+          <a:bodyPr spcFirstLastPara="1" wrap="square" lIns="91425" tIns="91425" rIns="91425" bIns="91425" anchor="t" anchorCtr="0">
             <a:normAutofit fontScale="90000"/>
           </a:bodyPr>
           <a:lstStyle/>
           <a:p>
-            <a:pPr indent="0" lvl="0" marL="0" rtl="0" algn="l">
+            <a:pPr marL="0" lvl="0" indent="0" algn="l" rtl="0">
               <a:spcBef>
                 <a:spcPts val="0"/>
               </a:spcBef>
@@ -7889,10 +7886,10 @@
               <a:buNone/>
             </a:pPr>
             <a:r>
-              <a:rPr lang="ru"/>
+              <a:rPr lang="en-US"/>
               <a:t>Демонстрация проекта</a:t>
             </a:r>
-            <a:endParaRPr/>
+            <a:endParaRPr lang="en-US"/>
           </a:p>
         </p:txBody>
       </p:sp>
@@ -7901,7 +7898,7 @@
           <p:cNvPr id="84" name="Google Shape;84;p16"/>
           <p:cNvSpPr txBox="1"/>
           <p:nvPr>
-            <p:ph idx="1" type="body"/>
+            <p:ph type="body" idx="1"/>
           </p:nvPr>
         </p:nvSpPr>
         <p:spPr>
@@ -7914,12 +7911,12 @@
           </a:prstGeom>
         </p:spPr>
         <p:txBody>
-          <a:bodyPr anchorCtr="0" anchor="t" bIns="91425" lIns="91425" spcFirstLastPara="1" rIns="91425" wrap="square" tIns="91425">
+          <a:bodyPr spcFirstLastPara="1" wrap="square" lIns="91425" tIns="91425" rIns="91425" bIns="91425" anchor="t" anchorCtr="0">
             <a:normAutofit/>
           </a:bodyPr>
           <a:lstStyle/>
           <a:p>
-            <a:pPr indent="0" lvl="0" marL="0" rtl="0" algn="l">
+            <a:pPr marL="0" lvl="0" indent="0" algn="l" rtl="0">
               <a:spcBef>
                 <a:spcPts val="0"/>
               </a:spcBef>
@@ -7929,10 +7926,10 @@
               <a:buNone/>
             </a:pPr>
             <a:r>
-              <a:rPr lang="ru"/>
+              <a:rPr lang="en-US"/>
               <a:t> QR-code на сайт:</a:t>
             </a:r>
-            <a:endParaRPr/>
+            <a:endParaRPr lang="en-US"/>
           </a:p>
         </p:txBody>
       </p:sp>
@@ -7941,7 +7938,7 @@
           <p:cNvPr id="85" name="Google Shape;85;p16"/>
           <p:cNvSpPr txBox="1"/>
           <p:nvPr>
-            <p:ph idx="1" type="body"/>
+            <p:ph type="body" idx="1"/>
           </p:nvPr>
         </p:nvSpPr>
         <p:spPr>
@@ -7954,12 +7951,12 @@
           </a:prstGeom>
         </p:spPr>
         <p:txBody>
-          <a:bodyPr anchorCtr="0" anchor="t" bIns="91425" lIns="91425" spcFirstLastPara="1" rIns="91425" wrap="square" tIns="91425">
+          <a:bodyPr spcFirstLastPara="1" wrap="square" lIns="91425" tIns="91425" rIns="91425" bIns="91425" anchor="t" anchorCtr="0">
             <a:normAutofit/>
           </a:bodyPr>
           <a:lstStyle/>
           <a:p>
-            <a:pPr indent="0" lvl="0" marL="0" rtl="0" algn="l">
+            <a:pPr marL="0" lvl="0" indent="0" algn="l" rtl="0">
               <a:spcBef>
                 <a:spcPts val="0"/>
               </a:spcBef>
@@ -7969,10 +7966,10 @@
               <a:buNone/>
             </a:pPr>
             <a:r>
-              <a:rPr lang="ru"/>
+              <a:rPr lang="en-US"/>
               <a:t> QR-code на GitHub проекта:</a:t>
             </a:r>
-            <a:endParaRPr/>
+            <a:endParaRPr lang="en-US"/>
           </a:p>
         </p:txBody>
       </p:sp>
@@ -7983,9 +7980,7 @@
           <p:nvPr/>
         </p:nvPicPr>
         <p:blipFill>
-          <a:blip r:embed="rId3">
-            <a:alphaModFix/>
-          </a:blip>
+          <a:blip r:embed="rId1"/>
           <a:stretch>
             <a:fillRect/>
           </a:stretch>
@@ -8011,9 +8006,7 @@
           <p:nvPr/>
         </p:nvPicPr>
         <p:blipFill>
-          <a:blip r:embed="rId4">
-            <a:alphaModFix/>
-          </a:blip>
+          <a:blip r:embed="rId2"/>
           <a:stretch>
             <a:fillRect/>
           </a:stretch>
@@ -8037,7 +8030,7 @@
           <p:cNvPr id="88" name="Google Shape;88;p16"/>
           <p:cNvSpPr txBox="1"/>
           <p:nvPr>
-            <p:ph idx="1" type="body"/>
+            <p:ph type="body" idx="1"/>
           </p:nvPr>
         </p:nvSpPr>
         <p:spPr>
@@ -8050,12 +8043,12 @@
           </a:prstGeom>
         </p:spPr>
         <p:txBody>
-          <a:bodyPr anchorCtr="0" anchor="t" bIns="91425" lIns="91425" spcFirstLastPara="1" rIns="91425" wrap="square" tIns="91425">
+          <a:bodyPr spcFirstLastPara="1" wrap="square" lIns="91425" tIns="91425" rIns="91425" bIns="91425" anchor="t" anchorCtr="0">
             <a:normAutofit fontScale="92500" lnSpcReduction="20000"/>
           </a:bodyPr>
           <a:lstStyle/>
           <a:p>
-            <a:pPr indent="0" lvl="0" marL="0" rtl="0" algn="l">
+            <a:pPr marL="0" lvl="0" indent="0" algn="l" rtl="0">
               <a:spcBef>
                 <a:spcPts val="0"/>
               </a:spcBef>
@@ -8065,10 +8058,10 @@
               <a:buNone/>
             </a:pPr>
             <a:r>
-              <a:rPr lang="ru"/>
+              <a:rPr lang="en-US"/>
               <a:t>Url адрес сайта: http://158.160.104.26:5001</a:t>
             </a:r>
-            <a:endParaRPr/>
+            <a:endParaRPr lang="en-US"/>
           </a:p>
         </p:txBody>
       </p:sp>
@@ -8081,7 +8074,7 @@
 </file>
 
 <file path=ppt/slides/slide5.xml><?xml version="1.0" encoding="utf-8"?>
-<p:sld xmlns:a="http://schemas.openxmlformats.org/drawingml/2006/main" xmlns:r="http://schemas.openxmlformats.org/officeDocument/2006/relationships" xmlns:mc="http://schemas.openxmlformats.org/markup-compatibility/2006" xmlns:mv="urn:schemas-microsoft-com:mac:vml" xmlns:p="http://schemas.openxmlformats.org/presentationml/2006/main" xmlns:c="http://schemas.openxmlformats.org/drawingml/2006/chart" xmlns:dgm="http://schemas.openxmlformats.org/drawingml/2006/diagram" xmlns:o="urn:schemas-microsoft-com:office:office" xmlns:v="urn:schemas-microsoft-com:vml" xmlns:pvml="urn:schemas-microsoft-com:office:powerpoint" xmlns:com="http://schemas.openxmlformats.org/drawingml/2006/compatibility" xmlns:p14="http://schemas.microsoft.com/office/powerpoint/2010/main" xmlns:p15="http://schemas.microsoft.com/office/powerpoint/2012/main" xmlns:ahyp="http://schemas.microsoft.com/office/drawing/2018/hyperlinkcolor">
+<p:sld xmlns:a="http://schemas.openxmlformats.org/drawingml/2006/main" xmlns:r="http://schemas.openxmlformats.org/officeDocument/2006/relationships" xmlns:p="http://schemas.openxmlformats.org/presentationml/2006/main">
   <p:cSld>
     <p:spTree>
       <p:nvGrpSpPr>
@@ -8115,12 +8108,12 @@
           </a:prstGeom>
         </p:spPr>
         <p:txBody>
-          <a:bodyPr anchorCtr="0" anchor="t" bIns="91425" lIns="91425" spcFirstLastPara="1" rIns="91425" wrap="square" tIns="91425">
+          <a:bodyPr spcFirstLastPara="1" wrap="square" lIns="91425" tIns="91425" rIns="91425" bIns="91425" anchor="t" anchorCtr="0">
             <a:normAutofit fontScale="90000"/>
           </a:bodyPr>
           <a:lstStyle/>
           <a:p>
-            <a:pPr indent="0" lvl="0" marL="0" rtl="0" algn="l">
+            <a:pPr marL="0" lvl="0" indent="0" algn="l" rtl="0">
               <a:spcBef>
                 <a:spcPts val="0"/>
               </a:spcBef>
@@ -8130,10 +8123,10 @@
               <a:buNone/>
             </a:pPr>
             <a:r>
-              <a:rPr lang="ru"/>
+              <a:rPr lang="en-US"/>
               <a:t>Что может проект?</a:t>
             </a:r>
-            <a:endParaRPr/>
+            <a:endParaRPr lang="en-US"/>
           </a:p>
         </p:txBody>
       </p:sp>
@@ -8142,7 +8135,7 @@
           <p:cNvPr id="94" name="Google Shape;94;p17"/>
           <p:cNvSpPr txBox="1"/>
           <p:nvPr>
-            <p:ph idx="1" type="body"/>
+            <p:ph type="body" idx="1"/>
           </p:nvPr>
         </p:nvSpPr>
         <p:spPr>
@@ -8155,12 +8148,12 @@
           </a:prstGeom>
         </p:spPr>
         <p:txBody>
-          <a:bodyPr anchorCtr="0" anchor="t" bIns="91425" lIns="91425" spcFirstLastPara="1" rIns="91425" wrap="square" tIns="91425">
+          <a:bodyPr spcFirstLastPara="1" wrap="square" lIns="91425" tIns="91425" rIns="91425" bIns="91425" anchor="t" anchorCtr="0">
             <a:normAutofit fontScale="62500" lnSpcReduction="20000"/>
           </a:bodyPr>
           <a:lstStyle/>
           <a:p>
-            <a:pPr indent="-300038" lvl="0" marL="457200" rtl="0" algn="l">
+            <a:pPr marL="457200" lvl="0" indent="-300355" algn="l" rtl="0">
               <a:spcBef>
                 <a:spcPts val="0"/>
               </a:spcBef>
@@ -8171,13 +8164,21 @@
               <a:buChar char="●"/>
             </a:pPr>
             <a:r>
-              <a:rPr lang="ru"/>
-              <a:t>Добавление, изменение, данных учеников.</a:t>
+              <a:rPr lang="en-US"/>
+              <a:t>Добавление, изменение, данных учеников</a:t>
             </a:r>
-            <a:endParaRPr/>
+            <a:r>
+              <a:rPr lang="ru-RU" altLang="en-US"/>
+              <a:t> и преподавателей</a:t>
+            </a:r>
+            <a:r>
+              <a:rPr lang="en-US"/>
+              <a:t>.</a:t>
+            </a:r>
+            <a:endParaRPr lang="en-US"/>
           </a:p>
           <a:p>
-            <a:pPr indent="-300038" lvl="0" marL="457200" rtl="0" algn="l">
+            <a:pPr marL="457200" lvl="0" indent="-300355" algn="l" rtl="0">
               <a:spcBef>
                 <a:spcPts val="0"/>
               </a:spcBef>
@@ -8188,13 +8189,13 @@
               <a:buChar char="●"/>
             </a:pPr>
             <a:r>
-              <a:rPr lang="ru"/>
+              <a:rPr lang="en-US"/>
               <a:t>Просмотр списка направлений, групп в них и учеников в них, удаление учеников из них и возможность переноса в другую группу, создание групп.</a:t>
             </a:r>
-            <a:endParaRPr/>
+            <a:endParaRPr lang="en-US"/>
           </a:p>
           <a:p>
-            <a:pPr indent="-300038" lvl="0" marL="457200" rtl="0" algn="l">
+            <a:pPr marL="457200" lvl="0" indent="-300355" algn="l" rtl="0">
               <a:spcBef>
                 <a:spcPts val="0"/>
               </a:spcBef>
@@ -8205,13 +8206,13 @@
               <a:buChar char="●"/>
             </a:pPr>
             <a:r>
-              <a:rPr lang="ru"/>
+              <a:rPr lang="en-US"/>
               <a:t>Просмотр списка учителей, изменение их данных, загрузка фотографии преподавателя.</a:t>
             </a:r>
-            <a:endParaRPr/>
+            <a:endParaRPr lang="en-US"/>
           </a:p>
           <a:p>
-            <a:pPr indent="-300038" lvl="0" marL="457200" rtl="0" algn="l">
+            <a:pPr marL="457200" lvl="0" indent="-300355" algn="l" rtl="0">
               <a:spcBef>
                 <a:spcPts val="0"/>
               </a:spcBef>
@@ -8222,13 +8223,13 @@
               <a:buChar char="●"/>
             </a:pPr>
             <a:r>
-              <a:rPr lang="ru"/>
+              <a:rPr lang="en-US"/>
               <a:t>Просмотр бесконечно подгружаемого расписания по неделям. добавления события и возможностью фильтровать события по группам.</a:t>
             </a:r>
-            <a:endParaRPr/>
+            <a:endParaRPr lang="en-US"/>
           </a:p>
           <a:p>
-            <a:pPr indent="-300038" lvl="0" marL="457200" rtl="0" algn="l">
+            <a:pPr marL="457200" lvl="0" indent="-300355" algn="l" rtl="0">
               <a:spcBef>
                 <a:spcPts val="0"/>
               </a:spcBef>
@@ -8239,13 +8240,13 @@
               <a:buChar char="●"/>
             </a:pPr>
             <a:r>
-              <a:rPr lang="ru"/>
+              <a:rPr lang="en-US"/>
               <a:t>Слежение за посещаемостью учеников, и его путем развития в ЦДО.</a:t>
             </a:r>
-            <a:endParaRPr/>
+            <a:endParaRPr lang="en-US"/>
           </a:p>
           <a:p>
-            <a:pPr indent="-300038" lvl="0" marL="457200" rtl="0" algn="l">
+            <a:pPr marL="457200" lvl="0" indent="-300355" algn="l" rtl="0">
               <a:spcBef>
                 <a:spcPts val="0"/>
               </a:spcBef>
@@ -8256,13 +8257,13 @@
               <a:buChar char="●"/>
             </a:pPr>
             <a:r>
-              <a:rPr lang="ru"/>
+              <a:rPr lang="en-US"/>
               <a:t>Автоматизация составления отчетов.</a:t>
             </a:r>
-            <a:endParaRPr/>
+            <a:endParaRPr lang="en-US"/>
           </a:p>
           <a:p>
-            <a:pPr indent="-300038" lvl="0" marL="457200" rtl="0" algn="l">
+            <a:pPr marL="457200" lvl="0" indent="-300355" algn="l" rtl="0">
               <a:spcBef>
                 <a:spcPts val="0"/>
               </a:spcBef>
@@ -8273,10 +8274,22 @@
               <a:buChar char="●"/>
             </a:pPr>
             <a:r>
-              <a:rPr lang="ru"/>
-              <a:t>Просмотр и добавление в список конкурсов.</a:t>
+              <a:rPr lang="en-US"/>
+              <a:t>Просмотр и добавлени</a:t>
             </a:r>
-            <a:endParaRPr/>
+            <a:r>
+              <a:rPr lang="ru-RU" altLang="en-US"/>
+              <a:t>е</a:t>
+            </a:r>
+            <a:r>
+              <a:rPr lang="en-US"/>
+              <a:t> в список конкурсов</a:t>
+            </a:r>
+            <a:r>
+              <a:rPr lang="ru-RU" altLang="en-US"/>
+              <a:t> для учеников и конкурсов для преподавателей, курсов повышения квалификации</a:t>
+            </a:r>
+            <a:endParaRPr lang="ru-RU" altLang="en-US"/>
           </a:p>
         </p:txBody>
       </p:sp>
@@ -8287,9 +8300,7 @@
           <p:nvPr/>
         </p:nvPicPr>
         <p:blipFill>
-          <a:blip r:embed="rId3">
-            <a:alphaModFix/>
-          </a:blip>
+          <a:blip r:embed="rId1"/>
           <a:stretch>
             <a:fillRect/>
           </a:stretch>
@@ -8315,9 +8326,7 @@
           <p:nvPr/>
         </p:nvPicPr>
         <p:blipFill>
-          <a:blip r:embed="rId4">
-            <a:alphaModFix/>
-          </a:blip>
+          <a:blip r:embed="rId2"/>
           <a:stretch>
             <a:fillRect/>
           </a:stretch>
@@ -8343,9 +8352,7 @@
           <p:nvPr/>
         </p:nvPicPr>
         <p:blipFill>
-          <a:blip r:embed="rId5">
-            <a:alphaModFix/>
-          </a:blip>
+          <a:blip r:embed="rId3"/>
           <a:stretch>
             <a:fillRect/>
           </a:stretch>
@@ -8373,7 +8380,7 @@
 </file>
 
 <file path=ppt/slides/slide6.xml><?xml version="1.0" encoding="utf-8"?>
-<p:sld xmlns:a="http://schemas.openxmlformats.org/drawingml/2006/main" xmlns:r="http://schemas.openxmlformats.org/officeDocument/2006/relationships" xmlns:mc="http://schemas.openxmlformats.org/markup-compatibility/2006" xmlns:mv="urn:schemas-microsoft-com:mac:vml" xmlns:p="http://schemas.openxmlformats.org/presentationml/2006/main" xmlns:c="http://schemas.openxmlformats.org/drawingml/2006/chart" xmlns:dgm="http://schemas.openxmlformats.org/drawingml/2006/diagram" xmlns:o="urn:schemas-microsoft-com:office:office" xmlns:v="urn:schemas-microsoft-com:vml" xmlns:pvml="urn:schemas-microsoft-com:office:powerpoint" xmlns:com="http://schemas.openxmlformats.org/drawingml/2006/compatibility" xmlns:p14="http://schemas.microsoft.com/office/powerpoint/2010/main" xmlns:p15="http://schemas.microsoft.com/office/powerpoint/2012/main" xmlns:ahyp="http://schemas.microsoft.com/office/drawing/2018/hyperlinkcolor">
+<p:sld xmlns:a="http://schemas.openxmlformats.org/drawingml/2006/main" xmlns:r="http://schemas.openxmlformats.org/officeDocument/2006/relationships" xmlns:p="http://schemas.openxmlformats.org/presentationml/2006/main">
   <p:cSld>
     <p:spTree>
       <p:nvGrpSpPr>
@@ -8407,12 +8414,12 @@
           </a:prstGeom>
         </p:spPr>
         <p:txBody>
-          <a:bodyPr anchorCtr="0" anchor="t" bIns="91425" lIns="91425" spcFirstLastPara="1" rIns="91425" wrap="square" tIns="91425">
+          <a:bodyPr spcFirstLastPara="1" wrap="square" lIns="91425" tIns="91425" rIns="91425" bIns="91425" anchor="t" anchorCtr="0">
             <a:normAutofit fontScale="90000"/>
           </a:bodyPr>
           <a:lstStyle/>
           <a:p>
-            <a:pPr indent="0" lvl="0" marL="0" rtl="0" algn="l">
+            <a:pPr marL="0" lvl="0" indent="0" algn="l" rtl="0">
               <a:spcBef>
                 <a:spcPts val="0"/>
               </a:spcBef>
@@ -8422,10 +8429,10 @@
               <a:buNone/>
             </a:pPr>
             <a:r>
-              <a:rPr lang="ru"/>
+              <a:rPr lang="en-US"/>
               <a:t>Архитектура проекта</a:t>
             </a:r>
-            <a:endParaRPr/>
+            <a:endParaRPr lang="en-US"/>
           </a:p>
         </p:txBody>
       </p:sp>
@@ -8434,7 +8441,7 @@
           <p:cNvPr id="103" name="Google Shape;103;p18"/>
           <p:cNvSpPr txBox="1"/>
           <p:nvPr>
-            <p:ph idx="1" type="body"/>
+            <p:ph type="body" idx="1"/>
           </p:nvPr>
         </p:nvSpPr>
         <p:spPr>
@@ -8447,12 +8454,12 @@
           </a:prstGeom>
         </p:spPr>
         <p:txBody>
-          <a:bodyPr anchorCtr="0" anchor="t" bIns="91425" lIns="91425" spcFirstLastPara="1" rIns="91425" wrap="square" tIns="91425">
+          <a:bodyPr spcFirstLastPara="1" wrap="square" lIns="91425" tIns="91425" rIns="91425" bIns="91425" anchor="t" anchorCtr="0">
             <a:normAutofit fontScale="92500" lnSpcReduction="20000"/>
           </a:bodyPr>
           <a:lstStyle/>
           <a:p>
-            <a:pPr indent="0" lvl="0" marL="0" rtl="0" algn="l">
+            <a:pPr marL="0" lvl="0" indent="0" algn="l" rtl="0">
               <a:spcBef>
                 <a:spcPts val="0"/>
               </a:spcBef>
@@ -8462,13 +8469,13 @@
               <a:buNone/>
             </a:pPr>
             <a:r>
-              <a:rPr lang="ru"/>
+              <a:rPr lang="en-US"/>
               <a:t>Корневая папка проекта делится на:</a:t>
             </a:r>
-            <a:endParaRPr/>
+            <a:endParaRPr lang="en-US"/>
           </a:p>
           <a:p>
-            <a:pPr indent="0" lvl="0" marL="0" rtl="0" algn="l">
+            <a:pPr marL="0" lvl="0" indent="0" algn="l" rtl="0">
               <a:spcBef>
                 <a:spcPts val="1200"/>
               </a:spcBef>
@@ -8478,13 +8485,13 @@
               <a:buNone/>
             </a:pPr>
             <a:r>
-              <a:rPr lang="ru"/>
+              <a:rPr lang="en-US"/>
               <a:t>static -&gt; Изображения, файлы, что “сырыми” отправляются пользователю</a:t>
             </a:r>
-            <a:endParaRPr/>
+            <a:endParaRPr lang="en-US"/>
           </a:p>
           <a:p>
-            <a:pPr indent="0" lvl="0" marL="0" rtl="0" algn="l">
+            <a:pPr marL="0" lvl="0" indent="0" algn="l" rtl="0">
               <a:spcBef>
                 <a:spcPts val="1200"/>
               </a:spcBef>
@@ -8494,13 +8501,13 @@
               <a:buNone/>
             </a:pPr>
             <a:r>
-              <a:rPr lang="ru"/>
+              <a:rPr lang="en-US"/>
               <a:t>routes -&gt; Адреса страниц и функции, что передают html пользователю по ним</a:t>
             </a:r>
-            <a:endParaRPr/>
+            <a:endParaRPr lang="en-US"/>
           </a:p>
           <a:p>
-            <a:pPr indent="0" lvl="0" marL="0" rtl="0" algn="l">
+            <a:pPr marL="0" lvl="0" indent="0" algn="l" rtl="0">
               <a:spcBef>
                 <a:spcPts val="1200"/>
               </a:spcBef>
@@ -8510,13 +8517,13 @@
               <a:buNone/>
             </a:pPr>
             <a:r>
-              <a:rPr lang="ru"/>
+              <a:rPr lang="en-US"/>
               <a:t>forms -&gt; flask-wtf формы, передаются на страницы c формами и обеспечивают csrf защиту.</a:t>
             </a:r>
-            <a:endParaRPr/>
+            <a:endParaRPr lang="en-US"/>
           </a:p>
           <a:p>
-            <a:pPr indent="0" lvl="0" marL="0" rtl="0" algn="l">
+            <a:pPr marL="0" lvl="0" indent="0" algn="l" rtl="0">
               <a:spcBef>
                 <a:spcPts val="1200"/>
               </a:spcBef>
@@ -8526,13 +8533,13 @@
               <a:buNone/>
             </a:pPr>
             <a:r>
-              <a:rPr lang="ru"/>
+              <a:rPr lang="en-US"/>
               <a:t>api -&gt; вся работа над модулями: “расписание”, “группы” и “посещаемость” переведены на restful-api структура. Классы и адреса для flask_restful</a:t>
             </a:r>
-            <a:endParaRPr/>
+            <a:endParaRPr lang="en-US"/>
           </a:p>
           <a:p>
-            <a:pPr indent="0" lvl="0" marL="0" rtl="0" algn="l">
+            <a:pPr marL="0" lvl="0" indent="0" algn="l" rtl="0">
               <a:spcBef>
                 <a:spcPts val="1200"/>
               </a:spcBef>
@@ -8542,13 +8549,13 @@
               <a:buNone/>
             </a:pPr>
             <a:r>
-              <a:rPr lang="ru"/>
+              <a:rPr lang="en-US"/>
               <a:t>templates -&gt; Jinja2 шаблоны, в них передаются данные из функций в routes.</a:t>
             </a:r>
-            <a:endParaRPr/>
+            <a:endParaRPr lang="en-US"/>
           </a:p>
           <a:p>
-            <a:pPr indent="0" lvl="0" marL="0" rtl="0" algn="l">
+            <a:pPr marL="0" lvl="0" indent="0" algn="l" rtl="0">
               <a:spcBef>
                 <a:spcPts val="1200"/>
               </a:spcBef>
@@ -8558,13 +8565,13 @@
               <a:buNone/>
             </a:pPr>
             <a:r>
-              <a:rPr lang="ru"/>
+              <a:rPr lang="en-US"/>
               <a:t>data -&gt; структура sql-alchemy классов - таблиц, описывающих  базу данных.</a:t>
             </a:r>
-            <a:endParaRPr/>
+            <a:endParaRPr lang="en-US"/>
           </a:p>
           <a:p>
-            <a:pPr indent="0" lvl="0" marL="0" rtl="0" algn="l">
+            <a:pPr marL="0" lvl="0" indent="0" algn="l" rtl="0">
               <a:spcBef>
                 <a:spcPts val="1200"/>
               </a:spcBef>
@@ -8574,10 +8581,10 @@
               <a:buNone/>
             </a:pPr>
             <a:r>
-              <a:rPr lang="ru"/>
+              <a:rPr lang="en-US"/>
               <a:t>db -&gt; файл базы данных sqlite в .db.</a:t>
             </a:r>
-            <a:endParaRPr/>
+            <a:endParaRPr lang="en-US"/>
           </a:p>
         </p:txBody>
       </p:sp>
@@ -8590,7 +8597,7 @@
 </file>
 
 <file path=ppt/slides/slide7.xml><?xml version="1.0" encoding="utf-8"?>
-<p:sld xmlns:a="http://schemas.openxmlformats.org/drawingml/2006/main" xmlns:r="http://schemas.openxmlformats.org/officeDocument/2006/relationships" xmlns:mc="http://schemas.openxmlformats.org/markup-compatibility/2006" xmlns:mv="urn:schemas-microsoft-com:mac:vml" xmlns:p="http://schemas.openxmlformats.org/presentationml/2006/main" xmlns:c="http://schemas.openxmlformats.org/drawingml/2006/chart" xmlns:dgm="http://schemas.openxmlformats.org/drawingml/2006/diagram" xmlns:o="urn:schemas-microsoft-com:office:office" xmlns:v="urn:schemas-microsoft-com:vml" xmlns:pvml="urn:schemas-microsoft-com:office:powerpoint" xmlns:com="http://schemas.openxmlformats.org/drawingml/2006/compatibility" xmlns:p14="http://schemas.microsoft.com/office/powerpoint/2010/main" xmlns:p15="http://schemas.microsoft.com/office/powerpoint/2012/main" xmlns:ahyp="http://schemas.microsoft.com/office/drawing/2018/hyperlinkcolor">
+<p:sld xmlns:a="http://schemas.openxmlformats.org/drawingml/2006/main" xmlns:r="http://schemas.openxmlformats.org/officeDocument/2006/relationships" xmlns:p="http://schemas.openxmlformats.org/presentationml/2006/main">
   <p:cSld>
     <p:spTree>
       <p:nvGrpSpPr>
@@ -8624,12 +8631,12 @@
           </a:prstGeom>
         </p:spPr>
         <p:txBody>
-          <a:bodyPr anchorCtr="0" anchor="t" bIns="91425" lIns="91425" spcFirstLastPara="1" rIns="91425" wrap="square" tIns="91425">
+          <a:bodyPr spcFirstLastPara="1" wrap="square" lIns="91425" tIns="91425" rIns="91425" bIns="91425" anchor="t" anchorCtr="0">
             <a:normAutofit fontScale="90000"/>
           </a:bodyPr>
           <a:lstStyle/>
           <a:p>
-            <a:pPr indent="0" lvl="0" marL="0" rtl="0" algn="l">
+            <a:pPr marL="0" lvl="0" indent="0" algn="l" rtl="0">
               <a:spcBef>
                 <a:spcPts val="0"/>
               </a:spcBef>
@@ -8639,39 +8646,35 @@
               <a:buNone/>
             </a:pPr>
             <a:r>
-              <a:rPr lang="ru"/>
+              <a:rPr lang="en-US"/>
               <a:t>Архитектура БД</a:t>
             </a:r>
-            <a:endParaRPr/>
+            <a:endParaRPr lang="en-US"/>
           </a:p>
         </p:txBody>
       </p:sp>
       <p:pic>
         <p:nvPicPr>
-          <p:cNvPr id="109" name="Google Shape;109;p19"/>
-          <p:cNvPicPr preferRelativeResize="0"/>
+          <p:cNvPr id="1" name="Picture 0"/>
+          <p:cNvPicPr>
+            <a:picLocks noChangeAspect="1"/>
+          </p:cNvPicPr>
           <p:nvPr/>
         </p:nvPicPr>
         <p:blipFill>
-          <a:blip r:embed="rId3">
-            <a:alphaModFix/>
-          </a:blip>
+          <a:blip r:embed="rId1"/>
           <a:stretch>
             <a:fillRect/>
           </a:stretch>
         </p:blipFill>
         <p:spPr>
           <a:xfrm>
-            <a:off x="152400" y="1210625"/>
-            <a:ext cx="8839199" cy="3772959"/>
+            <a:off x="925830" y="1057910"/>
+            <a:ext cx="6803390" cy="3977640"/>
           </a:xfrm>
           <a:prstGeom prst="rect">
             <a:avLst/>
           </a:prstGeom>
-          <a:noFill/>
-          <a:ln>
-            <a:noFill/>
-          </a:ln>
         </p:spPr>
       </p:pic>
     </p:spTree>
@@ -8683,7 +8686,7 @@
 </file>
 
 <file path=ppt/slides/slide8.xml><?xml version="1.0" encoding="utf-8"?>
-<p:sld xmlns:a="http://schemas.openxmlformats.org/drawingml/2006/main" xmlns:r="http://schemas.openxmlformats.org/officeDocument/2006/relationships" xmlns:mc="http://schemas.openxmlformats.org/markup-compatibility/2006" xmlns:mv="urn:schemas-microsoft-com:mac:vml" xmlns:p="http://schemas.openxmlformats.org/presentationml/2006/main" xmlns:c="http://schemas.openxmlformats.org/drawingml/2006/chart" xmlns:dgm="http://schemas.openxmlformats.org/drawingml/2006/diagram" xmlns:o="urn:schemas-microsoft-com:office:office" xmlns:v="urn:schemas-microsoft-com:vml" xmlns:pvml="urn:schemas-microsoft-com:office:powerpoint" xmlns:com="http://schemas.openxmlformats.org/drawingml/2006/compatibility" xmlns:p14="http://schemas.microsoft.com/office/powerpoint/2010/main" xmlns:p15="http://schemas.microsoft.com/office/powerpoint/2012/main" xmlns:ahyp="http://schemas.microsoft.com/office/drawing/2018/hyperlinkcolor">
+<p:sld xmlns:a="http://schemas.openxmlformats.org/drawingml/2006/main" xmlns:r="http://schemas.openxmlformats.org/officeDocument/2006/relationships" xmlns:p="http://schemas.openxmlformats.org/presentationml/2006/main">
   <p:cSld>
     <p:spTree>
       <p:nvGrpSpPr>
@@ -8717,12 +8720,12 @@
           </a:prstGeom>
         </p:spPr>
         <p:txBody>
-          <a:bodyPr anchorCtr="0" anchor="t" bIns="91425" lIns="91425" spcFirstLastPara="1" rIns="91425" wrap="square" tIns="91425">
+          <a:bodyPr spcFirstLastPara="1" wrap="square" lIns="91425" tIns="91425" rIns="91425" bIns="91425" anchor="t" anchorCtr="0">
             <a:noAutofit/>
           </a:bodyPr>
           <a:lstStyle/>
           <a:p>
-            <a:pPr indent="0" lvl="0" marL="0" rtl="0" algn="l">
+            <a:pPr marL="0" lvl="0" indent="0" algn="l" rtl="0">
               <a:spcBef>
                 <a:spcPts val="0"/>
               </a:spcBef>
@@ -8733,7 +8736,7 @@
               <a:buNone/>
             </a:pPr>
             <a:r>
-              <a:rPr lang="ru" sz="4900"/>
+              <a:rPr lang="en-US" sz="4900"/>
               <a:t>Выводы:</a:t>
             </a:r>
             <a:endParaRPr sz="4900"/>
@@ -8745,7 +8748,7 @@
           <p:cNvPr id="115" name="Google Shape;115;p20"/>
           <p:cNvSpPr txBox="1"/>
           <p:nvPr>
-            <p:ph idx="1" type="body"/>
+            <p:ph type="body" idx="1"/>
           </p:nvPr>
         </p:nvSpPr>
         <p:spPr>
@@ -8758,12 +8761,12 @@
           </a:prstGeom>
         </p:spPr>
         <p:txBody>
-          <a:bodyPr anchorCtr="0" anchor="t" bIns="91425" lIns="91425" spcFirstLastPara="1" rIns="91425" wrap="square" tIns="91425">
-            <a:normAutofit fontScale="92500" lnSpcReduction="10000"/>
+          <a:bodyPr spcFirstLastPara="1" wrap="square" lIns="91425" tIns="91425" rIns="91425" bIns="91425" anchor="t" anchorCtr="0">
+            <a:normAutofit fontScale="72500"/>
           </a:bodyPr>
           <a:lstStyle/>
           <a:p>
-            <a:pPr indent="0" lvl="0" marL="0" rtl="0" algn="l">
+            <a:pPr marL="0" lvl="0" indent="0" algn="l" rtl="0">
               <a:spcBef>
                 <a:spcPts val="0"/>
               </a:spcBef>
@@ -8773,13 +8776,13 @@
               <a:buNone/>
             </a:pPr>
             <a:r>
-              <a:rPr lang="ru" sz="3150"/>
+              <a:rPr lang="en-US" sz="3150"/>
               <a:t>Было выполнено:</a:t>
             </a:r>
             <a:endParaRPr sz="3150"/>
           </a:p>
           <a:p>
-            <a:pPr indent="-334328" lvl="0" marL="457200" rtl="0" algn="l">
+            <a:pPr marL="457200" lvl="0" indent="-334645" algn="l" rtl="0">
               <a:spcBef>
                 <a:spcPts val="1200"/>
               </a:spcBef>
@@ -8790,13 +8793,21 @@
               <a:buChar char="●"/>
             </a:pPr>
             <a:r>
-              <a:rPr lang="ru"/>
-              <a:t>Добавление, изменение, данных учеников.</a:t>
+              <a:rPr lang="en-US"/>
+              <a:t>Добавление, изменение, данных учеников</a:t>
             </a:r>
-            <a:endParaRPr/>
+            <a:r>
+              <a:rPr lang="ru-RU" altLang="en-US"/>
+              <a:t> и преподавателей</a:t>
+            </a:r>
+            <a:r>
+              <a:rPr lang="en-US"/>
+              <a:t>.</a:t>
+            </a:r>
+            <a:endParaRPr lang="en-US"/>
           </a:p>
           <a:p>
-            <a:pPr indent="-334328" lvl="0" marL="457200" rtl="0" algn="l">
+            <a:pPr marL="457200" lvl="0" indent="-334645" algn="l" rtl="0">
               <a:spcBef>
                 <a:spcPts val="0"/>
               </a:spcBef>
@@ -8807,13 +8818,13 @@
               <a:buChar char="●"/>
             </a:pPr>
             <a:r>
-              <a:rPr lang="ru"/>
+              <a:rPr lang="en-US"/>
               <a:t>Просмотр списка направлений, групп в них и учеников в них, удаление учеников из них и возможность переноса в другую группу.</a:t>
             </a:r>
-            <a:endParaRPr/>
+            <a:endParaRPr lang="en-US"/>
           </a:p>
           <a:p>
-            <a:pPr indent="-334328" lvl="0" marL="457200" rtl="0" algn="l">
+            <a:pPr marL="457200" lvl="0" indent="-334645" algn="l" rtl="0">
               <a:spcBef>
                 <a:spcPts val="0"/>
               </a:spcBef>
@@ -8824,13 +8835,13 @@
               <a:buChar char="●"/>
             </a:pPr>
             <a:r>
-              <a:rPr lang="ru"/>
-              <a:t>Просмотр списка учителей, изменение их данных, загрузка фотографии преподавателя.</a:t>
+              <a:rPr lang="en-US"/>
+              <a:t>Просмотр списка учителей, изменение их данных, загрузка фотографии преподавателя</a:t>
             </a:r>
-            <a:endParaRPr/>
+            <a:endParaRPr lang="en-US"/>
           </a:p>
           <a:p>
-            <a:pPr indent="-334328" lvl="0" marL="457200" rtl="0" algn="l">
+            <a:pPr marL="457200" lvl="0" indent="-334645" algn="l" rtl="0">
               <a:spcBef>
                 <a:spcPts val="0"/>
               </a:spcBef>
@@ -8841,13 +8852,13 @@
               <a:buChar char="●"/>
             </a:pPr>
             <a:r>
-              <a:rPr lang="ru"/>
+              <a:rPr lang="en-US"/>
               <a:t>Просмотр бесконечно подгружаемого расписания по неделям, добавления события с еженедельным повторением и возможностью фильтровать события по группам.</a:t>
             </a:r>
-            <a:endParaRPr/>
+            <a:endParaRPr lang="en-US"/>
           </a:p>
           <a:p>
-            <a:pPr indent="-334328" lvl="0" marL="457200" rtl="0" algn="l">
+            <a:pPr marL="457200" lvl="0" indent="-334645" algn="l" rtl="0">
               <a:spcBef>
                 <a:spcPts val="0"/>
               </a:spcBef>
@@ -8858,13 +8869,13 @@
               <a:buChar char="●"/>
             </a:pPr>
             <a:r>
-              <a:rPr lang="ru"/>
+              <a:rPr lang="en-US"/>
               <a:t>Слежение за посещаемостью учеников.</a:t>
             </a:r>
-            <a:endParaRPr/>
+            <a:endParaRPr lang="en-US"/>
           </a:p>
           <a:p>
-            <a:pPr indent="-334328" lvl="0" marL="457200" rtl="0" algn="l">
+            <a:pPr marL="457200" lvl="0" indent="-334645" algn="l" rtl="0">
               <a:spcBef>
                 <a:spcPts val="0"/>
               </a:spcBef>
@@ -8875,13 +8886,17 @@
               <a:buChar char="●"/>
             </a:pPr>
             <a:r>
-              <a:rPr lang="ru"/>
-              <a:t>Автоматизация составления отчетов по посещаемости в группах и у преподавателя.</a:t>
+              <a:rPr lang="en-US"/>
+              <a:t>Автоматизация составления отчетов по посещаемости в группах и у преподавател</a:t>
             </a:r>
-            <a:endParaRPr/>
+            <a:r>
+              <a:rPr lang="ru-RU" altLang="en-US"/>
+              <a:t>я, отчеты по участию преподавателей в конкурсах и курсах повышения квалификации</a:t>
+            </a:r>
+            <a:endParaRPr lang="en-US"/>
           </a:p>
           <a:p>
-            <a:pPr indent="-334328" lvl="0" marL="457200" rtl="0" algn="l">
+            <a:pPr marL="457200" lvl="0" indent="-334645" algn="l" rtl="0">
               <a:spcBef>
                 <a:spcPts val="0"/>
               </a:spcBef>
@@ -8892,13 +8907,17 @@
               <a:buChar char="●"/>
             </a:pPr>
             <a:r>
-              <a:rPr lang="ru"/>
-              <a:t>Просмотр и добавление в список конкурсов.</a:t>
+              <a:rPr lang="en-US"/>
+              <a:t>Просмотр и добавление в список конкурсов</a:t>
             </a:r>
-            <a:endParaRPr/>
+            <a:r>
+              <a:rPr lang="ru-RU" altLang="en-US"/>
+              <a:t> и курсов, легкое управление привязкой преподавателей к конкурсам и курсам</a:t>
+            </a:r>
+            <a:endParaRPr lang="en-US"/>
           </a:p>
           <a:p>
-            <a:pPr indent="-334328" lvl="0" marL="457200" rtl="0" algn="l">
+            <a:pPr marL="457200" lvl="0" indent="-334645" algn="l" rtl="0">
               <a:spcBef>
                 <a:spcPts val="0"/>
               </a:spcBef>
@@ -8909,13 +8928,13 @@
               <a:buChar char="●"/>
             </a:pPr>
             <a:r>
-              <a:rPr lang="ru"/>
+              <a:rPr lang="en-US"/>
               <a:t>Вход в аккаунт.</a:t>
             </a:r>
-            <a:endParaRPr/>
+            <a:endParaRPr lang="en-US"/>
           </a:p>
           <a:p>
-            <a:pPr indent="-334328" lvl="0" marL="457200" rtl="0" algn="l">
+            <a:pPr marL="457200" lvl="0" indent="-334645" algn="l" rtl="0">
               <a:spcBef>
                 <a:spcPts val="0"/>
               </a:spcBef>
@@ -8926,10 +8945,10 @@
               <a:buChar char="●"/>
             </a:pPr>
             <a:r>
-              <a:rPr lang="ru"/>
+              <a:rPr lang="en-US"/>
               <a:t>API</a:t>
             </a:r>
-            <a:endParaRPr/>
+            <a:endParaRPr lang="en-US"/>
           </a:p>
         </p:txBody>
       </p:sp>
@@ -8942,7 +8961,7 @@
 </file>
 
 <file path=ppt/slides/slide9.xml><?xml version="1.0" encoding="utf-8"?>
-<p:sld xmlns:a="http://schemas.openxmlformats.org/drawingml/2006/main" xmlns:r="http://schemas.openxmlformats.org/officeDocument/2006/relationships" xmlns:mc="http://schemas.openxmlformats.org/markup-compatibility/2006" xmlns:mv="urn:schemas-microsoft-com:mac:vml" xmlns:p="http://schemas.openxmlformats.org/presentationml/2006/main" xmlns:c="http://schemas.openxmlformats.org/drawingml/2006/chart" xmlns:dgm="http://schemas.openxmlformats.org/drawingml/2006/diagram" xmlns:o="urn:schemas-microsoft-com:office:office" xmlns:v="urn:schemas-microsoft-com:vml" xmlns:pvml="urn:schemas-microsoft-com:office:powerpoint" xmlns:com="http://schemas.openxmlformats.org/drawingml/2006/compatibility" xmlns:p14="http://schemas.microsoft.com/office/powerpoint/2010/main" xmlns:p15="http://schemas.microsoft.com/office/powerpoint/2012/main" xmlns:ahyp="http://schemas.microsoft.com/office/drawing/2018/hyperlinkcolor">
+<p:sld xmlns:a="http://schemas.openxmlformats.org/drawingml/2006/main" xmlns:r="http://schemas.openxmlformats.org/officeDocument/2006/relationships" xmlns:p="http://schemas.openxmlformats.org/presentationml/2006/main">
   <p:cSld>
     <p:spTree>
       <p:nvGrpSpPr>
@@ -8976,12 +8995,12 @@
           </a:prstGeom>
         </p:spPr>
         <p:txBody>
-          <a:bodyPr anchorCtr="0" anchor="t" bIns="91425" lIns="91425" spcFirstLastPara="1" rIns="91425" wrap="square" tIns="91425">
+          <a:bodyPr spcFirstLastPara="1" wrap="square" lIns="91425" tIns="91425" rIns="91425" bIns="91425" anchor="t" anchorCtr="0">
             <a:normAutofit fontScale="90000"/>
           </a:bodyPr>
           <a:lstStyle/>
           <a:p>
-            <a:pPr indent="0" lvl="0" marL="0" rtl="0" algn="l">
+            <a:pPr marL="0" lvl="0" indent="0" algn="l" rtl="0">
               <a:spcBef>
                 <a:spcPts val="0"/>
               </a:spcBef>
@@ -8991,14 +9010,14 @@
               <a:buNone/>
             </a:pPr>
             <a:r>
-              <a:rPr lang="ru"/>
+              <a:rPr lang="en-US"/>
               <a:t>Планы на </a:t>
             </a:r>
             <a:r>
-              <a:rPr lang="ru"/>
+              <a:rPr lang="en-US"/>
               <a:t>будущее</a:t>
             </a:r>
-            <a:endParaRPr/>
+            <a:endParaRPr lang="en-US"/>
           </a:p>
         </p:txBody>
       </p:sp>
@@ -9007,7 +9026,7 @@
           <p:cNvPr id="121" name="Google Shape;121;p21"/>
           <p:cNvSpPr txBox="1"/>
           <p:nvPr>
-            <p:ph idx="1" type="body"/>
+            <p:ph type="body" idx="1"/>
           </p:nvPr>
         </p:nvSpPr>
         <p:spPr>
@@ -9020,12 +9039,12 @@
           </a:prstGeom>
         </p:spPr>
         <p:txBody>
-          <a:bodyPr anchorCtr="0" anchor="t" bIns="91425" lIns="91425" spcFirstLastPara="1" rIns="91425" wrap="square" tIns="91425">
+          <a:bodyPr spcFirstLastPara="1" wrap="square" lIns="91425" tIns="91425" rIns="91425" bIns="91425" anchor="t" anchorCtr="0">
             <a:normAutofit/>
           </a:bodyPr>
           <a:lstStyle/>
           <a:p>
-            <a:pPr indent="-342900" lvl="0" marL="457200" rtl="0" algn="l">
+            <a:pPr marL="457200" lvl="0" indent="-342900" algn="l" rtl="0">
               <a:spcBef>
                 <a:spcPts val="0"/>
               </a:spcBef>
@@ -9036,13 +9055,13 @@
               <a:buChar char="●"/>
             </a:pPr>
             <a:r>
-              <a:rPr lang="ru"/>
+              <a:rPr lang="en-US"/>
               <a:t>Создание сайта для любого пользователя (гостя) с публичными данными.</a:t>
             </a:r>
-            <a:endParaRPr/>
+            <a:endParaRPr lang="en-US"/>
           </a:p>
           <a:p>
-            <a:pPr indent="-342900" lvl="0" marL="457200" rtl="0" algn="l">
+            <a:pPr marL="457200" lvl="0" indent="-342900" algn="l" rtl="0">
               <a:spcBef>
                 <a:spcPts val="0"/>
               </a:spcBef>
@@ -9053,21 +9072,21 @@
               <a:buChar char="●"/>
             </a:pPr>
             <a:r>
-              <a:rPr lang="ru"/>
+              <a:rPr lang="en-US"/>
               <a:t>Автоматизация составления всех </a:t>
             </a:r>
             <a:r>
-              <a:rPr lang="ru"/>
+              <a:rPr lang="en-US"/>
               <a:t>соответствующих</a:t>
             </a:r>
             <a:r>
-              <a:rPr lang="ru"/>
+              <a:rPr lang="en-US"/>
               <a:t> отчетов.</a:t>
             </a:r>
-            <a:endParaRPr/>
+            <a:endParaRPr lang="en-US"/>
           </a:p>
           <a:p>
-            <a:pPr indent="-342900" lvl="0" marL="457200" rtl="0" algn="l">
+            <a:pPr marL="457200" lvl="0" indent="-342900" algn="l" rtl="0">
               <a:spcBef>
                 <a:spcPts val="0"/>
               </a:spcBef>
@@ -9078,21 +9097,21 @@
               <a:buChar char="●"/>
             </a:pPr>
             <a:r>
-              <a:rPr lang="ru"/>
+              <a:rPr lang="en-US"/>
               <a:t>Нахождение и искоренение всех дыр в </a:t>
             </a:r>
             <a:r>
-              <a:rPr lang="ru"/>
+              <a:rPr lang="en-US"/>
               <a:t>безопасности</a:t>
             </a:r>
             <a:r>
-              <a:rPr lang="ru"/>
+              <a:rPr lang="en-US"/>
               <a:t>.</a:t>
             </a:r>
-            <a:endParaRPr/>
+            <a:endParaRPr lang="en-US"/>
           </a:p>
           <a:p>
-            <a:pPr indent="-342900" lvl="0" marL="457200" rtl="0" algn="l">
+            <a:pPr marL="457200" lvl="0" indent="-342900" algn="l" rtl="0">
               <a:spcBef>
                 <a:spcPts val="0"/>
               </a:spcBef>
@@ -9103,13 +9122,13 @@
               <a:buChar char="●"/>
             </a:pPr>
             <a:r>
-              <a:rPr lang="ru"/>
+              <a:rPr lang="en-US"/>
               <a:t>Введение нашего проекта в оборот ЦДО “IT-Cube”.</a:t>
             </a:r>
-            <a:endParaRPr/>
+            <a:endParaRPr lang="en-US"/>
           </a:p>
           <a:p>
-            <a:pPr indent="-342900" lvl="0" marL="457200" rtl="0" algn="l">
+            <a:pPr marL="457200" lvl="0" indent="-342900" algn="l" rtl="0">
               <a:spcBef>
                 <a:spcPts val="0"/>
               </a:spcBef>
@@ -9120,13 +9139,13 @@
               <a:buChar char="●"/>
             </a:pPr>
             <a:r>
-              <a:rPr lang="ru"/>
+              <a:rPr lang="en-US"/>
               <a:t>Получение гранта.</a:t>
             </a:r>
-            <a:endParaRPr/>
+            <a:endParaRPr lang="en-US"/>
           </a:p>
           <a:p>
-            <a:pPr indent="-342900" lvl="0" marL="457200" rtl="0" algn="l">
+            <a:pPr marL="457200" lvl="0" indent="-342900" algn="l" rtl="0">
               <a:spcBef>
                 <a:spcPts val="0"/>
               </a:spcBef>
@@ -9137,13 +9156,13 @@
               <a:buChar char="●"/>
             </a:pPr>
             <a:r>
-              <a:rPr lang="ru"/>
+              <a:rPr lang="en-US"/>
               <a:t>Коммерческий оборот в другие в ЦДО.</a:t>
             </a:r>
-            <a:endParaRPr/>
+            <a:endParaRPr lang="en-US"/>
           </a:p>
           <a:p>
-            <a:pPr indent="-342900" lvl="0" marL="457200" rtl="0" algn="l">
+            <a:pPr marL="457200" lvl="0" indent="-342900" algn="l" rtl="0">
               <a:spcBef>
                 <a:spcPts val="0"/>
               </a:spcBef>
@@ -9154,10 +9173,10 @@
               <a:buChar char="●"/>
             </a:pPr>
             <a:r>
-              <a:rPr lang="ru"/>
+              <a:rPr lang="en-US"/>
               <a:t>Создание идеального с точки зрения Quality-of-life сайта                             на основе сообщений с оборота в ЦДО “IT-Cube”.</a:t>
             </a:r>
-            <a:endParaRPr/>
+            <a:endParaRPr lang="en-US"/>
           </a:p>
         </p:txBody>
       </p:sp>
@@ -9168,9 +9187,7 @@
           <p:nvPr/>
         </p:nvPicPr>
         <p:blipFill>
-          <a:blip r:embed="rId3">
-            <a:alphaModFix/>
-          </a:blip>
+          <a:blip r:embed="rId1"/>
           <a:stretch>
             <a:fillRect/>
           </a:stretch>
@@ -9198,7 +9215,7 @@
 </file>
 
 <file path=ppt/theme/theme1.xml><?xml version="1.0" encoding="utf-8"?>
-<a:theme xmlns:a="http://schemas.openxmlformats.org/drawingml/2006/main" xmlns:r="http://schemas.openxmlformats.org/officeDocument/2006/relationships" name="Paperback">
+<a:theme xmlns:a="http://schemas.openxmlformats.org/drawingml/2006/main" name="Paperback">
   <a:themeElements>
     <a:clrScheme name="Paperback">
       <a:dk1>
@@ -9473,11 +9490,16 @@
       </a:bgFillStyleLst>
     </a:fmtScheme>
   </a:themeElements>
+  <a:extLst>
+    <a:ext uri="{05A4C25C-085E-4340-85A3-A5531E510DB2}">
+      <thm15:themeFamily xmlns:thm15="http://schemas.microsoft.com/office/thememl/2012/main" name="Office Theme" id="{62F939B6-93AF-4DB8-9C6B-D6C7DFDC589F}" vid="{4A3C46E8-61CC-4603-A589-7422A47A8E4A}"/>
+    </a:ext>
+  </a:extLst>
 </a:theme>
 </file>
 
 <file path=ppt/theme/theme2.xml><?xml version="1.0" encoding="utf-8"?>
-<a:theme xmlns:a="http://schemas.openxmlformats.org/drawingml/2006/main" xmlns:r="http://schemas.openxmlformats.org/officeDocument/2006/relationships">
+<a:theme xmlns:a="http://schemas.openxmlformats.org/drawingml/2006/main">
   <a:themeElements>
     <a:clrScheme name="Default">
       <a:dk1>
@@ -9752,5 +9774,10 @@
       </a:bgFillStyleLst>
     </a:fmtScheme>
   </a:themeElements>
+  <a:extLst>
+    <a:ext uri="{05A4C25C-085E-4340-85A3-A5531E510DB2}">
+      <thm15:themeFamily xmlns:thm15="http://schemas.microsoft.com/office/thememl/2012/main" name="Office Theme" id="{62F939B6-93AF-4DB8-9C6B-D6C7DFDC589F}" vid="{4A3C46E8-61CC-4603-A589-7422A47A8E4A}"/>
+    </a:ext>
+  </a:extLst>
 </a:theme>
 </file>
--- a/CRM для Центров Дополнительного образования.pptx
+++ b/CRM для Центров Дополнительного образования.pptx
@@ -5,26 +5,26 @@
     <p:sldMasterId id="2147483648" r:id="rId1"/>
   </p:sldMasterIdLst>
   <p:notesMasterIdLst>
-    <p:notesMasterId r:id="rId4"/>
+    <p:notesMasterId r:id="rId12"/>
   </p:notesMasterIdLst>
   <p:sldIdLst>
-    <p:sldId id="256" r:id="rId3"/>
-    <p:sldId id="257" r:id="rId5"/>
-    <p:sldId id="258" r:id="rId6"/>
-    <p:sldId id="259" r:id="rId7"/>
-    <p:sldId id="260" r:id="rId8"/>
-    <p:sldId id="261" r:id="rId9"/>
-    <p:sldId id="262" r:id="rId10"/>
-    <p:sldId id="263" r:id="rId11"/>
-    <p:sldId id="264" r:id="rId12"/>
-    <p:sldId id="265" r:id="rId13"/>
+    <p:sldId id="256" r:id="rId2"/>
+    <p:sldId id="257" r:id="rId3"/>
+    <p:sldId id="258" r:id="rId4"/>
+    <p:sldId id="259" r:id="rId5"/>
+    <p:sldId id="260" r:id="rId6"/>
+    <p:sldId id="261" r:id="rId7"/>
+    <p:sldId id="262" r:id="rId8"/>
+    <p:sldId id="263" r:id="rId9"/>
+    <p:sldId id="264" r:id="rId10"/>
+    <p:sldId id="265" r:id="rId11"/>
   </p:sldIdLst>
-  <p:sldSz cx="9144000" cy="5143500"/>
+  <p:sldSz cx="9144000" cy="5143500" type="screen16x9"/>
   <p:notesSz cx="6858000" cy="9144000"/>
   <p:embeddedFontLst>
     <p:embeddedFont>
-      <p:font typeface="Old Standard TT" panose="00000500000000000000"/>
-      <p:regular r:id="rId17"/>
+      <p:font typeface="Old Standard TT" panose="020B0604020202020204" charset="-52"/>
+      <p:regular r:id="rId13"/>
     </p:embeddedFont>
   </p:embeddedFontLst>
   <p:defaultTextStyle>
@@ -285,7 +285,7 @@
     </p:bg>
     <p:spTree>
       <p:nvGrpSpPr>
-        <p:cNvPr id="2" name="Shape 2"/>
+        <p:cNvPr id="1" name="Shape 2"/>
         <p:cNvGrpSpPr/>
         <p:nvPr/>
       </p:nvGrpSpPr>
@@ -300,7 +300,9 @@
       <p:sp>
         <p:nvSpPr>
           <p:cNvPr id="3" name="Google Shape;3;n"/>
-          <p:cNvSpPr/>
+          <p:cNvSpPr>
+            <a:spLocks noGrp="1" noRot="1" noChangeAspect="1"/>
+          </p:cNvSpPr>
           <p:nvPr>
             <p:ph type="sldImg" idx="2"/>
           </p:nvPr>
@@ -349,7 +351,9 @@
       <p:sp>
         <p:nvSpPr>
           <p:cNvPr id="4" name="Google Shape;4;n"/>
-          <p:cNvSpPr txBox="1"/>
+          <p:cNvSpPr txBox="1">
+            <a:spLocks noGrp="1"/>
+          </p:cNvSpPr>
           <p:nvPr>
             <p:ph type="body" idx="1"/>
           </p:nvPr>
@@ -472,7 +476,9 @@
               <a:defRPr sz="1100"/>
             </a:lvl9pPr>
           </a:lstStyle>
-          <a:p/>
+          <a:p>
+            <a:endParaRPr/>
+          </a:p>
         </p:txBody>
       </p:sp>
     </p:spTree>
@@ -711,11 +717,11 @@
 </file>
 
 <file path=ppt/notesSlides/notesSlide1.xml><?xml version="1.0" encoding="utf-8"?>
-<p:notes xmlns:a="http://schemas.openxmlformats.org/drawingml/2006/main" xmlns:r="http://schemas.openxmlformats.org/officeDocument/2006/relationships" xmlns:p="http://schemas.openxmlformats.org/presentationml/2006/main" showMasterPhAnim="0" showMasterSp="0">
+<p:notes xmlns:a="http://schemas.openxmlformats.org/drawingml/2006/main" xmlns:r="http://schemas.openxmlformats.org/officeDocument/2006/relationships" xmlns:p="http://schemas.openxmlformats.org/presentationml/2006/main" showMasterSp="0" showMasterPhAnim="0">
   <p:cSld>
     <p:spTree>
       <p:nvGrpSpPr>
-        <p:cNvPr id="55" name="Shape 55"/>
+        <p:cNvPr id="1" name="Shape 55"/>
         <p:cNvGrpSpPr/>
         <p:nvPr/>
       </p:nvGrpSpPr>
@@ -730,15 +736,17 @@
       <p:sp>
         <p:nvSpPr>
           <p:cNvPr id="56" name="Google Shape;56;p:notes"/>
-          <p:cNvSpPr/>
+          <p:cNvSpPr>
+            <a:spLocks noGrp="1" noRot="1" noChangeAspect="1"/>
+          </p:cNvSpPr>
           <p:nvPr>
             <p:ph type="sldImg" idx="2"/>
           </p:nvPr>
         </p:nvSpPr>
         <p:spPr>
           <a:xfrm>
-            <a:off x="381300" y="685800"/>
-            <a:ext cx="6096075" cy="3429000"/>
+            <a:off x="381000" y="685800"/>
+            <a:ext cx="6096000" cy="3429000"/>
           </a:xfrm>
           <a:custGeom>
             <a:avLst/>
@@ -769,7 +777,9 @@
       <p:sp>
         <p:nvSpPr>
           <p:cNvPr id="57" name="Google Shape;57;p:notes"/>
-          <p:cNvSpPr txBox="1"/>
+          <p:cNvSpPr txBox="1">
+            <a:spLocks noGrp="1"/>
+          </p:cNvSpPr>
           <p:nvPr>
             <p:ph type="body" idx="1"/>
           </p:nvPr>
@@ -798,6 +808,7 @@
               </a:spcAft>
               <a:buNone/>
             </a:pPr>
+            <a:endParaRPr/>
           </a:p>
         </p:txBody>
       </p:sp>
@@ -810,11 +821,11 @@
 </file>
 
 <file path=ppt/notesSlides/notesSlide10.xml><?xml version="1.0" encoding="utf-8"?>
-<p:notes xmlns:a="http://schemas.openxmlformats.org/drawingml/2006/main" xmlns:r="http://schemas.openxmlformats.org/officeDocument/2006/relationships" xmlns:p="http://schemas.openxmlformats.org/presentationml/2006/main" showMasterPhAnim="0" showMasterSp="0">
+<p:notes xmlns:a="http://schemas.openxmlformats.org/drawingml/2006/main" xmlns:r="http://schemas.openxmlformats.org/officeDocument/2006/relationships" xmlns:p="http://schemas.openxmlformats.org/presentationml/2006/main" showMasterSp="0" showMasterPhAnim="0">
   <p:cSld>
     <p:spTree>
       <p:nvGrpSpPr>
-        <p:cNvPr id="123" name="Shape 123"/>
+        <p:cNvPr id="1" name="Shape 123"/>
         <p:cNvGrpSpPr/>
         <p:nvPr/>
       </p:nvGrpSpPr>
@@ -829,14 +840,16 @@
       <p:sp>
         <p:nvSpPr>
           <p:cNvPr id="124" name="Google Shape;124;g3e1981d9e2e_0_17:notes"/>
-          <p:cNvSpPr/>
+          <p:cNvSpPr>
+            <a:spLocks noGrp="1" noRot="1" noChangeAspect="1"/>
+          </p:cNvSpPr>
           <p:nvPr>
             <p:ph type="sldImg" idx="2"/>
           </p:nvPr>
         </p:nvSpPr>
         <p:spPr>
           <a:xfrm>
-            <a:off x="381300" y="685800"/>
+            <a:off x="381000" y="685800"/>
             <a:ext cx="6096000" cy="3429000"/>
           </a:xfrm>
           <a:custGeom>
@@ -868,7 +881,9 @@
       <p:sp>
         <p:nvSpPr>
           <p:cNvPr id="125" name="Google Shape;125;g3e1981d9e2e_0_17:notes"/>
-          <p:cNvSpPr txBox="1"/>
+          <p:cNvSpPr txBox="1">
+            <a:spLocks noGrp="1"/>
+          </p:cNvSpPr>
           <p:nvPr>
             <p:ph type="body" idx="1"/>
           </p:nvPr>
@@ -897,6 +912,7 @@
               </a:spcAft>
               <a:buNone/>
             </a:pPr>
+            <a:endParaRPr/>
           </a:p>
         </p:txBody>
       </p:sp>
@@ -909,11 +925,11 @@
 </file>
 
 <file path=ppt/notesSlides/notesSlide2.xml><?xml version="1.0" encoding="utf-8"?>
-<p:notes xmlns:a="http://schemas.openxmlformats.org/drawingml/2006/main" xmlns:r="http://schemas.openxmlformats.org/officeDocument/2006/relationships" xmlns:p="http://schemas.openxmlformats.org/presentationml/2006/main" showMasterPhAnim="0" showMasterSp="0">
+<p:notes xmlns:a="http://schemas.openxmlformats.org/drawingml/2006/main" xmlns:r="http://schemas.openxmlformats.org/officeDocument/2006/relationships" xmlns:p="http://schemas.openxmlformats.org/presentationml/2006/main" showMasterSp="0" showMasterPhAnim="0">
   <p:cSld>
     <p:spTree>
       <p:nvGrpSpPr>
-        <p:cNvPr id="61" name="Shape 61"/>
+        <p:cNvPr id="1" name="Shape 61"/>
         <p:cNvGrpSpPr/>
         <p:nvPr/>
       </p:nvGrpSpPr>
@@ -928,14 +944,16 @@
       <p:sp>
         <p:nvSpPr>
           <p:cNvPr id="62" name="Google Shape;62;g3e0b95f86ae_0_305:notes"/>
-          <p:cNvSpPr/>
+          <p:cNvSpPr>
+            <a:spLocks noGrp="1" noRot="1" noChangeAspect="1"/>
+          </p:cNvSpPr>
           <p:nvPr>
             <p:ph type="sldImg" idx="2"/>
           </p:nvPr>
         </p:nvSpPr>
         <p:spPr>
           <a:xfrm>
-            <a:off x="381300" y="685800"/>
+            <a:off x="381000" y="685800"/>
             <a:ext cx="6096000" cy="3429000"/>
           </a:xfrm>
           <a:custGeom>
@@ -967,7 +985,9 @@
       <p:sp>
         <p:nvSpPr>
           <p:cNvPr id="63" name="Google Shape;63;g3e0b95f86ae_0_305:notes"/>
-          <p:cNvSpPr txBox="1"/>
+          <p:cNvSpPr txBox="1">
+            <a:spLocks noGrp="1"/>
+          </p:cNvSpPr>
           <p:nvPr>
             <p:ph type="body" idx="1"/>
           </p:nvPr>
@@ -996,6 +1016,7 @@
               </a:spcAft>
               <a:buNone/>
             </a:pPr>
+            <a:endParaRPr/>
           </a:p>
         </p:txBody>
       </p:sp>
@@ -1008,11 +1029,11 @@
 </file>
 
 <file path=ppt/notesSlides/notesSlide3.xml><?xml version="1.0" encoding="utf-8"?>
-<p:notes xmlns:a="http://schemas.openxmlformats.org/drawingml/2006/main" xmlns:r="http://schemas.openxmlformats.org/officeDocument/2006/relationships" xmlns:p="http://schemas.openxmlformats.org/presentationml/2006/main" showMasterPhAnim="0" showMasterSp="0">
+<p:notes xmlns:a="http://schemas.openxmlformats.org/drawingml/2006/main" xmlns:r="http://schemas.openxmlformats.org/officeDocument/2006/relationships" xmlns:p="http://schemas.openxmlformats.org/presentationml/2006/main" showMasterSp="0" showMasterPhAnim="0">
   <p:cSld>
     <p:spTree>
       <p:nvGrpSpPr>
-        <p:cNvPr id="69" name="Shape 69"/>
+        <p:cNvPr id="1" name="Shape 69"/>
         <p:cNvGrpSpPr/>
         <p:nvPr/>
       </p:nvGrpSpPr>
@@ -1027,14 +1048,16 @@
       <p:sp>
         <p:nvSpPr>
           <p:cNvPr id="70" name="Google Shape;70;g3e0b95f86ae_0_310:notes"/>
-          <p:cNvSpPr/>
+          <p:cNvSpPr>
+            <a:spLocks noGrp="1" noRot="1" noChangeAspect="1"/>
+          </p:cNvSpPr>
           <p:nvPr>
             <p:ph type="sldImg" idx="2"/>
           </p:nvPr>
         </p:nvSpPr>
         <p:spPr>
           <a:xfrm>
-            <a:off x="381300" y="685800"/>
+            <a:off x="381000" y="685800"/>
             <a:ext cx="6096000" cy="3429000"/>
           </a:xfrm>
           <a:custGeom>
@@ -1066,7 +1089,9 @@
       <p:sp>
         <p:nvSpPr>
           <p:cNvPr id="71" name="Google Shape;71;g3e0b95f86ae_0_310:notes"/>
-          <p:cNvSpPr txBox="1"/>
+          <p:cNvSpPr txBox="1">
+            <a:spLocks noGrp="1"/>
+          </p:cNvSpPr>
           <p:nvPr>
             <p:ph type="body" idx="1"/>
           </p:nvPr>
@@ -1095,6 +1120,7 @@
               </a:spcAft>
               <a:buNone/>
             </a:pPr>
+            <a:endParaRPr/>
           </a:p>
         </p:txBody>
       </p:sp>
@@ -1107,11 +1133,11 @@
 </file>
 
 <file path=ppt/notesSlides/notesSlide4.xml><?xml version="1.0" encoding="utf-8"?>
-<p:notes xmlns:a="http://schemas.openxmlformats.org/drawingml/2006/main" xmlns:r="http://schemas.openxmlformats.org/officeDocument/2006/relationships" xmlns:p="http://schemas.openxmlformats.org/presentationml/2006/main" showMasterPhAnim="0" showMasterSp="0">
+<p:notes xmlns:a="http://schemas.openxmlformats.org/drawingml/2006/main" xmlns:r="http://schemas.openxmlformats.org/officeDocument/2006/relationships" xmlns:p="http://schemas.openxmlformats.org/presentationml/2006/main" showMasterSp="0" showMasterPhAnim="0">
   <p:cSld>
     <p:spTree>
       <p:nvGrpSpPr>
-        <p:cNvPr id="79" name="Shape 79"/>
+        <p:cNvPr id="1" name="Shape 79"/>
         <p:cNvGrpSpPr/>
         <p:nvPr/>
       </p:nvGrpSpPr>
@@ -1126,14 +1152,16 @@
       <p:sp>
         <p:nvSpPr>
           <p:cNvPr id="80" name="Google Shape;80;g3e0c1a5fde7_0_0:notes"/>
-          <p:cNvSpPr/>
+          <p:cNvSpPr>
+            <a:spLocks noGrp="1" noRot="1" noChangeAspect="1"/>
+          </p:cNvSpPr>
           <p:nvPr>
             <p:ph type="sldImg" idx="2"/>
           </p:nvPr>
         </p:nvSpPr>
         <p:spPr>
           <a:xfrm>
-            <a:off x="381300" y="685800"/>
+            <a:off x="381000" y="685800"/>
             <a:ext cx="6096000" cy="3429000"/>
           </a:xfrm>
           <a:custGeom>
@@ -1165,7 +1193,9 @@
       <p:sp>
         <p:nvSpPr>
           <p:cNvPr id="81" name="Google Shape;81;g3e0c1a5fde7_0_0:notes"/>
-          <p:cNvSpPr txBox="1"/>
+          <p:cNvSpPr txBox="1">
+            <a:spLocks noGrp="1"/>
+          </p:cNvSpPr>
           <p:nvPr>
             <p:ph type="body" idx="1"/>
           </p:nvPr>
@@ -1194,6 +1224,7 @@
               </a:spcAft>
               <a:buNone/>
             </a:pPr>
+            <a:endParaRPr/>
           </a:p>
         </p:txBody>
       </p:sp>
@@ -1206,11 +1237,11 @@
 </file>
 
 <file path=ppt/notesSlides/notesSlide5.xml><?xml version="1.0" encoding="utf-8"?>
-<p:notes xmlns:a="http://schemas.openxmlformats.org/drawingml/2006/main" xmlns:r="http://schemas.openxmlformats.org/officeDocument/2006/relationships" xmlns:p="http://schemas.openxmlformats.org/presentationml/2006/main" showMasterPhAnim="0" showMasterSp="0">
+<p:notes xmlns:a="http://schemas.openxmlformats.org/drawingml/2006/main" xmlns:r="http://schemas.openxmlformats.org/officeDocument/2006/relationships" xmlns:p="http://schemas.openxmlformats.org/presentationml/2006/main" showMasterSp="0" showMasterPhAnim="0">
   <p:cSld>
     <p:spTree>
       <p:nvGrpSpPr>
-        <p:cNvPr id="89" name="Shape 89"/>
+        <p:cNvPr id="1" name="Shape 89"/>
         <p:cNvGrpSpPr/>
         <p:nvPr/>
       </p:nvGrpSpPr>
@@ -1225,14 +1256,16 @@
       <p:sp>
         <p:nvSpPr>
           <p:cNvPr id="90" name="Google Shape;90;g3e0c1a5fde7_0_5:notes"/>
-          <p:cNvSpPr/>
+          <p:cNvSpPr>
+            <a:spLocks noGrp="1" noRot="1" noChangeAspect="1"/>
+          </p:cNvSpPr>
           <p:nvPr>
             <p:ph type="sldImg" idx="2"/>
           </p:nvPr>
         </p:nvSpPr>
         <p:spPr>
           <a:xfrm>
-            <a:off x="381300" y="685800"/>
+            <a:off x="381000" y="685800"/>
             <a:ext cx="6096000" cy="3429000"/>
           </a:xfrm>
           <a:custGeom>
@@ -1264,7 +1297,9 @@
       <p:sp>
         <p:nvSpPr>
           <p:cNvPr id="91" name="Google Shape;91;g3e0c1a5fde7_0_5:notes"/>
-          <p:cNvSpPr txBox="1"/>
+          <p:cNvSpPr txBox="1">
+            <a:spLocks noGrp="1"/>
+          </p:cNvSpPr>
           <p:nvPr>
             <p:ph type="body" idx="1"/>
           </p:nvPr>
@@ -1293,6 +1328,7 @@
               </a:spcAft>
               <a:buNone/>
             </a:pPr>
+            <a:endParaRPr/>
           </a:p>
         </p:txBody>
       </p:sp>
@@ -1305,11 +1341,11 @@
 </file>
 
 <file path=ppt/notesSlides/notesSlide6.xml><?xml version="1.0" encoding="utf-8"?>
-<p:notes xmlns:a="http://schemas.openxmlformats.org/drawingml/2006/main" xmlns:r="http://schemas.openxmlformats.org/officeDocument/2006/relationships" xmlns:p="http://schemas.openxmlformats.org/presentationml/2006/main" showMasterPhAnim="0" showMasterSp="0">
+<p:notes xmlns:a="http://schemas.openxmlformats.org/drawingml/2006/main" xmlns:r="http://schemas.openxmlformats.org/officeDocument/2006/relationships" xmlns:p="http://schemas.openxmlformats.org/presentationml/2006/main" showMasterSp="0" showMasterPhAnim="0">
   <p:cSld>
     <p:spTree>
       <p:nvGrpSpPr>
-        <p:cNvPr id="98" name="Shape 98"/>
+        <p:cNvPr id="1" name="Shape 98"/>
         <p:cNvGrpSpPr/>
         <p:nvPr/>
       </p:nvGrpSpPr>
@@ -1324,14 +1360,16 @@
       <p:sp>
         <p:nvSpPr>
           <p:cNvPr id="99" name="Google Shape;99;g3e1981d9e2e_0_0:notes"/>
-          <p:cNvSpPr/>
+          <p:cNvSpPr>
+            <a:spLocks noGrp="1" noRot="1" noChangeAspect="1"/>
+          </p:cNvSpPr>
           <p:nvPr>
             <p:ph type="sldImg" idx="2"/>
           </p:nvPr>
         </p:nvSpPr>
         <p:spPr>
           <a:xfrm>
-            <a:off x="381300" y="685800"/>
+            <a:off x="381000" y="685800"/>
             <a:ext cx="6096000" cy="3429000"/>
           </a:xfrm>
           <a:custGeom>
@@ -1363,7 +1401,9 @@
       <p:sp>
         <p:nvSpPr>
           <p:cNvPr id="100" name="Google Shape;100;g3e1981d9e2e_0_0:notes"/>
-          <p:cNvSpPr txBox="1"/>
+          <p:cNvSpPr txBox="1">
+            <a:spLocks noGrp="1"/>
+          </p:cNvSpPr>
           <p:nvPr>
             <p:ph type="body" idx="1"/>
           </p:nvPr>
@@ -1392,6 +1432,7 @@
               </a:spcAft>
               <a:buNone/>
             </a:pPr>
+            <a:endParaRPr/>
           </a:p>
         </p:txBody>
       </p:sp>
@@ -1404,11 +1445,11 @@
 </file>
 
 <file path=ppt/notesSlides/notesSlide7.xml><?xml version="1.0" encoding="utf-8"?>
-<p:notes xmlns:a="http://schemas.openxmlformats.org/drawingml/2006/main" xmlns:r="http://schemas.openxmlformats.org/officeDocument/2006/relationships" xmlns:p="http://schemas.openxmlformats.org/presentationml/2006/main" showMasterPhAnim="0" showMasterSp="0">
+<p:notes xmlns:a="http://schemas.openxmlformats.org/drawingml/2006/main" xmlns:r="http://schemas.openxmlformats.org/officeDocument/2006/relationships" xmlns:p="http://schemas.openxmlformats.org/presentationml/2006/main" showMasterSp="0" showMasterPhAnim="0">
   <p:cSld>
     <p:spTree>
       <p:nvGrpSpPr>
-        <p:cNvPr id="104" name="Shape 104"/>
+        <p:cNvPr id="1" name="Shape 104"/>
         <p:cNvGrpSpPr/>
         <p:nvPr/>
       </p:nvGrpSpPr>
@@ -1423,14 +1464,16 @@
       <p:sp>
         <p:nvSpPr>
           <p:cNvPr id="105" name="Google Shape;105;g3e1981d9e2e_0_5:notes"/>
-          <p:cNvSpPr/>
+          <p:cNvSpPr>
+            <a:spLocks noGrp="1" noRot="1" noChangeAspect="1"/>
+          </p:cNvSpPr>
           <p:nvPr>
             <p:ph type="sldImg" idx="2"/>
           </p:nvPr>
         </p:nvSpPr>
         <p:spPr>
           <a:xfrm>
-            <a:off x="381300" y="685800"/>
+            <a:off x="381000" y="685800"/>
             <a:ext cx="6096000" cy="3429000"/>
           </a:xfrm>
           <a:custGeom>
@@ -1462,7 +1505,9 @@
       <p:sp>
         <p:nvSpPr>
           <p:cNvPr id="106" name="Google Shape;106;g3e1981d9e2e_0_5:notes"/>
-          <p:cNvSpPr txBox="1"/>
+          <p:cNvSpPr txBox="1">
+            <a:spLocks noGrp="1"/>
+          </p:cNvSpPr>
           <p:nvPr>
             <p:ph type="body" idx="1"/>
           </p:nvPr>
@@ -1491,6 +1536,7 @@
               </a:spcAft>
               <a:buNone/>
             </a:pPr>
+            <a:endParaRPr/>
           </a:p>
         </p:txBody>
       </p:sp>
@@ -1503,11 +1549,11 @@
 </file>
 
 <file path=ppt/notesSlides/notesSlide8.xml><?xml version="1.0" encoding="utf-8"?>
-<p:notes xmlns:a="http://schemas.openxmlformats.org/drawingml/2006/main" xmlns:r="http://schemas.openxmlformats.org/officeDocument/2006/relationships" xmlns:p="http://schemas.openxmlformats.org/presentationml/2006/main" showMasterPhAnim="0" showMasterSp="0">
+<p:notes xmlns:a="http://schemas.openxmlformats.org/drawingml/2006/main" xmlns:r="http://schemas.openxmlformats.org/officeDocument/2006/relationships" xmlns:p="http://schemas.openxmlformats.org/presentationml/2006/main" showMasterSp="0" showMasterPhAnim="0">
   <p:cSld>
     <p:spTree>
       <p:nvGrpSpPr>
-        <p:cNvPr id="110" name="Shape 110"/>
+        <p:cNvPr id="1" name="Shape 110"/>
         <p:cNvGrpSpPr/>
         <p:nvPr/>
       </p:nvGrpSpPr>
@@ -1522,14 +1568,16 @@
       <p:sp>
         <p:nvSpPr>
           <p:cNvPr id="111" name="Google Shape;111;g3e1981d9e2e_0_12:notes"/>
-          <p:cNvSpPr/>
+          <p:cNvSpPr>
+            <a:spLocks noGrp="1" noRot="1" noChangeAspect="1"/>
+          </p:cNvSpPr>
           <p:nvPr>
             <p:ph type="sldImg" idx="2"/>
           </p:nvPr>
         </p:nvSpPr>
         <p:spPr>
           <a:xfrm>
-            <a:off x="381300" y="685800"/>
+            <a:off x="381000" y="685800"/>
             <a:ext cx="6096000" cy="3429000"/>
           </a:xfrm>
           <a:custGeom>
@@ -1561,7 +1609,9 @@
       <p:sp>
         <p:nvSpPr>
           <p:cNvPr id="112" name="Google Shape;112;g3e1981d9e2e_0_12:notes"/>
-          <p:cNvSpPr txBox="1"/>
+          <p:cNvSpPr txBox="1">
+            <a:spLocks noGrp="1"/>
+          </p:cNvSpPr>
           <p:nvPr>
             <p:ph type="body" idx="1"/>
           </p:nvPr>
@@ -1590,6 +1640,7 @@
               </a:spcAft>
               <a:buNone/>
             </a:pPr>
+            <a:endParaRPr/>
           </a:p>
         </p:txBody>
       </p:sp>
@@ -1602,11 +1653,11 @@
 </file>
 
 <file path=ppt/notesSlides/notesSlide9.xml><?xml version="1.0" encoding="utf-8"?>
-<p:notes xmlns:a="http://schemas.openxmlformats.org/drawingml/2006/main" xmlns:r="http://schemas.openxmlformats.org/officeDocument/2006/relationships" xmlns:p="http://schemas.openxmlformats.org/presentationml/2006/main" showMasterPhAnim="0" showMasterSp="0">
+<p:notes xmlns:a="http://schemas.openxmlformats.org/drawingml/2006/main" xmlns:r="http://schemas.openxmlformats.org/officeDocument/2006/relationships" xmlns:p="http://schemas.openxmlformats.org/presentationml/2006/main" showMasterSp="0" showMasterPhAnim="0">
   <p:cSld>
     <p:spTree>
       <p:nvGrpSpPr>
-        <p:cNvPr id="116" name="Shape 116"/>
+        <p:cNvPr id="1" name="Shape 116"/>
         <p:cNvGrpSpPr/>
         <p:nvPr/>
       </p:nvGrpSpPr>
@@ -1621,14 +1672,16 @@
       <p:sp>
         <p:nvSpPr>
           <p:cNvPr id="117" name="Google Shape;117;g3e1981d9e2e_0_26:notes"/>
-          <p:cNvSpPr/>
+          <p:cNvSpPr>
+            <a:spLocks noGrp="1" noRot="1" noChangeAspect="1"/>
+          </p:cNvSpPr>
           <p:nvPr>
             <p:ph type="sldImg" idx="2"/>
           </p:nvPr>
         </p:nvSpPr>
         <p:spPr>
           <a:xfrm>
-            <a:off x="381300" y="685800"/>
+            <a:off x="381000" y="685800"/>
             <a:ext cx="6096000" cy="3429000"/>
           </a:xfrm>
           <a:custGeom>
@@ -1660,7 +1713,9 @@
       <p:sp>
         <p:nvSpPr>
           <p:cNvPr id="118" name="Google Shape;118;g3e1981d9e2e_0_26:notes"/>
-          <p:cNvSpPr txBox="1"/>
+          <p:cNvSpPr txBox="1">
+            <a:spLocks noGrp="1"/>
+          </p:cNvSpPr>
           <p:nvPr>
             <p:ph type="body" idx="1"/>
           </p:nvPr>
@@ -1689,6 +1744,7 @@
               </a:spcAft>
               <a:buNone/>
             </a:pPr>
+            <a:endParaRPr/>
           </a:p>
         </p:txBody>
       </p:sp>
@@ -1701,7 +1757,7 @@
 </file>
 
 <file path=ppt/slideLayouts/slideLayout1.xml><?xml version="1.0" encoding="utf-8"?>
-<p:sldLayout xmlns:a="http://schemas.openxmlformats.org/drawingml/2006/main" xmlns:r="http://schemas.openxmlformats.org/officeDocument/2006/relationships" xmlns:p="http://schemas.openxmlformats.org/presentationml/2006/main" type="title" matchingName="Title slide">
+<p:sldLayout xmlns:a="http://schemas.openxmlformats.org/drawingml/2006/main" xmlns:r="http://schemas.openxmlformats.org/officeDocument/2006/relationships" xmlns:p="http://schemas.openxmlformats.org/presentationml/2006/main" matchingName="Title slide" type="title">
   <p:cSld name="TITLE">
     <p:bg>
       <p:bgPr>
@@ -1713,7 +1769,7 @@
     </p:bg>
     <p:spTree>
       <p:nvGrpSpPr>
-        <p:cNvPr id="9" name="Shape 9"/>
+        <p:cNvPr id="1" name="Shape 9"/>
         <p:cNvGrpSpPr/>
         <p:nvPr/>
       </p:nvGrpSpPr>
@@ -1761,6 +1817,7 @@
               </a:spcAft>
               <a:buNone/>
             </a:pPr>
+            <a:endParaRPr/>
           </a:p>
         </p:txBody>
       </p:sp>
@@ -1793,7 +1850,9 @@
       <p:sp>
         <p:nvSpPr>
           <p:cNvPr id="12" name="Google Shape;12;p2"/>
-          <p:cNvSpPr txBox="1"/>
+          <p:cNvSpPr txBox="1">
+            <a:spLocks noGrp="1"/>
+          </p:cNvSpPr>
           <p:nvPr>
             <p:ph type="ctrTitle"/>
           </p:nvPr>
@@ -1975,13 +2034,17 @@
               </a:defRPr>
             </a:lvl9pPr>
           </a:lstStyle>
-          <a:p/>
+          <a:p>
+            <a:endParaRPr/>
+          </a:p>
         </p:txBody>
       </p:sp>
       <p:sp>
         <p:nvSpPr>
           <p:cNvPr id="13" name="Google Shape;13;p2"/>
-          <p:cNvSpPr txBox="1"/>
+          <p:cNvSpPr txBox="1">
+            <a:spLocks noGrp="1"/>
+          </p:cNvSpPr>
           <p:nvPr>
             <p:ph type="subTitle" idx="1"/>
           </p:nvPr>
@@ -2190,13 +2253,17 @@
               </a:defRPr>
             </a:lvl9pPr>
           </a:lstStyle>
-          <a:p/>
+          <a:p>
+            <a:endParaRPr/>
+          </a:p>
         </p:txBody>
       </p:sp>
       <p:sp>
         <p:nvSpPr>
           <p:cNvPr id="14" name="Google Shape;14;p2"/>
-          <p:cNvSpPr txBox="1"/>
+          <p:cNvSpPr txBox="1">
+            <a:spLocks noGrp="1"/>
+          </p:cNvSpPr>
           <p:nvPr>
             <p:ph type="sldNum" idx="12"/>
           </p:nvPr>
@@ -2300,6 +2367,7 @@
             </a:pPr>
             <a:fld id="{00000000-1234-1234-1234-123412341234}" type="slidenum">
               <a:rPr lang="en-US"/>
+              <a:t>‹#›</a:t>
             </a:fld>
             <a:endParaRPr lang="en-US"/>
           </a:p>
@@ -2318,7 +2386,7 @@
   <p:cSld name="BIG_NUMBER">
     <p:spTree>
       <p:nvGrpSpPr>
-        <p:cNvPr id="49" name="Shape 49"/>
+        <p:cNvPr id="1" name="Shape 49"/>
         <p:cNvGrpSpPr/>
         <p:nvPr/>
       </p:nvGrpSpPr>
@@ -2333,7 +2401,9 @@
       <p:sp>
         <p:nvSpPr>
           <p:cNvPr id="50" name="Google Shape;50;p11"/>
-          <p:cNvSpPr txBox="1"/>
+          <p:cNvSpPr txBox="1">
+            <a:spLocks noGrp="1"/>
+          </p:cNvSpPr>
           <p:nvPr>
             <p:ph type="title" hasCustomPrompt="1"/>
           </p:nvPr>
@@ -2462,7 +2532,9 @@
       <p:sp>
         <p:nvSpPr>
           <p:cNvPr id="51" name="Google Shape;51;p11"/>
-          <p:cNvSpPr txBox="1"/>
+          <p:cNvSpPr txBox="1">
+            <a:spLocks noGrp="1"/>
+          </p:cNvSpPr>
           <p:nvPr>
             <p:ph type="body" idx="1"/>
           </p:nvPr>
@@ -2581,13 +2653,17 @@
               <a:defRPr/>
             </a:lvl9pPr>
           </a:lstStyle>
-          <a:p/>
+          <a:p>
+            <a:endParaRPr/>
+          </a:p>
         </p:txBody>
       </p:sp>
       <p:sp>
         <p:nvSpPr>
           <p:cNvPr id="52" name="Google Shape;52;p11"/>
-          <p:cNvSpPr txBox="1"/>
+          <p:cNvSpPr txBox="1">
+            <a:spLocks noGrp="1"/>
+          </p:cNvSpPr>
           <p:nvPr>
             <p:ph type="sldNum" idx="12"/>
           </p:nvPr>
@@ -2655,6 +2731,7 @@
             </a:pPr>
             <a:fld id="{00000000-1234-1234-1234-123412341234}" type="slidenum">
               <a:rPr lang="en-US"/>
+              <a:t>‹#›</a:t>
             </a:fld>
             <a:endParaRPr lang="en-US"/>
           </a:p>
@@ -2669,11 +2746,11 @@
 </file>
 
 <file path=ppt/slideLayouts/slideLayout11.xml><?xml version="1.0" encoding="utf-8"?>
-<p:sldLayout xmlns:a="http://schemas.openxmlformats.org/drawingml/2006/main" xmlns:r="http://schemas.openxmlformats.org/officeDocument/2006/relationships" xmlns:p="http://schemas.openxmlformats.org/presentationml/2006/main" type="blank" matchingName="Blank">
+<p:sldLayout xmlns:a="http://schemas.openxmlformats.org/drawingml/2006/main" xmlns:r="http://schemas.openxmlformats.org/officeDocument/2006/relationships" xmlns:p="http://schemas.openxmlformats.org/presentationml/2006/main" matchingName="Blank" type="blank">
   <p:cSld name="BLANK">
     <p:spTree>
       <p:nvGrpSpPr>
-        <p:cNvPr id="53" name="Shape 53"/>
+        <p:cNvPr id="1" name="Shape 53"/>
         <p:cNvGrpSpPr/>
         <p:nvPr/>
       </p:nvGrpSpPr>
@@ -2688,7 +2765,9 @@
       <p:sp>
         <p:nvSpPr>
           <p:cNvPr id="54" name="Google Shape;54;p12"/>
-          <p:cNvSpPr txBox="1"/>
+          <p:cNvSpPr txBox="1">
+            <a:spLocks noGrp="1"/>
+          </p:cNvSpPr>
           <p:nvPr>
             <p:ph type="sldNum" idx="12"/>
           </p:nvPr>
@@ -2756,6 +2835,7 @@
             </a:pPr>
             <a:fld id="{00000000-1234-1234-1234-123412341234}" type="slidenum">
               <a:rPr lang="en-US"/>
+              <a:t>‹#›</a:t>
             </a:fld>
             <a:endParaRPr lang="en-US"/>
           </a:p>
@@ -2770,7 +2850,7 @@
 </file>
 
 <file path=ppt/slideLayouts/slideLayout2.xml><?xml version="1.0" encoding="utf-8"?>
-<p:sldLayout xmlns:a="http://schemas.openxmlformats.org/drawingml/2006/main" xmlns:r="http://schemas.openxmlformats.org/officeDocument/2006/relationships" xmlns:p="http://schemas.openxmlformats.org/presentationml/2006/main" type="secHead" matchingName="Section header">
+<p:sldLayout xmlns:a="http://schemas.openxmlformats.org/drawingml/2006/main" xmlns:r="http://schemas.openxmlformats.org/officeDocument/2006/relationships" xmlns:p="http://schemas.openxmlformats.org/presentationml/2006/main" matchingName="Section header" type="secHead">
   <p:cSld name="SECTION_HEADER">
     <p:bg>
       <p:bgPr>
@@ -2782,7 +2862,7 @@
     </p:bg>
     <p:spTree>
       <p:nvGrpSpPr>
-        <p:cNvPr id="15" name="Shape 15"/>
+        <p:cNvPr id="1" name="Shape 15"/>
         <p:cNvGrpSpPr/>
         <p:nvPr/>
       </p:nvGrpSpPr>
@@ -2823,7 +2903,9 @@
       <p:sp>
         <p:nvSpPr>
           <p:cNvPr id="17" name="Google Shape;17;p3"/>
-          <p:cNvSpPr txBox="1"/>
+          <p:cNvSpPr txBox="1">
+            <a:spLocks noGrp="1"/>
+          </p:cNvSpPr>
           <p:nvPr>
             <p:ph type="title"/>
           </p:nvPr>
@@ -3005,13 +3087,17 @@
               </a:defRPr>
             </a:lvl9pPr>
           </a:lstStyle>
-          <a:p/>
+          <a:p>
+            <a:endParaRPr/>
+          </a:p>
         </p:txBody>
       </p:sp>
       <p:sp>
         <p:nvSpPr>
           <p:cNvPr id="18" name="Google Shape;18;p3"/>
-          <p:cNvSpPr txBox="1"/>
+          <p:cNvSpPr txBox="1">
+            <a:spLocks noGrp="1"/>
+          </p:cNvSpPr>
           <p:nvPr>
             <p:ph type="sldNum" idx="12"/>
           </p:nvPr>
@@ -3115,6 +3201,7 @@
             </a:pPr>
             <a:fld id="{00000000-1234-1234-1234-123412341234}" type="slidenum">
               <a:rPr lang="en-US"/>
+              <a:t>‹#›</a:t>
             </a:fld>
             <a:endParaRPr lang="en-US"/>
           </a:p>
@@ -3129,11 +3216,11 @@
 </file>
 
 <file path=ppt/slideLayouts/slideLayout3.xml><?xml version="1.0" encoding="utf-8"?>
-<p:sldLayout xmlns:a="http://schemas.openxmlformats.org/drawingml/2006/main" xmlns:r="http://schemas.openxmlformats.org/officeDocument/2006/relationships" xmlns:p="http://schemas.openxmlformats.org/presentationml/2006/main" type="tx" matchingName="Title and body">
+<p:sldLayout xmlns:a="http://schemas.openxmlformats.org/drawingml/2006/main" xmlns:r="http://schemas.openxmlformats.org/officeDocument/2006/relationships" xmlns:p="http://schemas.openxmlformats.org/presentationml/2006/main" matchingName="Title and body" type="tx">
   <p:cSld name="TITLE_AND_BODY">
     <p:spTree>
       <p:nvGrpSpPr>
-        <p:cNvPr id="19" name="Shape 19"/>
+        <p:cNvPr id="1" name="Shape 19"/>
         <p:cNvGrpSpPr/>
         <p:nvPr/>
       </p:nvGrpSpPr>
@@ -3181,13 +3268,16 @@
               </a:spcAft>
               <a:buNone/>
             </a:pPr>
+            <a:endParaRPr/>
           </a:p>
         </p:txBody>
       </p:sp>
       <p:sp>
         <p:nvSpPr>
           <p:cNvPr id="21" name="Google Shape;21;p4"/>
-          <p:cNvSpPr txBox="1"/>
+          <p:cNvSpPr txBox="1">
+            <a:spLocks noGrp="1"/>
+          </p:cNvSpPr>
           <p:nvPr>
             <p:ph type="title"/>
           </p:nvPr>
@@ -3306,13 +3396,17 @@
               <a:defRPr/>
             </a:lvl9pPr>
           </a:lstStyle>
-          <a:p/>
+          <a:p>
+            <a:endParaRPr/>
+          </a:p>
         </p:txBody>
       </p:sp>
       <p:sp>
         <p:nvSpPr>
           <p:cNvPr id="22" name="Google Shape;22;p4"/>
-          <p:cNvSpPr txBox="1"/>
+          <p:cNvSpPr txBox="1">
+            <a:spLocks noGrp="1"/>
+          </p:cNvSpPr>
           <p:nvPr>
             <p:ph type="body" idx="1"/>
           </p:nvPr>
@@ -3431,13 +3525,17 @@
               <a:defRPr/>
             </a:lvl9pPr>
           </a:lstStyle>
-          <a:p/>
+          <a:p>
+            <a:endParaRPr/>
+          </a:p>
         </p:txBody>
       </p:sp>
       <p:sp>
         <p:nvSpPr>
           <p:cNvPr id="23" name="Google Shape;23;p4"/>
-          <p:cNvSpPr txBox="1"/>
+          <p:cNvSpPr txBox="1">
+            <a:spLocks noGrp="1"/>
+          </p:cNvSpPr>
           <p:nvPr>
             <p:ph type="sldNum" idx="12"/>
           </p:nvPr>
@@ -3505,6 +3603,7 @@
             </a:pPr>
             <a:fld id="{00000000-1234-1234-1234-123412341234}" type="slidenum">
               <a:rPr lang="en-US"/>
+              <a:t>‹#›</a:t>
             </a:fld>
             <a:endParaRPr lang="en-US"/>
           </a:p>
@@ -3519,11 +3618,11 @@
 </file>
 
 <file path=ppt/slideLayouts/slideLayout4.xml><?xml version="1.0" encoding="utf-8"?>
-<p:sldLayout xmlns:a="http://schemas.openxmlformats.org/drawingml/2006/main" xmlns:r="http://schemas.openxmlformats.org/officeDocument/2006/relationships" xmlns:p="http://schemas.openxmlformats.org/presentationml/2006/main" type="twoColTx" matchingName="Title and two columns">
+<p:sldLayout xmlns:a="http://schemas.openxmlformats.org/drawingml/2006/main" xmlns:r="http://schemas.openxmlformats.org/officeDocument/2006/relationships" xmlns:p="http://schemas.openxmlformats.org/presentationml/2006/main" matchingName="Title and two columns" type="twoColTx">
   <p:cSld name="TITLE_AND_TWO_COLUMNS">
     <p:spTree>
       <p:nvGrpSpPr>
-        <p:cNvPr id="24" name="Shape 24"/>
+        <p:cNvPr id="1" name="Shape 24"/>
         <p:cNvGrpSpPr/>
         <p:nvPr/>
       </p:nvGrpSpPr>
@@ -3538,7 +3637,9 @@
       <p:sp>
         <p:nvSpPr>
           <p:cNvPr id="25" name="Google Shape;25;p5"/>
-          <p:cNvSpPr txBox="1"/>
+          <p:cNvSpPr txBox="1">
+            <a:spLocks noGrp="1"/>
+          </p:cNvSpPr>
           <p:nvPr>
             <p:ph type="title"/>
           </p:nvPr>
@@ -3657,13 +3758,17 @@
               <a:defRPr/>
             </a:lvl9pPr>
           </a:lstStyle>
-          <a:p/>
+          <a:p>
+            <a:endParaRPr/>
+          </a:p>
         </p:txBody>
       </p:sp>
       <p:sp>
         <p:nvSpPr>
           <p:cNvPr id="26" name="Google Shape;26;p5"/>
-          <p:cNvSpPr txBox="1"/>
+          <p:cNvSpPr txBox="1">
+            <a:spLocks noGrp="1"/>
+          </p:cNvSpPr>
           <p:nvPr>
             <p:ph type="body" idx="1"/>
           </p:nvPr>
@@ -3782,13 +3887,17 @@
               <a:defRPr sz="1200"/>
             </a:lvl9pPr>
           </a:lstStyle>
-          <a:p/>
+          <a:p>
+            <a:endParaRPr/>
+          </a:p>
         </p:txBody>
       </p:sp>
       <p:sp>
         <p:nvSpPr>
           <p:cNvPr id="27" name="Google Shape;27;p5"/>
-          <p:cNvSpPr txBox="1"/>
+          <p:cNvSpPr txBox="1">
+            <a:spLocks noGrp="1"/>
+          </p:cNvSpPr>
           <p:nvPr>
             <p:ph type="body" idx="2"/>
           </p:nvPr>
@@ -3907,13 +4016,17 @@
               <a:defRPr sz="1200"/>
             </a:lvl9pPr>
           </a:lstStyle>
-          <a:p/>
+          <a:p>
+            <a:endParaRPr/>
+          </a:p>
         </p:txBody>
       </p:sp>
       <p:sp>
         <p:nvSpPr>
           <p:cNvPr id="28" name="Google Shape;28;p5"/>
-          <p:cNvSpPr txBox="1"/>
+          <p:cNvSpPr txBox="1">
+            <a:spLocks noGrp="1"/>
+          </p:cNvSpPr>
           <p:nvPr>
             <p:ph type="sldNum" idx="12"/>
           </p:nvPr>
@@ -3981,6 +4094,7 @@
             </a:pPr>
             <a:fld id="{00000000-1234-1234-1234-123412341234}" type="slidenum">
               <a:rPr lang="en-US"/>
+              <a:t>‹#›</a:t>
             </a:fld>
             <a:endParaRPr lang="en-US"/>
           </a:p>
@@ -3995,11 +4109,11 @@
 </file>
 
 <file path=ppt/slideLayouts/slideLayout5.xml><?xml version="1.0" encoding="utf-8"?>
-<p:sldLayout xmlns:a="http://schemas.openxmlformats.org/drawingml/2006/main" xmlns:r="http://schemas.openxmlformats.org/officeDocument/2006/relationships" xmlns:p="http://schemas.openxmlformats.org/presentationml/2006/main" type="titleOnly" matchingName="Title only">
+<p:sldLayout xmlns:a="http://schemas.openxmlformats.org/drawingml/2006/main" xmlns:r="http://schemas.openxmlformats.org/officeDocument/2006/relationships" xmlns:p="http://schemas.openxmlformats.org/presentationml/2006/main" matchingName="Title only" type="titleOnly">
   <p:cSld name="TITLE_ONLY">
     <p:spTree>
       <p:nvGrpSpPr>
-        <p:cNvPr id="29" name="Shape 29"/>
+        <p:cNvPr id="1" name="Shape 29"/>
         <p:cNvGrpSpPr/>
         <p:nvPr/>
       </p:nvGrpSpPr>
@@ -4014,7 +4128,9 @@
       <p:sp>
         <p:nvSpPr>
           <p:cNvPr id="30" name="Google Shape;30;p6"/>
-          <p:cNvSpPr txBox="1"/>
+          <p:cNvSpPr txBox="1">
+            <a:spLocks noGrp="1"/>
+          </p:cNvSpPr>
           <p:nvPr>
             <p:ph type="title"/>
           </p:nvPr>
@@ -4133,13 +4249,17 @@
               <a:defRPr/>
             </a:lvl9pPr>
           </a:lstStyle>
-          <a:p/>
+          <a:p>
+            <a:endParaRPr/>
+          </a:p>
         </p:txBody>
       </p:sp>
       <p:sp>
         <p:nvSpPr>
           <p:cNvPr id="31" name="Google Shape;31;p6"/>
-          <p:cNvSpPr txBox="1"/>
+          <p:cNvSpPr txBox="1">
+            <a:spLocks noGrp="1"/>
+          </p:cNvSpPr>
           <p:nvPr>
             <p:ph type="sldNum" idx="12"/>
           </p:nvPr>
@@ -4207,6 +4327,7 @@
             </a:pPr>
             <a:fld id="{00000000-1234-1234-1234-123412341234}" type="slidenum">
               <a:rPr lang="en-US"/>
+              <a:t>‹#›</a:t>
             </a:fld>
             <a:endParaRPr lang="en-US"/>
           </a:p>
@@ -4225,7 +4346,7 @@
   <p:cSld name="ONE_COLUMN_TEXT">
     <p:spTree>
       <p:nvGrpSpPr>
-        <p:cNvPr id="32" name="Shape 32"/>
+        <p:cNvPr id="1" name="Shape 32"/>
         <p:cNvGrpSpPr/>
         <p:nvPr/>
       </p:nvGrpSpPr>
@@ -4240,7 +4361,9 @@
       <p:sp>
         <p:nvSpPr>
           <p:cNvPr id="33" name="Google Shape;33;p7"/>
-          <p:cNvSpPr txBox="1"/>
+          <p:cNvSpPr txBox="1">
+            <a:spLocks noGrp="1"/>
+          </p:cNvSpPr>
           <p:nvPr>
             <p:ph type="title"/>
           </p:nvPr>
@@ -4359,13 +4482,17 @@
               <a:defRPr sz="2400"/>
             </a:lvl9pPr>
           </a:lstStyle>
-          <a:p/>
+          <a:p>
+            <a:endParaRPr/>
+          </a:p>
         </p:txBody>
       </p:sp>
       <p:sp>
         <p:nvSpPr>
           <p:cNvPr id="34" name="Google Shape;34;p7"/>
-          <p:cNvSpPr txBox="1"/>
+          <p:cNvSpPr txBox="1">
+            <a:spLocks noGrp="1"/>
+          </p:cNvSpPr>
           <p:nvPr>
             <p:ph type="body" idx="1"/>
           </p:nvPr>
@@ -4484,13 +4611,17 @@
               <a:defRPr sz="1200"/>
             </a:lvl9pPr>
           </a:lstStyle>
-          <a:p/>
+          <a:p>
+            <a:endParaRPr/>
+          </a:p>
         </p:txBody>
       </p:sp>
       <p:sp>
         <p:nvSpPr>
           <p:cNvPr id="35" name="Google Shape;35;p7"/>
-          <p:cNvSpPr txBox="1"/>
+          <p:cNvSpPr txBox="1">
+            <a:spLocks noGrp="1"/>
+          </p:cNvSpPr>
           <p:nvPr>
             <p:ph type="sldNum" idx="12"/>
           </p:nvPr>
@@ -4558,6 +4689,7 @@
             </a:pPr>
             <a:fld id="{00000000-1234-1234-1234-123412341234}" type="slidenum">
               <a:rPr lang="en-US"/>
+              <a:t>‹#›</a:t>
             </a:fld>
             <a:endParaRPr lang="en-US"/>
           </a:p>
@@ -4584,7 +4716,7 @@
     </p:bg>
     <p:spTree>
       <p:nvGrpSpPr>
-        <p:cNvPr id="36" name="Shape 36"/>
+        <p:cNvPr id="1" name="Shape 36"/>
         <p:cNvGrpSpPr/>
         <p:nvPr/>
       </p:nvGrpSpPr>
@@ -4599,7 +4731,9 @@
       <p:sp>
         <p:nvSpPr>
           <p:cNvPr id="37" name="Google Shape;37;p8"/>
-          <p:cNvSpPr txBox="1"/>
+          <p:cNvSpPr txBox="1">
+            <a:spLocks noGrp="1"/>
+          </p:cNvSpPr>
           <p:nvPr>
             <p:ph type="title"/>
           </p:nvPr>
@@ -4781,13 +4915,17 @@
               </a:defRPr>
             </a:lvl9pPr>
           </a:lstStyle>
-          <a:p/>
+          <a:p>
+            <a:endParaRPr/>
+          </a:p>
         </p:txBody>
       </p:sp>
       <p:sp>
         <p:nvSpPr>
           <p:cNvPr id="38" name="Google Shape;38;p8"/>
-          <p:cNvSpPr txBox="1"/>
+          <p:cNvSpPr txBox="1">
+            <a:spLocks noGrp="1"/>
+          </p:cNvSpPr>
           <p:nvPr>
             <p:ph type="sldNum" idx="12"/>
           </p:nvPr>
@@ -4891,6 +5029,7 @@
             </a:pPr>
             <a:fld id="{00000000-1234-1234-1234-123412341234}" type="slidenum">
               <a:rPr lang="en-US"/>
+              <a:t>‹#›</a:t>
             </a:fld>
             <a:endParaRPr lang="en-US"/>
           </a:p>
@@ -4909,7 +5048,7 @@
   <p:cSld name="SECTION_TITLE_AND_DESCRIPTION">
     <p:spTree>
       <p:nvGrpSpPr>
-        <p:cNvPr id="39" name="Shape 39"/>
+        <p:cNvPr id="1" name="Shape 39"/>
         <p:cNvGrpSpPr/>
         <p:nvPr/>
       </p:nvGrpSpPr>
@@ -4957,6 +5096,7 @@
               </a:spcAft>
               <a:buNone/>
             </a:pPr>
+            <a:endParaRPr/>
           </a:p>
         </p:txBody>
       </p:sp>
@@ -4989,7 +5129,9 @@
       <p:sp>
         <p:nvSpPr>
           <p:cNvPr id="42" name="Google Shape;42;p9"/>
-          <p:cNvSpPr txBox="1"/>
+          <p:cNvSpPr txBox="1">
+            <a:spLocks noGrp="1"/>
+          </p:cNvSpPr>
           <p:nvPr>
             <p:ph type="title"/>
           </p:nvPr>
@@ -5171,13 +5313,17 @@
               </a:defRPr>
             </a:lvl9pPr>
           </a:lstStyle>
-          <a:p/>
+          <a:p>
+            <a:endParaRPr/>
+          </a:p>
         </p:txBody>
       </p:sp>
       <p:sp>
         <p:nvSpPr>
           <p:cNvPr id="43" name="Google Shape;43;p9"/>
-          <p:cNvSpPr txBox="1"/>
+          <p:cNvSpPr txBox="1">
+            <a:spLocks noGrp="1"/>
+          </p:cNvSpPr>
           <p:nvPr>
             <p:ph type="subTitle" idx="1"/>
           </p:nvPr>
@@ -5323,13 +5469,17 @@
               <a:defRPr sz="2100"/>
             </a:lvl9pPr>
           </a:lstStyle>
-          <a:p/>
+          <a:p>
+            <a:endParaRPr/>
+          </a:p>
         </p:txBody>
       </p:sp>
       <p:sp>
         <p:nvSpPr>
           <p:cNvPr id="44" name="Google Shape;44;p9"/>
-          <p:cNvSpPr txBox="1"/>
+          <p:cNvSpPr txBox="1">
+            <a:spLocks noGrp="1"/>
+          </p:cNvSpPr>
           <p:nvPr>
             <p:ph type="body" idx="2"/>
           </p:nvPr>
@@ -5511,13 +5661,17 @@
               </a:defRPr>
             </a:lvl9pPr>
           </a:lstStyle>
-          <a:p/>
+          <a:p>
+            <a:endParaRPr/>
+          </a:p>
         </p:txBody>
       </p:sp>
       <p:sp>
         <p:nvSpPr>
           <p:cNvPr id="45" name="Google Shape;45;p9"/>
-          <p:cNvSpPr txBox="1"/>
+          <p:cNvSpPr txBox="1">
+            <a:spLocks noGrp="1"/>
+          </p:cNvSpPr>
           <p:nvPr>
             <p:ph type="sldNum" idx="12"/>
           </p:nvPr>
@@ -5621,6 +5775,7 @@
             </a:pPr>
             <a:fld id="{00000000-1234-1234-1234-123412341234}" type="slidenum">
               <a:rPr lang="en-US"/>
+              <a:t>‹#›</a:t>
             </a:fld>
             <a:endParaRPr lang="en-US"/>
           </a:p>
@@ -5639,7 +5794,7 @@
   <p:cSld name="CAPTION_ONLY">
     <p:spTree>
       <p:nvGrpSpPr>
-        <p:cNvPr id="46" name="Shape 46"/>
+        <p:cNvPr id="1" name="Shape 46"/>
         <p:cNvGrpSpPr/>
         <p:nvPr/>
       </p:nvGrpSpPr>
@@ -5654,7 +5809,9 @@
       <p:sp>
         <p:nvSpPr>
           <p:cNvPr id="47" name="Google Shape;47;p10"/>
-          <p:cNvSpPr txBox="1"/>
+          <p:cNvSpPr txBox="1">
+            <a:spLocks noGrp="1"/>
+          </p:cNvSpPr>
           <p:nvPr>
             <p:ph type="body" idx="1"/>
           </p:nvPr>
@@ -5688,13 +5845,17 @@
               <a:defRPr/>
             </a:lvl1pPr>
           </a:lstStyle>
-          <a:p/>
+          <a:p>
+            <a:endParaRPr/>
+          </a:p>
         </p:txBody>
       </p:sp>
       <p:sp>
         <p:nvSpPr>
           <p:cNvPr id="48" name="Google Shape;48;p10"/>
-          <p:cNvSpPr txBox="1"/>
+          <p:cNvSpPr txBox="1">
+            <a:spLocks noGrp="1"/>
+          </p:cNvSpPr>
           <p:nvPr>
             <p:ph type="sldNum" idx="12"/>
           </p:nvPr>
@@ -5762,6 +5923,7 @@
             </a:pPr>
             <a:fld id="{00000000-1234-1234-1234-123412341234}" type="slidenum">
               <a:rPr lang="en-US"/>
+              <a:t>‹#›</a:t>
             </a:fld>
             <a:endParaRPr lang="en-US"/>
           </a:p>
@@ -5788,7 +5950,7 @@
     </p:bg>
     <p:spTree>
       <p:nvGrpSpPr>
-        <p:cNvPr id="5" name="Shape 5"/>
+        <p:cNvPr id="1" name="Shape 5"/>
         <p:cNvGrpSpPr/>
         <p:nvPr/>
       </p:nvGrpSpPr>
@@ -5803,7 +5965,9 @@
       <p:sp>
         <p:nvSpPr>
           <p:cNvPr id="6" name="Google Shape;6;p1"/>
-          <p:cNvSpPr txBox="1"/>
+          <p:cNvSpPr txBox="1">
+            <a:spLocks noGrp="1"/>
+          </p:cNvSpPr>
           <p:nvPr>
             <p:ph type="title"/>
           </p:nvPr>
@@ -6034,13 +6198,17 @@
               </a:defRPr>
             </a:lvl9pPr>
           </a:lstStyle>
-          <a:p/>
+          <a:p>
+            <a:endParaRPr/>
+          </a:p>
         </p:txBody>
       </p:sp>
       <p:sp>
         <p:nvSpPr>
           <p:cNvPr id="7" name="Google Shape;7;p1"/>
-          <p:cNvSpPr txBox="1"/>
+          <p:cNvSpPr txBox="1">
+            <a:spLocks noGrp="1"/>
+          </p:cNvSpPr>
           <p:nvPr>
             <p:ph type="body" idx="1"/>
           </p:nvPr>
@@ -6298,13 +6466,17 @@
               </a:defRPr>
             </a:lvl9pPr>
           </a:lstStyle>
-          <a:p/>
+          <a:p>
+            <a:endParaRPr/>
+          </a:p>
         </p:txBody>
       </p:sp>
       <p:sp>
         <p:nvSpPr>
           <p:cNvPr id="8" name="Google Shape;8;p1"/>
-          <p:cNvSpPr txBox="1"/>
+          <p:cNvSpPr txBox="1">
+            <a:spLocks noGrp="1"/>
+          </p:cNvSpPr>
           <p:nvPr>
             <p:ph type="sldNum" idx="12"/>
           </p:nvPr>
@@ -6448,6 +6620,7 @@
             </a:pPr>
             <a:fld id="{00000000-1234-1234-1234-123412341234}" type="slidenum">
               <a:rPr lang="en-US"/>
+              <a:t>‹#›</a:t>
             </a:fld>
             <a:endParaRPr lang="en-US"/>
           </a:p>
@@ -7167,7 +7340,7 @@
   <p:cSld>
     <p:spTree>
       <p:nvGrpSpPr>
-        <p:cNvPr id="58" name="Shape 58"/>
+        <p:cNvPr id="1" name="Shape 58"/>
         <p:cNvGrpSpPr/>
         <p:nvPr/>
       </p:nvGrpSpPr>
@@ -7182,7 +7355,9 @@
       <p:sp>
         <p:nvSpPr>
           <p:cNvPr id="59" name="Google Shape;59;p13"/>
-          <p:cNvSpPr txBox="1"/>
+          <p:cNvSpPr txBox="1">
+            <a:spLocks noGrp="1"/>
+          </p:cNvSpPr>
           <p:nvPr>
             <p:ph type="ctrTitle"/>
           </p:nvPr>
@@ -7215,14 +7390,15 @@
               <a:rPr lang="en-US"/>
               <a:t>CRM для Центров Дополнительного образования</a:t>
             </a:r>
-            <a:endParaRPr lang="en-US"/>
           </a:p>
         </p:txBody>
       </p:sp>
       <p:sp>
         <p:nvSpPr>
           <p:cNvPr id="60" name="Google Shape;60;p13"/>
-          <p:cNvSpPr txBox="1"/>
+          <p:cNvSpPr txBox="1">
+            <a:spLocks noGrp="1"/>
+          </p:cNvSpPr>
           <p:nvPr>
             <p:ph type="subTitle" idx="1"/>
           </p:nvPr>
@@ -7255,7 +7431,6 @@
               <a:rPr lang="en-US" sz="2900"/>
               <a:t>Очилов Артур</a:t>
             </a:r>
-            <a:endParaRPr lang="en-US" sz="2900"/>
           </a:p>
           <a:p>
             <a:pPr marL="0" lvl="0" indent="0" algn="l" rtl="0">
@@ -7271,7 +7446,6 @@
               <a:rPr lang="ru-RU" sz="2900"/>
               <a:t>Сидакова Вероника</a:t>
             </a:r>
-            <a:endParaRPr lang="ru-RU" sz="2900"/>
           </a:p>
         </p:txBody>
       </p:sp>
@@ -7280,6 +7454,13 @@
   <p:clrMapOvr>
     <a:masterClrMapping/>
   </p:clrMapOvr>
+  <p:timing>
+    <p:tnLst>
+      <p:par>
+        <p:cTn id="1" dur="indefinite" restart="never" nodeType="tmRoot"/>
+      </p:par>
+    </p:tnLst>
+  </p:timing>
 </p:sld>
 </file>
 
@@ -7288,7 +7469,7 @@
   <p:cSld>
     <p:spTree>
       <p:nvGrpSpPr>
-        <p:cNvPr id="126" name="Shape 126"/>
+        <p:cNvPr id="1" name="Shape 126"/>
         <p:cNvGrpSpPr/>
         <p:nvPr/>
       </p:nvGrpSpPr>
@@ -7303,7 +7484,9 @@
       <p:sp>
         <p:nvSpPr>
           <p:cNvPr id="127" name="Google Shape;127;p22"/>
-          <p:cNvSpPr txBox="1"/>
+          <p:cNvSpPr txBox="1">
+            <a:spLocks noGrp="1"/>
+          </p:cNvSpPr>
           <p:nvPr>
             <p:ph type="title"/>
           </p:nvPr>
@@ -7353,7 +7536,7 @@
   <p:cSld>
     <p:spTree>
       <p:nvGrpSpPr>
-        <p:cNvPr id="64" name="Shape 64"/>
+        <p:cNvPr id="1" name="Shape 64"/>
         <p:cNvGrpSpPr/>
         <p:nvPr/>
       </p:nvGrpSpPr>
@@ -7368,7 +7551,9 @@
       <p:sp>
         <p:nvSpPr>
           <p:cNvPr id="65" name="Google Shape;65;p14"/>
-          <p:cNvSpPr txBox="1"/>
+          <p:cNvSpPr txBox="1">
+            <a:spLocks noGrp="1"/>
+          </p:cNvSpPr>
           <p:nvPr>
             <p:ph type="title"/>
           </p:nvPr>
@@ -7401,14 +7586,15 @@
               <a:rPr lang="en-US"/>
               <a:t>В чем цель проекта?</a:t>
             </a:r>
-            <a:endParaRPr lang="en-US"/>
           </a:p>
         </p:txBody>
       </p:sp>
       <p:sp>
         <p:nvSpPr>
           <p:cNvPr id="66" name="Google Shape;66;p14"/>
-          <p:cNvSpPr txBox="1"/>
+          <p:cNvSpPr txBox="1">
+            <a:spLocks noGrp="1"/>
+          </p:cNvSpPr>
           <p:nvPr>
             <p:ph type="body" idx="1"/>
           </p:nvPr>
@@ -7441,6 +7627,17 @@
               <a:rPr lang="en-US"/>
               <a:t>Преподавателям в ЦДО приходится работать с бумажками, и вести учет учеников карандашем - Это очень неудобно, а главное поиск и хранение таких документов тратит много места и времени. Также не стоит забывать о человеческом факторе. </a:t>
             </a:r>
+          </a:p>
+          <a:p>
+            <a:pPr marL="0" lvl="0" indent="0" algn="l" rtl="0">
+              <a:spcBef>
+                <a:spcPts val="1200"/>
+              </a:spcBef>
+              <a:spcAft>
+                <a:spcPts val="0"/>
+              </a:spcAft>
+              <a:buNone/>
+            </a:pPr>
             <a:endParaRPr lang="en-US"/>
           </a:p>
           <a:p>
@@ -7449,21 +7646,11 @@
                 <a:spcPts val="1200"/>
               </a:spcBef>
               <a:spcAft>
-                <a:spcPts val="0"/>
+                <a:spcPts val="1200"/>
               </a:spcAft>
               <a:buNone/>
             </a:pPr>
-          </a:p>
-          <a:p>
-            <a:pPr marL="0" lvl="0" indent="0" algn="l" rtl="0">
-              <a:spcBef>
-                <a:spcPts val="1200"/>
-              </a:spcBef>
-              <a:spcAft>
-                <a:spcPts val="1200"/>
-              </a:spcAft>
-              <a:buNone/>
-            </a:pPr>
+            <a:endParaRPr lang="en-US"/>
           </a:p>
         </p:txBody>
       </p:sp>
@@ -7474,7 +7661,7 @@
           <p:nvPr/>
         </p:nvPicPr>
         <p:blipFill>
-          <a:blip r:embed="rId1"/>
+          <a:blip r:embed="rId3"/>
           <a:stretch>
             <a:fillRect/>
           </a:stretch>
@@ -7500,7 +7687,7 @@
           <p:nvPr/>
         </p:nvPicPr>
         <p:blipFill>
-          <a:blip r:embed="rId2"/>
+          <a:blip r:embed="rId4"/>
           <a:stretch>
             <a:fillRect/>
           </a:stretch>
@@ -7524,6 +7711,13 @@
   <p:clrMapOvr>
     <a:masterClrMapping/>
   </p:clrMapOvr>
+  <p:timing>
+    <p:tnLst>
+      <p:par>
+        <p:cTn id="1" dur="indefinite" restart="never" nodeType="tmRoot"/>
+      </p:par>
+    </p:tnLst>
+  </p:timing>
 </p:sld>
 </file>
 
@@ -7532,7 +7726,7 @@
   <p:cSld>
     <p:spTree>
       <p:nvGrpSpPr>
-        <p:cNvPr id="72" name="Shape 72"/>
+        <p:cNvPr id="1" name="Shape 72"/>
         <p:cNvGrpSpPr/>
         <p:nvPr/>
       </p:nvGrpSpPr>
@@ -7547,7 +7741,9 @@
       <p:sp>
         <p:nvSpPr>
           <p:cNvPr id="73" name="Google Shape;73;p15"/>
-          <p:cNvSpPr txBox="1"/>
+          <p:cNvSpPr txBox="1">
+            <a:spLocks noGrp="1"/>
+          </p:cNvSpPr>
           <p:nvPr>
             <p:ph type="title"/>
           </p:nvPr>
@@ -7580,14 +7776,15 @@
               <a:rPr lang="en-US"/>
               <a:t>Какие проблемы мой проект решает</a:t>
             </a:r>
-            <a:endParaRPr lang="en-US"/>
           </a:p>
         </p:txBody>
       </p:sp>
       <p:sp>
         <p:nvSpPr>
           <p:cNvPr id="74" name="Google Shape;74;p15"/>
-          <p:cNvSpPr txBox="1"/>
+          <p:cNvSpPr txBox="1">
+            <a:spLocks noGrp="1"/>
+          </p:cNvSpPr>
           <p:nvPr>
             <p:ph type="body" idx="1"/>
           </p:nvPr>
@@ -7618,18 +7815,33 @@
               <a:buAutoNum type="arabicPeriod"/>
             </a:pPr>
             <a:r>
-              <a:rPr lang="en-US"/>
-              <a:t>Упрощение работы с учениками</a:t>
-            </a:r>
-            <a:r>
-              <a:rPr lang="ru-RU" altLang="en-US"/>
+              <a:rPr lang="en-US" dirty="0" err="1"/>
+              <a:t>Упрощение</a:t>
+            </a:r>
+            <a:r>
+              <a:rPr lang="en-US" dirty="0"/>
+              <a:t> </a:t>
+            </a:r>
+            <a:r>
+              <a:rPr lang="en-US" dirty="0" err="1"/>
+              <a:t>работы</a:t>
+            </a:r>
+            <a:r>
+              <a:rPr lang="en-US" dirty="0"/>
+              <a:t> с </a:t>
+            </a:r>
+            <a:r>
+              <a:rPr lang="en-US" dirty="0" err="1"/>
+              <a:t>учениками</a:t>
+            </a:r>
+            <a:r>
+              <a:rPr lang="ru-RU" altLang="en-US" dirty="0"/>
               <a:t> и преподавателями</a:t>
             </a:r>
             <a:r>
-              <a:rPr lang="en-US"/>
+              <a:rPr lang="en-US" dirty="0"/>
               <a:t>.</a:t>
             </a:r>
-            <a:endParaRPr lang="en-US"/>
           </a:p>
           <a:p>
             <a:pPr marL="457200" lvl="0" indent="-342900" algn="l" rtl="0">
@@ -7643,18 +7855,34 @@
               <a:buAutoNum type="arabicPeriod"/>
             </a:pPr>
             <a:r>
-              <a:rPr lang="en-US"/>
-              <a:t>Автоматизация составления</a:t>
-            </a:r>
-            <a:r>
-              <a:rPr lang="ru-RU" altLang="en-US"/>
+              <a:rPr lang="en-US" dirty="0" err="1"/>
+              <a:t>Автоматизация</a:t>
+            </a:r>
+            <a:r>
+              <a:rPr lang="en-US" dirty="0"/>
               <a:t> </a:t>
             </a:r>
             <a:r>
-              <a:rPr lang="en-US"/>
-              <a:t>периодических отчетов</a:t>
-            </a:r>
-            <a:endParaRPr lang="en-US"/>
+              <a:rPr lang="en-US" dirty="0" err="1"/>
+              <a:t>составления</a:t>
+            </a:r>
+            <a:r>
+              <a:rPr lang="ru-RU" altLang="en-US" dirty="0"/>
+              <a:t> </a:t>
+            </a:r>
+            <a:r>
+              <a:rPr lang="en-US" dirty="0" err="1"/>
+              <a:t>периодических</a:t>
+            </a:r>
+            <a:r>
+              <a:rPr lang="en-US" dirty="0"/>
+              <a:t> </a:t>
+            </a:r>
+            <a:r>
+              <a:rPr lang="en-US" dirty="0" err="1"/>
+              <a:t>отчетов</a:t>
+            </a:r>
+            <a:endParaRPr lang="en-US" dirty="0"/>
           </a:p>
           <a:p>
             <a:pPr marL="457200" lvl="0" indent="-342900" algn="l" rtl="0">
@@ -7668,14 +7896,46 @@
               <a:buAutoNum type="arabicPeriod"/>
             </a:pPr>
             <a:r>
-              <a:rPr lang="en-US"/>
-              <a:t>Упрощение просмотра будущих конкурсов</a:t>
-            </a:r>
-            <a:r>
-              <a:rPr lang="ru-RU" altLang="en-US"/>
-              <a:t> и курсов и управленя ими</a:t>
-            </a:r>
-            <a:endParaRPr lang="en-US"/>
+              <a:rPr lang="en-US" dirty="0" err="1"/>
+              <a:t>Упрощение</a:t>
+            </a:r>
+            <a:r>
+              <a:rPr lang="en-US" dirty="0"/>
+              <a:t> </a:t>
+            </a:r>
+            <a:r>
+              <a:rPr lang="en-US" dirty="0" err="1"/>
+              <a:t>просмотра</a:t>
+            </a:r>
+            <a:r>
+              <a:rPr lang="en-US" dirty="0"/>
+              <a:t> </a:t>
+            </a:r>
+            <a:r>
+              <a:rPr lang="en-US" dirty="0" err="1"/>
+              <a:t>будущих</a:t>
+            </a:r>
+            <a:r>
+              <a:rPr lang="en-US" dirty="0"/>
+              <a:t> </a:t>
+            </a:r>
+            <a:r>
+              <a:rPr lang="en-US" dirty="0" err="1"/>
+              <a:t>конкурсов</a:t>
+            </a:r>
+            <a:r>
+              <a:rPr lang="ru-RU" altLang="en-US" dirty="0"/>
+              <a:t> и курсов и </a:t>
+            </a:r>
+            <a:r>
+              <a:rPr lang="ru-RU" altLang="en-US" dirty="0" err="1"/>
+              <a:t>управленя</a:t>
+            </a:r>
+            <a:r>
+              <a:rPr lang="ru-RU" altLang="en-US" dirty="0"/>
+              <a:t> ими</a:t>
+            </a:r>
+            <a:endParaRPr lang="en-US" dirty="0"/>
           </a:p>
           <a:p>
             <a:pPr marL="457200" lvl="0" indent="-342900" algn="l" rtl="0">
@@ -7689,10 +7949,26 @@
               <a:buAutoNum type="arabicPeriod"/>
             </a:pPr>
             <a:r>
-              <a:rPr lang="en-US"/>
-              <a:t>Просмотр расписания онлайн</a:t>
-            </a:r>
-            <a:endParaRPr lang="en-US"/>
+              <a:rPr lang="en-US" dirty="0" err="1"/>
+              <a:t>Просмотр</a:t>
+            </a:r>
+            <a:r>
+              <a:rPr lang="en-US" dirty="0"/>
+              <a:t> </a:t>
+            </a:r>
+            <a:r>
+              <a:rPr lang="en-US" dirty="0" err="1"/>
+              <a:t>расписания</a:t>
+            </a:r>
+            <a:r>
+              <a:rPr lang="en-US" dirty="0"/>
+              <a:t> </a:t>
+            </a:r>
+            <a:r>
+              <a:rPr lang="en-US" dirty="0" err="1"/>
+              <a:t>онлайн</a:t>
+            </a:r>
+            <a:endParaRPr lang="en-US" dirty="0"/>
           </a:p>
           <a:p>
             <a:pPr marL="457200" lvl="0" indent="-342900" algn="l" rtl="0">
@@ -7706,27 +7982,40 @@
               <a:buAutoNum type="arabicPeriod"/>
             </a:pPr>
             <a:r>
-              <a:rPr lang="en-US"/>
-              <a:t>Слежение за посещаемостью учеников</a:t>
-            </a:r>
-            <a:endParaRPr lang="en-US"/>
+              <a:rPr lang="ru-RU" dirty="0" err="1" smtClean="0"/>
+              <a:t>Отмечивание</a:t>
+            </a:r>
+            <a:r>
+              <a:rPr lang="ru-RU" dirty="0" smtClean="0"/>
+              <a:t> </a:t>
+            </a:r>
+            <a:r>
+              <a:rPr lang="en-US" dirty="0" err="1" smtClean="0"/>
+              <a:t>посещаемост</a:t>
+            </a:r>
+            <a:r>
+              <a:rPr lang="ru-RU" dirty="0" smtClean="0"/>
+              <a:t>и</a:t>
+            </a:r>
+            <a:r>
+              <a:rPr lang="en-US" dirty="0" smtClean="0"/>
+              <a:t> </a:t>
+            </a:r>
+            <a:r>
+              <a:rPr lang="en-US" dirty="0" err="1"/>
+              <a:t>учеников</a:t>
+            </a:r>
+            <a:endParaRPr lang="en-US" dirty="0"/>
           </a:p>
           <a:p>
-            <a:pPr marL="457200" lvl="0" indent="-342900" algn="l" rtl="0">
-              <a:spcBef>
-                <a:spcPts val="0"/>
-              </a:spcBef>
-              <a:spcAft>
-                <a:spcPts val="0"/>
-              </a:spcAft>
-              <a:buSzPts val="1800"/>
+            <a:pPr lvl="0">
               <a:buAutoNum type="arabicPeriod"/>
             </a:pPr>
             <a:r>
-              <a:rPr lang="en-US"/>
-              <a:t>Слежение за эффективностью преподавателя для директора ЦДО</a:t>
-            </a:r>
-            <a:endParaRPr lang="en-US"/>
+              <a:rPr lang="ru-RU" dirty="0"/>
+              <a:t>Анализ работы преподавателей</a:t>
+            </a:r>
+            <a:endParaRPr lang="en-US" dirty="0"/>
           </a:p>
         </p:txBody>
       </p:sp>
@@ -7737,7 +8026,7 @@
           <p:nvPr/>
         </p:nvPicPr>
         <p:blipFill>
-          <a:blip r:embed="rId1"/>
+          <a:blip r:embed="rId3"/>
           <a:stretch>
             <a:fillRect/>
           </a:stretch>
@@ -7758,14 +8047,14 @@
       </p:pic>
       <p:pic>
         <p:nvPicPr>
-          <p:cNvPr id="1" name="Picture 0"/>
+          <p:cNvPr id="4" name="Picture 0"/>
           <p:cNvPicPr>
             <a:picLocks noChangeAspect="1"/>
           </p:cNvPicPr>
           <p:nvPr/>
         </p:nvPicPr>
         <p:blipFill>
-          <a:blip r:embed="rId2"/>
+          <a:blip r:embed="rId4"/>
           <a:stretch>
             <a:fillRect/>
           </a:stretch>
@@ -7789,7 +8078,7 @@
           <p:nvPr/>
         </p:nvPicPr>
         <p:blipFill>
-          <a:blip r:embed="rId3"/>
+          <a:blip r:embed="rId5"/>
           <a:stretch>
             <a:fillRect/>
           </a:stretch>
@@ -7813,15 +8102,15 @@
           <p:nvPr/>
         </p:nvPicPr>
         <p:blipFill>
-          <a:blip r:embed="rId4"/>
+          <a:blip r:embed="rId6"/>
           <a:stretch>
             <a:fillRect/>
           </a:stretch>
         </p:blipFill>
         <p:spPr>
           <a:xfrm>
-            <a:off x="4422775" y="3348355"/>
-            <a:ext cx="4558030" cy="1106805"/>
+            <a:off x="5570219" y="3153410"/>
+            <a:ext cx="3410585" cy="733018"/>
           </a:xfrm>
           <a:prstGeom prst="rect">
             <a:avLst/>
@@ -7833,6 +8122,13 @@
   <p:clrMapOvr>
     <a:masterClrMapping/>
   </p:clrMapOvr>
+  <p:timing>
+    <p:tnLst>
+      <p:par>
+        <p:cTn id="1" dur="indefinite" restart="never" nodeType="tmRoot"/>
+      </p:par>
+    </p:tnLst>
+  </p:timing>
 </p:sld>
 </file>
 
@@ -7841,7 +8137,7 @@
   <p:cSld>
     <p:spTree>
       <p:nvGrpSpPr>
-        <p:cNvPr id="82" name="Shape 82"/>
+        <p:cNvPr id="1" name="Shape 82"/>
         <p:cNvGrpSpPr/>
         <p:nvPr/>
       </p:nvGrpSpPr>
@@ -7856,7 +8152,9 @@
       <p:sp>
         <p:nvSpPr>
           <p:cNvPr id="83" name="Google Shape;83;p16"/>
-          <p:cNvSpPr txBox="1"/>
+          <p:cNvSpPr txBox="1">
+            <a:spLocks noGrp="1"/>
+          </p:cNvSpPr>
           <p:nvPr>
             <p:ph type="title"/>
           </p:nvPr>
@@ -7889,14 +8187,15 @@
               <a:rPr lang="en-US"/>
               <a:t>Демонстрация проекта</a:t>
             </a:r>
-            <a:endParaRPr lang="en-US"/>
           </a:p>
         </p:txBody>
       </p:sp>
       <p:sp>
         <p:nvSpPr>
           <p:cNvPr id="84" name="Google Shape;84;p16"/>
-          <p:cNvSpPr txBox="1"/>
+          <p:cNvSpPr txBox="1">
+            <a:spLocks noGrp="1"/>
+          </p:cNvSpPr>
           <p:nvPr>
             <p:ph type="body" idx="1"/>
           </p:nvPr>
@@ -7929,14 +8228,15 @@
               <a:rPr lang="en-US"/>
               <a:t> QR-code на сайт:</a:t>
             </a:r>
-            <a:endParaRPr lang="en-US"/>
           </a:p>
         </p:txBody>
       </p:sp>
       <p:sp>
         <p:nvSpPr>
           <p:cNvPr id="85" name="Google Shape;85;p16"/>
-          <p:cNvSpPr txBox="1"/>
+          <p:cNvSpPr txBox="1">
+            <a:spLocks noGrp="1"/>
+          </p:cNvSpPr>
           <p:nvPr>
             <p:ph type="body" idx="1"/>
           </p:nvPr>
@@ -7969,7 +8269,6 @@
               <a:rPr lang="en-US"/>
               <a:t> QR-code на GitHub проекта:</a:t>
             </a:r>
-            <a:endParaRPr lang="en-US"/>
           </a:p>
         </p:txBody>
       </p:sp>
@@ -7980,7 +8279,7 @@
           <p:nvPr/>
         </p:nvPicPr>
         <p:blipFill>
-          <a:blip r:embed="rId1"/>
+          <a:blip r:embed="rId3"/>
           <a:stretch>
             <a:fillRect/>
           </a:stretch>
@@ -8006,7 +8305,7 @@
           <p:nvPr/>
         </p:nvPicPr>
         <p:blipFill>
-          <a:blip r:embed="rId2"/>
+          <a:blip r:embed="rId4"/>
           <a:stretch>
             <a:fillRect/>
           </a:stretch>
@@ -8028,7 +8327,9 @@
       <p:sp>
         <p:nvSpPr>
           <p:cNvPr id="88" name="Google Shape;88;p16"/>
-          <p:cNvSpPr txBox="1"/>
+          <p:cNvSpPr txBox="1">
+            <a:spLocks noGrp="1"/>
+          </p:cNvSpPr>
           <p:nvPr>
             <p:ph type="body" idx="1"/>
           </p:nvPr>
@@ -8044,7 +8345,7 @@
         </p:spPr>
         <p:txBody>
           <a:bodyPr spcFirstLastPara="1" wrap="square" lIns="91425" tIns="91425" rIns="91425" bIns="91425" anchor="t" anchorCtr="0">
-            <a:normAutofit fontScale="92500" lnSpcReduction="20000"/>
+            <a:normAutofit fontScale="62500" lnSpcReduction="20000"/>
           </a:bodyPr>
           <a:lstStyle/>
           <a:p>
@@ -8061,7 +8362,6 @@
               <a:rPr lang="en-US"/>
               <a:t>Url адрес сайта: http://158.160.104.26:5001</a:t>
             </a:r>
-            <a:endParaRPr lang="en-US"/>
           </a:p>
         </p:txBody>
       </p:sp>
@@ -8070,6 +8370,13 @@
   <p:clrMapOvr>
     <a:masterClrMapping/>
   </p:clrMapOvr>
+  <p:timing>
+    <p:tnLst>
+      <p:par>
+        <p:cTn id="1" dur="indefinite" restart="never" nodeType="tmRoot"/>
+      </p:par>
+    </p:tnLst>
+  </p:timing>
 </p:sld>
 </file>
 
@@ -8078,7 +8385,7 @@
   <p:cSld>
     <p:spTree>
       <p:nvGrpSpPr>
-        <p:cNvPr id="92" name="Shape 92"/>
+        <p:cNvPr id="1" name="Shape 92"/>
         <p:cNvGrpSpPr/>
         <p:nvPr/>
       </p:nvGrpSpPr>
@@ -8093,7 +8400,9 @@
       <p:sp>
         <p:nvSpPr>
           <p:cNvPr id="93" name="Google Shape;93;p17"/>
-          <p:cNvSpPr txBox="1"/>
+          <p:cNvSpPr txBox="1">
+            <a:spLocks noGrp="1"/>
+          </p:cNvSpPr>
           <p:nvPr>
             <p:ph type="title"/>
           </p:nvPr>
@@ -8123,17 +8432,38 @@
               <a:buNone/>
             </a:pPr>
             <a:r>
-              <a:rPr lang="en-US"/>
-              <a:t>Что может проект?</a:t>
-            </a:r>
-            <a:endParaRPr lang="en-US"/>
+              <a:rPr lang="en-US" dirty="0" err="1"/>
+              <a:t>Что</a:t>
+            </a:r>
+            <a:r>
+              <a:rPr lang="en-US" dirty="0"/>
+              <a:t> </a:t>
+            </a:r>
+            <a:r>
+              <a:rPr lang="en-US" dirty="0" err="1"/>
+              <a:t>может</a:t>
+            </a:r>
+            <a:r>
+              <a:rPr lang="en-US" dirty="0"/>
+              <a:t> </a:t>
+            </a:r>
+            <a:r>
+              <a:rPr lang="en-US" dirty="0" err="1"/>
+              <a:t>проект</a:t>
+            </a:r>
+            <a:r>
+              <a:rPr lang="en-US" dirty="0"/>
+              <a:t>?</a:t>
+            </a:r>
           </a:p>
         </p:txBody>
       </p:sp>
       <p:sp>
         <p:nvSpPr>
           <p:cNvPr id="94" name="Google Shape;94;p17"/>
-          <p:cNvSpPr txBox="1"/>
+          <p:cNvSpPr txBox="1">
+            <a:spLocks noGrp="1"/>
+          </p:cNvSpPr>
           <p:nvPr>
             <p:ph type="body" idx="1"/>
           </p:nvPr>
@@ -8149,147 +8479,92 @@
         </p:spPr>
         <p:txBody>
           <a:bodyPr spcFirstLastPara="1" wrap="square" lIns="91425" tIns="91425" rIns="91425" bIns="91425" anchor="t" anchorCtr="0">
-            <a:normAutofit fontScale="62500" lnSpcReduction="20000"/>
+            <a:normAutofit fontScale="85000" lnSpcReduction="20000"/>
           </a:bodyPr>
           <a:lstStyle/>
           <a:p>
-            <a:pPr marL="457200" lvl="0" indent="-300355" algn="l" rtl="0">
-              <a:spcBef>
-                <a:spcPts val="0"/>
-              </a:spcBef>
-              <a:spcAft>
-                <a:spcPts val="0"/>
-              </a:spcAft>
+            <a:pPr lvl="0" indent="-300355">
               <a:buSzPct val="100000"/>
-              <a:buChar char="●"/>
             </a:pPr>
             <a:r>
-              <a:rPr lang="en-US"/>
-              <a:t>Добавление, изменение, данных учеников</a:t>
-            </a:r>
-            <a:r>
-              <a:rPr lang="ru-RU" altLang="en-US"/>
-              <a:t> и преподавателей</a:t>
-            </a:r>
-            <a:r>
-              <a:rPr lang="en-US"/>
-              <a:t>.</a:t>
-            </a:r>
-            <a:endParaRPr lang="en-US"/>
+              <a:rPr lang="ru-RU" dirty="0"/>
+              <a:t>Управление данными учеников и преподавателей </a:t>
+            </a:r>
           </a:p>
           <a:p>
-            <a:pPr marL="457200" lvl="0" indent="-300355" algn="l" rtl="0">
-              <a:spcBef>
-                <a:spcPts val="0"/>
-              </a:spcBef>
-              <a:spcAft>
-                <a:spcPts val="0"/>
-              </a:spcAft>
+            <a:pPr lvl="0" indent="-300355">
               <a:buSzPct val="100000"/>
-              <a:buChar char="●"/>
             </a:pPr>
             <a:r>
-              <a:rPr lang="en-US"/>
-              <a:t>Просмотр списка направлений, групп в них и учеников в них, удаление учеников из них и возможность переноса в другую группу, создание групп.</a:t>
-            </a:r>
-            <a:endParaRPr lang="en-US"/>
+              <a:rPr lang="ru-RU" dirty="0"/>
+              <a:t>Работа с группами и направлениями (просмотр, создание, перевод </a:t>
+            </a:r>
+            <a:r>
+              <a:rPr lang="ru-RU" dirty="0" smtClean="0"/>
+              <a:t>учеников)</a:t>
+            </a:r>
           </a:p>
           <a:p>
-            <a:pPr marL="457200" lvl="0" indent="-300355" algn="l" rtl="0">
-              <a:spcBef>
-                <a:spcPts val="0"/>
-              </a:spcBef>
-              <a:spcAft>
-                <a:spcPts val="0"/>
-              </a:spcAft>
+            <a:pPr lvl="0" indent="-300355">
               <a:buSzPct val="100000"/>
-              <a:buChar char="●"/>
             </a:pPr>
             <a:r>
-              <a:rPr lang="en-US"/>
-              <a:t>Просмотр списка учителей, изменение их данных, загрузка фотографии преподавателя.</a:t>
-            </a:r>
-            <a:endParaRPr lang="en-US"/>
+              <a:rPr lang="ru-RU" dirty="0" smtClean="0"/>
+              <a:t>Управление </a:t>
+            </a:r>
+            <a:r>
+              <a:rPr lang="ru-RU" dirty="0"/>
+              <a:t>профилем учителя (данные, фото) </a:t>
+            </a:r>
           </a:p>
           <a:p>
-            <a:pPr marL="457200" lvl="0" indent="-300355" algn="l" rtl="0">
-              <a:spcBef>
-                <a:spcPts val="0"/>
-              </a:spcBef>
-              <a:spcAft>
-                <a:spcPts val="0"/>
-              </a:spcAft>
+            <a:pPr lvl="0" indent="-300355">
               <a:buSzPct val="100000"/>
-              <a:buChar char="●"/>
             </a:pPr>
             <a:r>
-              <a:rPr lang="en-US"/>
-              <a:t>Просмотр бесконечно подгружаемого расписания по неделям. добавления события и возможностью фильтровать события по группам.</a:t>
-            </a:r>
-            <a:endParaRPr lang="en-US"/>
+              <a:rPr lang="ru-RU" dirty="0"/>
+              <a:t>Расписание с фильтрацией по группам и добавлением событий</a:t>
+            </a:r>
           </a:p>
           <a:p>
-            <a:pPr marL="457200" lvl="0" indent="-300355" algn="l" rtl="0">
-              <a:spcBef>
-                <a:spcPts val="0"/>
-              </a:spcBef>
-              <a:spcAft>
-                <a:spcPts val="0"/>
-              </a:spcAft>
+            <a:pPr lvl="0" indent="-300355">
               <a:buSzPct val="100000"/>
-              <a:buChar char="●"/>
             </a:pPr>
             <a:r>
-              <a:rPr lang="en-US"/>
-              <a:t>Слежение за посещаемостью учеников, и его путем развития в ЦДО.</a:t>
-            </a:r>
-            <a:endParaRPr lang="en-US"/>
+              <a:rPr lang="ru-RU" dirty="0"/>
+              <a:t>Отслеживание посещаемости и прогресса учеников </a:t>
+            </a:r>
           </a:p>
           <a:p>
-            <a:pPr marL="457200" lvl="0" indent="-300355" algn="l" rtl="0">
-              <a:spcBef>
-                <a:spcPts val="0"/>
-              </a:spcBef>
-              <a:spcAft>
-                <a:spcPts val="0"/>
-              </a:spcAft>
+            <a:pPr lvl="0" indent="-300355">
               <a:buSzPct val="100000"/>
-              <a:buChar char="●"/>
             </a:pPr>
             <a:r>
-              <a:rPr lang="en-US"/>
-              <a:t>Автоматизация составления отчетов.</a:t>
-            </a:r>
-            <a:endParaRPr lang="en-US"/>
+              <a:rPr lang="ru-RU" dirty="0"/>
+              <a:t>Автоматическая генерация отчётов </a:t>
+            </a:r>
           </a:p>
           <a:p>
-            <a:pPr marL="457200" lvl="0" indent="-300355" algn="l" rtl="0">
-              <a:spcBef>
-                <a:spcPts val="0"/>
-              </a:spcBef>
-              <a:spcAft>
-                <a:spcPts val="0"/>
-              </a:spcAft>
+            <a:pPr lvl="0" indent="-300355">
               <a:buSzPct val="100000"/>
-              <a:buChar char="●"/>
             </a:pPr>
             <a:r>
-              <a:rPr lang="en-US"/>
-              <a:t>Просмотр и добавлени</a:t>
-            </a:r>
-            <a:r>
-              <a:rPr lang="ru-RU" altLang="en-US"/>
-              <a:t>е</a:t>
-            </a:r>
-            <a:r>
-              <a:rPr lang="en-US"/>
-              <a:t> в список конкурсов</a:t>
-            </a:r>
-            <a:r>
-              <a:rPr lang="ru-RU" altLang="en-US"/>
-              <a:t> для учеников и конкурсов для преподавателей, курсов повышения квалификации</a:t>
-            </a:r>
-            <a:endParaRPr lang="ru-RU" altLang="en-US"/>
+              <a:rPr lang="ru-RU" dirty="0"/>
+              <a:t>Каталог конкурсов и курсов повышения квалификации</a:t>
+            </a:r>
+            <a:r>
+              <a:rPr lang="en-US" dirty="0"/>
+              <a:t> </a:t>
+            </a:r>
+            <a:r>
+              <a:rPr lang="ru-RU" altLang="en-US" dirty="0"/>
+              <a:t>для преподавателей</a:t>
+            </a:r>
+            <a:r>
+              <a:rPr lang="en-US" altLang="en-US" dirty="0"/>
+              <a:t>.</a:t>
+            </a:r>
+            <a:endParaRPr lang="ru-RU" altLang="en-US" dirty="0"/>
           </a:p>
         </p:txBody>
       </p:sp>
@@ -8300,7 +8575,7 @@
           <p:nvPr/>
         </p:nvPicPr>
         <p:blipFill>
-          <a:blip r:embed="rId1"/>
+          <a:blip r:embed="rId3"/>
           <a:stretch>
             <a:fillRect/>
           </a:stretch>
@@ -8326,7 +8601,7 @@
           <p:nvPr/>
         </p:nvPicPr>
         <p:blipFill>
-          <a:blip r:embed="rId2"/>
+          <a:blip r:embed="rId4"/>
           <a:stretch>
             <a:fillRect/>
           </a:stretch>
@@ -8352,7 +8627,7 @@
           <p:nvPr/>
         </p:nvPicPr>
         <p:blipFill>
-          <a:blip r:embed="rId3"/>
+          <a:blip r:embed="rId5"/>
           <a:stretch>
             <a:fillRect/>
           </a:stretch>
@@ -8384,7 +8659,7 @@
   <p:cSld>
     <p:spTree>
       <p:nvGrpSpPr>
-        <p:cNvPr id="101" name="Shape 101"/>
+        <p:cNvPr id="1" name="Shape 101"/>
         <p:cNvGrpSpPr/>
         <p:nvPr/>
       </p:nvGrpSpPr>
@@ -8399,7 +8674,9 @@
       <p:sp>
         <p:nvSpPr>
           <p:cNvPr id="102" name="Google Shape;102;p18"/>
-          <p:cNvSpPr txBox="1"/>
+          <p:cNvSpPr txBox="1">
+            <a:spLocks noGrp="1"/>
+          </p:cNvSpPr>
           <p:nvPr>
             <p:ph type="title"/>
           </p:nvPr>
@@ -8432,14 +8709,15 @@
               <a:rPr lang="en-US"/>
               <a:t>Архитектура проекта</a:t>
             </a:r>
-            <a:endParaRPr lang="en-US"/>
           </a:p>
         </p:txBody>
       </p:sp>
       <p:sp>
         <p:nvSpPr>
           <p:cNvPr id="103" name="Google Shape;103;p18"/>
-          <p:cNvSpPr txBox="1"/>
+          <p:cNvSpPr txBox="1">
+            <a:spLocks noGrp="1"/>
+          </p:cNvSpPr>
           <p:nvPr>
             <p:ph type="body" idx="1"/>
           </p:nvPr>
@@ -8455,7 +8733,7 @@
         </p:spPr>
         <p:txBody>
           <a:bodyPr spcFirstLastPara="1" wrap="square" lIns="91425" tIns="91425" rIns="91425" bIns="91425" anchor="t" anchorCtr="0">
-            <a:normAutofit fontScale="92500" lnSpcReduction="20000"/>
+            <a:normAutofit fontScale="85000" lnSpcReduction="10000"/>
           </a:bodyPr>
           <a:lstStyle/>
           <a:p>
@@ -8472,7 +8750,6 @@
               <a:rPr lang="en-US"/>
               <a:t>Корневая папка проекта делится на:</a:t>
             </a:r>
-            <a:endParaRPr lang="en-US"/>
           </a:p>
           <a:p>
             <a:pPr marL="0" lvl="0" indent="0" algn="l" rtl="0">
@@ -8488,7 +8765,6 @@
               <a:rPr lang="en-US"/>
               <a:t>static -&gt; Изображения, файлы, что “сырыми” отправляются пользователю</a:t>
             </a:r>
-            <a:endParaRPr lang="en-US"/>
           </a:p>
           <a:p>
             <a:pPr marL="0" lvl="0" indent="0" algn="l" rtl="0">
@@ -8504,7 +8780,6 @@
               <a:rPr lang="en-US"/>
               <a:t>routes -&gt; Адреса страниц и функции, что передают html пользователю по ним</a:t>
             </a:r>
-            <a:endParaRPr lang="en-US"/>
           </a:p>
           <a:p>
             <a:pPr marL="0" lvl="0" indent="0" algn="l" rtl="0">
@@ -8520,7 +8795,6 @@
               <a:rPr lang="en-US"/>
               <a:t>forms -&gt; flask-wtf формы, передаются на страницы c формами и обеспечивают csrf защиту.</a:t>
             </a:r>
-            <a:endParaRPr lang="en-US"/>
           </a:p>
           <a:p>
             <a:pPr marL="0" lvl="0" indent="0" algn="l" rtl="0">
@@ -8536,7 +8810,6 @@
               <a:rPr lang="en-US"/>
               <a:t>api -&gt; вся работа над модулями: “расписание”, “группы” и “посещаемость” переведены на restful-api структура. Классы и адреса для flask_restful</a:t>
             </a:r>
-            <a:endParaRPr lang="en-US"/>
           </a:p>
           <a:p>
             <a:pPr marL="0" lvl="0" indent="0" algn="l" rtl="0">
@@ -8552,7 +8825,6 @@
               <a:rPr lang="en-US"/>
               <a:t>templates -&gt; Jinja2 шаблоны, в них передаются данные из функций в routes.</a:t>
             </a:r>
-            <a:endParaRPr lang="en-US"/>
           </a:p>
           <a:p>
             <a:pPr marL="0" lvl="0" indent="0" algn="l" rtl="0">
@@ -8568,7 +8840,6 @@
               <a:rPr lang="en-US"/>
               <a:t>data -&gt; структура sql-alchemy классов - таблиц, описывающих  базу данных.</a:t>
             </a:r>
-            <a:endParaRPr lang="en-US"/>
           </a:p>
           <a:p>
             <a:pPr marL="0" lvl="0" indent="0" algn="l" rtl="0">
@@ -8584,7 +8855,6 @@
               <a:rPr lang="en-US"/>
               <a:t>db -&gt; файл базы данных sqlite в .db.</a:t>
             </a:r>
-            <a:endParaRPr lang="en-US"/>
           </a:p>
         </p:txBody>
       </p:sp>
@@ -8601,7 +8871,7 @@
   <p:cSld>
     <p:spTree>
       <p:nvGrpSpPr>
-        <p:cNvPr id="107" name="Shape 107"/>
+        <p:cNvPr id="1" name="Shape 107"/>
         <p:cNvGrpSpPr/>
         <p:nvPr/>
       </p:nvGrpSpPr>
@@ -8616,7 +8886,9 @@
       <p:sp>
         <p:nvSpPr>
           <p:cNvPr id="108" name="Google Shape;108;p19"/>
-          <p:cNvSpPr txBox="1"/>
+          <p:cNvSpPr txBox="1">
+            <a:spLocks noGrp="1"/>
+          </p:cNvSpPr>
           <p:nvPr>
             <p:ph type="title"/>
           </p:nvPr>
@@ -8649,20 +8921,19 @@
               <a:rPr lang="en-US"/>
               <a:t>Архитектура БД</a:t>
             </a:r>
-            <a:endParaRPr lang="en-US"/>
           </a:p>
         </p:txBody>
       </p:sp>
       <p:pic>
         <p:nvPicPr>
-          <p:cNvPr id="1" name="Picture 0"/>
+          <p:cNvPr id="2" name="Picture 0"/>
           <p:cNvPicPr>
             <a:picLocks noChangeAspect="1"/>
           </p:cNvPicPr>
           <p:nvPr/>
         </p:nvPicPr>
         <p:blipFill>
-          <a:blip r:embed="rId1"/>
+          <a:blip r:embed="rId3"/>
           <a:stretch>
             <a:fillRect/>
           </a:stretch>
@@ -8690,7 +8961,7 @@
   <p:cSld>
     <p:spTree>
       <p:nvGrpSpPr>
-        <p:cNvPr id="113" name="Shape 113"/>
+        <p:cNvPr id="1" name="Shape 113"/>
         <p:cNvGrpSpPr/>
         <p:nvPr/>
       </p:nvGrpSpPr>
@@ -8705,7 +8976,9 @@
       <p:sp>
         <p:nvSpPr>
           <p:cNvPr id="114" name="Google Shape;114;p20"/>
-          <p:cNvSpPr txBox="1"/>
+          <p:cNvSpPr txBox="1">
+            <a:spLocks noGrp="1"/>
+          </p:cNvSpPr>
           <p:nvPr>
             <p:ph type="title"/>
           </p:nvPr>
@@ -8736,17 +9009,23 @@
               <a:buNone/>
             </a:pPr>
             <a:r>
-              <a:rPr lang="en-US" sz="4900"/>
-              <a:t>Выводы:</a:t>
-            </a:r>
-            <a:endParaRPr sz="4900"/>
+              <a:rPr lang="en-US" sz="4900" dirty="0" err="1"/>
+              <a:t>Выводы</a:t>
+            </a:r>
+            <a:r>
+              <a:rPr lang="en-US" sz="4900" dirty="0"/>
+              <a:t>:</a:t>
+            </a:r>
+            <a:endParaRPr sz="4900" dirty="0"/>
           </a:p>
         </p:txBody>
       </p:sp>
       <p:sp>
         <p:nvSpPr>
           <p:cNvPr id="115" name="Google Shape;115;p20"/>
-          <p:cNvSpPr txBox="1"/>
+          <p:cNvSpPr txBox="1">
+            <a:spLocks noGrp="1"/>
+          </p:cNvSpPr>
           <p:nvPr>
             <p:ph type="body" idx="1"/>
           </p:nvPr>
@@ -8762,7 +9041,7 @@
         </p:spPr>
         <p:txBody>
           <a:bodyPr spcFirstLastPara="1" wrap="square" lIns="91425" tIns="91425" rIns="91425" bIns="91425" anchor="t" anchorCtr="0">
-            <a:normAutofit fontScale="72500"/>
+            <a:normAutofit fontScale="57500" lnSpcReduction="20000"/>
           </a:bodyPr>
           <a:lstStyle/>
           <a:p>
@@ -8776,179 +9055,102 @@
               <a:buNone/>
             </a:pPr>
             <a:r>
-              <a:rPr lang="en-US" sz="3150"/>
-              <a:t>Было выполнено:</a:t>
-            </a:r>
-            <a:endParaRPr sz="3150"/>
+              <a:rPr lang="en-US" sz="3150" dirty="0" err="1"/>
+              <a:t>Было</a:t>
+            </a:r>
+            <a:r>
+              <a:rPr lang="en-US" sz="3150" dirty="0"/>
+              <a:t> </a:t>
+            </a:r>
+            <a:r>
+              <a:rPr lang="en-US" sz="3150" dirty="0" err="1"/>
+              <a:t>выполнено</a:t>
+            </a:r>
+            <a:r>
+              <a:rPr lang="en-US" sz="3150" dirty="0" smtClean="0"/>
+              <a:t>:</a:t>
+            </a:r>
+            <a:endParaRPr lang="ru-RU" sz="3150" dirty="0" smtClean="0"/>
           </a:p>
           <a:p>
-            <a:pPr marL="457200" lvl="0" indent="-334645" algn="l" rtl="0">
-              <a:spcBef>
-                <a:spcPts val="1200"/>
-              </a:spcBef>
-              <a:spcAft>
-                <a:spcPts val="0"/>
-              </a:spcAft>
-              <a:buSzPct val="100000"/>
-              <a:buChar char="●"/>
-            </a:pPr>
-            <a:r>
-              <a:rPr lang="en-US"/>
-              <a:t>Добавление, изменение, данных учеников</a:t>
-            </a:r>
-            <a:r>
-              <a:rPr lang="ru-RU" altLang="en-US"/>
-              <a:t> и преподавателей</a:t>
-            </a:r>
-            <a:r>
-              <a:rPr lang="en-US"/>
-              <a:t>.</a:t>
-            </a:r>
-            <a:endParaRPr lang="en-US"/>
+            <a:r>
+              <a:rPr lang="ru-RU" sz="3200" b="1" dirty="0"/>
+              <a:t>Управление пользователями:</a:t>
+            </a:r>
+            <a:r>
+              <a:rPr lang="ru-RU" sz="3200" dirty="0"/>
+              <a:t> добавление и редактирование данных учеников и учителей (включая загрузку фото).</a:t>
+            </a:r>
           </a:p>
           <a:p>
-            <a:pPr marL="457200" lvl="0" indent="-334645" algn="l" rtl="0">
-              <a:spcBef>
-                <a:spcPts val="0"/>
-              </a:spcBef>
-              <a:spcAft>
-                <a:spcPts val="0"/>
-              </a:spcAft>
-              <a:buSzPct val="100000"/>
-              <a:buChar char="●"/>
-            </a:pPr>
-            <a:r>
-              <a:rPr lang="en-US"/>
-              <a:t>Просмотр списка направлений, групп в них и учеников в них, удаление учеников из них и возможность переноса в другую группу.</a:t>
-            </a:r>
-            <a:endParaRPr lang="en-US"/>
+            <a:r>
+              <a:rPr lang="ru-RU" sz="3200" b="1" dirty="0"/>
+              <a:t>Управление группами:</a:t>
+            </a:r>
+            <a:r>
+              <a:rPr lang="ru-RU" sz="3200" dirty="0"/>
+              <a:t> просмотр направлений, распределение, удаление и перенос учеников между группами.</a:t>
+            </a:r>
           </a:p>
           <a:p>
-            <a:pPr marL="457200" lvl="0" indent="-334645" algn="l" rtl="0">
-              <a:spcBef>
-                <a:spcPts val="0"/>
-              </a:spcBef>
-              <a:spcAft>
-                <a:spcPts val="0"/>
-              </a:spcAft>
-              <a:buSzPct val="100000"/>
-              <a:buChar char="●"/>
-            </a:pPr>
-            <a:r>
-              <a:rPr lang="en-US"/>
-              <a:t>Просмотр списка учителей, изменение их данных, загрузка фотографии преподавателя</a:t>
-            </a:r>
-            <a:endParaRPr lang="en-US"/>
+            <a:r>
+              <a:rPr lang="ru-RU" sz="3200" b="1" dirty="0"/>
+              <a:t>Интерактивное расписание:</a:t>
+            </a:r>
+            <a:r>
+              <a:rPr lang="ru-RU" sz="3200" dirty="0"/>
+              <a:t> бесконечная прокрутка по неделям, создание повторяющихся событий и фильтрация по группам.</a:t>
+            </a:r>
           </a:p>
           <a:p>
-            <a:pPr marL="457200" lvl="0" indent="-334645" algn="l" rtl="0">
-              <a:spcBef>
-                <a:spcPts val="0"/>
-              </a:spcBef>
-              <a:spcAft>
-                <a:spcPts val="0"/>
-              </a:spcAft>
-              <a:buSzPct val="100000"/>
-              <a:buChar char="●"/>
-            </a:pPr>
-            <a:r>
-              <a:rPr lang="en-US"/>
-              <a:t>Просмотр бесконечно подгружаемого расписания по неделям, добавления события с еженедельным повторением и возможностью фильтровать события по группам.</a:t>
-            </a:r>
-            <a:endParaRPr lang="en-US"/>
+            <a:r>
+              <a:rPr lang="ru-RU" sz="3200" b="1" dirty="0"/>
+              <a:t>Контроль посещаемости:</a:t>
+            </a:r>
+            <a:r>
+              <a:rPr lang="ru-RU" sz="3200" dirty="0"/>
+              <a:t> отслеживание </a:t>
+            </a:r>
+            <a:r>
+              <a:rPr lang="ru-RU" sz="3200" dirty="0" smtClean="0"/>
+              <a:t>посещаемости учеников </a:t>
+            </a:r>
+            <a:r>
+              <a:rPr lang="ru-RU" sz="3200" dirty="0"/>
+              <a:t>и автоматическая генерация отчетов по группам и педагогам.</a:t>
+            </a:r>
           </a:p>
           <a:p>
-            <a:pPr marL="457200" lvl="0" indent="-334645" algn="l" rtl="0">
-              <a:spcBef>
-                <a:spcPts val="0"/>
-              </a:spcBef>
-              <a:spcAft>
-                <a:spcPts val="0"/>
-              </a:spcAft>
-              <a:buSzPct val="100000"/>
-              <a:buChar char="●"/>
-            </a:pPr>
-            <a:r>
-              <a:rPr lang="en-US"/>
-              <a:t>Слежение за посещаемостью учеников.</a:t>
-            </a:r>
-            <a:endParaRPr lang="en-US"/>
+            <a:r>
+              <a:rPr lang="ru-RU" sz="3200" b="1" dirty="0"/>
+              <a:t>Учет активности учителей:</a:t>
+            </a:r>
+            <a:r>
+              <a:rPr lang="ru-RU" sz="3200" dirty="0"/>
+              <a:t> отчеты по участию в конкурсах и курсах повышения квалификации с удобной привязкой.</a:t>
+            </a:r>
           </a:p>
           <a:p>
-            <a:pPr marL="457200" lvl="0" indent="-334645" algn="l" rtl="0">
-              <a:spcBef>
-                <a:spcPts val="0"/>
-              </a:spcBef>
-              <a:spcAft>
-                <a:spcPts val="0"/>
-              </a:spcAft>
-              <a:buSzPct val="100000"/>
-              <a:buChar char="●"/>
-            </a:pPr>
-            <a:r>
-              <a:rPr lang="en-US"/>
-              <a:t>Автоматизация составления отчетов по посещаемости в группах и у преподавател</a:t>
-            </a:r>
-            <a:r>
-              <a:rPr lang="ru-RU" altLang="en-US"/>
-              <a:t>я, отчеты по участию преподавателей в конкурсах и курсах повышения квалификации</a:t>
-            </a:r>
-            <a:endParaRPr lang="en-US"/>
+            <a:r>
+              <a:rPr lang="ru-RU" sz="3200" b="1" dirty="0"/>
+              <a:t>Безопасность и интеграция:</a:t>
+            </a:r>
+            <a:r>
+              <a:rPr lang="ru-RU" sz="3200" dirty="0"/>
+              <a:t> авторизация пользователей (вход в аккаунт) и разработка API.</a:t>
+            </a:r>
           </a:p>
           <a:p>
-            <a:pPr marL="457200" lvl="0" indent="-334645" algn="l" rtl="0">
-              <a:spcBef>
-                <a:spcPts val="0"/>
-              </a:spcBef>
-              <a:spcAft>
-                <a:spcPts val="0"/>
-              </a:spcAft>
-              <a:buSzPct val="100000"/>
-              <a:buChar char="●"/>
+            <a:pPr marL="0" lvl="0" indent="0" algn="l" rtl="0">
+              <a:spcBef>
+                <a:spcPts val="0"/>
+              </a:spcBef>
+              <a:spcAft>
+                <a:spcPts val="0"/>
+              </a:spcAft>
+              <a:buNone/>
             </a:pPr>
-            <a:r>
-              <a:rPr lang="en-US"/>
-              <a:t>Просмотр и добавление в список конкурсов</a:t>
-            </a:r>
-            <a:r>
-              <a:rPr lang="ru-RU" altLang="en-US"/>
-              <a:t> и курсов, легкое управление привязкой преподавателей к конкурсам и курсам</a:t>
-            </a:r>
-            <a:endParaRPr lang="en-US"/>
-          </a:p>
-          <a:p>
-            <a:pPr marL="457200" lvl="0" indent="-334645" algn="l" rtl="0">
-              <a:spcBef>
-                <a:spcPts val="0"/>
-              </a:spcBef>
-              <a:spcAft>
-                <a:spcPts val="0"/>
-              </a:spcAft>
-              <a:buSzPct val="100000"/>
-              <a:buChar char="●"/>
-            </a:pPr>
-            <a:r>
-              <a:rPr lang="en-US"/>
-              <a:t>Вход в аккаунт.</a:t>
-            </a:r>
-            <a:endParaRPr lang="en-US"/>
-          </a:p>
-          <a:p>
-            <a:pPr marL="457200" lvl="0" indent="-334645" algn="l" rtl="0">
-              <a:spcBef>
-                <a:spcPts val="0"/>
-              </a:spcBef>
-              <a:spcAft>
-                <a:spcPts val="0"/>
-              </a:spcAft>
-              <a:buSzPct val="100000"/>
-              <a:buChar char="●"/>
-            </a:pPr>
-            <a:r>
-              <a:rPr lang="en-US"/>
-              <a:t>API</a:t>
-            </a:r>
-            <a:endParaRPr lang="en-US"/>
+            <a:endParaRPr sz="3150" dirty="0"/>
           </a:p>
         </p:txBody>
       </p:sp>
@@ -8965,7 +9167,7 @@
   <p:cSld>
     <p:spTree>
       <p:nvGrpSpPr>
-        <p:cNvPr id="119" name="Shape 119"/>
+        <p:cNvPr id="1" name="Shape 119"/>
         <p:cNvGrpSpPr/>
         <p:nvPr/>
       </p:nvGrpSpPr>
@@ -8980,7 +9182,9 @@
       <p:sp>
         <p:nvSpPr>
           <p:cNvPr id="120" name="Google Shape;120;p21"/>
-          <p:cNvSpPr txBox="1"/>
+          <p:cNvSpPr txBox="1">
+            <a:spLocks noGrp="1"/>
+          </p:cNvSpPr>
           <p:nvPr>
             <p:ph type="title"/>
           </p:nvPr>
@@ -9011,20 +9215,17 @@
             </a:pPr>
             <a:r>
               <a:rPr lang="en-US"/>
-              <a:t>Планы на </a:t>
-            </a:r>
-            <a:r>
-              <a:rPr lang="en-US"/>
-              <a:t>будущее</a:t>
-            </a:r>
-            <a:endParaRPr lang="en-US"/>
+              <a:t>Планы на будущее</a:t>
+            </a:r>
           </a:p>
         </p:txBody>
       </p:sp>
       <p:sp>
         <p:nvSpPr>
           <p:cNvPr id="121" name="Google Shape;121;p21"/>
-          <p:cNvSpPr txBox="1"/>
+          <p:cNvSpPr txBox="1">
+            <a:spLocks noGrp="1"/>
+          </p:cNvSpPr>
           <p:nvPr>
             <p:ph type="body" idx="1"/>
           </p:nvPr>
@@ -9055,10 +9256,69 @@
               <a:buChar char="●"/>
             </a:pPr>
             <a:r>
-              <a:rPr lang="en-US"/>
-              <a:t>Создание сайта для любого пользователя (гостя) с публичными данными.</a:t>
-            </a:r>
-            <a:endParaRPr lang="en-US"/>
+              <a:rPr lang="en-US" dirty="0" err="1"/>
+              <a:t>Создание</a:t>
+            </a:r>
+            <a:r>
+              <a:rPr lang="en-US" dirty="0"/>
+              <a:t> </a:t>
+            </a:r>
+            <a:r>
+              <a:rPr lang="en-US" dirty="0" err="1"/>
+              <a:t>сайта</a:t>
+            </a:r>
+            <a:r>
+              <a:rPr lang="en-US" dirty="0"/>
+              <a:t> </a:t>
+            </a:r>
+            <a:r>
+              <a:rPr lang="en-US" dirty="0" err="1"/>
+              <a:t>для</a:t>
+            </a:r>
+            <a:r>
+              <a:rPr lang="en-US" dirty="0"/>
+              <a:t> </a:t>
+            </a:r>
+            <a:r>
+              <a:rPr lang="en-US" dirty="0" err="1"/>
+              <a:t>любого</a:t>
+            </a:r>
+            <a:r>
+              <a:rPr lang="en-US" dirty="0"/>
+              <a:t> </a:t>
+            </a:r>
+            <a:r>
+              <a:rPr lang="en-US" dirty="0" err="1"/>
+              <a:t>пользователя</a:t>
+            </a:r>
+            <a:r>
+              <a:rPr lang="en-US" dirty="0"/>
+              <a:t> (</a:t>
+            </a:r>
+            <a:r>
+              <a:rPr lang="en-US" dirty="0" err="1"/>
+              <a:t>гостя</a:t>
+            </a:r>
+            <a:r>
+              <a:rPr lang="en-US" dirty="0"/>
+              <a:t>) с </a:t>
+            </a:r>
+            <a:r>
+              <a:rPr lang="en-US" dirty="0" err="1"/>
+              <a:t>публичными</a:t>
+            </a:r>
+            <a:r>
+              <a:rPr lang="en-US" dirty="0"/>
+              <a:t> </a:t>
+            </a:r>
+            <a:r>
+              <a:rPr lang="en-US" dirty="0" err="1"/>
+              <a:t>данными</a:t>
+            </a:r>
+            <a:r>
+              <a:rPr lang="en-US" dirty="0"/>
+              <a:t>.</a:t>
+            </a:r>
           </a:p>
           <a:p>
             <a:pPr marL="457200" lvl="0" indent="-342900" algn="l" rtl="0">
@@ -9072,18 +9332,45 @@
               <a:buChar char="●"/>
             </a:pPr>
             <a:r>
-              <a:rPr lang="en-US"/>
-              <a:t>Автоматизация составления всех </a:t>
-            </a:r>
-            <a:r>
-              <a:rPr lang="en-US"/>
+              <a:rPr lang="en-US" dirty="0" err="1"/>
+              <a:t>Автоматизация</a:t>
+            </a:r>
+            <a:r>
+              <a:rPr lang="en-US" dirty="0"/>
+              <a:t> </a:t>
+            </a:r>
+            <a:r>
+              <a:rPr lang="en-US" dirty="0" err="1"/>
+              <a:t>составления</a:t>
+            </a:r>
+            <a:r>
+              <a:rPr lang="en-US" dirty="0"/>
+              <a:t> </a:t>
+            </a:r>
+            <a:r>
+              <a:rPr lang="en-US" dirty="0" err="1"/>
+              <a:t>всех</a:t>
+            </a:r>
+            <a:r>
+              <a:rPr lang="en-US" dirty="0"/>
+              <a:t> </a:t>
+            </a:r>
+            <a:r>
+              <a:rPr lang="en-US" dirty="0" err="1"/>
               <a:t>соответствующих</a:t>
             </a:r>
             <a:r>
-              <a:rPr lang="en-US"/>
-              <a:t> отчетов.</a:t>
-            </a:r>
-            <a:endParaRPr lang="en-US"/>
+              <a:rPr lang="en-US" dirty="0"/>
+              <a:t> </a:t>
+            </a:r>
+            <a:r>
+              <a:rPr lang="en-US" dirty="0" err="1"/>
+              <a:t>отчетов</a:t>
+            </a:r>
+            <a:r>
+              <a:rPr lang="en-US" dirty="0"/>
+              <a:t>.</a:t>
+            </a:r>
           </a:p>
           <a:p>
             <a:pPr marL="457200" lvl="0" indent="-342900" algn="l" rtl="0">
@@ -9097,18 +9384,45 @@
               <a:buChar char="●"/>
             </a:pPr>
             <a:r>
-              <a:rPr lang="en-US"/>
-              <a:t>Нахождение и искоренение всех дыр в </a:t>
-            </a:r>
-            <a:r>
-              <a:rPr lang="en-US"/>
+              <a:rPr lang="en-US" dirty="0" err="1"/>
+              <a:t>Нахождение</a:t>
+            </a:r>
+            <a:r>
+              <a:rPr lang="en-US" dirty="0"/>
+              <a:t> и </a:t>
+            </a:r>
+            <a:r>
+              <a:rPr lang="en-US" dirty="0" err="1"/>
+              <a:t>искоренение</a:t>
+            </a:r>
+            <a:r>
+              <a:rPr lang="en-US" dirty="0"/>
+              <a:t> </a:t>
+            </a:r>
+            <a:r>
+              <a:rPr lang="en-US" dirty="0" err="1"/>
+              <a:t>всех</a:t>
+            </a:r>
+            <a:r>
+              <a:rPr lang="en-US" dirty="0"/>
+              <a:t> </a:t>
+            </a:r>
+            <a:r>
+              <a:rPr lang="en-US" dirty="0" err="1"/>
+              <a:t>дыр</a:t>
+            </a:r>
+            <a:r>
+              <a:rPr lang="en-US" dirty="0"/>
+              <a:t> в </a:t>
+            </a:r>
+            <a:r>
+              <a:rPr lang="en-US" dirty="0" err="1"/>
               <a:t>безопасности</a:t>
             </a:r>
             <a:r>
-              <a:rPr lang="en-US"/>
+              <a:rPr lang="en-US" dirty="0"/>
               <a:t>.</a:t>
             </a:r>
-            <a:endParaRPr lang="en-US"/>
           </a:p>
           <a:p>
             <a:pPr marL="457200" lvl="0" indent="-342900" algn="l" rtl="0">
@@ -9122,10 +9436,37 @@
               <a:buChar char="●"/>
             </a:pPr>
             <a:r>
-              <a:rPr lang="en-US"/>
-              <a:t>Введение нашего проекта в оборот ЦДО “IT-Cube”.</a:t>
-            </a:r>
-            <a:endParaRPr lang="en-US"/>
+              <a:rPr lang="en-US" dirty="0" err="1"/>
+              <a:t>Введение</a:t>
+            </a:r>
+            <a:r>
+              <a:rPr lang="en-US" dirty="0"/>
+              <a:t> </a:t>
+            </a:r>
+            <a:r>
+              <a:rPr lang="en-US" dirty="0" err="1"/>
+              <a:t>нашего</a:t>
+            </a:r>
+            <a:r>
+              <a:rPr lang="en-US" dirty="0"/>
+              <a:t> </a:t>
+            </a:r>
+            <a:r>
+              <a:rPr lang="en-US" dirty="0" err="1"/>
+              <a:t>проекта</a:t>
+            </a:r>
+            <a:r>
+              <a:rPr lang="en-US" dirty="0"/>
+              <a:t> в </a:t>
+            </a:r>
+            <a:r>
+              <a:rPr lang="en-US" dirty="0" err="1"/>
+              <a:t>оборот</a:t>
+            </a:r>
+            <a:r>
+              <a:rPr lang="en-US" dirty="0"/>
+              <a:t> ЦДО “IT-Cube”.</a:t>
+            </a:r>
           </a:p>
           <a:p>
             <a:pPr marL="457200" lvl="0" indent="-342900" algn="l" rtl="0">
@@ -9139,10 +9480,21 @@
               <a:buChar char="●"/>
             </a:pPr>
             <a:r>
-              <a:rPr lang="en-US"/>
-              <a:t>Получение гранта.</a:t>
-            </a:r>
-            <a:endParaRPr lang="en-US"/>
+              <a:rPr lang="en-US" dirty="0" err="1"/>
+              <a:t>Получение</a:t>
+            </a:r>
+            <a:r>
+              <a:rPr lang="en-US" dirty="0"/>
+              <a:t> </a:t>
+            </a:r>
+            <a:r>
+              <a:rPr lang="en-US" dirty="0" err="1"/>
+              <a:t>гранта</a:t>
+            </a:r>
+            <a:r>
+              <a:rPr lang="en-US" dirty="0"/>
+              <a:t>.</a:t>
+            </a:r>
           </a:p>
           <a:p>
             <a:pPr marL="457200" lvl="0" indent="-342900" algn="l" rtl="0">
@@ -9156,10 +9508,29 @@
               <a:buChar char="●"/>
             </a:pPr>
             <a:r>
-              <a:rPr lang="en-US"/>
-              <a:t>Коммерческий оборот в другие в ЦДО.</a:t>
-            </a:r>
-            <a:endParaRPr lang="en-US"/>
+              <a:rPr lang="en-US" dirty="0" err="1"/>
+              <a:t>Коммерческий</a:t>
+            </a:r>
+            <a:r>
+              <a:rPr lang="en-US" dirty="0"/>
+              <a:t> </a:t>
+            </a:r>
+            <a:r>
+              <a:rPr lang="en-US" dirty="0" err="1"/>
+              <a:t>оборот</a:t>
+            </a:r>
+            <a:r>
+              <a:rPr lang="en-US" dirty="0"/>
+              <a:t> в </a:t>
+            </a:r>
+            <a:r>
+              <a:rPr lang="en-US" dirty="0" err="1"/>
+              <a:t>другие</a:t>
+            </a:r>
+            <a:r>
+              <a:rPr lang="en-US" dirty="0"/>
+              <a:t> в ЦДО.</a:t>
+            </a:r>
           </a:p>
           <a:p>
             <a:pPr marL="457200" lvl="0" indent="-342900" algn="l" rtl="0">
@@ -9173,10 +9544,77 @@
               <a:buChar char="●"/>
             </a:pPr>
             <a:r>
-              <a:rPr lang="en-US"/>
-              <a:t>Создание идеального с точки зрения Quality-of-life сайта                             на основе сообщений с оборота в ЦДО “IT-Cube”.</a:t>
-            </a:r>
-            <a:endParaRPr lang="en-US"/>
+              <a:rPr lang="en-US" dirty="0" err="1"/>
+              <a:t>Создание</a:t>
+            </a:r>
+            <a:r>
+              <a:rPr lang="en-US" dirty="0"/>
+              <a:t> </a:t>
+            </a:r>
+            <a:r>
+              <a:rPr lang="en-US" dirty="0" err="1"/>
+              <a:t>идеального</a:t>
+            </a:r>
+            <a:r>
+              <a:rPr lang="en-US" dirty="0"/>
+              <a:t> с </a:t>
+            </a:r>
+            <a:r>
+              <a:rPr lang="en-US" dirty="0" err="1"/>
+              <a:t>точки</a:t>
+            </a:r>
+            <a:r>
+              <a:rPr lang="en-US" dirty="0"/>
+              <a:t> </a:t>
+            </a:r>
+            <a:r>
+              <a:rPr lang="en-US" dirty="0" err="1"/>
+              <a:t>зрения</a:t>
+            </a:r>
+            <a:r>
+              <a:rPr lang="en-US" dirty="0"/>
+              <a:t> Quality-of-life </a:t>
+            </a:r>
+            <a:r>
+              <a:rPr lang="en-US" dirty="0" err="1"/>
+              <a:t>сайта</a:t>
+            </a:r>
+            <a:r>
+              <a:rPr lang="en-US" dirty="0"/>
+              <a:t>                             </a:t>
+            </a:r>
+            <a:r>
+              <a:rPr lang="en-US" dirty="0" err="1"/>
+              <a:t>на</a:t>
+            </a:r>
+            <a:r>
+              <a:rPr lang="en-US" dirty="0"/>
+              <a:t> </a:t>
+            </a:r>
+            <a:r>
+              <a:rPr lang="en-US" dirty="0" err="1"/>
+              <a:t>основе</a:t>
+            </a:r>
+            <a:r>
+              <a:rPr lang="en-US" dirty="0"/>
+              <a:t> </a:t>
+            </a:r>
+            <a:r>
+              <a:rPr lang="en-US" dirty="0" err="1"/>
+              <a:t>сообщений</a:t>
+            </a:r>
+            <a:r>
+              <a:rPr lang="en-US" dirty="0"/>
+              <a:t> с </a:t>
+            </a:r>
+            <a:r>
+              <a:rPr lang="en-US" dirty="0" err="1"/>
+              <a:t>оборота</a:t>
+            </a:r>
+            <a:r>
+              <a:rPr lang="en-US" dirty="0"/>
+              <a:t> в ЦДО “IT-Cube”.</a:t>
+            </a:r>
           </a:p>
         </p:txBody>
       </p:sp>
@@ -9187,7 +9625,7 @@
           <p:nvPr/>
         </p:nvPicPr>
         <p:blipFill>
-          <a:blip r:embed="rId1"/>
+          <a:blip r:embed="rId3"/>
           <a:stretch>
             <a:fillRect/>
           </a:stretch>
@@ -9490,6 +9928,8 @@
       </a:bgFillStyleLst>
     </a:fmtScheme>
   </a:themeElements>
+  <a:objectDefaults/>
+  <a:extraClrSchemeLst/>
   <a:extLst>
     <a:ext uri="{05A4C25C-085E-4340-85A3-A5531E510DB2}">
       <thm15:themeFamily xmlns:thm15="http://schemas.microsoft.com/office/thememl/2012/main" name="Office Theme" id="{62F939B6-93AF-4DB8-9C6B-D6C7DFDC589F}" vid="{4A3C46E8-61CC-4603-A589-7422A47A8E4A}"/>
@@ -9774,6 +10214,8 @@
       </a:bgFillStyleLst>
     </a:fmtScheme>
   </a:themeElements>
+  <a:objectDefaults/>
+  <a:extraClrSchemeLst/>
   <a:extLst>
     <a:ext uri="{05A4C25C-085E-4340-85A3-A5531E510DB2}">
       <thm15:themeFamily xmlns:thm15="http://schemas.microsoft.com/office/thememl/2012/main" name="Office Theme" id="{62F939B6-93AF-4DB8-9C6B-D6C7DFDC589F}" vid="{4A3C46E8-61CC-4603-A589-7422A47A8E4A}"/>
